--- a/FSI strategy/EAIND-FSI-Strategy-Development-Plan.pptx
+++ b/FSI strategy/EAIND-FSI-Strategy-Development-Plan.pptx
@@ -13,9 +13,11 @@
     <p:sldId id="261" r:id="rId7"/>
     <p:sldId id="262" r:id="rId8"/>
     <p:sldId id="263" r:id="rId9"/>
+    <p:sldId id="264" r:id="rId10"/>
+    <p:sldId id="265" r:id="rId11"/>
   </p:sldIdLst>
   <p:notesMasterIdLst>
-    <p:notesMasterId r:id="rId10"/>
+    <p:notesMasterId r:id="rId12"/>
   </p:notesMasterIdLst>
   <p:sldSz cx="12192000" cy="6858000"/>
   <p:notesSz cx="6858000" cy="12192000"/>
@@ -509,7 +511,13 @@
           <a:p>
             <a:r>
               <a:rPr lang="en-US" dirty="0"/>
-              <a:t>This deck sets out how we will build the FSI strategy. It deliberately carries no answers — markets, accounts, offerings, targets and owners are outputs of the cycle described here.</a:t>
+              <a:t>CONTEXT FOR THE TEAM — do not put on the slide.
+The portfolio is EAIND: Engineering, AI and Data. It is a consulting portfolio — think technology advisory and delivery. We design, advise on and implement end-to-end technology transformation for the financial services industry, primarily banking.
+Three pillars:
+1. Industry Solutions — core-led transformation: core modernisation, core banking and other core packages. Also full systems-integration capability: we can take the SI role and own the end-to-end setup, including design governance, functional governance, delivery management and individual stream management, to stand up a greenfield bank or modernise an incumbent.
+2. Data and AI — enterprise AI, core AI, AI use-case activation, and standard data work: data platforms, warehouses, ETL, reporting, all for banking.
+3. Engineering and Cloud — cloud advisory and implementation, plus custom engineered solutions: integration management, microservices, API gateways, and bespoke core engineering. Less common in banking; likeliest in investments and wealth.
+This deck is the plan for developing the FSI strategy, not the strategy. Target: strategy finalised within three weeks.</a:t>
             </a:r>
             <a:endParaRPr lang="en-US" dirty="0"/>
           </a:p>
@@ -533,6 +541,97 @@
             <a:fld id="{F7021451-1387-4CA6-816F-3879F97B5CBC}" type="slidenum">
               <a:rPr lang="en-US"/>
               <a:t>1</a:t>
+            </a:fld>
+            <a:endParaRPr lang="en-US"/>
+          </a:p>
+        </p:txBody>
+      </p:sp>
+    </p:spTree>
+    <p:extLst>
+      <p:ext uri="{BB962C8B-B14F-4D97-AF65-F5344CB8AC3E}">
+        <p14:creationId xmlns:p14="http://schemas.microsoft.com/office/powerpoint/2010/main" val="1024086991"/>
+      </p:ext>
+    </p:extLst>
+  </p:cSld>
+  <p:clrMapOvr>
+    <a:masterClrMapping/>
+  </p:clrMapOvr>
+</p:notes>
+</file>
+
+<file path=ppt/notesSlides/notesSlide10.xml><?xml version="1.0" encoding="utf-8"?>
+<p:notes xmlns:a="http://schemas.openxmlformats.org/drawingml/2006/main" xmlns:r="http://schemas.openxmlformats.org/officeDocument/2006/relationships" xmlns:p="http://schemas.openxmlformats.org/presentationml/2006/main">
+  <p:cSld>
+    <p:spTree>
+      <p:nvGrpSpPr>
+        <p:cNvPr id="1" name=""/>
+        <p:cNvGrpSpPr/>
+        <p:nvPr/>
+      </p:nvGrpSpPr>
+      <p:grpSpPr>
+        <a:xfrm>
+          <a:off x="0" y="0"/>
+          <a:ext cx="0" cy="0"/>
+          <a:chOff x="0" y="0"/>
+          <a:chExt cx="0" cy="0"/>
+        </a:xfrm>
+      </p:grpSpPr>
+      <p:sp>
+        <p:nvSpPr>
+          <p:cNvPr id="2" name="Slide Image Placeholder 1"/>
+          <p:cNvSpPr>
+            <a:spLocks noGrp="1" noRot="1" noChangeAspect="1"/>
+          </p:cNvSpPr>
+          <p:nvPr>
+            <p:ph type="sldImg"/>
+          </p:nvPr>
+        </p:nvSpPr>
+        <p:spPr/>
+      </p:sp>
+      <p:sp>
+        <p:nvSpPr>
+          <p:cNvPr id="3" name="Notes Placeholder 2"/>
+          <p:cNvSpPr>
+            <a:spLocks noGrp="1"/>
+          </p:cNvSpPr>
+          <p:nvPr>
+            <p:ph type="body" idx="1"/>
+          </p:nvPr>
+        </p:nvSpPr>
+        <p:spPr/>
+        <p:txBody>
+          <a:bodyPr/>
+          <a:lstStyle/>
+          <a:p>
+            <a:r>
+              <a:rPr lang="en-US" dirty="0"/>
+              <a:t>Close on two asks: confirm the principles, and nominate the workstream owners.
+Inputs are the long pole — pipeline, revenue by pillar and market, existing relationships, alliance status, delivery capacity and historical deal values all sit with different people. Chase them in the first 48 hours or week 1 slips.
+Decisions requested at sign-off: priority markets and segments, the target account list, revenue and margin targets, account ownership, and the investment and hiring asks coming out of the talent and eminence workstreams.
+Open items to resolve at kick-off: audience for this pack, the definition of partner for account ownership, and the start date.</a:t>
+            </a:r>
+            <a:endParaRPr lang="en-US" dirty="0"/>
+          </a:p>
+        </p:txBody>
+      </p:sp>
+      <p:sp>
+        <p:nvSpPr>
+          <p:cNvPr id="4" name="Slide Number Placeholder 3"/>
+          <p:cNvSpPr>
+            <a:spLocks noGrp="1"/>
+          </p:cNvSpPr>
+          <p:nvPr>
+            <p:ph type="sldNum" sz="quarter" idx="10"/>
+          </p:nvPr>
+        </p:nvSpPr>
+        <p:spPr/>
+        <p:txBody>
+          <a:bodyPr/>
+          <a:lstStyle/>
+          <a:p>
+            <a:fld id="{F7021451-1387-4CA6-816F-3879F97B5CBC}" type="slidenum">
+              <a:rPr lang="en-US"/>
+              <a:t>10</a:t>
             </a:fld>
             <a:endParaRPr lang="en-US"/>
           </a:p>
@@ -597,7 +696,11 @@
           <a:p>
             <a:r>
               <a:rPr lang="en-US" dirty="0"/>
-              <a:t>Set expectations up front: reviewers should not look for answers in this pack.</a:t>
+              <a:t>Direction given: this pack carries no answers. We know things already — focus markets, likely accounts — but none of it belongs here. Everything is a blank to be filled through the cycle, so reviewers engage with the method first and do not anchor on half-formed conclusions.
+Still open before we finalise this pack:
+- Audience: leadership approval pack, or team working document?
+- What "partner" means where we say account ownership: our own consulting partners (the people who carry accounts) versus alliance and vendor partners. Both matter; they are different lists.
+- Start date for the three-week cycle.</a:t>
             </a:r>
             <a:endParaRPr lang="en-US" dirty="0"/>
           </a:p>
@@ -685,7 +788,12 @@
           <a:p>
             <a:r>
               <a:rPr lang="en-US" dirty="0"/>
-              <a:t>Framing follows a standard strategy cascade, adapted to a consulting portfolio.</a:t>
+              <a:t>Framing is loosely a strategy cascade (where to play, how to play), extended for a consulting portfolio with commercial, coverage, talent and eminence dimensions.
+Context we already hold, to be validated rather than assumed during the cycle:
+- Primary markets: Saudi Arabia, UAE, Qatar.
+- Secondary markets: Kuwait, Oman, Jordan — where we focus our key relationships.
+- The output must go further than markets: a specific, named target account list, with account mapping — who covers whom.
+- Offerings must be expressed as products and services with a buyer attached: who buys this, and what do they typically pay.</a:t>
             </a:r>
             <a:endParaRPr lang="en-US" dirty="0"/>
           </a:p>
@@ -773,7 +881,9 @@
           <a:p>
             <a:r>
               <a:rPr lang="en-US" dirty="0"/>
-              <a:t>Confirm these principles at kick-off; they bound every later decision.</a:t>
+              <a:t>The hard rule from the portfolio: no siloed solutions. Our primary go-to-market catalogue is integrated propositions across the three pillars. Even where we sell a focused solution — enterprise AI, for example — it is sold as an entry point into an integrated play, and the catalogue is built that way. Flavours and partial offerings are permitted as variants of an integrated proposition, not as the default.
+Delivery model: we expect to inherit the standard firm delivery model rather than invent one. The work here is to confirm it and note where FSI-specific governance (design authority, functional governance, stream management on large SI programmes) needs to be explicit.
+Confirm all five principles at kick-off; they bound every later decision.</a:t>
             </a:r>
             <a:endParaRPr lang="en-US" dirty="0"/>
           </a:p>
@@ -861,7 +971,9 @@
           <a:p>
             <a:r>
               <a:rPr lang="en-US" dirty="0"/>
-              <a:t>This is the process view. The workstream and calendar views that follow are the same journey cut by owner and by week.</a:t>
+              <a:t>The five steps are the process view; the workstream and calendar views that follow are the same journey cut by owner and by week.
+Note on Quantify: pricing will not reduce to a single number per offering. Core banking modernisation and migration varies by retail, corporate or SME scope; by single-country versus multi-country; and by whether full data migration is in scope. So the artefact is price bands and deal-size ranges with the drivers named, not a price list. Same logic for AI and data platform work, and for cloud and integration engagements.
+Baseline also covers people: who we have today, dedicated and shared.</a:t>
             </a:r>
             <a:endParaRPr lang="en-US" dirty="0"/>
           </a:p>
@@ -949,7 +1061,15 @@
           <a:p>
             <a:r>
               <a:rPr lang="en-US" dirty="0"/>
-              <a:t>Artefact templates are blank at this stage; they are populated during the cycle.</a:t>
+              <a:t>Artefact templates are blank at this stage and are populated during the cycle.
+Notes per workstream:
+- WS1 Proposition and catalogue: integrated propositions first, permitted variants second. Must cover all three pillars and the cross-pillar plays.
+- WS2 Market and account targeting: markets are broadly known (primary: Saudi, UAE, Qatar; secondary: Kuwait, Oman, Jordan). The real output is the named account list and the segment logic behind it.
+- WS3 Commercial sizing and pricing: size of each product, who buys it, and the typical price the market pays — with the variation drivers spelled out (retail/corporate/SME, single/multi-country, data migration in or out of scope).
+- WS4 Coverage and ownership: two distinct mappings — our partners to accounts (who owns the relationship) and alliance partners to accounts (who we go to market with, and what they drive).
+- WS5 Delivery model and readiness: largely inherited; confirm and note gaps.
+- WS6 Team and talent: see the talent slide.
+- WS7 Eminence and positioning: see the eminence slide.</a:t>
             </a:r>
             <a:endParaRPr lang="en-US" dirty="0"/>
           </a:p>
@@ -1037,7 +1157,12 @@
           <a:p>
             <a:r>
               <a:rPr lang="en-US" dirty="0"/>
-              <a:t>Timebox is deliberate: three weeks forces decisions rather than analysis.</a:t>
+              <a:t>This was called out as an important dimension in its own right.
+Three things to establish:
+1. The dedicated team — who in the portfolio works on FSI exclusively, across Industry Solutions, Data and AI, and Engineering and Cloud. Roles, levels, and what we can credibly deliver with them alone.
+2. Generic and shared capacity — who we can draw on from the wider portfolio and firm, how much of their time we can actually count on, and which skills we borrow rather than own.
+3. The recruitment gap — what remains once dedicated and shared capacity is counted, expressed by level: partners, directors, and other delivery staff. Then build, borrow or buy, and by when.
+The link to the rest of the strategy is direct: a revenue target we cannot staff is not a target. Capacity is sized against the targets set in the commercial workstream.</a:t>
             </a:r>
             <a:endParaRPr lang="en-US" dirty="0"/>
           </a:p>
@@ -1125,7 +1250,10 @@
           <a:p>
             <a:r>
               <a:rPr lang="en-US" dirty="0"/>
-              <a:t>Close on two asks: confirm the principles, and nominate the workstream owners.</a:t>
+              <a:t>Raised as a distinct part of the plan: how we enhance our positioning in the market, specifically in FSI, around what we do.
+Channels mentioned: workshops, seminars, podcasts, articles, and participation in key industry events — Money20/20 was named as an example of the class of event we should consider. The plan should decide which of these are relevant to us rather than assume all of them.
+For each channel the plan answers: do we commit, how often, who fronts it, which accounts or markets it targets, and how we measure return — inbound enquiries, meetings created, inclusion on shortlists and RFP invitations.
+Worth linking eminence to the account list: eminence activity should point at the accounts and markets the strategy has prioritised, not at general brand awareness.</a:t>
             </a:r>
             <a:endParaRPr lang="en-US" dirty="0"/>
           </a:p>
@@ -1149,6 +1277,96 @@
             <a:fld id="{F7021451-1387-4CA6-816F-3879F97B5CBC}" type="slidenum">
               <a:rPr lang="en-US"/>
               <a:t>8</a:t>
+            </a:fld>
+            <a:endParaRPr lang="en-US"/>
+          </a:p>
+        </p:txBody>
+      </p:sp>
+    </p:spTree>
+    <p:extLst>
+      <p:ext uri="{BB962C8B-B14F-4D97-AF65-F5344CB8AC3E}">
+        <p14:creationId xmlns:p14="http://schemas.microsoft.com/office/powerpoint/2010/main" val="1024086991"/>
+      </p:ext>
+    </p:extLst>
+  </p:cSld>
+  <p:clrMapOvr>
+    <a:masterClrMapping/>
+  </p:clrMapOvr>
+</p:notes>
+</file>
+
+<file path=ppt/notesSlides/notesSlide9.xml><?xml version="1.0" encoding="utf-8"?>
+<p:notes xmlns:a="http://schemas.openxmlformats.org/drawingml/2006/main" xmlns:r="http://schemas.openxmlformats.org/officeDocument/2006/relationships" xmlns:p="http://schemas.openxmlformats.org/presentationml/2006/main">
+  <p:cSld>
+    <p:spTree>
+      <p:nvGrpSpPr>
+        <p:cNvPr id="1" name=""/>
+        <p:cNvGrpSpPr/>
+        <p:nvPr/>
+      </p:nvGrpSpPr>
+      <p:grpSpPr>
+        <a:xfrm>
+          <a:off x="0" y="0"/>
+          <a:ext cx="0" cy="0"/>
+          <a:chOff x="0" y="0"/>
+          <a:chExt cx="0" cy="0"/>
+        </a:xfrm>
+      </p:grpSpPr>
+      <p:sp>
+        <p:nvSpPr>
+          <p:cNvPr id="2" name="Slide Image Placeholder 1"/>
+          <p:cNvSpPr>
+            <a:spLocks noGrp="1" noRot="1" noChangeAspect="1"/>
+          </p:cNvSpPr>
+          <p:nvPr>
+            <p:ph type="sldImg"/>
+          </p:nvPr>
+        </p:nvSpPr>
+        <p:spPr/>
+      </p:sp>
+      <p:sp>
+        <p:nvSpPr>
+          <p:cNvPr id="3" name="Notes Placeholder 2"/>
+          <p:cNvSpPr>
+            <a:spLocks noGrp="1"/>
+          </p:cNvSpPr>
+          <p:nvPr>
+            <p:ph type="body" idx="1"/>
+          </p:nvPr>
+        </p:nvSpPr>
+        <p:spPr/>
+        <p:txBody>
+          <a:bodyPr/>
+          <a:lstStyle/>
+          <a:p>
+            <a:r>
+              <a:rPr lang="en-US" dirty="0"/>
+              <a:t>Three weeks is the timebox given: the strategy should be finalised in no more than about three weeks. The constraint is deliberate — it forces decisions rather than analysis.
+Each week ends at a gate, and a gate is a decision taken, not a document circulated. If a gate cannot be closed, we escalate at the checkpoint rather than let the week slip.
+Start date to be set at kick-off.</a:t>
+            </a:r>
+            <a:endParaRPr lang="en-US" dirty="0"/>
+          </a:p>
+        </p:txBody>
+      </p:sp>
+      <p:sp>
+        <p:nvSpPr>
+          <p:cNvPr id="4" name="Slide Number Placeholder 3"/>
+          <p:cNvSpPr>
+            <a:spLocks noGrp="1"/>
+          </p:cNvSpPr>
+          <p:nvPr>
+            <p:ph type="sldNum" sz="quarter" idx="10"/>
+          </p:nvPr>
+        </p:nvSpPr>
+        <p:spPr/>
+        <p:txBody>
+          <a:bodyPr/>
+          <a:lstStyle/>
+          <a:p>
+            <a:fld id="{F7021451-1387-4CA6-816F-3879F97B5CBC}" type="slidenum">
+              <a:rPr lang="en-US"/>
+              <a:t>9</a:t>
             </a:fld>
             <a:endParaRPr lang="en-US"/>
           </a:p>
@@ -1729,6 +1947,831 @@
 </p:sld>
 </file>
 
+<file path=ppt/slides/slide10.xml><?xml version="1.0" encoding="utf-8"?>
+<p:sld xmlns:a="http://schemas.openxmlformats.org/drawingml/2006/main" xmlns:r="http://schemas.openxmlformats.org/officeDocument/2006/relationships" xmlns:p="http://schemas.openxmlformats.org/presentationml/2006/main">
+  <p:cSld name="Slide 10">
+    <p:bg>
+      <p:bgPr>
+        <a:solidFill>
+          <a:srgbClr val="1E2761"/>
+        </a:solidFill>
+      </p:bgPr>
+    </p:bg>
+    <p:spTree>
+      <p:nvGrpSpPr>
+        <p:cNvPr id="1" name=""/>
+        <p:cNvGrpSpPr/>
+        <p:nvPr/>
+      </p:nvGrpSpPr>
+      <p:grpSpPr>
+        <a:xfrm>
+          <a:off x="0" y="0"/>
+          <a:ext cx="0" cy="0"/>
+          <a:chOff x="0" y="0"/>
+          <a:chExt cx="0" cy="0"/>
+        </a:xfrm>
+      </p:grpSpPr>
+      <p:sp>
+        <p:nvSpPr>
+          <p:cNvPr id="2" name="Shape 0"/>
+          <p:cNvSpPr/>
+          <p:nvPr/>
+        </p:nvSpPr>
+        <p:spPr>
+          <a:xfrm>
+            <a:off x="-2011680" y="4023360"/>
+            <a:ext cx="5669280" cy="5669280"/>
+          </a:xfrm>
+          <a:prstGeom prst="ellipse">
+            <a:avLst/>
+          </a:prstGeom>
+          <a:solidFill>
+            <a:srgbClr val="3E5C8A">
+              <a:alpha val="45000"/>
+            </a:srgbClr>
+          </a:solidFill>
+          <a:ln/>
+        </p:spPr>
+      </p:sp>
+      <p:sp>
+        <p:nvSpPr>
+          <p:cNvPr id="3" name="Text 1"/>
+          <p:cNvSpPr txBox="1"/>
+          <p:nvPr/>
+        </p:nvSpPr>
+        <p:spPr>
+          <a:xfrm>
+            <a:off x="731520" y="548640"/>
+            <a:ext cx="10058400" cy="731520"/>
+          </a:xfrm>
+          <a:prstGeom prst="rect">
+            <a:avLst/>
+          </a:prstGeom>
+          <a:noFill/>
+          <a:ln/>
+        </p:spPr>
+        <p:txBody>
+          <a:bodyPr wrap="square" lIns="0" tIns="0" rIns="0" bIns="0" rtlCol="0" anchor="ctr"/>
+          <a:lstStyle/>
+          <a:p>
+            <a:pPr indent="0" marL="0">
+              <a:buNone/>
+            </a:pPr>
+            <a:r>
+              <a:rPr lang="en-US" sz="3600" b="1" dirty="0">
+                <a:solidFill>
+                  <a:srgbClr val="FFFFFF"/>
+                </a:solidFill>
+                <a:latin typeface="Cambria" pitchFamily="34" charset="0"/>
+                <a:ea typeface="Cambria" pitchFamily="34" charset="-122"/>
+                <a:cs typeface="Cambria" pitchFamily="34" charset="-120"/>
+              </a:rPr>
+              <a:t>How we run it</a:t>
+            </a:r>
+            <a:endParaRPr lang="en-US" sz="3600" dirty="0"/>
+          </a:p>
+        </p:txBody>
+      </p:sp>
+      <p:sp>
+        <p:nvSpPr>
+          <p:cNvPr id="4" name="Text 2"/>
+          <p:cNvSpPr txBox="1"/>
+          <p:nvPr/>
+        </p:nvSpPr>
+        <p:spPr>
+          <a:xfrm>
+            <a:off x="731520" y="1298448"/>
+            <a:ext cx="10058400" cy="411480"/>
+          </a:xfrm>
+          <a:prstGeom prst="rect">
+            <a:avLst/>
+          </a:prstGeom>
+          <a:noFill/>
+          <a:ln/>
+        </p:spPr>
+        <p:txBody>
+          <a:bodyPr wrap="square" lIns="0" tIns="0" rIns="0" bIns="0" rtlCol="0" anchor="ctr"/>
+          <a:lstStyle/>
+          <a:p>
+            <a:pPr indent="0" marL="0">
+              <a:buNone/>
+            </a:pPr>
+            <a:r>
+              <a:rPr lang="en-US" sz="1450" dirty="0">
+                <a:solidFill>
+                  <a:srgbClr val="CADCFC"/>
+                </a:solidFill>
+                <a:latin typeface="Calibri" pitchFamily="34" charset="0"/>
+                <a:ea typeface="Calibri" pitchFamily="34" charset="-122"/>
+                <a:cs typeface="Calibri" pitchFamily="34" charset="-120"/>
+              </a:rPr>
+              <a:t>Cadence, inputs and the decisions we are asking for.</a:t>
+            </a:r>
+            <a:endParaRPr lang="en-US" sz="1450" dirty="0"/>
+          </a:p>
+        </p:txBody>
+      </p:sp>
+      <p:sp>
+        <p:nvSpPr>
+          <p:cNvPr id="5" name="Shape 3"/>
+          <p:cNvSpPr/>
+          <p:nvPr/>
+        </p:nvSpPr>
+        <p:spPr>
+          <a:xfrm>
+            <a:off x="731520" y="1965960"/>
+            <a:ext cx="384048" cy="384048"/>
+          </a:xfrm>
+          <a:prstGeom prst="ellipse">
+            <a:avLst/>
+          </a:prstGeom>
+          <a:solidFill>
+            <a:srgbClr val="3E5C8A"/>
+          </a:solidFill>
+          <a:ln/>
+        </p:spPr>
+      </p:sp>
+      <p:sp>
+        <p:nvSpPr>
+          <p:cNvPr id="6" name="Text 4"/>
+          <p:cNvSpPr txBox="1"/>
+          <p:nvPr/>
+        </p:nvSpPr>
+        <p:spPr>
+          <a:xfrm>
+            <a:off x="731520" y="1965960"/>
+            <a:ext cx="384048" cy="384048"/>
+          </a:xfrm>
+          <a:prstGeom prst="rect">
+            <a:avLst/>
+          </a:prstGeom>
+          <a:noFill/>
+          <a:ln/>
+        </p:spPr>
+        <p:txBody>
+          <a:bodyPr wrap="square" lIns="0" tIns="0" rIns="0" bIns="0" rtlCol="0" anchor="ctr"/>
+          <a:lstStyle/>
+          <a:p>
+            <a:pPr algn="ctr" indent="0" marL="0">
+              <a:buNone/>
+            </a:pPr>
+            <a:r>
+              <a:rPr lang="en-US" sz="1200" b="1" dirty="0">
+                <a:solidFill>
+                  <a:srgbClr val="FFFFFF"/>
+                </a:solidFill>
+                <a:latin typeface="Calibri" pitchFamily="34" charset="0"/>
+                <a:ea typeface="Calibri" pitchFamily="34" charset="-122"/>
+                <a:cs typeface="Calibri" pitchFamily="34" charset="-120"/>
+              </a:rPr>
+              <a:t>1</a:t>
+            </a:r>
+            <a:endParaRPr lang="en-US" sz="1200" dirty="0"/>
+          </a:p>
+        </p:txBody>
+      </p:sp>
+      <p:sp>
+        <p:nvSpPr>
+          <p:cNvPr id="7" name="Text 5"/>
+          <p:cNvSpPr txBox="1"/>
+          <p:nvPr/>
+        </p:nvSpPr>
+        <p:spPr>
+          <a:xfrm>
+            <a:off x="1280160" y="1947672"/>
+            <a:ext cx="2926080" cy="365760"/>
+          </a:xfrm>
+          <a:prstGeom prst="rect">
+            <a:avLst/>
+          </a:prstGeom>
+          <a:noFill/>
+          <a:ln/>
+        </p:spPr>
+        <p:txBody>
+          <a:bodyPr wrap="square" lIns="0" tIns="0" rIns="0" bIns="0" rtlCol="0" anchor="ctr"/>
+          <a:lstStyle/>
+          <a:p>
+            <a:pPr indent="0" marL="0">
+              <a:buNone/>
+            </a:pPr>
+            <a:r>
+              <a:rPr lang="en-US" sz="1900" b="1" dirty="0">
+                <a:solidFill>
+                  <a:srgbClr val="FFFFFF"/>
+                </a:solidFill>
+                <a:latin typeface="Calibri" pitchFamily="34" charset="0"/>
+                <a:ea typeface="Calibri" pitchFamily="34" charset="-122"/>
+                <a:cs typeface="Calibri" pitchFamily="34" charset="-120"/>
+              </a:rPr>
+              <a:t>Cadence</a:t>
+            </a:r>
+            <a:endParaRPr lang="en-US" sz="1900" dirty="0"/>
+          </a:p>
+        </p:txBody>
+      </p:sp>
+      <p:sp>
+        <p:nvSpPr>
+          <p:cNvPr id="8" name="Text 6"/>
+          <p:cNvSpPr txBox="1"/>
+          <p:nvPr/>
+        </p:nvSpPr>
+        <p:spPr>
+          <a:xfrm>
+            <a:off x="731520" y="2606040"/>
+            <a:ext cx="3291840" cy="2560320"/>
+          </a:xfrm>
+          <a:prstGeom prst="rect">
+            <a:avLst/>
+          </a:prstGeom>
+          <a:noFill/>
+          <a:ln/>
+        </p:spPr>
+        <p:txBody>
+          <a:bodyPr wrap="square" lIns="0" tIns="0" rIns="0" bIns="0" rtlCol="0" anchor="ctr"/>
+          <a:lstStyle/>
+          <a:p>
+            <a:pPr marL="342900" indent="-342900">
+              <a:spcAft>
+                <a:spcPts val="1000"/>
+              </a:spcAft>
+              <a:buSzPct val="100000"/>
+              <a:buChar char="•"/>
+            </a:pPr>
+            <a:r>
+              <a:rPr lang="en-US" sz="1300" dirty="0">
+                <a:solidFill>
+                  <a:srgbClr val="CADCFC"/>
+                </a:solidFill>
+                <a:latin typeface="Calibri" pitchFamily="34" charset="0"/>
+                <a:ea typeface="Calibri" pitchFamily="34" charset="-122"/>
+                <a:cs typeface="Calibri" pitchFamily="34" charset="-120"/>
+              </a:rPr>
+              <a:t>Kick-off to confirm scope and principles</a:t>
+            </a:r>
+            <a:endParaRPr lang="en-US" sz="1300" dirty="0"/>
+          </a:p>
+          <a:p>
+            <a:pPr marL="342900" indent="-342900">
+              <a:spcAft>
+                <a:spcPts val="1000"/>
+              </a:spcAft>
+              <a:buSzPct val="100000"/>
+              <a:buChar char="•"/>
+            </a:pPr>
+            <a:r>
+              <a:rPr lang="en-US" sz="1300" dirty="0">
+                <a:solidFill>
+                  <a:srgbClr val="CADCFC"/>
+                </a:solidFill>
+                <a:latin typeface="Calibri" pitchFamily="34" charset="0"/>
+                <a:ea typeface="Calibri" pitchFamily="34" charset="-122"/>
+                <a:cs typeface="Calibri" pitchFamily="34" charset="-120"/>
+              </a:rPr>
+              <a:t>Weekly working session per workstream</a:t>
+            </a:r>
+            <a:endParaRPr lang="en-US" sz="1300" dirty="0"/>
+          </a:p>
+          <a:p>
+            <a:pPr marL="342900" indent="-342900">
+              <a:spcAft>
+                <a:spcPts val="1000"/>
+              </a:spcAft>
+              <a:buSzPct val="100000"/>
+              <a:buChar char="•"/>
+            </a:pPr>
+            <a:r>
+              <a:rPr lang="en-US" sz="1300" dirty="0">
+                <a:solidFill>
+                  <a:srgbClr val="CADCFC"/>
+                </a:solidFill>
+                <a:latin typeface="Calibri" pitchFamily="34" charset="0"/>
+                <a:ea typeface="Calibri" pitchFamily="34" charset="-122"/>
+                <a:cs typeface="Calibri" pitchFamily="34" charset="-120"/>
+              </a:rPr>
+              <a:t>Checkpoint at the end of each week</a:t>
+            </a:r>
+            <a:endParaRPr lang="en-US" sz="1300" dirty="0"/>
+          </a:p>
+          <a:p>
+            <a:pPr marL="342900" indent="-342900">
+              <a:spcAft>
+                <a:spcPts val="1000"/>
+              </a:spcAft>
+              <a:buSzPct val="100000"/>
+              <a:buChar char="•"/>
+            </a:pPr>
+            <a:r>
+              <a:rPr lang="en-US" sz="1300" dirty="0">
+                <a:solidFill>
+                  <a:srgbClr val="CADCFC"/>
+                </a:solidFill>
+                <a:latin typeface="Calibri" pitchFamily="34" charset="0"/>
+                <a:ea typeface="Calibri" pitchFamily="34" charset="-122"/>
+                <a:cs typeface="Calibri" pitchFamily="34" charset="-120"/>
+              </a:rPr>
+              <a:t>Sign-off session in week three</a:t>
+            </a:r>
+            <a:endParaRPr lang="en-US" sz="1300" dirty="0"/>
+          </a:p>
+        </p:txBody>
+      </p:sp>
+      <p:sp>
+        <p:nvSpPr>
+          <p:cNvPr id="9" name="Shape 7"/>
+          <p:cNvSpPr/>
+          <p:nvPr/>
+        </p:nvSpPr>
+        <p:spPr>
+          <a:xfrm>
+            <a:off x="4434840" y="1965960"/>
+            <a:ext cx="384048" cy="384048"/>
+          </a:xfrm>
+          <a:prstGeom prst="ellipse">
+            <a:avLst/>
+          </a:prstGeom>
+          <a:solidFill>
+            <a:srgbClr val="3E5C8A"/>
+          </a:solidFill>
+          <a:ln/>
+        </p:spPr>
+      </p:sp>
+      <p:sp>
+        <p:nvSpPr>
+          <p:cNvPr id="10" name="Text 8"/>
+          <p:cNvSpPr txBox="1"/>
+          <p:nvPr/>
+        </p:nvSpPr>
+        <p:spPr>
+          <a:xfrm>
+            <a:off x="4434840" y="1965960"/>
+            <a:ext cx="384048" cy="384048"/>
+          </a:xfrm>
+          <a:prstGeom prst="rect">
+            <a:avLst/>
+          </a:prstGeom>
+          <a:noFill/>
+          <a:ln/>
+        </p:spPr>
+        <p:txBody>
+          <a:bodyPr wrap="square" lIns="0" tIns="0" rIns="0" bIns="0" rtlCol="0" anchor="ctr"/>
+          <a:lstStyle/>
+          <a:p>
+            <a:pPr algn="ctr" indent="0" marL="0">
+              <a:buNone/>
+            </a:pPr>
+            <a:r>
+              <a:rPr lang="en-US" sz="1200" b="1" dirty="0">
+                <a:solidFill>
+                  <a:srgbClr val="FFFFFF"/>
+                </a:solidFill>
+                <a:latin typeface="Calibri" pitchFamily="34" charset="0"/>
+                <a:ea typeface="Calibri" pitchFamily="34" charset="-122"/>
+                <a:cs typeface="Calibri" pitchFamily="34" charset="-120"/>
+              </a:rPr>
+              <a:t>2</a:t>
+            </a:r>
+            <a:endParaRPr lang="en-US" sz="1200" dirty="0"/>
+          </a:p>
+        </p:txBody>
+      </p:sp>
+      <p:sp>
+        <p:nvSpPr>
+          <p:cNvPr id="11" name="Text 9"/>
+          <p:cNvSpPr txBox="1"/>
+          <p:nvPr/>
+        </p:nvSpPr>
+        <p:spPr>
+          <a:xfrm>
+            <a:off x="4983480" y="1947672"/>
+            <a:ext cx="2926080" cy="365760"/>
+          </a:xfrm>
+          <a:prstGeom prst="rect">
+            <a:avLst/>
+          </a:prstGeom>
+          <a:noFill/>
+          <a:ln/>
+        </p:spPr>
+        <p:txBody>
+          <a:bodyPr wrap="square" lIns="0" tIns="0" rIns="0" bIns="0" rtlCol="0" anchor="ctr"/>
+          <a:lstStyle/>
+          <a:p>
+            <a:pPr indent="0" marL="0">
+              <a:buNone/>
+            </a:pPr>
+            <a:r>
+              <a:rPr lang="en-US" sz="1900" b="1" dirty="0">
+                <a:solidFill>
+                  <a:srgbClr val="FFFFFF"/>
+                </a:solidFill>
+                <a:latin typeface="Calibri" pitchFamily="34" charset="0"/>
+                <a:ea typeface="Calibri" pitchFamily="34" charset="-122"/>
+                <a:cs typeface="Calibri" pitchFamily="34" charset="-120"/>
+              </a:rPr>
+              <a:t>Inputs we need</a:t>
+            </a:r>
+            <a:endParaRPr lang="en-US" sz="1900" dirty="0"/>
+          </a:p>
+        </p:txBody>
+      </p:sp>
+      <p:sp>
+        <p:nvSpPr>
+          <p:cNvPr id="12" name="Text 10"/>
+          <p:cNvSpPr txBox="1"/>
+          <p:nvPr/>
+        </p:nvSpPr>
+        <p:spPr>
+          <a:xfrm>
+            <a:off x="4434840" y="2606040"/>
+            <a:ext cx="3291840" cy="2560320"/>
+          </a:xfrm>
+          <a:prstGeom prst="rect">
+            <a:avLst/>
+          </a:prstGeom>
+          <a:noFill/>
+          <a:ln/>
+        </p:spPr>
+        <p:txBody>
+          <a:bodyPr wrap="square" lIns="0" tIns="0" rIns="0" bIns="0" rtlCol="0" anchor="ctr"/>
+          <a:lstStyle/>
+          <a:p>
+            <a:pPr marL="342900" indent="-342900">
+              <a:spcAft>
+                <a:spcPts val="1000"/>
+              </a:spcAft>
+              <a:buSzPct val="100000"/>
+              <a:buChar char="•"/>
+            </a:pPr>
+            <a:r>
+              <a:rPr lang="en-US" sz="1300" dirty="0">
+                <a:solidFill>
+                  <a:srgbClr val="CADCFC"/>
+                </a:solidFill>
+                <a:latin typeface="Calibri" pitchFamily="34" charset="0"/>
+                <a:ea typeface="Calibri" pitchFamily="34" charset="-122"/>
+                <a:cs typeface="Calibri" pitchFamily="34" charset="-120"/>
+              </a:rPr>
+              <a:t>Current pipeline and revenue by pillar</a:t>
+            </a:r>
+            <a:endParaRPr lang="en-US" sz="1300" dirty="0"/>
+          </a:p>
+          <a:p>
+            <a:pPr marL="342900" indent="-342900">
+              <a:spcAft>
+                <a:spcPts val="1000"/>
+              </a:spcAft>
+              <a:buSzPct val="100000"/>
+              <a:buChar char="•"/>
+            </a:pPr>
+            <a:r>
+              <a:rPr lang="en-US" sz="1300" dirty="0">
+                <a:solidFill>
+                  <a:srgbClr val="CADCFC"/>
+                </a:solidFill>
+                <a:latin typeface="Calibri" pitchFamily="34" charset="0"/>
+                <a:ea typeface="Calibri" pitchFamily="34" charset="-122"/>
+                <a:cs typeface="Calibri" pitchFamily="34" charset="-120"/>
+              </a:rPr>
+              <a:t>Existing account relationships</a:t>
+            </a:r>
+            <a:endParaRPr lang="en-US" sz="1300" dirty="0"/>
+          </a:p>
+          <a:p>
+            <a:pPr marL="342900" indent="-342900">
+              <a:spcAft>
+                <a:spcPts val="1000"/>
+              </a:spcAft>
+              <a:buSzPct val="100000"/>
+              <a:buChar char="•"/>
+            </a:pPr>
+            <a:r>
+              <a:rPr lang="en-US" sz="1300" dirty="0">
+                <a:solidFill>
+                  <a:srgbClr val="CADCFC"/>
+                </a:solidFill>
+                <a:latin typeface="Calibri" pitchFamily="34" charset="0"/>
+                <a:ea typeface="Calibri" pitchFamily="34" charset="-122"/>
+                <a:cs typeface="Calibri" pitchFamily="34" charset="-120"/>
+              </a:rPr>
+              <a:t>Alliance and partnership status</a:t>
+            </a:r>
+            <a:endParaRPr lang="en-US" sz="1300" dirty="0"/>
+          </a:p>
+          <a:p>
+            <a:pPr marL="342900" indent="-342900">
+              <a:spcAft>
+                <a:spcPts val="1000"/>
+              </a:spcAft>
+              <a:buSzPct val="100000"/>
+              <a:buChar char="•"/>
+            </a:pPr>
+            <a:r>
+              <a:rPr lang="en-US" sz="1300" dirty="0">
+                <a:solidFill>
+                  <a:srgbClr val="CADCFC"/>
+                </a:solidFill>
+                <a:latin typeface="Calibri" pitchFamily="34" charset="0"/>
+                <a:ea typeface="Calibri" pitchFamily="34" charset="-122"/>
+                <a:cs typeface="Calibri" pitchFamily="34" charset="-120"/>
+              </a:rPr>
+              <a:t>Delivery capacity and skills view</a:t>
+            </a:r>
+            <a:endParaRPr lang="en-US" sz="1300" dirty="0"/>
+          </a:p>
+          <a:p>
+            <a:pPr marL="342900" indent="-342900">
+              <a:spcAft>
+                <a:spcPts val="1000"/>
+              </a:spcAft>
+              <a:buSzPct val="100000"/>
+              <a:buChar char="•"/>
+            </a:pPr>
+            <a:r>
+              <a:rPr lang="en-US" sz="1300" dirty="0">
+                <a:solidFill>
+                  <a:srgbClr val="CADCFC"/>
+                </a:solidFill>
+                <a:latin typeface="Calibri" pitchFamily="34" charset="0"/>
+                <a:ea typeface="Calibri" pitchFamily="34" charset="-122"/>
+                <a:cs typeface="Calibri" pitchFamily="34" charset="-120"/>
+              </a:rPr>
+              <a:t>Historical deal values</a:t>
+            </a:r>
+            <a:endParaRPr lang="en-US" sz="1300" dirty="0"/>
+          </a:p>
+        </p:txBody>
+      </p:sp>
+      <p:sp>
+        <p:nvSpPr>
+          <p:cNvPr id="13" name="Shape 11"/>
+          <p:cNvSpPr/>
+          <p:nvPr/>
+        </p:nvSpPr>
+        <p:spPr>
+          <a:xfrm>
+            <a:off x="8138160" y="1965960"/>
+            <a:ext cx="384048" cy="384048"/>
+          </a:xfrm>
+          <a:prstGeom prst="ellipse">
+            <a:avLst/>
+          </a:prstGeom>
+          <a:solidFill>
+            <a:srgbClr val="3E5C8A"/>
+          </a:solidFill>
+          <a:ln/>
+        </p:spPr>
+      </p:sp>
+      <p:sp>
+        <p:nvSpPr>
+          <p:cNvPr id="14" name="Text 12"/>
+          <p:cNvSpPr txBox="1"/>
+          <p:nvPr/>
+        </p:nvSpPr>
+        <p:spPr>
+          <a:xfrm>
+            <a:off x="8138160" y="1965960"/>
+            <a:ext cx="384048" cy="384048"/>
+          </a:xfrm>
+          <a:prstGeom prst="rect">
+            <a:avLst/>
+          </a:prstGeom>
+          <a:noFill/>
+          <a:ln/>
+        </p:spPr>
+        <p:txBody>
+          <a:bodyPr wrap="square" lIns="0" tIns="0" rIns="0" bIns="0" rtlCol="0" anchor="ctr"/>
+          <a:lstStyle/>
+          <a:p>
+            <a:pPr algn="ctr" indent="0" marL="0">
+              <a:buNone/>
+            </a:pPr>
+            <a:r>
+              <a:rPr lang="en-US" sz="1200" b="1" dirty="0">
+                <a:solidFill>
+                  <a:srgbClr val="FFFFFF"/>
+                </a:solidFill>
+                <a:latin typeface="Calibri" pitchFamily="34" charset="0"/>
+                <a:ea typeface="Calibri" pitchFamily="34" charset="-122"/>
+                <a:cs typeface="Calibri" pitchFamily="34" charset="-120"/>
+              </a:rPr>
+              <a:t>3</a:t>
+            </a:r>
+            <a:endParaRPr lang="en-US" sz="1200" dirty="0"/>
+          </a:p>
+        </p:txBody>
+      </p:sp>
+      <p:sp>
+        <p:nvSpPr>
+          <p:cNvPr id="15" name="Text 13"/>
+          <p:cNvSpPr txBox="1"/>
+          <p:nvPr/>
+        </p:nvSpPr>
+        <p:spPr>
+          <a:xfrm>
+            <a:off x="8686800" y="1947672"/>
+            <a:ext cx="2926080" cy="365760"/>
+          </a:xfrm>
+          <a:prstGeom prst="rect">
+            <a:avLst/>
+          </a:prstGeom>
+          <a:noFill/>
+          <a:ln/>
+        </p:spPr>
+        <p:txBody>
+          <a:bodyPr wrap="square" lIns="0" tIns="0" rIns="0" bIns="0" rtlCol="0" anchor="ctr"/>
+          <a:lstStyle/>
+          <a:p>
+            <a:pPr indent="0" marL="0">
+              <a:buNone/>
+            </a:pPr>
+            <a:r>
+              <a:rPr lang="en-US" sz="1900" b="1" dirty="0">
+                <a:solidFill>
+                  <a:srgbClr val="FFFFFF"/>
+                </a:solidFill>
+                <a:latin typeface="Calibri" pitchFamily="34" charset="0"/>
+                <a:ea typeface="Calibri" pitchFamily="34" charset="-122"/>
+                <a:cs typeface="Calibri" pitchFamily="34" charset="-120"/>
+              </a:rPr>
+              <a:t>Decisions requested</a:t>
+            </a:r>
+            <a:endParaRPr lang="en-US" sz="1900" dirty="0"/>
+          </a:p>
+        </p:txBody>
+      </p:sp>
+      <p:sp>
+        <p:nvSpPr>
+          <p:cNvPr id="16" name="Text 14"/>
+          <p:cNvSpPr txBox="1"/>
+          <p:nvPr/>
+        </p:nvSpPr>
+        <p:spPr>
+          <a:xfrm>
+            <a:off x="8138160" y="2606040"/>
+            <a:ext cx="3291840" cy="2560320"/>
+          </a:xfrm>
+          <a:prstGeom prst="rect">
+            <a:avLst/>
+          </a:prstGeom>
+          <a:noFill/>
+          <a:ln/>
+        </p:spPr>
+        <p:txBody>
+          <a:bodyPr wrap="square" lIns="0" tIns="0" rIns="0" bIns="0" rtlCol="0" anchor="ctr"/>
+          <a:lstStyle/>
+          <a:p>
+            <a:pPr marL="342900" indent="-342900">
+              <a:spcAft>
+                <a:spcPts val="1000"/>
+              </a:spcAft>
+              <a:buSzPct val="100000"/>
+              <a:buChar char="•"/>
+            </a:pPr>
+            <a:r>
+              <a:rPr lang="en-US" sz="1300" dirty="0">
+                <a:solidFill>
+                  <a:srgbClr val="CADCFC"/>
+                </a:solidFill>
+                <a:latin typeface="Calibri" pitchFamily="34" charset="0"/>
+                <a:ea typeface="Calibri" pitchFamily="34" charset="-122"/>
+                <a:cs typeface="Calibri" pitchFamily="34" charset="-120"/>
+              </a:rPr>
+              <a:t>Priority markets and segments</a:t>
+            </a:r>
+            <a:endParaRPr lang="en-US" sz="1300" dirty="0"/>
+          </a:p>
+          <a:p>
+            <a:pPr marL="342900" indent="-342900">
+              <a:spcAft>
+                <a:spcPts val="1000"/>
+              </a:spcAft>
+              <a:buSzPct val="100000"/>
+              <a:buChar char="•"/>
+            </a:pPr>
+            <a:r>
+              <a:rPr lang="en-US" sz="1300" dirty="0">
+                <a:solidFill>
+                  <a:srgbClr val="CADCFC"/>
+                </a:solidFill>
+                <a:latin typeface="Calibri" pitchFamily="34" charset="0"/>
+                <a:ea typeface="Calibri" pitchFamily="34" charset="-122"/>
+                <a:cs typeface="Calibri" pitchFamily="34" charset="-120"/>
+              </a:rPr>
+              <a:t>Target account list</a:t>
+            </a:r>
+            <a:endParaRPr lang="en-US" sz="1300" dirty="0"/>
+          </a:p>
+          <a:p>
+            <a:pPr marL="342900" indent="-342900">
+              <a:spcAft>
+                <a:spcPts val="1000"/>
+              </a:spcAft>
+              <a:buSzPct val="100000"/>
+              <a:buChar char="•"/>
+            </a:pPr>
+            <a:r>
+              <a:rPr lang="en-US" sz="1300" dirty="0">
+                <a:solidFill>
+                  <a:srgbClr val="CADCFC"/>
+                </a:solidFill>
+                <a:latin typeface="Calibri" pitchFamily="34" charset="0"/>
+                <a:ea typeface="Calibri" pitchFamily="34" charset="-122"/>
+                <a:cs typeface="Calibri" pitchFamily="34" charset="-120"/>
+              </a:rPr>
+              <a:t>Revenue and margin targets</a:t>
+            </a:r>
+            <a:endParaRPr lang="en-US" sz="1300" dirty="0"/>
+          </a:p>
+          <a:p>
+            <a:pPr marL="342900" indent="-342900">
+              <a:spcAft>
+                <a:spcPts val="1000"/>
+              </a:spcAft>
+              <a:buSzPct val="100000"/>
+              <a:buChar char="•"/>
+            </a:pPr>
+            <a:r>
+              <a:rPr lang="en-US" sz="1300" dirty="0">
+                <a:solidFill>
+                  <a:srgbClr val="CADCFC"/>
+                </a:solidFill>
+                <a:latin typeface="Calibri" pitchFamily="34" charset="0"/>
+                <a:ea typeface="Calibri" pitchFamily="34" charset="-122"/>
+                <a:cs typeface="Calibri" pitchFamily="34" charset="-120"/>
+              </a:rPr>
+              <a:t>Account ownership</a:t>
+            </a:r>
+            <a:endParaRPr lang="en-US" sz="1300" dirty="0"/>
+          </a:p>
+          <a:p>
+            <a:pPr marL="342900" indent="-342900">
+              <a:spcAft>
+                <a:spcPts val="1000"/>
+              </a:spcAft>
+              <a:buSzPct val="100000"/>
+              <a:buChar char="•"/>
+            </a:pPr>
+            <a:r>
+              <a:rPr lang="en-US" sz="1300" dirty="0">
+                <a:solidFill>
+                  <a:srgbClr val="CADCFC"/>
+                </a:solidFill>
+                <a:latin typeface="Calibri" pitchFamily="34" charset="0"/>
+                <a:ea typeface="Calibri" pitchFamily="34" charset="-122"/>
+                <a:cs typeface="Calibri" pitchFamily="34" charset="-120"/>
+              </a:rPr>
+              <a:t>Investment and hiring asks</a:t>
+            </a:r>
+            <a:endParaRPr lang="en-US" sz="1300" dirty="0"/>
+          </a:p>
+        </p:txBody>
+      </p:sp>
+      <p:sp>
+        <p:nvSpPr>
+          <p:cNvPr id="17" name="Text 15"/>
+          <p:cNvSpPr txBox="1"/>
+          <p:nvPr/>
+        </p:nvSpPr>
+        <p:spPr>
+          <a:xfrm>
+            <a:off x="731520" y="5852160"/>
+            <a:ext cx="6400800" cy="365760"/>
+          </a:xfrm>
+          <a:prstGeom prst="rect">
+            <a:avLst/>
+          </a:prstGeom>
+          <a:noFill/>
+          <a:ln/>
+        </p:spPr>
+        <p:txBody>
+          <a:bodyPr wrap="square" lIns="0" tIns="0" rIns="0" bIns="0" rtlCol="0" anchor="ctr"/>
+          <a:lstStyle/>
+          <a:p>
+            <a:pPr indent="0" marL="0">
+              <a:buNone/>
+            </a:pPr>
+            <a:r>
+              <a:rPr lang="en-US" sz="1200" i="1" dirty="0">
+                <a:solidFill>
+                  <a:srgbClr val="9AA7C4"/>
+                </a:solidFill>
+                <a:latin typeface="Calibri" pitchFamily="34" charset="0"/>
+                <a:ea typeface="Calibri" pitchFamily="34" charset="-122"/>
+                <a:cs typeface="Calibri" pitchFamily="34" charset="-120"/>
+              </a:rPr>
+              <a:t>Owners, dates and participants are set at kick-off.</a:t>
+            </a:r>
+            <a:endParaRPr lang="en-US" sz="1200" dirty="0"/>
+          </a:p>
+        </p:txBody>
+      </p:sp>
+    </p:spTree>
+  </p:cSld>
+  <p:clrMapOvr>
+    <a:masterClrMapping/>
+  </p:clrMapOvr>
+</p:sld>
+</file>
+
 <file path=ppt/slides/slide2.xml><?xml version="1.0" encoding="utf-8"?>
 <p:sld xmlns:a="http://schemas.openxmlformats.org/drawingml/2006/main" xmlns:r="http://schemas.openxmlformats.org/officeDocument/2006/relationships" xmlns:p="http://schemas.openxmlformats.org/presentationml/2006/main">
   <p:cSld name="Slide 2">
@@ -2495,7 +3538,7 @@
                 <a:ea typeface="Cambria" pitchFamily="34" charset="-122"/>
                 <a:cs typeface="Cambria" pitchFamily="34" charset="-120"/>
               </a:rPr>
-              <a:t>Five questions to answer</a:t>
+              <a:t>Seven questions to answer</a:t>
             </a:r>
             <a:endParaRPr lang="en-US" sz="3600" dirty="0"/>
           </a:p>
@@ -2548,12 +3591,12 @@
         </p:nvSpPr>
         <p:spPr>
           <a:xfrm>
-            <a:off x="640080" y="1874520"/>
-            <a:ext cx="2029968" cy="3520440"/>
+            <a:off x="640080" y="1828800"/>
+            <a:ext cx="2606040" cy="1783080"/>
           </a:xfrm>
           <a:prstGeom prst="roundRect">
             <a:avLst>
-              <a:gd name="adj" fmla="val 5405"/>
+              <a:gd name="adj" fmla="val 6154"/>
             </a:avLst>
           </a:prstGeom>
           <a:solidFill>
@@ -2570,8 +3613,8 @@
         </p:nvSpPr>
         <p:spPr>
           <a:xfrm>
-            <a:off x="868680" y="2103120"/>
-            <a:ext cx="384048" cy="384048"/>
+            <a:off x="868680" y="2084832"/>
+            <a:ext cx="365760" cy="365760"/>
           </a:xfrm>
           <a:prstGeom prst="ellipse">
             <a:avLst/>
@@ -2590,8 +3633,8 @@
         </p:nvSpPr>
         <p:spPr>
           <a:xfrm>
-            <a:off x="868680" y="2103120"/>
-            <a:ext cx="384048" cy="384048"/>
+            <a:off x="868680" y="2084832"/>
+            <a:ext cx="365760" cy="365760"/>
           </a:xfrm>
           <a:prstGeom prst="rect">
             <a:avLst/>
@@ -2629,8 +3672,8 @@
         </p:nvSpPr>
         <p:spPr>
           <a:xfrm>
-            <a:off x="868680" y="2606040"/>
-            <a:ext cx="1645920" cy="548640"/>
+            <a:off x="1353312" y="2066544"/>
+            <a:ext cx="1783080" cy="365760"/>
           </a:xfrm>
           <a:prstGeom prst="rect">
             <a:avLst/>
@@ -2646,7 +3689,7 @@
               <a:buNone/>
             </a:pPr>
             <a:r>
-              <a:rPr lang="en-US" sz="1600" b="1" dirty="0">
+              <a:rPr lang="en-US" sz="1450" b="1" dirty="0">
                 <a:solidFill>
                   <a:srgbClr val="16203A"/>
                 </a:solidFill>
@@ -2656,7 +3699,7 @@
               </a:rPr>
               <a:t>Where to play</a:t>
             </a:r>
-            <a:endParaRPr lang="en-US" sz="1600" dirty="0"/>
+            <a:endParaRPr lang="en-US" sz="1450" dirty="0"/>
           </a:p>
         </p:txBody>
       </p:sp>
@@ -2668,8 +3711,8 @@
         </p:nvSpPr>
         <p:spPr>
           <a:xfrm>
-            <a:off x="868680" y="3200400"/>
-            <a:ext cx="1627632" cy="2011680"/>
+            <a:off x="896112" y="2542032"/>
+            <a:ext cx="2194560" cy="960120"/>
           </a:xfrm>
           <a:prstGeom prst="rect">
             <a:avLst/>
@@ -2683,13 +3726,13 @@
           <a:p>
             <a:pPr marL="342900" indent="-342900">
               <a:spcAft>
-                <a:spcPts val="700"/>
+                <a:spcPts val="400"/>
               </a:spcAft>
               <a:buSzPct val="100000"/>
               <a:buChar char="•"/>
             </a:pPr>
             <a:r>
-              <a:rPr lang="en-US" sz="1150" dirty="0">
+              <a:rPr lang="en-US" sz="1050" dirty="0">
                 <a:solidFill>
                   <a:srgbClr val="44506B"/>
                 </a:solidFill>
@@ -2699,18 +3742,18 @@
               </a:rPr>
               <a:t>Which markets, in what priority?</a:t>
             </a:r>
-            <a:endParaRPr lang="en-US" sz="1150" dirty="0"/>
+            <a:endParaRPr lang="en-US" sz="1050" dirty="0"/>
           </a:p>
           <a:p>
             <a:pPr marL="342900" indent="-342900">
               <a:spcAft>
-                <a:spcPts val="700"/>
+                <a:spcPts val="400"/>
               </a:spcAft>
               <a:buSzPct val="100000"/>
               <a:buChar char="•"/>
             </a:pPr>
             <a:r>
-              <a:rPr lang="en-US" sz="1150" dirty="0">
+              <a:rPr lang="en-US" sz="1050" dirty="0">
                 <a:solidFill>
                   <a:srgbClr val="44506B"/>
                 </a:solidFill>
@@ -2720,18 +3763,18 @@
               </a:rPr>
               <a:t>Which client segments?</a:t>
             </a:r>
-            <a:endParaRPr lang="en-US" sz="1150" dirty="0"/>
+            <a:endParaRPr lang="en-US" sz="1050" dirty="0"/>
           </a:p>
           <a:p>
             <a:pPr marL="342900" indent="-342900">
               <a:spcAft>
-                <a:spcPts val="700"/>
+                <a:spcPts val="400"/>
               </a:spcAft>
               <a:buSzPct val="100000"/>
               <a:buChar char="•"/>
             </a:pPr>
             <a:r>
-              <a:rPr lang="en-US" sz="1150" dirty="0">
+              <a:rPr lang="en-US" sz="1050" dirty="0">
                 <a:solidFill>
                   <a:srgbClr val="44506B"/>
                 </a:solidFill>
@@ -2741,7 +3784,7 @@
               </a:rPr>
               <a:t>Which named accounts?</a:t>
             </a:r>
-            <a:endParaRPr lang="en-US" sz="1150" dirty="0"/>
+            <a:endParaRPr lang="en-US" sz="1050" dirty="0"/>
           </a:p>
         </p:txBody>
       </p:sp>
@@ -2753,12 +3796,12 @@
         </p:nvSpPr>
         <p:spPr>
           <a:xfrm>
-            <a:off x="2852928" y="1874520"/>
-            <a:ext cx="2029968" cy="3520440"/>
+            <a:off x="3383280" y="1828800"/>
+            <a:ext cx="2606040" cy="1783080"/>
           </a:xfrm>
           <a:prstGeom prst="roundRect">
             <a:avLst>
-              <a:gd name="adj" fmla="val 5405"/>
+              <a:gd name="adj" fmla="val 6154"/>
             </a:avLst>
           </a:prstGeom>
           <a:solidFill>
@@ -2775,8 +3818,8 @@
         </p:nvSpPr>
         <p:spPr>
           <a:xfrm>
-            <a:off x="3081528" y="2103120"/>
-            <a:ext cx="384048" cy="384048"/>
+            <a:off x="3611880" y="2084832"/>
+            <a:ext cx="365760" cy="365760"/>
           </a:xfrm>
           <a:prstGeom prst="ellipse">
             <a:avLst/>
@@ -2795,8 +3838,8 @@
         </p:nvSpPr>
         <p:spPr>
           <a:xfrm>
-            <a:off x="3081528" y="2103120"/>
-            <a:ext cx="384048" cy="384048"/>
+            <a:off x="3611880" y="2084832"/>
+            <a:ext cx="365760" cy="365760"/>
           </a:xfrm>
           <a:prstGeom prst="rect">
             <a:avLst/>
@@ -2834,8 +3877,8 @@
         </p:nvSpPr>
         <p:spPr>
           <a:xfrm>
-            <a:off x="3081528" y="2606040"/>
-            <a:ext cx="1645920" cy="548640"/>
+            <a:off x="4096512" y="2066544"/>
+            <a:ext cx="1783080" cy="365760"/>
           </a:xfrm>
           <a:prstGeom prst="rect">
             <a:avLst/>
@@ -2851,7 +3894,7 @@
               <a:buNone/>
             </a:pPr>
             <a:r>
-              <a:rPr lang="en-US" sz="1600" b="1" dirty="0">
+              <a:rPr lang="en-US" sz="1450" b="1" dirty="0">
                 <a:solidFill>
                   <a:srgbClr val="16203A"/>
                 </a:solidFill>
@@ -2861,7 +3904,7 @@
               </a:rPr>
               <a:t>What we offer</a:t>
             </a:r>
-            <a:endParaRPr lang="en-US" sz="1600" dirty="0"/>
+            <a:endParaRPr lang="en-US" sz="1450" dirty="0"/>
           </a:p>
         </p:txBody>
       </p:sp>
@@ -2873,8 +3916,8 @@
         </p:nvSpPr>
         <p:spPr>
           <a:xfrm>
-            <a:off x="3081528" y="3200400"/>
-            <a:ext cx="1627632" cy="2011680"/>
+            <a:off x="3639312" y="2542032"/>
+            <a:ext cx="2194560" cy="960120"/>
           </a:xfrm>
           <a:prstGeom prst="rect">
             <a:avLst/>
@@ -2888,13 +3931,13 @@
           <a:p>
             <a:pPr marL="342900" indent="-342900">
               <a:spcAft>
-                <a:spcPts val="700"/>
+                <a:spcPts val="400"/>
               </a:spcAft>
               <a:buSzPct val="100000"/>
               <a:buChar char="•"/>
             </a:pPr>
             <a:r>
-              <a:rPr lang="en-US" sz="1150" dirty="0">
+              <a:rPr lang="en-US" sz="1050" dirty="0">
                 <a:solidFill>
                   <a:srgbClr val="44506B"/>
                 </a:solidFill>
@@ -2904,18 +3947,18 @@
               </a:rPr>
               <a:t>Which integrated propositions across the three pillars?</a:t>
             </a:r>
-            <a:endParaRPr lang="en-US" sz="1150" dirty="0"/>
+            <a:endParaRPr lang="en-US" sz="1050" dirty="0"/>
           </a:p>
           <a:p>
             <a:pPr marL="342900" indent="-342900">
               <a:spcAft>
-                <a:spcPts val="700"/>
+                <a:spcPts val="400"/>
               </a:spcAft>
               <a:buSzPct val="100000"/>
               <a:buChar char="•"/>
             </a:pPr>
             <a:r>
-              <a:rPr lang="en-US" sz="1150" dirty="0">
+              <a:rPr lang="en-US" sz="1050" dirty="0">
                 <a:solidFill>
                   <a:srgbClr val="44506B"/>
                 </a:solidFill>
@@ -2923,9 +3966,9 @@
                 <a:ea typeface="Calibri" pitchFamily="34" charset="-122"/>
                 <a:cs typeface="Calibri" pitchFamily="34" charset="-120"/>
               </a:rPr>
-              <a:t>Which partial offerings are permitted, and when?</a:t>
-            </a:r>
-            <a:endParaRPr lang="en-US" sz="1150" dirty="0"/>
+              <a:t>Which partial offerings are permitted?</a:t>
+            </a:r>
+            <a:endParaRPr lang="en-US" sz="1050" dirty="0"/>
           </a:p>
         </p:txBody>
       </p:sp>
@@ -2937,12 +3980,12 @@
         </p:nvSpPr>
         <p:spPr>
           <a:xfrm>
-            <a:off x="5065776" y="1874520"/>
-            <a:ext cx="2029968" cy="3520440"/>
+            <a:off x="6126480" y="1828800"/>
+            <a:ext cx="2606040" cy="1783080"/>
           </a:xfrm>
           <a:prstGeom prst="roundRect">
             <a:avLst>
-              <a:gd name="adj" fmla="val 5405"/>
+              <a:gd name="adj" fmla="val 6154"/>
             </a:avLst>
           </a:prstGeom>
           <a:solidFill>
@@ -2959,8 +4002,8 @@
         </p:nvSpPr>
         <p:spPr>
           <a:xfrm>
-            <a:off x="5294376" y="2103120"/>
-            <a:ext cx="384048" cy="384048"/>
+            <a:off x="6355080" y="2084832"/>
+            <a:ext cx="365760" cy="365760"/>
           </a:xfrm>
           <a:prstGeom prst="ellipse">
             <a:avLst/>
@@ -2979,8 +4022,8 @@
         </p:nvSpPr>
         <p:spPr>
           <a:xfrm>
-            <a:off x="5294376" y="2103120"/>
-            <a:ext cx="384048" cy="384048"/>
+            <a:off x="6355080" y="2084832"/>
+            <a:ext cx="365760" cy="365760"/>
           </a:xfrm>
           <a:prstGeom prst="rect">
             <a:avLst/>
@@ -3018,8 +4061,8 @@
         </p:nvSpPr>
         <p:spPr>
           <a:xfrm>
-            <a:off x="5294376" y="2606040"/>
-            <a:ext cx="1645920" cy="548640"/>
+            <a:off x="6839712" y="2066544"/>
+            <a:ext cx="1783080" cy="365760"/>
           </a:xfrm>
           <a:prstGeom prst="rect">
             <a:avLst/>
@@ -3035,7 +4078,7 @@
               <a:buNone/>
             </a:pPr>
             <a:r>
-              <a:rPr lang="en-US" sz="1600" b="1" dirty="0">
+              <a:rPr lang="en-US" sz="1450" b="1" dirty="0">
                 <a:solidFill>
                   <a:srgbClr val="16203A"/>
                 </a:solidFill>
@@ -3045,7 +4088,7 @@
               </a:rPr>
               <a:t>How we win</a:t>
             </a:r>
-            <a:endParaRPr lang="en-US" sz="1600" dirty="0"/>
+            <a:endParaRPr lang="en-US" sz="1450" dirty="0"/>
           </a:p>
         </p:txBody>
       </p:sp>
@@ -3057,8 +4100,8 @@
         </p:nvSpPr>
         <p:spPr>
           <a:xfrm>
-            <a:off x="5294376" y="3200400"/>
-            <a:ext cx="1627632" cy="2011680"/>
+            <a:off x="6382512" y="2542032"/>
+            <a:ext cx="2194560" cy="960120"/>
           </a:xfrm>
           <a:prstGeom prst="rect">
             <a:avLst/>
@@ -3072,13 +4115,13 @@
           <a:p>
             <a:pPr marL="342900" indent="-342900">
               <a:spcAft>
-                <a:spcPts val="700"/>
+                <a:spcPts val="400"/>
               </a:spcAft>
               <a:buSzPct val="100000"/>
               <a:buChar char="•"/>
             </a:pPr>
             <a:r>
-              <a:rPr lang="en-US" sz="1150" dirty="0">
+              <a:rPr lang="en-US" sz="1050" dirty="0">
                 <a:solidFill>
                   <a:srgbClr val="44506B"/>
                 </a:solidFill>
@@ -3088,18 +4131,18 @@
               </a:rPr>
               <a:t>What differentiates us?</a:t>
             </a:r>
-            <a:endParaRPr lang="en-US" sz="1150" dirty="0"/>
+            <a:endParaRPr lang="en-US" sz="1050" dirty="0"/>
           </a:p>
           <a:p>
             <a:pPr marL="342900" indent="-342900">
               <a:spcAft>
-                <a:spcPts val="700"/>
+                <a:spcPts val="400"/>
               </a:spcAft>
               <a:buSzPct val="100000"/>
               <a:buChar char="•"/>
             </a:pPr>
             <a:r>
-              <a:rPr lang="en-US" sz="1150" dirty="0">
+              <a:rPr lang="en-US" sz="1050" dirty="0">
                 <a:solidFill>
                   <a:srgbClr val="44506B"/>
                 </a:solidFill>
@@ -3109,18 +4152,160 @@
               </a:rPr>
               <a:t>Which alliances and credentials are needed?</a:t>
             </a:r>
-            <a:endParaRPr lang="en-US" sz="1150" dirty="0"/>
-          </a:p>
+            <a:endParaRPr lang="en-US" sz="1050" dirty="0"/>
+          </a:p>
+        </p:txBody>
+      </p:sp>
+      <p:sp>
+        <p:nvSpPr>
+          <p:cNvPr id="19" name="Shape 17"/>
+          <p:cNvSpPr/>
+          <p:nvPr/>
+        </p:nvSpPr>
+        <p:spPr>
+          <a:xfrm>
+            <a:off x="8869680" y="1828800"/>
+            <a:ext cx="2606040" cy="1783080"/>
+          </a:xfrm>
+          <a:prstGeom prst="roundRect">
+            <a:avLst>
+              <a:gd name="adj" fmla="val 6154"/>
+            </a:avLst>
+          </a:prstGeom>
+          <a:solidFill>
+            <a:srgbClr val="EDF2FA"/>
+          </a:solidFill>
+          <a:ln/>
+        </p:spPr>
+      </p:sp>
+      <p:sp>
+        <p:nvSpPr>
+          <p:cNvPr id="20" name="Shape 18"/>
+          <p:cNvSpPr/>
+          <p:nvPr/>
+        </p:nvSpPr>
+        <p:spPr>
+          <a:xfrm>
+            <a:off x="9098280" y="2084832"/>
+            <a:ext cx="365760" cy="365760"/>
+          </a:xfrm>
+          <a:prstGeom prst="ellipse">
+            <a:avLst/>
+          </a:prstGeom>
+          <a:solidFill>
+            <a:srgbClr val="1E2761"/>
+          </a:solidFill>
+          <a:ln/>
+        </p:spPr>
+      </p:sp>
+      <p:sp>
+        <p:nvSpPr>
+          <p:cNvPr id="21" name="Text 19"/>
+          <p:cNvSpPr txBox="1"/>
+          <p:nvPr/>
+        </p:nvSpPr>
+        <p:spPr>
+          <a:xfrm>
+            <a:off x="9098280" y="2084832"/>
+            <a:ext cx="365760" cy="365760"/>
+          </a:xfrm>
+          <a:prstGeom prst="rect">
+            <a:avLst/>
+          </a:prstGeom>
+          <a:noFill/>
+          <a:ln/>
+        </p:spPr>
+        <p:txBody>
+          <a:bodyPr wrap="square" lIns="0" tIns="0" rIns="0" bIns="0" rtlCol="0" anchor="ctr"/>
+          <a:lstStyle/>
+          <a:p>
+            <a:pPr algn="ctr" indent="0" marL="0">
+              <a:buNone/>
+            </a:pPr>
+            <a:r>
+              <a:rPr lang="en-US" sz="1200" b="1" dirty="0">
+                <a:solidFill>
+                  <a:srgbClr val="FFFFFF"/>
+                </a:solidFill>
+                <a:latin typeface="Calibri" pitchFamily="34" charset="0"/>
+                <a:ea typeface="Calibri" pitchFamily="34" charset="-122"/>
+                <a:cs typeface="Calibri" pitchFamily="34" charset="-120"/>
+              </a:rPr>
+              <a:t>4</a:t>
+            </a:r>
+            <a:endParaRPr lang="en-US" sz="1200" dirty="0"/>
+          </a:p>
+        </p:txBody>
+      </p:sp>
+      <p:sp>
+        <p:nvSpPr>
+          <p:cNvPr id="22" name="Text 20"/>
+          <p:cNvSpPr txBox="1"/>
+          <p:nvPr/>
+        </p:nvSpPr>
+        <p:spPr>
+          <a:xfrm>
+            <a:off x="9582912" y="2066544"/>
+            <a:ext cx="1783080" cy="365760"/>
+          </a:xfrm>
+          <a:prstGeom prst="rect">
+            <a:avLst/>
+          </a:prstGeom>
+          <a:noFill/>
+          <a:ln/>
+        </p:spPr>
+        <p:txBody>
+          <a:bodyPr wrap="square" lIns="0" tIns="0" rIns="0" bIns="0" rtlCol="0" anchor="ctr"/>
+          <a:lstStyle/>
+          <a:p>
+            <a:pPr indent="0" marL="0">
+              <a:buNone/>
+            </a:pPr>
+            <a:r>
+              <a:rPr lang="en-US" sz="1450" b="1" dirty="0">
+                <a:solidFill>
+                  <a:srgbClr val="16203A"/>
+                </a:solidFill>
+                <a:latin typeface="Calibri" pitchFamily="34" charset="0"/>
+                <a:ea typeface="Calibri" pitchFamily="34" charset="-122"/>
+                <a:cs typeface="Calibri" pitchFamily="34" charset="-120"/>
+              </a:rPr>
+              <a:t>How much</a:t>
+            </a:r>
+            <a:endParaRPr lang="en-US" sz="1450" dirty="0"/>
+          </a:p>
+        </p:txBody>
+      </p:sp>
+      <p:sp>
+        <p:nvSpPr>
+          <p:cNvPr id="23" name="Text 21"/>
+          <p:cNvSpPr txBox="1"/>
+          <p:nvPr/>
+        </p:nvSpPr>
+        <p:spPr>
+          <a:xfrm>
+            <a:off x="9125712" y="2542032"/>
+            <a:ext cx="2194560" cy="960120"/>
+          </a:xfrm>
+          <a:prstGeom prst="rect">
+            <a:avLst/>
+          </a:prstGeom>
+          <a:noFill/>
+          <a:ln/>
+        </p:spPr>
+        <p:txBody>
+          <a:bodyPr wrap="square" lIns="0" tIns="0" rIns="0" bIns="0" rtlCol="0" anchor="ctr"/>
+          <a:lstStyle/>
           <a:p>
             <a:pPr marL="342900" indent="-342900">
               <a:spcAft>
-                <a:spcPts val="700"/>
+                <a:spcPts val="400"/>
               </a:spcAft>
               <a:buSzPct val="100000"/>
               <a:buChar char="•"/>
             </a:pPr>
             <a:r>
-              <a:rPr lang="en-US" sz="1150" dirty="0">
+              <a:rPr lang="en-US" sz="1050" dirty="0">
                 <a:solidFill>
                   <a:srgbClr val="44506B"/>
                 </a:solidFill>
@@ -3128,26 +4313,231 @@
                 <a:ea typeface="Calibri" pitchFamily="34" charset="-122"/>
                 <a:cs typeface="Calibri" pitchFamily="34" charset="-120"/>
               </a:rPr>
-              <a:t>What delivery model applies?</a:t>
-            </a:r>
-            <a:endParaRPr lang="en-US" sz="1150" dirty="0"/>
-          </a:p>
-        </p:txBody>
-      </p:sp>
-      <p:sp>
-        <p:nvSpPr>
-          <p:cNvPr id="19" name="Shape 17"/>
+              <a:t>What revenue by market and by offering?</a:t>
+            </a:r>
+            <a:endParaRPr lang="en-US" sz="1050" dirty="0"/>
+          </a:p>
+          <a:p>
+            <a:pPr marL="342900" indent="-342900">
+              <a:spcAft>
+                <a:spcPts val="400"/>
+              </a:spcAft>
+              <a:buSzPct val="100000"/>
+              <a:buChar char="•"/>
+            </a:pPr>
+            <a:r>
+              <a:rPr lang="en-US" sz="1050" dirty="0">
+                <a:solidFill>
+                  <a:srgbClr val="44506B"/>
+                </a:solidFill>
+                <a:latin typeface="Calibri" pitchFamily="34" charset="0"/>
+                <a:ea typeface="Calibri" pitchFamily="34" charset="-122"/>
+                <a:cs typeface="Calibri" pitchFamily="34" charset="-120"/>
+              </a:rPr>
+              <a:t>What deal sizes and price bands does the market pay?</a:t>
+            </a:r>
+            <a:endParaRPr lang="en-US" sz="1050" dirty="0"/>
+          </a:p>
+        </p:txBody>
+      </p:sp>
+      <p:sp>
+        <p:nvSpPr>
+          <p:cNvPr id="24" name="Shape 22"/>
           <p:cNvSpPr/>
           <p:nvPr/>
         </p:nvSpPr>
         <p:spPr>
           <a:xfrm>
-            <a:off x="7278624" y="1874520"/>
-            <a:ext cx="2029968" cy="3520440"/>
+            <a:off x="640080" y="3794760"/>
+            <a:ext cx="2606040" cy="1783080"/>
           </a:xfrm>
           <a:prstGeom prst="roundRect">
             <a:avLst>
-              <a:gd name="adj" fmla="val 5405"/>
+              <a:gd name="adj" fmla="val 6154"/>
+            </a:avLst>
+          </a:prstGeom>
+          <a:solidFill>
+            <a:srgbClr val="E4EBF7"/>
+          </a:solidFill>
+          <a:ln/>
+        </p:spPr>
+      </p:sp>
+      <p:sp>
+        <p:nvSpPr>
+          <p:cNvPr id="25" name="Shape 23"/>
+          <p:cNvSpPr/>
+          <p:nvPr/>
+        </p:nvSpPr>
+        <p:spPr>
+          <a:xfrm>
+            <a:off x="868680" y="4050792"/>
+            <a:ext cx="365760" cy="365760"/>
+          </a:xfrm>
+          <a:prstGeom prst="ellipse">
+            <a:avLst/>
+          </a:prstGeom>
+          <a:solidFill>
+            <a:srgbClr val="1E2761"/>
+          </a:solidFill>
+          <a:ln/>
+        </p:spPr>
+      </p:sp>
+      <p:sp>
+        <p:nvSpPr>
+          <p:cNvPr id="26" name="Text 24"/>
+          <p:cNvSpPr txBox="1"/>
+          <p:nvPr/>
+        </p:nvSpPr>
+        <p:spPr>
+          <a:xfrm>
+            <a:off x="868680" y="4050792"/>
+            <a:ext cx="365760" cy="365760"/>
+          </a:xfrm>
+          <a:prstGeom prst="rect">
+            <a:avLst/>
+          </a:prstGeom>
+          <a:noFill/>
+          <a:ln/>
+        </p:spPr>
+        <p:txBody>
+          <a:bodyPr wrap="square" lIns="0" tIns="0" rIns="0" bIns="0" rtlCol="0" anchor="ctr"/>
+          <a:lstStyle/>
+          <a:p>
+            <a:pPr algn="ctr" indent="0" marL="0">
+              <a:buNone/>
+            </a:pPr>
+            <a:r>
+              <a:rPr lang="en-US" sz="1200" b="1" dirty="0">
+                <a:solidFill>
+                  <a:srgbClr val="FFFFFF"/>
+                </a:solidFill>
+                <a:latin typeface="Calibri" pitchFamily="34" charset="0"/>
+                <a:ea typeface="Calibri" pitchFamily="34" charset="-122"/>
+                <a:cs typeface="Calibri" pitchFamily="34" charset="-120"/>
+              </a:rPr>
+              <a:t>5</a:t>
+            </a:r>
+            <a:endParaRPr lang="en-US" sz="1200" dirty="0"/>
+          </a:p>
+        </p:txBody>
+      </p:sp>
+      <p:sp>
+        <p:nvSpPr>
+          <p:cNvPr id="27" name="Text 25"/>
+          <p:cNvSpPr txBox="1"/>
+          <p:nvPr/>
+        </p:nvSpPr>
+        <p:spPr>
+          <a:xfrm>
+            <a:off x="1353312" y="4032504"/>
+            <a:ext cx="1783080" cy="365760"/>
+          </a:xfrm>
+          <a:prstGeom prst="rect">
+            <a:avLst/>
+          </a:prstGeom>
+          <a:noFill/>
+          <a:ln/>
+        </p:spPr>
+        <p:txBody>
+          <a:bodyPr wrap="square" lIns="0" tIns="0" rIns="0" bIns="0" rtlCol="0" anchor="ctr"/>
+          <a:lstStyle/>
+          <a:p>
+            <a:pPr indent="0" marL="0">
+              <a:buNone/>
+            </a:pPr>
+            <a:r>
+              <a:rPr lang="en-US" sz="1450" b="1" dirty="0">
+                <a:solidFill>
+                  <a:srgbClr val="16203A"/>
+                </a:solidFill>
+                <a:latin typeface="Calibri" pitchFamily="34" charset="0"/>
+                <a:ea typeface="Calibri" pitchFamily="34" charset="-122"/>
+                <a:cs typeface="Calibri" pitchFamily="34" charset="-120"/>
+              </a:rPr>
+              <a:t>Who covers what</a:t>
+            </a:r>
+            <a:endParaRPr lang="en-US" sz="1450" dirty="0"/>
+          </a:p>
+        </p:txBody>
+      </p:sp>
+      <p:sp>
+        <p:nvSpPr>
+          <p:cNvPr id="28" name="Text 26"/>
+          <p:cNvSpPr txBox="1"/>
+          <p:nvPr/>
+        </p:nvSpPr>
+        <p:spPr>
+          <a:xfrm>
+            <a:off x="896112" y="4507992"/>
+            <a:ext cx="2194560" cy="960120"/>
+          </a:xfrm>
+          <a:prstGeom prst="rect">
+            <a:avLst/>
+          </a:prstGeom>
+          <a:noFill/>
+          <a:ln/>
+        </p:spPr>
+        <p:txBody>
+          <a:bodyPr wrap="square" lIns="0" tIns="0" rIns="0" bIns="0" rtlCol="0" anchor="ctr"/>
+          <a:lstStyle/>
+          <a:p>
+            <a:pPr marL="342900" indent="-342900">
+              <a:spcAft>
+                <a:spcPts val="400"/>
+              </a:spcAft>
+              <a:buSzPct val="100000"/>
+              <a:buChar char="•"/>
+            </a:pPr>
+            <a:r>
+              <a:rPr lang="en-US" sz="1050" dirty="0">
+                <a:solidFill>
+                  <a:srgbClr val="44506B"/>
+                </a:solidFill>
+                <a:latin typeface="Calibri" pitchFamily="34" charset="0"/>
+                <a:ea typeface="Calibri" pitchFamily="34" charset="-122"/>
+                <a:cs typeface="Calibri" pitchFamily="34" charset="-120"/>
+              </a:rPr>
+              <a:t>Which partner owns which account?</a:t>
+            </a:r>
+            <a:endParaRPr lang="en-US" sz="1050" dirty="0"/>
+          </a:p>
+          <a:p>
+            <a:pPr marL="342900" indent="-342900">
+              <a:spcAft>
+                <a:spcPts val="400"/>
+              </a:spcAft>
+              <a:buSzPct val="100000"/>
+              <a:buChar char="•"/>
+            </a:pPr>
+            <a:r>
+              <a:rPr lang="en-US" sz="1050" dirty="0">
+                <a:solidFill>
+                  <a:srgbClr val="44506B"/>
+                </a:solidFill>
+                <a:latin typeface="Calibri" pitchFamily="34" charset="0"/>
+                <a:ea typeface="Calibri" pitchFamily="34" charset="-122"/>
+                <a:cs typeface="Calibri" pitchFamily="34" charset="-120"/>
+              </a:rPr>
+              <a:t>What coverage model across markets?</a:t>
+            </a:r>
+            <a:endParaRPr lang="en-US" sz="1050" dirty="0"/>
+          </a:p>
+        </p:txBody>
+      </p:sp>
+      <p:sp>
+        <p:nvSpPr>
+          <p:cNvPr id="29" name="Shape 27"/>
+          <p:cNvSpPr/>
+          <p:nvPr/>
+        </p:nvSpPr>
+        <p:spPr>
+          <a:xfrm>
+            <a:off x="3383280" y="3794760"/>
+            <a:ext cx="2606040" cy="1783080"/>
+          </a:xfrm>
+          <a:prstGeom prst="roundRect">
+            <a:avLst>
+              <a:gd name="adj" fmla="val 6154"/>
             </a:avLst>
           </a:prstGeom>
           <a:solidFill>
@@ -3158,14 +4548,14 @@
       </p:sp>
       <p:sp>
         <p:nvSpPr>
-          <p:cNvPr id="20" name="Shape 18"/>
+          <p:cNvPr id="30" name="Shape 28"/>
           <p:cNvSpPr/>
           <p:nvPr/>
         </p:nvSpPr>
         <p:spPr>
           <a:xfrm>
-            <a:off x="7507224" y="2103120"/>
-            <a:ext cx="384048" cy="384048"/>
+            <a:off x="3611880" y="4050792"/>
+            <a:ext cx="365760" cy="365760"/>
           </a:xfrm>
           <a:prstGeom prst="ellipse">
             <a:avLst/>
@@ -3178,14 +4568,14 @@
       </p:sp>
       <p:sp>
         <p:nvSpPr>
-          <p:cNvPr id="21" name="Text 19"/>
-          <p:cNvSpPr txBox="1"/>
-          <p:nvPr/>
-        </p:nvSpPr>
-        <p:spPr>
-          <a:xfrm>
-            <a:off x="7507224" y="2103120"/>
-            <a:ext cx="384048" cy="384048"/>
+          <p:cNvPr id="31" name="Text 29"/>
+          <p:cNvSpPr txBox="1"/>
+          <p:nvPr/>
+        </p:nvSpPr>
+        <p:spPr>
+          <a:xfrm>
+            <a:off x="3611880" y="4050792"/>
+            <a:ext cx="365760" cy="365760"/>
           </a:xfrm>
           <a:prstGeom prst="rect">
             <a:avLst/>
@@ -3209,7 +4599,7 @@
                 <a:ea typeface="Calibri" pitchFamily="34" charset="-122"/>
                 <a:cs typeface="Calibri" pitchFamily="34" charset="-120"/>
               </a:rPr>
-              <a:t>4</a:t>
+              <a:t>6</a:t>
             </a:r>
             <a:endParaRPr lang="en-US" sz="1200" dirty="0"/>
           </a:p>
@@ -3217,14 +4607,14 @@
       </p:sp>
       <p:sp>
         <p:nvSpPr>
-          <p:cNvPr id="22" name="Text 20"/>
-          <p:cNvSpPr txBox="1"/>
-          <p:nvPr/>
-        </p:nvSpPr>
-        <p:spPr>
-          <a:xfrm>
-            <a:off x="7507224" y="2606040"/>
-            <a:ext cx="1645920" cy="548640"/>
+          <p:cNvPr id="32" name="Text 30"/>
+          <p:cNvSpPr txBox="1"/>
+          <p:nvPr/>
+        </p:nvSpPr>
+        <p:spPr>
+          <a:xfrm>
+            <a:off x="4096512" y="4032504"/>
+            <a:ext cx="1783080" cy="365760"/>
           </a:xfrm>
           <a:prstGeom prst="rect">
             <a:avLst/>
@@ -3240,7 +4630,7 @@
               <a:buNone/>
             </a:pPr>
             <a:r>
-              <a:rPr lang="en-US" sz="1600" b="1" dirty="0">
+              <a:rPr lang="en-US" sz="1450" b="1" dirty="0">
                 <a:solidFill>
                   <a:srgbClr val="16203A"/>
                 </a:solidFill>
@@ -3248,22 +4638,22 @@
                 <a:ea typeface="Calibri" pitchFamily="34" charset="-122"/>
                 <a:cs typeface="Calibri" pitchFamily="34" charset="-120"/>
               </a:rPr>
-              <a:t>How much</a:t>
-            </a:r>
-            <a:endParaRPr lang="en-US" sz="1600" dirty="0"/>
-          </a:p>
-        </p:txBody>
-      </p:sp>
-      <p:sp>
-        <p:nvSpPr>
-          <p:cNvPr id="23" name="Text 21"/>
-          <p:cNvSpPr txBox="1"/>
-          <p:nvPr/>
-        </p:nvSpPr>
-        <p:spPr>
-          <a:xfrm>
-            <a:off x="7507224" y="3200400"/>
-            <a:ext cx="1627632" cy="2011680"/>
+              <a:t>Who delivers it</a:t>
+            </a:r>
+            <a:endParaRPr lang="en-US" sz="1450" dirty="0"/>
+          </a:p>
+        </p:txBody>
+      </p:sp>
+      <p:sp>
+        <p:nvSpPr>
+          <p:cNvPr id="33" name="Text 31"/>
+          <p:cNvSpPr txBox="1"/>
+          <p:nvPr/>
+        </p:nvSpPr>
+        <p:spPr>
+          <a:xfrm>
+            <a:off x="3639312" y="4507992"/>
+            <a:ext cx="2194560" cy="960120"/>
           </a:xfrm>
           <a:prstGeom prst="rect">
             <a:avLst/>
@@ -3277,13 +4667,13 @@
           <a:p>
             <a:pPr marL="342900" indent="-342900">
               <a:spcAft>
-                <a:spcPts val="700"/>
+                <a:spcPts val="400"/>
               </a:spcAft>
               <a:buSzPct val="100000"/>
               <a:buChar char="•"/>
             </a:pPr>
             <a:r>
-              <a:rPr lang="en-US" sz="1150" dirty="0">
+              <a:rPr lang="en-US" sz="1050" dirty="0">
                 <a:solidFill>
                   <a:srgbClr val="44506B"/>
                 </a:solidFill>
@@ -3291,20 +4681,20 @@
                 <a:ea typeface="Calibri" pitchFamily="34" charset="-122"/>
                 <a:cs typeface="Calibri" pitchFamily="34" charset="-120"/>
               </a:rPr>
-              <a:t>What revenue by market and by offering?</a:t>
-            </a:r>
-            <a:endParaRPr lang="en-US" sz="1150" dirty="0"/>
+              <a:t>Who is dedicated to FSI?</a:t>
+            </a:r>
+            <a:endParaRPr lang="en-US" sz="1050" dirty="0"/>
           </a:p>
           <a:p>
             <a:pPr marL="342900" indent="-342900">
               <a:spcAft>
-                <a:spcPts val="700"/>
+                <a:spcPts val="400"/>
               </a:spcAft>
               <a:buSzPct val="100000"/>
               <a:buChar char="•"/>
             </a:pPr>
             <a:r>
-              <a:rPr lang="en-US" sz="1150" dirty="0">
+              <a:rPr lang="en-US" sz="1050" dirty="0">
                 <a:solidFill>
                   <a:srgbClr val="44506B"/>
                 </a:solidFill>
@@ -3312,26 +4702,47 @@
                 <a:ea typeface="Calibri" pitchFamily="34" charset="-122"/>
                 <a:cs typeface="Calibri" pitchFamily="34" charset="-120"/>
               </a:rPr>
-              <a:t>What deal sizes and price bands does the market pay?</a:t>
-            </a:r>
-            <a:endParaRPr lang="en-US" sz="1150" dirty="0"/>
-          </a:p>
-        </p:txBody>
-      </p:sp>
-      <p:sp>
-        <p:nvSpPr>
-          <p:cNvPr id="24" name="Shape 22"/>
+              <a:t>What shared capacity can we draw on?</a:t>
+            </a:r>
+            <a:endParaRPr lang="en-US" sz="1050" dirty="0"/>
+          </a:p>
+          <a:p>
+            <a:pPr marL="342900" indent="-342900">
+              <a:spcAft>
+                <a:spcPts val="400"/>
+              </a:spcAft>
+              <a:buSzPct val="100000"/>
+              <a:buChar char="•"/>
+            </a:pPr>
+            <a:r>
+              <a:rPr lang="en-US" sz="1050" dirty="0">
+                <a:solidFill>
+                  <a:srgbClr val="44506B"/>
+                </a:solidFill>
+                <a:latin typeface="Calibri" pitchFamily="34" charset="0"/>
+                <a:ea typeface="Calibri" pitchFamily="34" charset="-122"/>
+                <a:cs typeface="Calibri" pitchFamily="34" charset="-120"/>
+              </a:rPr>
+              <a:t>What must we recruit?</a:t>
+            </a:r>
+            <a:endParaRPr lang="en-US" sz="1050" dirty="0"/>
+          </a:p>
+        </p:txBody>
+      </p:sp>
+      <p:sp>
+        <p:nvSpPr>
+          <p:cNvPr id="34" name="Shape 32"/>
           <p:cNvSpPr/>
           <p:nvPr/>
         </p:nvSpPr>
         <p:spPr>
           <a:xfrm>
-            <a:off x="9491472" y="1874520"/>
-            <a:ext cx="2029968" cy="3520440"/>
+            <a:off x="6126480" y="3794760"/>
+            <a:ext cx="2606040" cy="1783080"/>
           </a:xfrm>
           <a:prstGeom prst="roundRect">
             <a:avLst>
-              <a:gd name="adj" fmla="val 5405"/>
+              <a:gd name="adj" fmla="val 6154"/>
             </a:avLst>
           </a:prstGeom>
           <a:solidFill>
@@ -3342,14 +4753,14 @@
       </p:sp>
       <p:sp>
         <p:nvSpPr>
-          <p:cNvPr id="25" name="Shape 23"/>
+          <p:cNvPr id="35" name="Shape 33"/>
           <p:cNvSpPr/>
           <p:nvPr/>
         </p:nvSpPr>
         <p:spPr>
           <a:xfrm>
-            <a:off x="9720072" y="2103120"/>
-            <a:ext cx="384048" cy="384048"/>
+            <a:off x="6355080" y="4050792"/>
+            <a:ext cx="365760" cy="365760"/>
           </a:xfrm>
           <a:prstGeom prst="ellipse">
             <a:avLst/>
@@ -3362,14 +4773,14 @@
       </p:sp>
       <p:sp>
         <p:nvSpPr>
-          <p:cNvPr id="26" name="Text 24"/>
-          <p:cNvSpPr txBox="1"/>
-          <p:nvPr/>
-        </p:nvSpPr>
-        <p:spPr>
-          <a:xfrm>
-            <a:off x="9720072" y="2103120"/>
-            <a:ext cx="384048" cy="384048"/>
+          <p:cNvPr id="36" name="Text 34"/>
+          <p:cNvSpPr txBox="1"/>
+          <p:nvPr/>
+        </p:nvSpPr>
+        <p:spPr>
+          <a:xfrm>
+            <a:off x="6355080" y="4050792"/>
+            <a:ext cx="365760" cy="365760"/>
           </a:xfrm>
           <a:prstGeom prst="rect">
             <a:avLst/>
@@ -3393,7 +4804,7 @@
                 <a:ea typeface="Calibri" pitchFamily="34" charset="-122"/>
                 <a:cs typeface="Calibri" pitchFamily="34" charset="-120"/>
               </a:rPr>
-              <a:t>5</a:t>
+              <a:t>7</a:t>
             </a:r>
             <a:endParaRPr lang="en-US" sz="1200" dirty="0"/>
           </a:p>
@@ -3401,14 +4812,14 @@
       </p:sp>
       <p:sp>
         <p:nvSpPr>
-          <p:cNvPr id="27" name="Text 25"/>
-          <p:cNvSpPr txBox="1"/>
-          <p:nvPr/>
-        </p:nvSpPr>
-        <p:spPr>
-          <a:xfrm>
-            <a:off x="9720072" y="2606040"/>
-            <a:ext cx="1645920" cy="548640"/>
+          <p:cNvPr id="37" name="Text 35"/>
+          <p:cNvSpPr txBox="1"/>
+          <p:nvPr/>
+        </p:nvSpPr>
+        <p:spPr>
+          <a:xfrm>
+            <a:off x="6839712" y="4032504"/>
+            <a:ext cx="1783080" cy="365760"/>
           </a:xfrm>
           <a:prstGeom prst="rect">
             <a:avLst/>
@@ -3424,7 +4835,7 @@
               <a:buNone/>
             </a:pPr>
             <a:r>
-              <a:rPr lang="en-US" sz="1600" b="1" dirty="0">
+              <a:rPr lang="en-US" sz="1450" b="1" dirty="0">
                 <a:solidFill>
                   <a:srgbClr val="16203A"/>
                 </a:solidFill>
@@ -3432,22 +4843,22 @@
                 <a:ea typeface="Calibri" pitchFamily="34" charset="-122"/>
                 <a:cs typeface="Calibri" pitchFamily="34" charset="-120"/>
               </a:rPr>
-              <a:t>Who covers what</a:t>
-            </a:r>
-            <a:endParaRPr lang="en-US" sz="1600" dirty="0"/>
-          </a:p>
-        </p:txBody>
-      </p:sp>
-      <p:sp>
-        <p:nvSpPr>
-          <p:cNvPr id="28" name="Text 26"/>
-          <p:cNvSpPr txBox="1"/>
-          <p:nvPr/>
-        </p:nvSpPr>
-        <p:spPr>
-          <a:xfrm>
-            <a:off x="9720072" y="3200400"/>
-            <a:ext cx="1627632" cy="2011680"/>
+              <a:t>How we are known</a:t>
+            </a:r>
+            <a:endParaRPr lang="en-US" sz="1450" dirty="0"/>
+          </a:p>
+        </p:txBody>
+      </p:sp>
+      <p:sp>
+        <p:nvSpPr>
+          <p:cNvPr id="38" name="Text 36"/>
+          <p:cNvSpPr txBox="1"/>
+          <p:nvPr/>
+        </p:nvSpPr>
+        <p:spPr>
+          <a:xfrm>
+            <a:off x="6382512" y="4507992"/>
+            <a:ext cx="2194560" cy="960120"/>
           </a:xfrm>
           <a:prstGeom prst="rect">
             <a:avLst/>
@@ -3461,13 +4872,13 @@
           <a:p>
             <a:pPr marL="342900" indent="-342900">
               <a:spcAft>
-                <a:spcPts val="700"/>
+                <a:spcPts val="400"/>
               </a:spcAft>
               <a:buSzPct val="100000"/>
               <a:buChar char="•"/>
             </a:pPr>
             <a:r>
-              <a:rPr lang="en-US" sz="1150" dirty="0">
+              <a:rPr lang="en-US" sz="1050" dirty="0">
                 <a:solidFill>
                   <a:srgbClr val="44506B"/>
                 </a:solidFill>
@@ -3475,20 +4886,20 @@
                 <a:ea typeface="Calibri" pitchFamily="34" charset="-122"/>
                 <a:cs typeface="Calibri" pitchFamily="34" charset="-120"/>
               </a:rPr>
-              <a:t>Which partner owns which account?</a:t>
-            </a:r>
-            <a:endParaRPr lang="en-US" sz="1150" dirty="0"/>
+              <a:t>Where must we be visible?</a:t>
+            </a:r>
+            <a:endParaRPr lang="en-US" sz="1050" dirty="0"/>
           </a:p>
           <a:p>
             <a:pPr marL="342900" indent="-342900">
               <a:spcAft>
-                <a:spcPts val="700"/>
+                <a:spcPts val="400"/>
               </a:spcAft>
               <a:buSzPct val="100000"/>
               <a:buChar char="•"/>
             </a:pPr>
             <a:r>
-              <a:rPr lang="en-US" sz="1150" dirty="0">
+              <a:rPr lang="en-US" sz="1050" dirty="0">
                 <a:solidFill>
                   <a:srgbClr val="44506B"/>
                 </a:solidFill>
@@ -3496,20 +4907,20 @@
                 <a:ea typeface="Calibri" pitchFamily="34" charset="-122"/>
                 <a:cs typeface="Calibri" pitchFamily="34" charset="-120"/>
               </a:rPr>
-              <a:t>What coverage model across markets?</a:t>
-            </a:r>
-            <a:endParaRPr lang="en-US" sz="1150" dirty="0"/>
+              <a:t>What do we publish, host or speak at?</a:t>
+            </a:r>
+            <a:endParaRPr lang="en-US" sz="1050" dirty="0"/>
           </a:p>
           <a:p>
             <a:pPr marL="342900" indent="-342900">
               <a:spcAft>
-                <a:spcPts val="700"/>
+                <a:spcPts val="400"/>
               </a:spcAft>
               <a:buSzPct val="100000"/>
               <a:buChar char="•"/>
             </a:pPr>
             <a:r>
-              <a:rPr lang="en-US" sz="1150" dirty="0">
+              <a:rPr lang="en-US" sz="1050" dirty="0">
                 <a:solidFill>
                   <a:srgbClr val="44506B"/>
                 </a:solidFill>
@@ -3517,21 +4928,21 @@
                 <a:ea typeface="Calibri" pitchFamily="34" charset="-122"/>
                 <a:cs typeface="Calibri" pitchFamily="34" charset="-120"/>
               </a:rPr>
-              <a:t>What capacity is required?</a:t>
-            </a:r>
-            <a:endParaRPr lang="en-US" sz="1150" dirty="0"/>
-          </a:p>
-        </p:txBody>
-      </p:sp>
-      <p:sp>
-        <p:nvSpPr>
-          <p:cNvPr id="29" name="Shape 27"/>
+              <a:t>How do we measure it?</a:t>
+            </a:r>
+            <a:endParaRPr lang="en-US" sz="1050" dirty="0"/>
+          </a:p>
+        </p:txBody>
+      </p:sp>
+      <p:sp>
+        <p:nvSpPr>
+          <p:cNvPr id="39" name="Shape 37"/>
           <p:cNvSpPr/>
           <p:nvPr/>
         </p:nvSpPr>
         <p:spPr>
           <a:xfrm>
-            <a:off x="4251960" y="5623560"/>
+            <a:off x="4251960" y="6035040"/>
             <a:ext cx="3657600" cy="301752"/>
           </a:xfrm>
           <a:prstGeom prst="roundRect">
@@ -3552,13 +4963,13 @@
       </p:sp>
       <p:sp>
         <p:nvSpPr>
-          <p:cNvPr id="30" name="Text 28"/>
-          <p:cNvSpPr txBox="1"/>
-          <p:nvPr/>
-        </p:nvSpPr>
-        <p:spPr>
-          <a:xfrm>
-            <a:off x="4251960" y="5623560"/>
+          <p:cNvPr id="40" name="Text 38"/>
+          <p:cNvSpPr txBox="1"/>
+          <p:nvPr/>
+        </p:nvSpPr>
+        <p:spPr>
+          <a:xfrm>
+            <a:off x="4251960" y="6035040"/>
             <a:ext cx="3657600" cy="301752"/>
           </a:xfrm>
           <a:prstGeom prst="rect">
@@ -5019,7 +6430,7 @@
                 <a:ea typeface="Calibri" pitchFamily="34" charset="-122"/>
                 <a:cs typeface="Calibri" pitchFamily="34" charset="-120"/>
               </a:rPr>
-              <a:t>Where we stand today: credentials, pipeline, capability</a:t>
+              <a:t>Credentials, pipeline and current wins</a:t>
             </a:r>
             <a:endParaRPr lang="en-US" sz="1200" dirty="0"/>
           </a:p>
@@ -5040,7 +6451,7 @@
                 <a:ea typeface="Calibri" pitchFamily="34" charset="-122"/>
                 <a:cs typeface="Calibri" pitchFamily="34" charset="-120"/>
               </a:rPr>
-              <a:t>What we have already won, and where</a:t>
+              <a:t>Who we have today: dedicated and shared</a:t>
             </a:r>
             <a:endParaRPr lang="en-US" sz="1200" dirty="0"/>
           </a:p>
@@ -5482,7 +6893,7 @@
                 <a:ea typeface="Calibri" pitchFamily="34" charset="-122"/>
                 <a:cs typeface="Calibri" pitchFamily="34" charset="-120"/>
               </a:rPr>
-              <a:t>Revenue targets by market and offering</a:t>
+              <a:t>Revenue targets and the capacity to service them</a:t>
             </a:r>
             <a:endParaRPr lang="en-US" sz="1200" dirty="0"/>
           </a:p>
@@ -5703,7 +7114,7 @@
                 <a:ea typeface="Calibri" pitchFamily="34" charset="-122"/>
                 <a:cs typeface="Calibri" pitchFamily="34" charset="-120"/>
               </a:rPr>
-              <a:t>Activation plan and sign-off</a:t>
+              <a:t>Team, eminence and activation plans signed off</a:t>
             </a:r>
             <a:endParaRPr lang="en-US" sz="1200" dirty="0"/>
           </a:p>
@@ -5852,7 +7263,7 @@
                 <a:ea typeface="Cambria" pitchFamily="34" charset="-122"/>
                 <a:cs typeface="Cambria" pitchFamily="34" charset="-120"/>
               </a:rPr>
-              <a:t>Five workstreams, five artefacts</a:t>
+              <a:t>Seven workstreams, seven artefacts</a:t>
             </a:r>
             <a:endParaRPr lang="en-US" sz="3600" dirty="0"/>
           </a:p>
@@ -5912,7 +7323,7 @@
           </p:nvPr>
         </p:nvGraphicFramePr>
         <p:xfrm>
-          <a:off x="640080" y="1920240"/>
+          <a:off x="640080" y="1828800"/>
           <a:ext cx="10881360" cy="914400"/>
         </p:xfrm>
         <a:graphic>
@@ -5924,7 +7335,7 @@
                 <a:gridCol w="2377440"/>
                 <a:gridCol w="5486400"/>
               </a:tblGrid>
-              <a:tr h="457200">
+              <a:tr h="438912">
                 <a:tc>
                   <a:txBody>
                     <a:bodyPr/>
@@ -5934,7 +7345,7 @@
                         <a:buNone/>
                       </a:pPr>
                       <a:r>
-                        <a:rPr lang="en-US" sz="1300" b="1" dirty="0">
+                        <a:rPr lang="en-US" sz="1200" b="1" dirty="0">
                           <a:solidFill>
                             <a:srgbClr val="44506B"/>
                           </a:solidFill>
@@ -5944,14 +7355,14 @@
                         </a:rPr>
                         <a:t>Workstream</a:t>
                       </a:r>
-                      <a:endParaRPr lang="en-US" sz="1300" dirty="0">
+                      <a:endParaRPr lang="en-US" sz="1200" dirty="0">
                         <a:latin typeface="Calibri" charset="0"/>
                         <a:ea typeface="Calibri" charset="0"/>
                         <a:cs typeface="Calibri" charset="0"/>
                       </a:endParaRPr>
                     </a:p>
                   </a:txBody>
-                  <a:tcPr marL="127000" marR="127000" marT="127000" marB="127000" anchor="ctr">
+                  <a:tcPr marL="88900" marR="88900" marT="88900" marB="88900" anchor="ctr">
                     <a:lnL w="12700" cap="flat" cmpd="sng" algn="ctr">
                       <a:solidFill>
                         <a:srgbClr val="D8E0EE"/>
@@ -6002,7 +7413,7 @@
                         <a:buNone/>
                       </a:pPr>
                       <a:r>
-                        <a:rPr lang="en-US" sz="1300" b="1" dirty="0">
+                        <a:rPr lang="en-US" sz="1200" b="1" dirty="0">
                           <a:solidFill>
                             <a:srgbClr val="44506B"/>
                           </a:solidFill>
@@ -6012,14 +7423,14 @@
                         </a:rPr>
                         <a:t>Question it closes</a:t>
                       </a:r>
-                      <a:endParaRPr lang="en-US" sz="1300" dirty="0">
+                      <a:endParaRPr lang="en-US" sz="1200" dirty="0">
                         <a:latin typeface="Calibri" charset="0"/>
                         <a:ea typeface="Calibri" charset="0"/>
                         <a:cs typeface="Calibri" charset="0"/>
                       </a:endParaRPr>
                     </a:p>
                   </a:txBody>
-                  <a:tcPr marL="127000" marR="127000" marT="127000" marB="127000" anchor="ctr">
+                  <a:tcPr marL="88900" marR="88900" marT="88900" marB="88900" anchor="ctr">
                     <a:lnL w="12700" cap="flat" cmpd="sng" algn="ctr">
                       <a:solidFill>
                         <a:srgbClr val="D8E0EE"/>
@@ -6070,7 +7481,7 @@
                         <a:buNone/>
                       </a:pPr>
                       <a:r>
-                        <a:rPr lang="en-US" sz="1300" b="1" dirty="0">
+                        <a:rPr lang="en-US" sz="1200" b="1" dirty="0">
                           <a:solidFill>
                             <a:srgbClr val="44506B"/>
                           </a:solidFill>
@@ -6080,14 +7491,14 @@
                         </a:rPr>
                         <a:t>Artefact produced</a:t>
                       </a:r>
-                      <a:endParaRPr lang="en-US" sz="1300" dirty="0">
+                      <a:endParaRPr lang="en-US" sz="1200" dirty="0">
                         <a:latin typeface="Calibri" charset="0"/>
                         <a:ea typeface="Calibri" charset="0"/>
                         <a:cs typeface="Calibri" charset="0"/>
                       </a:endParaRPr>
                     </a:p>
                   </a:txBody>
-                  <a:tcPr marL="127000" marR="127000" marT="127000" marB="127000" anchor="ctr">
+                  <a:tcPr marL="88900" marR="88900" marT="88900" marB="88900" anchor="ctr">
                     <a:lnL w="12700" cap="flat" cmpd="sng" algn="ctr">
                       <a:solidFill>
                         <a:srgbClr val="D8E0EE"/>
@@ -6130,7 +7541,7 @@
                   </a:tcPr>
                 </a:tc>
               </a:tr>
-              <a:tr h="658368">
+              <a:tr h="512064">
                 <a:tc>
                   <a:txBody>
                     <a:bodyPr/>
@@ -6140,7 +7551,7 @@
                         <a:buNone/>
                       </a:pPr>
                       <a:r>
-                        <a:rPr lang="en-US" sz="1300" dirty="0">
+                        <a:rPr lang="en-US" sz="1200" dirty="0">
                           <a:solidFill>
                             <a:srgbClr val="44506B"/>
                           </a:solidFill>
@@ -6150,14 +7561,14 @@
                         </a:rPr>
                         <a:t>1 · Proposition &amp; catalogue</a:t>
                       </a:r>
-                      <a:endParaRPr lang="en-US" sz="1300" dirty="0">
+                      <a:endParaRPr lang="en-US" sz="1200" dirty="0">
                         <a:latin typeface="Calibri" charset="0"/>
                         <a:ea typeface="Calibri" charset="0"/>
                         <a:cs typeface="Calibri" charset="0"/>
                       </a:endParaRPr>
                     </a:p>
                   </a:txBody>
-                  <a:tcPr marL="127000" marR="127000" marT="127000" marB="127000" anchor="ctr">
+                  <a:tcPr marL="88900" marR="88900" marT="88900" marB="88900" anchor="ctr">
                     <a:lnL w="12700" cap="flat" cmpd="sng" algn="ctr">
                       <a:solidFill>
                         <a:srgbClr val="D8E0EE"/>
@@ -6208,7 +7619,7 @@
                         <a:buNone/>
                       </a:pPr>
                       <a:r>
-                        <a:rPr lang="en-US" sz="1300" dirty="0">
+                        <a:rPr lang="en-US" sz="1200" dirty="0">
                           <a:solidFill>
                             <a:srgbClr val="44506B"/>
                           </a:solidFill>
@@ -6218,14 +7629,14 @@
                         </a:rPr>
                         <a:t>What we offer</a:t>
                       </a:r>
-                      <a:endParaRPr lang="en-US" sz="1300" dirty="0">
+                      <a:endParaRPr lang="en-US" sz="1200" dirty="0">
                         <a:latin typeface="Calibri" charset="0"/>
                         <a:ea typeface="Calibri" charset="0"/>
                         <a:cs typeface="Calibri" charset="0"/>
                       </a:endParaRPr>
                     </a:p>
                   </a:txBody>
-                  <a:tcPr marL="127000" marR="127000" marT="127000" marB="127000" anchor="ctr">
+                  <a:tcPr marL="88900" marR="88900" marT="88900" marB="88900" anchor="ctr">
                     <a:lnL w="12700" cap="flat" cmpd="sng" algn="ctr">
                       <a:solidFill>
                         <a:srgbClr val="D8E0EE"/>
@@ -6276,7 +7687,7 @@
                         <a:buNone/>
                       </a:pPr>
                       <a:r>
-                        <a:rPr lang="en-US" sz="1300" dirty="0">
+                        <a:rPr lang="en-US" sz="1200" dirty="0">
                           <a:solidFill>
                             <a:srgbClr val="44506B"/>
                           </a:solidFill>
@@ -6286,14 +7697,14 @@
                         </a:rPr>
                         <a:t>Integrated proposition catalogue with permitted variants</a:t>
                       </a:r>
-                      <a:endParaRPr lang="en-US" sz="1300" dirty="0">
+                      <a:endParaRPr lang="en-US" sz="1200" dirty="0">
                         <a:latin typeface="Calibri" charset="0"/>
                         <a:ea typeface="Calibri" charset="0"/>
                         <a:cs typeface="Calibri" charset="0"/>
                       </a:endParaRPr>
                     </a:p>
                   </a:txBody>
-                  <a:tcPr marL="127000" marR="127000" marT="127000" marB="127000" anchor="ctr">
+                  <a:tcPr marL="88900" marR="88900" marT="88900" marB="88900" anchor="ctr">
                     <a:lnL w="12700" cap="flat" cmpd="sng" algn="ctr">
                       <a:solidFill>
                         <a:srgbClr val="D8E0EE"/>
@@ -6336,7 +7747,7 @@
                   </a:tcPr>
                 </a:tc>
               </a:tr>
-              <a:tr h="658368">
+              <a:tr h="512064">
                 <a:tc>
                   <a:txBody>
                     <a:bodyPr/>
@@ -6346,7 +7757,7 @@
                         <a:buNone/>
                       </a:pPr>
                       <a:r>
-                        <a:rPr lang="en-US" sz="1300" dirty="0">
+                        <a:rPr lang="en-US" sz="1200" dirty="0">
                           <a:solidFill>
                             <a:srgbClr val="44506B"/>
                           </a:solidFill>
@@ -6356,14 +7767,14 @@
                         </a:rPr>
                         <a:t>2 · Market &amp; account targeting</a:t>
                       </a:r>
-                      <a:endParaRPr lang="en-US" sz="1300" dirty="0">
+                      <a:endParaRPr lang="en-US" sz="1200" dirty="0">
                         <a:latin typeface="Calibri" charset="0"/>
                         <a:ea typeface="Calibri" charset="0"/>
                         <a:cs typeface="Calibri" charset="0"/>
                       </a:endParaRPr>
                     </a:p>
                   </a:txBody>
-                  <a:tcPr marL="127000" marR="127000" marT="127000" marB="127000" anchor="ctr">
+                  <a:tcPr marL="88900" marR="88900" marT="88900" marB="88900" anchor="ctr">
                     <a:lnL w="12700" cap="flat" cmpd="sng" algn="ctr">
                       <a:solidFill>
                         <a:srgbClr val="D8E0EE"/>
@@ -6414,7 +7825,7 @@
                         <a:buNone/>
                       </a:pPr>
                       <a:r>
-                        <a:rPr lang="en-US" sz="1300" dirty="0">
+                        <a:rPr lang="en-US" sz="1200" dirty="0">
                           <a:solidFill>
                             <a:srgbClr val="44506B"/>
                           </a:solidFill>
@@ -6424,14 +7835,14 @@
                         </a:rPr>
                         <a:t>Where to play</a:t>
                       </a:r>
-                      <a:endParaRPr lang="en-US" sz="1300" dirty="0">
+                      <a:endParaRPr lang="en-US" sz="1200" dirty="0">
                         <a:latin typeface="Calibri" charset="0"/>
                         <a:ea typeface="Calibri" charset="0"/>
                         <a:cs typeface="Calibri" charset="0"/>
                       </a:endParaRPr>
                     </a:p>
                   </a:txBody>
-                  <a:tcPr marL="127000" marR="127000" marT="127000" marB="127000" anchor="ctr">
+                  <a:tcPr marL="88900" marR="88900" marT="88900" marB="88900" anchor="ctr">
                     <a:lnL w="12700" cap="flat" cmpd="sng" algn="ctr">
                       <a:solidFill>
                         <a:srgbClr val="D8E0EE"/>
@@ -6482,7 +7893,7 @@
                         <a:buNone/>
                       </a:pPr>
                       <a:r>
-                        <a:rPr lang="en-US" sz="1300" dirty="0">
+                        <a:rPr lang="en-US" sz="1200" dirty="0">
                           <a:solidFill>
                             <a:srgbClr val="44506B"/>
                           </a:solidFill>
@@ -6492,14 +7903,14 @@
                         </a:rPr>
                         <a:t>Prioritised markets, segments and named account list</a:t>
                       </a:r>
-                      <a:endParaRPr lang="en-US" sz="1300" dirty="0">
+                      <a:endParaRPr lang="en-US" sz="1200" dirty="0">
                         <a:latin typeface="Calibri" charset="0"/>
                         <a:ea typeface="Calibri" charset="0"/>
                         <a:cs typeface="Calibri" charset="0"/>
                       </a:endParaRPr>
                     </a:p>
                   </a:txBody>
-                  <a:tcPr marL="127000" marR="127000" marT="127000" marB="127000" anchor="ctr">
+                  <a:tcPr marL="88900" marR="88900" marT="88900" marB="88900" anchor="ctr">
                     <a:lnL w="12700" cap="flat" cmpd="sng" algn="ctr">
                       <a:solidFill>
                         <a:srgbClr val="D8E0EE"/>
@@ -6542,7 +7953,7 @@
                   </a:tcPr>
                 </a:tc>
               </a:tr>
-              <a:tr h="658368">
+              <a:tr h="512064">
                 <a:tc>
                   <a:txBody>
                     <a:bodyPr/>
@@ -6552,7 +7963,7 @@
                         <a:buNone/>
                       </a:pPr>
                       <a:r>
-                        <a:rPr lang="en-US" sz="1300" dirty="0">
+                        <a:rPr lang="en-US" sz="1200" dirty="0">
                           <a:solidFill>
                             <a:srgbClr val="44506B"/>
                           </a:solidFill>
@@ -6562,14 +7973,14 @@
                         </a:rPr>
                         <a:t>3 · Commercial sizing &amp; pricing</a:t>
                       </a:r>
-                      <a:endParaRPr lang="en-US" sz="1300" dirty="0">
+                      <a:endParaRPr lang="en-US" sz="1200" dirty="0">
                         <a:latin typeface="Calibri" charset="0"/>
                         <a:ea typeface="Calibri" charset="0"/>
                         <a:cs typeface="Calibri" charset="0"/>
                       </a:endParaRPr>
                     </a:p>
                   </a:txBody>
-                  <a:tcPr marL="127000" marR="127000" marT="127000" marB="127000" anchor="ctr">
+                  <a:tcPr marL="88900" marR="88900" marT="88900" marB="88900" anchor="ctr">
                     <a:lnL w="12700" cap="flat" cmpd="sng" algn="ctr">
                       <a:solidFill>
                         <a:srgbClr val="D8E0EE"/>
@@ -6620,7 +8031,7 @@
                         <a:buNone/>
                       </a:pPr>
                       <a:r>
-                        <a:rPr lang="en-US" sz="1300" dirty="0">
+                        <a:rPr lang="en-US" sz="1200" dirty="0">
                           <a:solidFill>
                             <a:srgbClr val="44506B"/>
                           </a:solidFill>
@@ -6630,14 +8041,14 @@
                         </a:rPr>
                         <a:t>How much</a:t>
                       </a:r>
-                      <a:endParaRPr lang="en-US" sz="1300" dirty="0">
+                      <a:endParaRPr lang="en-US" sz="1200" dirty="0">
                         <a:latin typeface="Calibri" charset="0"/>
                         <a:ea typeface="Calibri" charset="0"/>
                         <a:cs typeface="Calibri" charset="0"/>
                       </a:endParaRPr>
                     </a:p>
                   </a:txBody>
-                  <a:tcPr marL="127000" marR="127000" marT="127000" marB="127000" anchor="ctr">
+                  <a:tcPr marL="88900" marR="88900" marT="88900" marB="88900" anchor="ctr">
                     <a:lnL w="12700" cap="flat" cmpd="sng" algn="ctr">
                       <a:solidFill>
                         <a:srgbClr val="D8E0EE"/>
@@ -6688,7 +8099,7 @@
                         <a:buNone/>
                       </a:pPr>
                       <a:r>
-                        <a:rPr lang="en-US" sz="1300" dirty="0">
+                        <a:rPr lang="en-US" sz="1200" dirty="0">
                           <a:solidFill>
                             <a:srgbClr val="44506B"/>
                           </a:solidFill>
@@ -6698,14 +8109,14 @@
                         </a:rPr>
                         <a:t>Deal-size bands, price benchmarks, revenue targets</a:t>
                       </a:r>
-                      <a:endParaRPr lang="en-US" sz="1300" dirty="0">
+                      <a:endParaRPr lang="en-US" sz="1200" dirty="0">
                         <a:latin typeface="Calibri" charset="0"/>
                         <a:ea typeface="Calibri" charset="0"/>
                         <a:cs typeface="Calibri" charset="0"/>
                       </a:endParaRPr>
                     </a:p>
                   </a:txBody>
-                  <a:tcPr marL="127000" marR="127000" marT="127000" marB="127000" anchor="ctr">
+                  <a:tcPr marL="88900" marR="88900" marT="88900" marB="88900" anchor="ctr">
                     <a:lnL w="12700" cap="flat" cmpd="sng" algn="ctr">
                       <a:solidFill>
                         <a:srgbClr val="D8E0EE"/>
@@ -6748,7 +8159,7 @@
                   </a:tcPr>
                 </a:tc>
               </a:tr>
-              <a:tr h="658368">
+              <a:tr h="512064">
                 <a:tc>
                   <a:txBody>
                     <a:bodyPr/>
@@ -6758,7 +8169,7 @@
                         <a:buNone/>
                       </a:pPr>
                       <a:r>
-                        <a:rPr lang="en-US" sz="1300" dirty="0">
+                        <a:rPr lang="en-US" sz="1200" dirty="0">
                           <a:solidFill>
                             <a:srgbClr val="44506B"/>
                           </a:solidFill>
@@ -6768,14 +8179,14 @@
                         </a:rPr>
                         <a:t>4 · Coverage &amp; ownership</a:t>
                       </a:r>
-                      <a:endParaRPr lang="en-US" sz="1300" dirty="0">
+                      <a:endParaRPr lang="en-US" sz="1200" dirty="0">
                         <a:latin typeface="Calibri" charset="0"/>
                         <a:ea typeface="Calibri" charset="0"/>
                         <a:cs typeface="Calibri" charset="0"/>
                       </a:endParaRPr>
                     </a:p>
                   </a:txBody>
-                  <a:tcPr marL="127000" marR="127000" marT="127000" marB="127000" anchor="ctr">
+                  <a:tcPr marL="88900" marR="88900" marT="88900" marB="88900" anchor="ctr">
                     <a:lnL w="12700" cap="flat" cmpd="sng" algn="ctr">
                       <a:solidFill>
                         <a:srgbClr val="D8E0EE"/>
@@ -6826,7 +8237,7 @@
                         <a:buNone/>
                       </a:pPr>
                       <a:r>
-                        <a:rPr lang="en-US" sz="1300" dirty="0">
+                        <a:rPr lang="en-US" sz="1200" dirty="0">
                           <a:solidFill>
                             <a:srgbClr val="44506B"/>
                           </a:solidFill>
@@ -6836,14 +8247,14 @@
                         </a:rPr>
                         <a:t>Who covers what</a:t>
                       </a:r>
-                      <a:endParaRPr lang="en-US" sz="1300" dirty="0">
+                      <a:endParaRPr lang="en-US" sz="1200" dirty="0">
                         <a:latin typeface="Calibri" charset="0"/>
                         <a:ea typeface="Calibri" charset="0"/>
                         <a:cs typeface="Calibri" charset="0"/>
                       </a:endParaRPr>
                     </a:p>
                   </a:txBody>
-                  <a:tcPr marL="127000" marR="127000" marT="127000" marB="127000" anchor="ctr">
+                  <a:tcPr marL="88900" marR="88900" marT="88900" marB="88900" anchor="ctr">
                     <a:lnL w="12700" cap="flat" cmpd="sng" algn="ctr">
                       <a:solidFill>
                         <a:srgbClr val="D8E0EE"/>
@@ -6894,7 +8305,7 @@
                         <a:buNone/>
                       </a:pPr>
                       <a:r>
-                        <a:rPr lang="en-US" sz="1300" dirty="0">
+                        <a:rPr lang="en-US" sz="1200" dirty="0">
                           <a:solidFill>
                             <a:srgbClr val="44506B"/>
                           </a:solidFill>
@@ -6904,14 +8315,14 @@
                         </a:rPr>
                         <a:t>Account-to-partner map and coverage model</a:t>
                       </a:r>
-                      <a:endParaRPr lang="en-US" sz="1300" dirty="0">
+                      <a:endParaRPr lang="en-US" sz="1200" dirty="0">
                         <a:latin typeface="Calibri" charset="0"/>
                         <a:ea typeface="Calibri" charset="0"/>
                         <a:cs typeface="Calibri" charset="0"/>
                       </a:endParaRPr>
                     </a:p>
                   </a:txBody>
-                  <a:tcPr marL="127000" marR="127000" marT="127000" marB="127000" anchor="ctr">
+                  <a:tcPr marL="88900" marR="88900" marT="88900" marB="88900" anchor="ctr">
                     <a:lnL w="12700" cap="flat" cmpd="sng" algn="ctr">
                       <a:solidFill>
                         <a:srgbClr val="D8E0EE"/>
@@ -6954,7 +8365,7 @@
                   </a:tcPr>
                 </a:tc>
               </a:tr>
-              <a:tr h="658368">
+              <a:tr h="512064">
                 <a:tc>
                   <a:txBody>
                     <a:bodyPr/>
@@ -6964,7 +8375,7 @@
                         <a:buNone/>
                       </a:pPr>
                       <a:r>
-                        <a:rPr lang="en-US" sz="1300" dirty="0">
+                        <a:rPr lang="en-US" sz="1200" dirty="0">
                           <a:solidFill>
                             <a:srgbClr val="44506B"/>
                           </a:solidFill>
@@ -6974,14 +8385,14 @@
                         </a:rPr>
                         <a:t>5 · Delivery model &amp; readiness</a:t>
                       </a:r>
-                      <a:endParaRPr lang="en-US" sz="1300" dirty="0">
+                      <a:endParaRPr lang="en-US" sz="1200" dirty="0">
                         <a:latin typeface="Calibri" charset="0"/>
                         <a:ea typeface="Calibri" charset="0"/>
                         <a:cs typeface="Calibri" charset="0"/>
                       </a:endParaRPr>
                     </a:p>
                   </a:txBody>
-                  <a:tcPr marL="127000" marR="127000" marT="127000" marB="127000" anchor="ctr">
+                  <a:tcPr marL="88900" marR="88900" marT="88900" marB="88900" anchor="ctr">
                     <a:lnL w="12700" cap="flat" cmpd="sng" algn="ctr">
                       <a:solidFill>
                         <a:srgbClr val="D8E0EE"/>
@@ -7032,7 +8443,7 @@
                         <a:buNone/>
                       </a:pPr>
                       <a:r>
-                        <a:rPr lang="en-US" sz="1300" dirty="0">
+                        <a:rPr lang="en-US" sz="1200" dirty="0">
                           <a:solidFill>
                             <a:srgbClr val="44506B"/>
                           </a:solidFill>
@@ -7042,14 +8453,14 @@
                         </a:rPr>
                         <a:t>How we win</a:t>
                       </a:r>
-                      <a:endParaRPr lang="en-US" sz="1300" dirty="0">
+                      <a:endParaRPr lang="en-US" sz="1200" dirty="0">
                         <a:latin typeface="Calibri" charset="0"/>
                         <a:ea typeface="Calibri" charset="0"/>
                         <a:cs typeface="Calibri" charset="0"/>
                       </a:endParaRPr>
                     </a:p>
                   </a:txBody>
-                  <a:tcPr marL="127000" marR="127000" marT="127000" marB="127000" anchor="ctr">
+                  <a:tcPr marL="88900" marR="88900" marT="88900" marB="88900" anchor="ctr">
                     <a:lnL w="12700" cap="flat" cmpd="sng" algn="ctr">
                       <a:solidFill>
                         <a:srgbClr val="D8E0EE"/>
@@ -7100,7 +8511,7 @@
                         <a:buNone/>
                       </a:pPr>
                       <a:r>
-                        <a:rPr lang="en-US" sz="1300" dirty="0">
+                        <a:rPr lang="en-US" sz="1200" dirty="0">
                           <a:solidFill>
                             <a:srgbClr val="44506B"/>
                           </a:solidFill>
@@ -7108,16 +8519,428 @@
                           <a:ea typeface="Calibri" pitchFamily="34" charset="-122"/>
                           <a:cs typeface="Calibri" pitchFamily="34" charset="-120"/>
                         </a:rPr>
-                        <a:t>Delivery approach and capability or capacity gaps</a:t>
+                        <a:t>Delivery approach and delivery standards</a:t>
                       </a:r>
-                      <a:endParaRPr lang="en-US" sz="1300" dirty="0">
+                      <a:endParaRPr lang="en-US" sz="1200" dirty="0">
                         <a:latin typeface="Calibri" charset="0"/>
                         <a:ea typeface="Calibri" charset="0"/>
                         <a:cs typeface="Calibri" charset="0"/>
                       </a:endParaRPr>
                     </a:p>
                   </a:txBody>
-                  <a:tcPr marL="127000" marR="127000" marT="127000" marB="127000" anchor="ctr">
+                  <a:tcPr marL="88900" marR="88900" marT="88900" marB="88900" anchor="ctr">
+                    <a:lnL w="12700" cap="flat" cmpd="sng" algn="ctr">
+                      <a:solidFill>
+                        <a:srgbClr val="D8E0EE"/>
+                      </a:solidFill>
+                      <a:prstDash val="solid"/>
+                      <a:round/>
+                      <a:headEnd type="none" w="med" len="med"/>
+                      <a:tailEnd type="none" w="med" len="med"/>
+                    </a:lnL>
+                    <a:lnR w="12700" cap="flat" cmpd="sng" algn="ctr">
+                      <a:solidFill>
+                        <a:srgbClr val="D8E0EE"/>
+                      </a:solidFill>
+                      <a:prstDash val="solid"/>
+                      <a:round/>
+                      <a:headEnd type="none" w="med" len="med"/>
+                      <a:tailEnd type="none" w="med" len="med"/>
+                    </a:lnR>
+                    <a:lnT w="12700" cap="flat" cmpd="sng" algn="ctr">
+                      <a:solidFill>
+                        <a:srgbClr val="D8E0EE"/>
+                      </a:solidFill>
+                      <a:prstDash val="solid"/>
+                      <a:round/>
+                      <a:headEnd type="none" w="med" len="med"/>
+                      <a:tailEnd type="none" w="med" len="med"/>
+                    </a:lnT>
+                    <a:lnB w="12700" cap="flat" cmpd="sng" algn="ctr">
+                      <a:solidFill>
+                        <a:srgbClr val="D8E0EE"/>
+                      </a:solidFill>
+                      <a:prstDash val="solid"/>
+                      <a:round/>
+                      <a:headEnd type="none" w="med" len="med"/>
+                      <a:tailEnd type="none" w="med" len="med"/>
+                    </a:lnB>
+                    <a:solidFill>
+                      <a:srgbClr val="FFFFFF"/>
+                    </a:solidFill>
+                  </a:tcPr>
+                </a:tc>
+              </a:tr>
+              <a:tr h="512064">
+                <a:tc>
+                  <a:txBody>
+                    <a:bodyPr/>
+                    <a:lstStyle/>
+                    <a:p>
+                      <a:pPr algn="l" indent="0" marL="0">
+                        <a:buNone/>
+                      </a:pPr>
+                      <a:r>
+                        <a:rPr lang="en-US" sz="1200" dirty="0">
+                          <a:solidFill>
+                            <a:srgbClr val="44506B"/>
+                          </a:solidFill>
+                          <a:latin typeface="Calibri" pitchFamily="34" charset="0"/>
+                          <a:ea typeface="Calibri" pitchFamily="34" charset="-122"/>
+                          <a:cs typeface="Calibri" pitchFamily="34" charset="-120"/>
+                        </a:rPr>
+                        <a:t>6 · Team &amp; talent</a:t>
+                      </a:r>
+                      <a:endParaRPr lang="en-US" sz="1200" dirty="0">
+                        <a:latin typeface="Calibri" charset="0"/>
+                        <a:ea typeface="Calibri" charset="0"/>
+                        <a:cs typeface="Calibri" charset="0"/>
+                      </a:endParaRPr>
+                    </a:p>
+                  </a:txBody>
+                  <a:tcPr marL="88900" marR="88900" marT="88900" marB="88900" anchor="ctr">
+                    <a:lnL w="12700" cap="flat" cmpd="sng" algn="ctr">
+                      <a:solidFill>
+                        <a:srgbClr val="D8E0EE"/>
+                      </a:solidFill>
+                      <a:prstDash val="solid"/>
+                      <a:round/>
+                      <a:headEnd type="none" w="med" len="med"/>
+                      <a:tailEnd type="none" w="med" len="med"/>
+                    </a:lnL>
+                    <a:lnR w="12700" cap="flat" cmpd="sng" algn="ctr">
+                      <a:solidFill>
+                        <a:srgbClr val="D8E0EE"/>
+                      </a:solidFill>
+                      <a:prstDash val="solid"/>
+                      <a:round/>
+                      <a:headEnd type="none" w="med" len="med"/>
+                      <a:tailEnd type="none" w="med" len="med"/>
+                    </a:lnR>
+                    <a:lnT w="12700" cap="flat" cmpd="sng" algn="ctr">
+                      <a:solidFill>
+                        <a:srgbClr val="D8E0EE"/>
+                      </a:solidFill>
+                      <a:prstDash val="solid"/>
+                      <a:round/>
+                      <a:headEnd type="none" w="med" len="med"/>
+                      <a:tailEnd type="none" w="med" len="med"/>
+                    </a:lnT>
+                    <a:lnB w="12700" cap="flat" cmpd="sng" algn="ctr">
+                      <a:solidFill>
+                        <a:srgbClr val="D8E0EE"/>
+                      </a:solidFill>
+                      <a:prstDash val="solid"/>
+                      <a:round/>
+                      <a:headEnd type="none" w="med" len="med"/>
+                      <a:tailEnd type="none" w="med" len="med"/>
+                    </a:lnB>
+                    <a:solidFill>
+                      <a:srgbClr val="FFFFFF"/>
+                    </a:solidFill>
+                  </a:tcPr>
+                </a:tc>
+                <a:tc>
+                  <a:txBody>
+                    <a:bodyPr/>
+                    <a:lstStyle/>
+                    <a:p>
+                      <a:pPr algn="l" indent="0" marL="0">
+                        <a:buNone/>
+                      </a:pPr>
+                      <a:r>
+                        <a:rPr lang="en-US" sz="1200" dirty="0">
+                          <a:solidFill>
+                            <a:srgbClr val="44506B"/>
+                          </a:solidFill>
+                          <a:latin typeface="Calibri" pitchFamily="34" charset="0"/>
+                          <a:ea typeface="Calibri" pitchFamily="34" charset="-122"/>
+                          <a:cs typeface="Calibri" pitchFamily="34" charset="-120"/>
+                        </a:rPr>
+                        <a:t>Who delivers it</a:t>
+                      </a:r>
+                      <a:endParaRPr lang="en-US" sz="1200" dirty="0">
+                        <a:latin typeface="Calibri" charset="0"/>
+                        <a:ea typeface="Calibri" charset="0"/>
+                        <a:cs typeface="Calibri" charset="0"/>
+                      </a:endParaRPr>
+                    </a:p>
+                  </a:txBody>
+                  <a:tcPr marL="88900" marR="88900" marT="88900" marB="88900" anchor="ctr">
+                    <a:lnL w="12700" cap="flat" cmpd="sng" algn="ctr">
+                      <a:solidFill>
+                        <a:srgbClr val="D8E0EE"/>
+                      </a:solidFill>
+                      <a:prstDash val="solid"/>
+                      <a:round/>
+                      <a:headEnd type="none" w="med" len="med"/>
+                      <a:tailEnd type="none" w="med" len="med"/>
+                    </a:lnL>
+                    <a:lnR w="12700" cap="flat" cmpd="sng" algn="ctr">
+                      <a:solidFill>
+                        <a:srgbClr val="D8E0EE"/>
+                      </a:solidFill>
+                      <a:prstDash val="solid"/>
+                      <a:round/>
+                      <a:headEnd type="none" w="med" len="med"/>
+                      <a:tailEnd type="none" w="med" len="med"/>
+                    </a:lnR>
+                    <a:lnT w="12700" cap="flat" cmpd="sng" algn="ctr">
+                      <a:solidFill>
+                        <a:srgbClr val="D8E0EE"/>
+                      </a:solidFill>
+                      <a:prstDash val="solid"/>
+                      <a:round/>
+                      <a:headEnd type="none" w="med" len="med"/>
+                      <a:tailEnd type="none" w="med" len="med"/>
+                    </a:lnT>
+                    <a:lnB w="12700" cap="flat" cmpd="sng" algn="ctr">
+                      <a:solidFill>
+                        <a:srgbClr val="D8E0EE"/>
+                      </a:solidFill>
+                      <a:prstDash val="solid"/>
+                      <a:round/>
+                      <a:headEnd type="none" w="med" len="med"/>
+                      <a:tailEnd type="none" w="med" len="med"/>
+                    </a:lnB>
+                    <a:solidFill>
+                      <a:srgbClr val="FFFFFF"/>
+                    </a:solidFill>
+                  </a:tcPr>
+                </a:tc>
+                <a:tc>
+                  <a:txBody>
+                    <a:bodyPr/>
+                    <a:lstStyle/>
+                    <a:p>
+                      <a:pPr algn="l" indent="0" marL="0">
+                        <a:buNone/>
+                      </a:pPr>
+                      <a:r>
+                        <a:rPr lang="en-US" sz="1200" dirty="0">
+                          <a:solidFill>
+                            <a:srgbClr val="44506B"/>
+                          </a:solidFill>
+                          <a:latin typeface="Calibri" pitchFamily="34" charset="0"/>
+                          <a:ea typeface="Calibri" pitchFamily="34" charset="-122"/>
+                          <a:cs typeface="Calibri" pitchFamily="34" charset="-120"/>
+                        </a:rPr>
+                        <a:t>Dedicated FSI team, shared capacity view, recruitment plan</a:t>
+                      </a:r>
+                      <a:endParaRPr lang="en-US" sz="1200" dirty="0">
+                        <a:latin typeface="Calibri" charset="0"/>
+                        <a:ea typeface="Calibri" charset="0"/>
+                        <a:cs typeface="Calibri" charset="0"/>
+                      </a:endParaRPr>
+                    </a:p>
+                  </a:txBody>
+                  <a:tcPr marL="88900" marR="88900" marT="88900" marB="88900" anchor="ctr">
+                    <a:lnL w="12700" cap="flat" cmpd="sng" algn="ctr">
+                      <a:solidFill>
+                        <a:srgbClr val="D8E0EE"/>
+                      </a:solidFill>
+                      <a:prstDash val="solid"/>
+                      <a:round/>
+                      <a:headEnd type="none" w="med" len="med"/>
+                      <a:tailEnd type="none" w="med" len="med"/>
+                    </a:lnL>
+                    <a:lnR w="12700" cap="flat" cmpd="sng" algn="ctr">
+                      <a:solidFill>
+                        <a:srgbClr val="D8E0EE"/>
+                      </a:solidFill>
+                      <a:prstDash val="solid"/>
+                      <a:round/>
+                      <a:headEnd type="none" w="med" len="med"/>
+                      <a:tailEnd type="none" w="med" len="med"/>
+                    </a:lnR>
+                    <a:lnT w="12700" cap="flat" cmpd="sng" algn="ctr">
+                      <a:solidFill>
+                        <a:srgbClr val="D8E0EE"/>
+                      </a:solidFill>
+                      <a:prstDash val="solid"/>
+                      <a:round/>
+                      <a:headEnd type="none" w="med" len="med"/>
+                      <a:tailEnd type="none" w="med" len="med"/>
+                    </a:lnT>
+                    <a:lnB w="12700" cap="flat" cmpd="sng" algn="ctr">
+                      <a:solidFill>
+                        <a:srgbClr val="D8E0EE"/>
+                      </a:solidFill>
+                      <a:prstDash val="solid"/>
+                      <a:round/>
+                      <a:headEnd type="none" w="med" len="med"/>
+                      <a:tailEnd type="none" w="med" len="med"/>
+                    </a:lnB>
+                    <a:solidFill>
+                      <a:srgbClr val="FFFFFF"/>
+                    </a:solidFill>
+                  </a:tcPr>
+                </a:tc>
+              </a:tr>
+              <a:tr h="512064">
+                <a:tc>
+                  <a:txBody>
+                    <a:bodyPr/>
+                    <a:lstStyle/>
+                    <a:p>
+                      <a:pPr algn="l" indent="0" marL="0">
+                        <a:buNone/>
+                      </a:pPr>
+                      <a:r>
+                        <a:rPr lang="en-US" sz="1200" dirty="0">
+                          <a:solidFill>
+                            <a:srgbClr val="44506B"/>
+                          </a:solidFill>
+                          <a:latin typeface="Calibri" pitchFamily="34" charset="0"/>
+                          <a:ea typeface="Calibri" pitchFamily="34" charset="-122"/>
+                          <a:cs typeface="Calibri" pitchFamily="34" charset="-120"/>
+                        </a:rPr>
+                        <a:t>7 · Eminence &amp; positioning</a:t>
+                      </a:r>
+                      <a:endParaRPr lang="en-US" sz="1200" dirty="0">
+                        <a:latin typeface="Calibri" charset="0"/>
+                        <a:ea typeface="Calibri" charset="0"/>
+                        <a:cs typeface="Calibri" charset="0"/>
+                      </a:endParaRPr>
+                    </a:p>
+                  </a:txBody>
+                  <a:tcPr marL="88900" marR="88900" marT="88900" marB="88900" anchor="ctr">
+                    <a:lnL w="12700" cap="flat" cmpd="sng" algn="ctr">
+                      <a:solidFill>
+                        <a:srgbClr val="D8E0EE"/>
+                      </a:solidFill>
+                      <a:prstDash val="solid"/>
+                      <a:round/>
+                      <a:headEnd type="none" w="med" len="med"/>
+                      <a:tailEnd type="none" w="med" len="med"/>
+                    </a:lnL>
+                    <a:lnR w="12700" cap="flat" cmpd="sng" algn="ctr">
+                      <a:solidFill>
+                        <a:srgbClr val="D8E0EE"/>
+                      </a:solidFill>
+                      <a:prstDash val="solid"/>
+                      <a:round/>
+                      <a:headEnd type="none" w="med" len="med"/>
+                      <a:tailEnd type="none" w="med" len="med"/>
+                    </a:lnR>
+                    <a:lnT w="12700" cap="flat" cmpd="sng" algn="ctr">
+                      <a:solidFill>
+                        <a:srgbClr val="D8E0EE"/>
+                      </a:solidFill>
+                      <a:prstDash val="solid"/>
+                      <a:round/>
+                      <a:headEnd type="none" w="med" len="med"/>
+                      <a:tailEnd type="none" w="med" len="med"/>
+                    </a:lnT>
+                    <a:lnB w="12700" cap="flat" cmpd="sng" algn="ctr">
+                      <a:solidFill>
+                        <a:srgbClr val="D8E0EE"/>
+                      </a:solidFill>
+                      <a:prstDash val="solid"/>
+                      <a:round/>
+                      <a:headEnd type="none" w="med" len="med"/>
+                      <a:tailEnd type="none" w="med" len="med"/>
+                    </a:lnB>
+                    <a:solidFill>
+                      <a:srgbClr val="FFFFFF"/>
+                    </a:solidFill>
+                  </a:tcPr>
+                </a:tc>
+                <a:tc>
+                  <a:txBody>
+                    <a:bodyPr/>
+                    <a:lstStyle/>
+                    <a:p>
+                      <a:pPr algn="l" indent="0" marL="0">
+                        <a:buNone/>
+                      </a:pPr>
+                      <a:r>
+                        <a:rPr lang="en-US" sz="1200" dirty="0">
+                          <a:solidFill>
+                            <a:srgbClr val="44506B"/>
+                          </a:solidFill>
+                          <a:latin typeface="Calibri" pitchFamily="34" charset="0"/>
+                          <a:ea typeface="Calibri" pitchFamily="34" charset="-122"/>
+                          <a:cs typeface="Calibri" pitchFamily="34" charset="-120"/>
+                        </a:rPr>
+                        <a:t>How we are known</a:t>
+                      </a:r>
+                      <a:endParaRPr lang="en-US" sz="1200" dirty="0">
+                        <a:latin typeface="Calibri" charset="0"/>
+                        <a:ea typeface="Calibri" charset="0"/>
+                        <a:cs typeface="Calibri" charset="0"/>
+                      </a:endParaRPr>
+                    </a:p>
+                  </a:txBody>
+                  <a:tcPr marL="88900" marR="88900" marT="88900" marB="88900" anchor="ctr">
+                    <a:lnL w="12700" cap="flat" cmpd="sng" algn="ctr">
+                      <a:solidFill>
+                        <a:srgbClr val="D8E0EE"/>
+                      </a:solidFill>
+                      <a:prstDash val="solid"/>
+                      <a:round/>
+                      <a:headEnd type="none" w="med" len="med"/>
+                      <a:tailEnd type="none" w="med" len="med"/>
+                    </a:lnL>
+                    <a:lnR w="12700" cap="flat" cmpd="sng" algn="ctr">
+                      <a:solidFill>
+                        <a:srgbClr val="D8E0EE"/>
+                      </a:solidFill>
+                      <a:prstDash val="solid"/>
+                      <a:round/>
+                      <a:headEnd type="none" w="med" len="med"/>
+                      <a:tailEnd type="none" w="med" len="med"/>
+                    </a:lnR>
+                    <a:lnT w="12700" cap="flat" cmpd="sng" algn="ctr">
+                      <a:solidFill>
+                        <a:srgbClr val="D8E0EE"/>
+                      </a:solidFill>
+                      <a:prstDash val="solid"/>
+                      <a:round/>
+                      <a:headEnd type="none" w="med" len="med"/>
+                      <a:tailEnd type="none" w="med" len="med"/>
+                    </a:lnT>
+                    <a:lnB w="12700" cap="flat" cmpd="sng" algn="ctr">
+                      <a:solidFill>
+                        <a:srgbClr val="D8E0EE"/>
+                      </a:solidFill>
+                      <a:prstDash val="solid"/>
+                      <a:round/>
+                      <a:headEnd type="none" w="med" len="med"/>
+                      <a:tailEnd type="none" w="med" len="med"/>
+                    </a:lnB>
+                    <a:solidFill>
+                      <a:srgbClr val="FFFFFF"/>
+                    </a:solidFill>
+                  </a:tcPr>
+                </a:tc>
+                <a:tc>
+                  <a:txBody>
+                    <a:bodyPr/>
+                    <a:lstStyle/>
+                    <a:p>
+                      <a:pPr algn="l" indent="0" marL="0">
+                        <a:buNone/>
+                      </a:pPr>
+                      <a:r>
+                        <a:rPr lang="en-US" sz="1200" dirty="0">
+                          <a:solidFill>
+                            <a:srgbClr val="44506B"/>
+                          </a:solidFill>
+                          <a:latin typeface="Calibri" pitchFamily="34" charset="0"/>
+                          <a:ea typeface="Calibri" pitchFamily="34" charset="-122"/>
+                          <a:cs typeface="Calibri" pitchFamily="34" charset="-120"/>
+                        </a:rPr>
+                        <a:t>Eminence plan: content, events and speaking calendar</a:t>
+                      </a:r>
+                      <a:endParaRPr lang="en-US" sz="1200" dirty="0">
+                        <a:latin typeface="Calibri" charset="0"/>
+                        <a:ea typeface="Calibri" charset="0"/>
+                        <a:cs typeface="Calibri" charset="0"/>
+                      </a:endParaRPr>
+                    </a:p>
+                  </a:txBody>
+                  <a:tcPr marL="88900" marR="88900" marT="88900" marB="88900" anchor="ctr">
                     <a:lnL w="12700" cap="flat" cmpd="sng" algn="ctr">
                       <a:solidFill>
                         <a:srgbClr val="D8E0EE"/>
@@ -7172,8 +8995,8 @@
         </p:nvSpPr>
         <p:spPr>
           <a:xfrm>
-            <a:off x="640080" y="1920240"/>
-            <a:ext cx="10881360" cy="457200"/>
+            <a:off x="640080" y="1828800"/>
+            <a:ext cx="10881360" cy="438912"/>
           </a:xfrm>
           <a:prstGeom prst="rect">
             <a:avLst/>
@@ -7192,8 +9015,8 @@
         </p:nvSpPr>
         <p:spPr>
           <a:xfrm>
-            <a:off x="777240" y="1920240"/>
-            <a:ext cx="2926080" cy="457200"/>
+            <a:off x="777240" y="1828800"/>
+            <a:ext cx="2926080" cy="438912"/>
           </a:xfrm>
           <a:prstGeom prst="rect">
             <a:avLst/>
@@ -7209,7 +9032,7 @@
               <a:buNone/>
             </a:pPr>
             <a:r>
-              <a:rPr lang="en-US" sz="1300" b="1" dirty="0">
+              <a:rPr lang="en-US" sz="1250" b="1" dirty="0">
                 <a:solidFill>
                   <a:srgbClr val="FFFFFF"/>
                 </a:solidFill>
@@ -7219,7 +9042,7 @@
               </a:rPr>
               <a:t>Workstream</a:t>
             </a:r>
-            <a:endParaRPr lang="en-US" sz="1300" dirty="0"/>
+            <a:endParaRPr lang="en-US" sz="1250" dirty="0"/>
           </a:p>
         </p:txBody>
       </p:sp>
@@ -7231,8 +9054,8 @@
         </p:nvSpPr>
         <p:spPr>
           <a:xfrm>
-            <a:off x="3794760" y="1920240"/>
-            <a:ext cx="2286000" cy="457200"/>
+            <a:off x="3794760" y="1828800"/>
+            <a:ext cx="2286000" cy="438912"/>
           </a:xfrm>
           <a:prstGeom prst="rect">
             <a:avLst/>
@@ -7248,7 +9071,7 @@
               <a:buNone/>
             </a:pPr>
             <a:r>
-              <a:rPr lang="en-US" sz="1300" b="1" dirty="0">
+              <a:rPr lang="en-US" sz="1250" b="1" dirty="0">
                 <a:solidFill>
                   <a:srgbClr val="FFFFFF"/>
                 </a:solidFill>
@@ -7258,7 +9081,7 @@
               </a:rPr>
               <a:t>Question it closes</a:t>
             </a:r>
-            <a:endParaRPr lang="en-US" sz="1300" dirty="0"/>
+            <a:endParaRPr lang="en-US" sz="1250" dirty="0"/>
           </a:p>
         </p:txBody>
       </p:sp>
@@ -7270,8 +9093,8 @@
         </p:nvSpPr>
         <p:spPr>
           <a:xfrm>
-            <a:off x="6172200" y="1920240"/>
-            <a:ext cx="5120640" cy="457200"/>
+            <a:off x="6172200" y="1828800"/>
+            <a:ext cx="5120640" cy="438912"/>
           </a:xfrm>
           <a:prstGeom prst="rect">
             <a:avLst/>
@@ -7287,7 +9110,7 @@
               <a:buNone/>
             </a:pPr>
             <a:r>
-              <a:rPr lang="en-US" sz="1300" b="1" dirty="0">
+              <a:rPr lang="en-US" sz="1250" b="1" dirty="0">
                 <a:solidFill>
                   <a:srgbClr val="FFFFFF"/>
                 </a:solidFill>
@@ -7297,7 +9120,7 @@
               </a:rPr>
               <a:t>Artefact produced</a:t>
             </a:r>
-            <a:endParaRPr lang="en-US" sz="1300" dirty="0"/>
+            <a:endParaRPr lang="en-US" sz="1250" dirty="0"/>
           </a:p>
         </p:txBody>
       </p:sp>
@@ -7309,7 +9132,7 @@
         </p:nvSpPr>
         <p:spPr>
           <a:xfrm>
-            <a:off x="640080" y="5760720"/>
+            <a:off x="640080" y="5897880"/>
             <a:ext cx="10881360" cy="365760"/>
           </a:xfrm>
           <a:prstGeom prst="rect">
@@ -7405,7 +9228,7 @@
                 <a:ea typeface="Cambria" pitchFamily="34" charset="-122"/>
                 <a:cs typeface="Cambria" pitchFamily="34" charset="-120"/>
               </a:rPr>
-              <a:t>The three-week journey</a:t>
+              <a:t>Team and talent</a:t>
             </a:r>
             <a:endParaRPr lang="en-US" sz="3600" dirty="0"/>
           </a:p>
@@ -7444,7 +9267,7 @@
                 <a:ea typeface="Calibri" pitchFamily="34" charset="-122"/>
                 <a:cs typeface="Calibri" pitchFamily="34" charset="-120"/>
               </a:rPr>
-              <a:t>Three weeks, three gates, one decision.</a:t>
+              <a:t>The capacity question, answered in three parts.</a:t>
             </a:r>
             <a:endParaRPr lang="en-US" sz="1450" dirty="0"/>
           </a:p>
@@ -7459,11 +9282,11 @@
         <p:spPr>
           <a:xfrm>
             <a:off x="640080" y="1828800"/>
-            <a:ext cx="3429000" cy="3840480"/>
+            <a:ext cx="3429000" cy="3383280"/>
           </a:xfrm>
           <a:prstGeom prst="roundRect">
             <a:avLst>
-              <a:gd name="adj" fmla="val 3200"/>
+              <a:gd name="adj" fmla="val 3243"/>
             </a:avLst>
           </a:prstGeom>
           <a:solidFill>
@@ -7481,7 +9304,7 @@
         <p:spPr>
           <a:xfrm>
             <a:off x="640080" y="1828800"/>
-            <a:ext cx="3429000" cy="685800"/>
+            <a:ext cx="3429000" cy="658368"/>
           </a:xfrm>
           <a:prstGeom prst="rect">
             <a:avLst/>
@@ -7501,7 +9324,7 @@
         <p:spPr>
           <a:xfrm>
             <a:off x="914400" y="1828800"/>
-            <a:ext cx="2926080" cy="685800"/>
+            <a:ext cx="2880360" cy="658368"/>
           </a:xfrm>
           <a:prstGeom prst="rect">
             <a:avLst/>
@@ -7517,7 +9340,7 @@
               <a:buNone/>
             </a:pPr>
             <a:r>
-              <a:rPr lang="en-US" sz="1800" b="1" dirty="0">
+              <a:rPr lang="en-US" sz="1700" b="1" dirty="0">
                 <a:solidFill>
                   <a:srgbClr val="FFFFFF"/>
                 </a:solidFill>
@@ -7525,9 +9348,9 @@
                 <a:ea typeface="Calibri" pitchFamily="34" charset="-122"/>
                 <a:cs typeface="Calibri" pitchFamily="34" charset="-120"/>
               </a:rPr>
-              <a:t>Week 1  ·  Frame</a:t>
-            </a:r>
-            <a:endParaRPr lang="en-US" sz="1800" dirty="0"/>
+              <a:t>The dedicated team</a:t>
+            </a:r>
+            <a:endParaRPr lang="en-US" sz="1700" dirty="0"/>
           </a:p>
         </p:txBody>
       </p:sp>
@@ -7539,8 +9362,8 @@
         </p:nvSpPr>
         <p:spPr>
           <a:xfrm>
-            <a:off x="914400" y="2743200"/>
-            <a:ext cx="2880360" cy="1920240"/>
+            <a:off x="914400" y="2697480"/>
+            <a:ext cx="2880360" cy="2286000"/>
           </a:xfrm>
           <a:prstGeom prst="rect">
             <a:avLst/>
@@ -7554,7 +9377,7 @@
           <a:p>
             <a:pPr marL="342900" indent="-342900">
               <a:spcAft>
-                <a:spcPts val="900"/>
+                <a:spcPts val="1000"/>
               </a:spcAft>
               <a:buSzPct val="100000"/>
               <a:buChar char="•"/>
@@ -7568,14 +9391,14 @@
                 <a:ea typeface="Calibri" pitchFamily="34" charset="-122"/>
                 <a:cs typeface="Calibri" pitchFamily="34" charset="-120"/>
               </a:rPr>
-              <a:t>Baseline current position and credentials</a:t>
+              <a:t>Who works on FSI exclusively, across the three pillars?</a:t>
             </a:r>
             <a:endParaRPr lang="en-US" sz="1250" dirty="0"/>
           </a:p>
           <a:p>
             <a:pPr marL="342900" indent="-342900">
               <a:spcAft>
-                <a:spcPts val="900"/>
+                <a:spcPts val="1000"/>
               </a:spcAft>
               <a:buSzPct val="100000"/>
               <a:buChar char="•"/>
@@ -7589,14 +9412,14 @@
                 <a:ea typeface="Calibri" pitchFamily="34" charset="-122"/>
                 <a:cs typeface="Calibri" pitchFamily="34" charset="-120"/>
               </a:rPr>
-              <a:t>Prioritise markets and segments</a:t>
+              <a:t>Which roles and levels do they hold?</a:t>
             </a:r>
             <a:endParaRPr lang="en-US" sz="1250" dirty="0"/>
           </a:p>
           <a:p>
             <a:pPr marL="342900" indent="-342900">
               <a:spcAft>
-                <a:spcPts val="900"/>
+                <a:spcPts val="1000"/>
               </a:spcAft>
               <a:buSzPct val="100000"/>
               <a:buChar char="•"/>
@@ -7610,14 +9433,117 @@
                 <a:ea typeface="Calibri" pitchFamily="34" charset="-122"/>
                 <a:cs typeface="Calibri" pitchFamily="34" charset="-120"/>
               </a:rPr>
-              <a:t>Build the account longlist</a:t>
+              <a:t>What is realistically deliverable with them alone?</a:t>
             </a:r>
             <a:endParaRPr lang="en-US" sz="1250" dirty="0"/>
           </a:p>
+        </p:txBody>
+      </p:sp>
+      <p:sp>
+        <p:nvSpPr>
+          <p:cNvPr id="8" name="Shape 6"/>
+          <p:cNvSpPr/>
+          <p:nvPr/>
+        </p:nvSpPr>
+        <p:spPr>
+          <a:xfrm>
+            <a:off x="4361688" y="1828800"/>
+            <a:ext cx="3429000" cy="3383280"/>
+          </a:xfrm>
+          <a:prstGeom prst="roundRect">
+            <a:avLst>
+              <a:gd name="adj" fmla="val 3243"/>
+            </a:avLst>
+          </a:prstGeom>
+          <a:solidFill>
+            <a:srgbClr val="EDF2FA"/>
+          </a:solidFill>
+          <a:ln/>
+        </p:spPr>
+      </p:sp>
+      <p:sp>
+        <p:nvSpPr>
+          <p:cNvPr id="9" name="Shape 7"/>
+          <p:cNvSpPr/>
+          <p:nvPr/>
+        </p:nvSpPr>
+        <p:spPr>
+          <a:xfrm>
+            <a:off x="4361688" y="1828800"/>
+            <a:ext cx="3429000" cy="658368"/>
+          </a:xfrm>
+          <a:prstGeom prst="rect">
+            <a:avLst/>
+          </a:prstGeom>
+          <a:solidFill>
+            <a:srgbClr val="3E5C8A"/>
+          </a:solidFill>
+          <a:ln/>
+        </p:spPr>
+      </p:sp>
+      <p:sp>
+        <p:nvSpPr>
+          <p:cNvPr id="10" name="Text 8"/>
+          <p:cNvSpPr txBox="1"/>
+          <p:nvPr/>
+        </p:nvSpPr>
+        <p:spPr>
+          <a:xfrm>
+            <a:off x="4636008" y="1828800"/>
+            <a:ext cx="2880360" cy="658368"/>
+          </a:xfrm>
+          <a:prstGeom prst="rect">
+            <a:avLst/>
+          </a:prstGeom>
+          <a:noFill/>
+          <a:ln/>
+        </p:spPr>
+        <p:txBody>
+          <a:bodyPr wrap="square" lIns="0" tIns="0" rIns="0" bIns="0" rtlCol="0" anchor="ctr"/>
+          <a:lstStyle/>
+          <a:p>
+            <a:pPr indent="0" marL="0">
+              <a:buNone/>
+            </a:pPr>
+            <a:r>
+              <a:rPr lang="en-US" sz="1700" b="1" dirty="0">
+                <a:solidFill>
+                  <a:srgbClr val="FFFFFF"/>
+                </a:solidFill>
+                <a:latin typeface="Calibri" pitchFamily="34" charset="0"/>
+                <a:ea typeface="Calibri" pitchFamily="34" charset="-122"/>
+                <a:cs typeface="Calibri" pitchFamily="34" charset="-120"/>
+              </a:rPr>
+              <a:t>Shared capacity</a:t>
+            </a:r>
+            <a:endParaRPr lang="en-US" sz="1700" dirty="0"/>
+          </a:p>
+        </p:txBody>
+      </p:sp>
+      <p:sp>
+        <p:nvSpPr>
+          <p:cNvPr id="11" name="Text 9"/>
+          <p:cNvSpPr txBox="1"/>
+          <p:nvPr/>
+        </p:nvSpPr>
+        <p:spPr>
+          <a:xfrm>
+            <a:off x="4636008" y="2697480"/>
+            <a:ext cx="2880360" cy="2286000"/>
+          </a:xfrm>
+          <a:prstGeom prst="rect">
+            <a:avLst/>
+          </a:prstGeom>
+          <a:noFill/>
+          <a:ln/>
+        </p:spPr>
+        <p:txBody>
+          <a:bodyPr wrap="square" lIns="0" tIns="0" rIns="0" bIns="0" rtlCol="0" anchor="ctr"/>
+          <a:lstStyle/>
           <a:p>
             <a:pPr marL="342900" indent="-342900">
               <a:spcAft>
-                <a:spcPts val="900"/>
+                <a:spcPts val="1000"/>
               </a:spcAft>
               <a:buSzPct val="100000"/>
               <a:buChar char="•"/>
@@ -7631,104 +9557,68 @@
                 <a:ea typeface="Calibri" pitchFamily="34" charset="-122"/>
                 <a:cs typeface="Calibri" pitchFamily="34" charset="-120"/>
               </a:rPr>
-              <a:t>Draft the proposition catalogue</a:t>
+              <a:t>Which resources are shared with other portfolios?</a:t>
             </a:r>
             <a:endParaRPr lang="en-US" sz="1250" dirty="0"/>
           </a:p>
-        </p:txBody>
-      </p:sp>
-      <p:sp>
-        <p:nvSpPr>
-          <p:cNvPr id="8" name="Text 6"/>
-          <p:cNvSpPr txBox="1"/>
-          <p:nvPr/>
-        </p:nvSpPr>
-        <p:spPr>
-          <a:xfrm>
-            <a:off x="914400" y="4892040"/>
-            <a:ext cx="2880360" cy="594360"/>
-          </a:xfrm>
-          <a:prstGeom prst="rect">
-            <a:avLst/>
-          </a:prstGeom>
-          <a:noFill/>
-          <a:ln/>
-        </p:spPr>
-        <p:txBody>
-          <a:bodyPr wrap="square" lIns="0" tIns="0" rIns="0" bIns="0" rtlCol="0" anchor="ctr"/>
-          <a:lstStyle/>
-          <a:p>
-            <a:pPr indent="0" marL="0">
-              <a:buNone/>
-            </a:pPr>
-            <a:r>
-              <a:rPr lang="en-US" sz="1200" b="1" dirty="0">
-                <a:solidFill>
-                  <a:srgbClr val="B8862B"/>
-                </a:solidFill>
-                <a:latin typeface="Calibri" pitchFamily="34" charset="0"/>
-                <a:ea typeface="Calibri" pitchFamily="34" charset="-122"/>
-                <a:cs typeface="Calibri" pitchFamily="34" charset="-120"/>
-              </a:rPr>
-              <a:t>Gate: agreed market and segment priorities</a:t>
-            </a:r>
-            <a:endParaRPr lang="en-US" sz="1200" dirty="0"/>
-          </a:p>
-        </p:txBody>
-      </p:sp>
-      <p:sp>
-        <p:nvSpPr>
-          <p:cNvPr id="9" name="Text 7"/>
-          <p:cNvSpPr txBox="1"/>
-          <p:nvPr/>
-        </p:nvSpPr>
-        <p:spPr>
-          <a:xfrm>
-            <a:off x="4096512" y="3474720"/>
-            <a:ext cx="256032" cy="457200"/>
-          </a:xfrm>
-          <a:prstGeom prst="rect">
-            <a:avLst/>
-          </a:prstGeom>
-          <a:noFill/>
-          <a:ln/>
-        </p:spPr>
-        <p:txBody>
-          <a:bodyPr wrap="square" lIns="0" tIns="0" rIns="0" bIns="0" rtlCol="0" anchor="ctr"/>
-          <a:lstStyle/>
-          <a:p>
-            <a:pPr algn="ctr" indent="0" marL="0">
-              <a:buNone/>
-            </a:pPr>
-            <a:r>
-              <a:rPr lang="en-US" sz="2000" dirty="0">
-                <a:solidFill>
-                  <a:srgbClr val="8792AB"/>
-                </a:solidFill>
-                <a:latin typeface="Calibri" pitchFamily="34" charset="0"/>
-                <a:ea typeface="Calibri" pitchFamily="34" charset="-122"/>
-                <a:cs typeface="Calibri" pitchFamily="34" charset="-120"/>
-              </a:rPr>
-              <a:t>→</a:t>
-            </a:r>
-            <a:endParaRPr lang="en-US" sz="2000" dirty="0"/>
-          </a:p>
-        </p:txBody>
-      </p:sp>
-      <p:sp>
-        <p:nvSpPr>
-          <p:cNvPr id="10" name="Shape 8"/>
+          <a:p>
+            <a:pPr marL="342900" indent="-342900">
+              <a:spcAft>
+                <a:spcPts val="1000"/>
+              </a:spcAft>
+              <a:buSzPct val="100000"/>
+              <a:buChar char="•"/>
+            </a:pPr>
+            <a:r>
+              <a:rPr lang="en-US" sz="1250" dirty="0">
+                <a:solidFill>
+                  <a:srgbClr val="44506B"/>
+                </a:solidFill>
+                <a:latin typeface="Calibri" pitchFamily="34" charset="0"/>
+                <a:ea typeface="Calibri" pitchFamily="34" charset="-122"/>
+                <a:cs typeface="Calibri" pitchFamily="34" charset="-120"/>
+              </a:rPr>
+              <a:t>How much of their time can we count on?</a:t>
+            </a:r>
+            <a:endParaRPr lang="en-US" sz="1250" dirty="0"/>
+          </a:p>
+          <a:p>
+            <a:pPr marL="342900" indent="-342900">
+              <a:spcAft>
+                <a:spcPts val="1000"/>
+              </a:spcAft>
+              <a:buSzPct val="100000"/>
+              <a:buChar char="•"/>
+            </a:pPr>
+            <a:r>
+              <a:rPr lang="en-US" sz="1250" dirty="0">
+                <a:solidFill>
+                  <a:srgbClr val="44506B"/>
+                </a:solidFill>
+                <a:latin typeface="Calibri" pitchFamily="34" charset="0"/>
+                <a:ea typeface="Calibri" pitchFamily="34" charset="-122"/>
+                <a:cs typeface="Calibri" pitchFamily="34" charset="-120"/>
+              </a:rPr>
+              <a:t>Which skills do we borrow rather than own?</a:t>
+            </a:r>
+            <a:endParaRPr lang="en-US" sz="1250" dirty="0"/>
+          </a:p>
+        </p:txBody>
+      </p:sp>
+      <p:sp>
+        <p:nvSpPr>
+          <p:cNvPr id="12" name="Shape 10"/>
           <p:cNvSpPr/>
           <p:nvPr/>
         </p:nvSpPr>
         <p:spPr>
           <a:xfrm>
-            <a:off x="4361688" y="1828800"/>
-            <a:ext cx="3429000" cy="3840480"/>
+            <a:off x="8083296" y="1828800"/>
+            <a:ext cx="3429000" cy="3383280"/>
           </a:xfrm>
           <a:prstGeom prst="roundRect">
             <a:avLst>
-              <a:gd name="adj" fmla="val 3200"/>
+              <a:gd name="adj" fmla="val 3243"/>
             </a:avLst>
           </a:prstGeom>
           <a:solidFill>
@@ -7739,34 +9629,34 @@
       </p:sp>
       <p:sp>
         <p:nvSpPr>
-          <p:cNvPr id="11" name="Shape 9"/>
+          <p:cNvPr id="13" name="Shape 11"/>
           <p:cNvSpPr/>
           <p:nvPr/>
         </p:nvSpPr>
         <p:spPr>
           <a:xfrm>
-            <a:off x="4361688" y="1828800"/>
-            <a:ext cx="3429000" cy="685800"/>
+            <a:off x="8083296" y="1828800"/>
+            <a:ext cx="3429000" cy="658368"/>
           </a:xfrm>
           <a:prstGeom prst="rect">
             <a:avLst/>
           </a:prstGeom>
           <a:solidFill>
-            <a:srgbClr val="3E5C8A"/>
+            <a:srgbClr val="1E2761"/>
           </a:solidFill>
           <a:ln/>
         </p:spPr>
       </p:sp>
       <p:sp>
         <p:nvSpPr>
-          <p:cNvPr id="12" name="Text 10"/>
-          <p:cNvSpPr txBox="1"/>
-          <p:nvPr/>
-        </p:nvSpPr>
-        <p:spPr>
-          <a:xfrm>
-            <a:off x="4636008" y="1828800"/>
-            <a:ext cx="2926080" cy="685800"/>
+          <p:cNvPr id="14" name="Text 12"/>
+          <p:cNvSpPr txBox="1"/>
+          <p:nvPr/>
+        </p:nvSpPr>
+        <p:spPr>
+          <a:xfrm>
+            <a:off x="8357616" y="1828800"/>
+            <a:ext cx="2880360" cy="658368"/>
           </a:xfrm>
           <a:prstGeom prst="rect">
             <a:avLst/>
@@ -7782,7 +9672,7 @@
               <a:buNone/>
             </a:pPr>
             <a:r>
-              <a:rPr lang="en-US" sz="1800" b="1" dirty="0">
+              <a:rPr lang="en-US" sz="1700" b="1" dirty="0">
                 <a:solidFill>
                   <a:srgbClr val="FFFFFF"/>
                 </a:solidFill>
@@ -7790,22 +9680,22 @@
                 <a:ea typeface="Calibri" pitchFamily="34" charset="-122"/>
                 <a:cs typeface="Calibri" pitchFamily="34" charset="-120"/>
               </a:rPr>
-              <a:t>Week 2  ·  Define</a:t>
-            </a:r>
-            <a:endParaRPr lang="en-US" sz="1800" dirty="0"/>
-          </a:p>
-        </p:txBody>
-      </p:sp>
-      <p:sp>
-        <p:nvSpPr>
-          <p:cNvPr id="13" name="Text 11"/>
-          <p:cNvSpPr txBox="1"/>
-          <p:nvPr/>
-        </p:nvSpPr>
-        <p:spPr>
-          <a:xfrm>
-            <a:off x="4636008" y="2743200"/>
-            <a:ext cx="2880360" cy="1920240"/>
+              <a:t>The gap to close</a:t>
+            </a:r>
+            <a:endParaRPr lang="en-US" sz="1700" dirty="0"/>
+          </a:p>
+        </p:txBody>
+      </p:sp>
+      <p:sp>
+        <p:nvSpPr>
+          <p:cNvPr id="15" name="Text 13"/>
+          <p:cNvSpPr txBox="1"/>
+          <p:nvPr/>
+        </p:nvSpPr>
+        <p:spPr>
+          <a:xfrm>
+            <a:off x="8357616" y="2697480"/>
+            <a:ext cx="2880360" cy="2286000"/>
           </a:xfrm>
           <a:prstGeom prst="rect">
             <a:avLst/>
@@ -7819,7 +9709,7 @@
           <a:p>
             <a:pPr marL="342900" indent="-342900">
               <a:spcAft>
-                <a:spcPts val="900"/>
+                <a:spcPts val="1000"/>
               </a:spcAft>
               <a:buSzPct val="100000"/>
               <a:buChar char="•"/>
@@ -7833,14 +9723,14 @@
                 <a:ea typeface="Calibri" pitchFamily="34" charset="-122"/>
                 <a:cs typeface="Calibri" pitchFamily="34" charset="-120"/>
               </a:rPr>
-              <a:t>Lock propositions and permitted variants</a:t>
+              <a:t>How many partners, directors and delivery staff are missing?</a:t>
             </a:r>
             <a:endParaRPr lang="en-US" sz="1250" dirty="0"/>
           </a:p>
           <a:p>
             <a:pPr marL="342900" indent="-342900">
               <a:spcAft>
-                <a:spcPts val="900"/>
+                <a:spcPts val="1000"/>
               </a:spcAft>
               <a:buSzPct val="100000"/>
               <a:buChar char="•"/>
@@ -7854,14 +9744,14 @@
                 <a:ea typeface="Calibri" pitchFamily="34" charset="-122"/>
                 <a:cs typeface="Calibri" pitchFamily="34" charset="-120"/>
               </a:rPr>
-              <a:t>Benchmark deal sizes and pricing</a:t>
+              <a:t>Build, borrow or buy for each gap?</a:t>
             </a:r>
             <a:endParaRPr lang="en-US" sz="1250" dirty="0"/>
           </a:p>
           <a:p>
             <a:pPr marL="342900" indent="-342900">
               <a:spcAft>
-                <a:spcPts val="900"/>
+                <a:spcPts val="1000"/>
               </a:spcAft>
               <a:buSzPct val="100000"/>
               <a:buChar char="•"/>
@@ -7875,43 +9765,88 @@
                 <a:ea typeface="Calibri" pitchFamily="34" charset="-122"/>
                 <a:cs typeface="Calibri" pitchFamily="34" charset="-120"/>
               </a:rPr>
-              <a:t>Shortlist target accounts</a:t>
+              <a:t>By when, to support the targets we set?</a:t>
             </a:r>
             <a:endParaRPr lang="en-US" sz="1250" dirty="0"/>
           </a:p>
-          <a:p>
-            <a:pPr marL="342900" indent="-342900">
-              <a:spcAft>
-                <a:spcPts val="900"/>
-              </a:spcAft>
-              <a:buSzPct val="100000"/>
-              <a:buChar char="•"/>
-            </a:pPr>
-            <a:r>
-              <a:rPr lang="en-US" sz="1250" dirty="0">
-                <a:solidFill>
-                  <a:srgbClr val="44506B"/>
-                </a:solidFill>
-                <a:latin typeface="Calibri" pitchFamily="34" charset="0"/>
-                <a:ea typeface="Calibri" pitchFamily="34" charset="-122"/>
-                <a:cs typeface="Calibri" pitchFamily="34" charset="-120"/>
-              </a:rPr>
-              <a:t>Draft the coverage map</a:t>
-            </a:r>
-            <a:endParaRPr lang="en-US" sz="1250" dirty="0"/>
-          </a:p>
-        </p:txBody>
-      </p:sp>
-      <p:sp>
-        <p:nvSpPr>
-          <p:cNvPr id="14" name="Text 12"/>
-          <p:cNvSpPr txBox="1"/>
-          <p:nvPr/>
-        </p:nvSpPr>
-        <p:spPr>
-          <a:xfrm>
-            <a:off x="4636008" y="4892040"/>
-            <a:ext cx="2880360" cy="594360"/>
+        </p:txBody>
+      </p:sp>
+      <p:sp>
+        <p:nvSpPr>
+          <p:cNvPr id="16" name="Shape 14"/>
+          <p:cNvSpPr/>
+          <p:nvPr/>
+        </p:nvSpPr>
+        <p:spPr>
+          <a:xfrm>
+            <a:off x="3566160" y="5440680"/>
+            <a:ext cx="5029200" cy="301752"/>
+          </a:xfrm>
+          <a:prstGeom prst="roundRect">
+            <a:avLst>
+              <a:gd name="adj" fmla="val 48485"/>
+            </a:avLst>
+          </a:prstGeom>
+          <a:solidFill>
+            <a:srgbClr val="FFFFFF"/>
+          </a:solidFill>
+          <a:ln w="12700">
+            <a:solidFill>
+              <a:srgbClr val="B8862B"/>
+            </a:solidFill>
+            <a:prstDash val="solid"/>
+          </a:ln>
+        </p:spPr>
+      </p:sp>
+      <p:sp>
+        <p:nvSpPr>
+          <p:cNvPr id="17" name="Text 15"/>
+          <p:cNvSpPr txBox="1"/>
+          <p:nvPr/>
+        </p:nvSpPr>
+        <p:spPr>
+          <a:xfrm>
+            <a:off x="3566160" y="5440680"/>
+            <a:ext cx="5029200" cy="301752"/>
+          </a:xfrm>
+          <a:prstGeom prst="rect">
+            <a:avLst/>
+          </a:prstGeom>
+          <a:noFill/>
+          <a:ln/>
+        </p:spPr>
+        <p:txBody>
+          <a:bodyPr wrap="square" lIns="0" tIns="0" rIns="0" bIns="0" rtlCol="0" anchor="ctr"/>
+          <a:lstStyle/>
+          <a:p>
+            <a:pPr algn="ctr" indent="0" marL="0">
+              <a:buNone/>
+            </a:pPr>
+            <a:r>
+              <a:rPr lang="en-US" sz="1050" i="1" dirty="0">
+                <a:solidFill>
+                  <a:srgbClr val="B8862B"/>
+                </a:solidFill>
+                <a:latin typeface="Calibri" pitchFamily="34" charset="0"/>
+                <a:ea typeface="Calibri" pitchFamily="34" charset="-122"/>
+                <a:cs typeface="Calibri" pitchFamily="34" charset="-120"/>
+              </a:rPr>
+              <a:t>names, numbers and dates to be defined in the cycle</a:t>
+            </a:r>
+            <a:endParaRPr lang="en-US" sz="1050" dirty="0"/>
+          </a:p>
+        </p:txBody>
+      </p:sp>
+      <p:sp>
+        <p:nvSpPr>
+          <p:cNvPr id="18" name="Text 16"/>
+          <p:cNvSpPr txBox="1"/>
+          <p:nvPr/>
+        </p:nvSpPr>
+        <p:spPr>
+          <a:xfrm>
+            <a:off x="640080" y="5989320"/>
+            <a:ext cx="10881360" cy="365760"/>
           </a:xfrm>
           <a:prstGeom prst="rect">
             <a:avLst/>
@@ -7927,321 +9862,17 @@
               <a:buNone/>
             </a:pPr>
             <a:r>
-              <a:rPr lang="en-US" sz="1200" b="1" dirty="0">
-                <a:solidFill>
-                  <a:srgbClr val="B8862B"/>
-                </a:solidFill>
-                <a:latin typeface="Calibri" pitchFamily="34" charset="0"/>
-                <a:ea typeface="Calibri" pitchFamily="34" charset="-122"/>
-                <a:cs typeface="Calibri" pitchFamily="34" charset="-120"/>
-              </a:rPr>
-              <a:t>Gate: agreed catalogue and shortlist</a:t>
-            </a:r>
-            <a:endParaRPr lang="en-US" sz="1200" dirty="0"/>
-          </a:p>
-        </p:txBody>
-      </p:sp>
-      <p:sp>
-        <p:nvSpPr>
-          <p:cNvPr id="15" name="Text 13"/>
-          <p:cNvSpPr txBox="1"/>
-          <p:nvPr/>
-        </p:nvSpPr>
-        <p:spPr>
-          <a:xfrm>
-            <a:off x="7818120" y="3474720"/>
-            <a:ext cx="256032" cy="457200"/>
-          </a:xfrm>
-          <a:prstGeom prst="rect">
-            <a:avLst/>
-          </a:prstGeom>
-          <a:noFill/>
-          <a:ln/>
-        </p:spPr>
-        <p:txBody>
-          <a:bodyPr wrap="square" lIns="0" tIns="0" rIns="0" bIns="0" rtlCol="0" anchor="ctr"/>
-          <a:lstStyle/>
-          <a:p>
-            <a:pPr algn="ctr" indent="0" marL="0">
-              <a:buNone/>
-            </a:pPr>
-            <a:r>
-              <a:rPr lang="en-US" sz="2000" dirty="0">
-                <a:solidFill>
-                  <a:srgbClr val="8792AB"/>
-                </a:solidFill>
-                <a:latin typeface="Calibri" pitchFamily="34" charset="0"/>
-                <a:ea typeface="Calibri" pitchFamily="34" charset="-122"/>
-                <a:cs typeface="Calibri" pitchFamily="34" charset="-120"/>
-              </a:rPr>
-              <a:t>→</a:t>
-            </a:r>
-            <a:endParaRPr lang="en-US" sz="2000" dirty="0"/>
-          </a:p>
-        </p:txBody>
-      </p:sp>
-      <p:sp>
-        <p:nvSpPr>
-          <p:cNvPr id="16" name="Shape 14"/>
-          <p:cNvSpPr/>
-          <p:nvPr/>
-        </p:nvSpPr>
-        <p:spPr>
-          <a:xfrm>
-            <a:off x="8083296" y="1828800"/>
-            <a:ext cx="3429000" cy="3840480"/>
-          </a:xfrm>
-          <a:prstGeom prst="roundRect">
-            <a:avLst>
-              <a:gd name="adj" fmla="val 3200"/>
-            </a:avLst>
-          </a:prstGeom>
-          <a:solidFill>
-            <a:srgbClr val="EDF2FA"/>
-          </a:solidFill>
-          <a:ln/>
-        </p:spPr>
-      </p:sp>
-      <p:sp>
-        <p:nvSpPr>
-          <p:cNvPr id="17" name="Shape 15"/>
-          <p:cNvSpPr/>
-          <p:nvPr/>
-        </p:nvSpPr>
-        <p:spPr>
-          <a:xfrm>
-            <a:off x="8083296" y="1828800"/>
-            <a:ext cx="3429000" cy="685800"/>
-          </a:xfrm>
-          <a:prstGeom prst="rect">
-            <a:avLst/>
-          </a:prstGeom>
-          <a:solidFill>
-            <a:srgbClr val="1E2761"/>
-          </a:solidFill>
-          <a:ln/>
-        </p:spPr>
-      </p:sp>
-      <p:sp>
-        <p:nvSpPr>
-          <p:cNvPr id="18" name="Text 16"/>
-          <p:cNvSpPr txBox="1"/>
-          <p:nvPr/>
-        </p:nvSpPr>
-        <p:spPr>
-          <a:xfrm>
-            <a:off x="8357616" y="1828800"/>
-            <a:ext cx="2926080" cy="685800"/>
-          </a:xfrm>
-          <a:prstGeom prst="rect">
-            <a:avLst/>
-          </a:prstGeom>
-          <a:noFill/>
-          <a:ln/>
-        </p:spPr>
-        <p:txBody>
-          <a:bodyPr wrap="square" lIns="0" tIns="0" rIns="0" bIns="0" rtlCol="0" anchor="ctr"/>
-          <a:lstStyle/>
-          <a:p>
-            <a:pPr indent="0" marL="0">
-              <a:buNone/>
-            </a:pPr>
-            <a:r>
-              <a:rPr lang="en-US" sz="1800" b="1" dirty="0">
-                <a:solidFill>
-                  <a:srgbClr val="FFFFFF"/>
-                </a:solidFill>
-                <a:latin typeface="Calibri" pitchFamily="34" charset="0"/>
-                <a:ea typeface="Calibri" pitchFamily="34" charset="-122"/>
-                <a:cs typeface="Calibri" pitchFamily="34" charset="-120"/>
-              </a:rPr>
-              <a:t>Week 3  ·  Commit</a:t>
-            </a:r>
-            <a:endParaRPr lang="en-US" sz="1800" dirty="0"/>
-          </a:p>
-        </p:txBody>
-      </p:sp>
-      <p:sp>
-        <p:nvSpPr>
-          <p:cNvPr id="19" name="Text 17"/>
-          <p:cNvSpPr txBox="1"/>
-          <p:nvPr/>
-        </p:nvSpPr>
-        <p:spPr>
-          <a:xfrm>
-            <a:off x="8357616" y="2743200"/>
-            <a:ext cx="2880360" cy="1920240"/>
-          </a:xfrm>
-          <a:prstGeom prst="rect">
-            <a:avLst/>
-          </a:prstGeom>
-          <a:noFill/>
-          <a:ln/>
-        </p:spPr>
-        <p:txBody>
-          <a:bodyPr wrap="square" lIns="0" tIns="0" rIns="0" bIns="0" rtlCol="0" anchor="ctr"/>
-          <a:lstStyle/>
-          <a:p>
-            <a:pPr marL="342900" indent="-342900">
-              <a:spcAft>
-                <a:spcPts val="900"/>
-              </a:spcAft>
-              <a:buSzPct val="100000"/>
-              <a:buChar char="•"/>
-            </a:pPr>
-            <a:r>
-              <a:rPr lang="en-US" sz="1250" dirty="0">
-                <a:solidFill>
-                  <a:srgbClr val="44506B"/>
-                </a:solidFill>
-                <a:latin typeface="Calibri" pitchFamily="34" charset="0"/>
-                <a:ea typeface="Calibri" pitchFamily="34" charset="-122"/>
-                <a:cs typeface="Calibri" pitchFamily="34" charset="-120"/>
-              </a:rPr>
-              <a:t>Set revenue targets by market and offering</a:t>
-            </a:r>
-            <a:endParaRPr lang="en-US" sz="1250" dirty="0"/>
-          </a:p>
-          <a:p>
-            <a:pPr marL="342900" indent="-342900">
-              <a:spcAft>
-                <a:spcPts val="900"/>
-              </a:spcAft>
-              <a:buSzPct val="100000"/>
-              <a:buChar char="•"/>
-            </a:pPr>
-            <a:r>
-              <a:rPr lang="en-US" sz="1250" dirty="0">
-                <a:solidFill>
-                  <a:srgbClr val="44506B"/>
-                </a:solidFill>
-                <a:latin typeface="Calibri" pitchFamily="34" charset="0"/>
-                <a:ea typeface="Calibri" pitchFamily="34" charset="-122"/>
-                <a:cs typeface="Calibri" pitchFamily="34" charset="-120"/>
-              </a:rPr>
-              <a:t>Assign an owner to every account</a:t>
-            </a:r>
-            <a:endParaRPr lang="en-US" sz="1250" dirty="0"/>
-          </a:p>
-          <a:p>
-            <a:pPr marL="342900" indent="-342900">
-              <a:spcAft>
-                <a:spcPts val="900"/>
-              </a:spcAft>
-              <a:buSzPct val="100000"/>
-              <a:buChar char="•"/>
-            </a:pPr>
-            <a:r>
-              <a:rPr lang="en-US" sz="1250" dirty="0">
-                <a:solidFill>
-                  <a:srgbClr val="44506B"/>
-                </a:solidFill>
-                <a:latin typeface="Calibri" pitchFamily="34" charset="0"/>
-                <a:ea typeface="Calibri" pitchFamily="34" charset="-122"/>
-                <a:cs typeface="Calibri" pitchFamily="34" charset="-120"/>
-              </a:rPr>
-              <a:t>Build the first-90-days activation plan</a:t>
-            </a:r>
-            <a:endParaRPr lang="en-US" sz="1250" dirty="0"/>
-          </a:p>
-          <a:p>
-            <a:pPr marL="342900" indent="-342900">
-              <a:spcAft>
-                <a:spcPts val="900"/>
-              </a:spcAft>
-              <a:buSzPct val="100000"/>
-              <a:buChar char="•"/>
-            </a:pPr>
-            <a:r>
-              <a:rPr lang="en-US" sz="1250" dirty="0">
-                <a:solidFill>
-                  <a:srgbClr val="44506B"/>
-                </a:solidFill>
-                <a:latin typeface="Calibri" pitchFamily="34" charset="0"/>
-                <a:ea typeface="Calibri" pitchFamily="34" charset="-122"/>
-                <a:cs typeface="Calibri" pitchFamily="34" charset="-120"/>
-              </a:rPr>
-              <a:t>Review and sign off</a:t>
-            </a:r>
-            <a:endParaRPr lang="en-US" sz="1250" dirty="0"/>
-          </a:p>
-        </p:txBody>
-      </p:sp>
-      <p:sp>
-        <p:nvSpPr>
-          <p:cNvPr id="20" name="Text 18"/>
-          <p:cNvSpPr txBox="1"/>
-          <p:nvPr/>
-        </p:nvSpPr>
-        <p:spPr>
-          <a:xfrm>
-            <a:off x="8357616" y="4892040"/>
-            <a:ext cx="2880360" cy="594360"/>
-          </a:xfrm>
-          <a:prstGeom prst="rect">
-            <a:avLst/>
-          </a:prstGeom>
-          <a:noFill/>
-          <a:ln/>
-        </p:spPr>
-        <p:txBody>
-          <a:bodyPr wrap="square" lIns="0" tIns="0" rIns="0" bIns="0" rtlCol="0" anchor="ctr"/>
-          <a:lstStyle/>
-          <a:p>
-            <a:pPr indent="0" marL="0">
-              <a:buNone/>
-            </a:pPr>
-            <a:r>
-              <a:rPr lang="en-US" sz="1200" b="1" dirty="0">
-                <a:solidFill>
-                  <a:srgbClr val="B8862B"/>
-                </a:solidFill>
-                <a:latin typeface="Calibri" pitchFamily="34" charset="0"/>
-                <a:ea typeface="Calibri" pitchFamily="34" charset="-122"/>
-                <a:cs typeface="Calibri" pitchFamily="34" charset="-120"/>
-              </a:rPr>
-              <a:t>Gate: strategy signed off</a:t>
-            </a:r>
-            <a:endParaRPr lang="en-US" sz="1200" dirty="0"/>
-          </a:p>
-        </p:txBody>
-      </p:sp>
-      <p:sp>
-        <p:nvSpPr>
-          <p:cNvPr id="21" name="Text 19"/>
-          <p:cNvSpPr txBox="1"/>
-          <p:nvPr/>
-        </p:nvSpPr>
-        <p:spPr>
-          <a:xfrm>
-            <a:off x="640080" y="5852160"/>
-            <a:ext cx="5486400" cy="320040"/>
-          </a:xfrm>
-          <a:prstGeom prst="rect">
-            <a:avLst/>
-          </a:prstGeom>
-          <a:noFill/>
-          <a:ln/>
-        </p:spPr>
-        <p:txBody>
-          <a:bodyPr wrap="square" lIns="0" tIns="0" rIns="0" bIns="0" rtlCol="0" anchor="ctr"/>
-          <a:lstStyle/>
-          <a:p>
-            <a:pPr indent="0" marL="0">
-              <a:buNone/>
-            </a:pPr>
-            <a:r>
-              <a:rPr lang="en-US" sz="1200" i="1" dirty="0">
-                <a:solidFill>
-                  <a:srgbClr val="8792AB"/>
-                </a:solidFill>
-                <a:latin typeface="Calibri" pitchFamily="34" charset="0"/>
-                <a:ea typeface="Calibri" pitchFamily="34" charset="-122"/>
-                <a:cs typeface="Calibri" pitchFamily="34" charset="-120"/>
-              </a:rPr>
-              <a:t>Start date to be defined at kick-off.</a:t>
-            </a:r>
-            <a:endParaRPr lang="en-US" sz="1200" dirty="0"/>
+              <a:rPr lang="en-US" sz="1300" i="1" dirty="0">
+                <a:solidFill>
+                  <a:srgbClr val="3E5C8A"/>
+                </a:solidFill>
+                <a:latin typeface="Calibri" pitchFamily="34" charset="0"/>
+                <a:ea typeface="Calibri" pitchFamily="34" charset="-122"/>
+                <a:cs typeface="Calibri" pitchFamily="34" charset="-120"/>
+              </a:rPr>
+              <a:t>Talent is treated as a strategy output, not an afterthought: targets we cannot staff are not targets.</a:t>
+            </a:r>
+            <a:endParaRPr lang="en-US" sz="1300" dirty="0"/>
           </a:p>
         </p:txBody>
       </p:sp>
@@ -8259,7 +9890,7 @@
     <p:bg>
       <p:bgPr>
         <a:solidFill>
-          <a:srgbClr val="1E2761"/>
+          <a:srgbClr val="FFFFFF"/>
         </a:solidFill>
       </p:bgPr>
     </p:bg>
@@ -8279,36 +9910,14 @@
       </p:grpSpPr>
       <p:sp>
         <p:nvSpPr>
-          <p:cNvPr id="2" name="Shape 0"/>
-          <p:cNvSpPr/>
-          <p:nvPr/>
-        </p:nvSpPr>
-        <p:spPr>
-          <a:xfrm>
-            <a:off x="-2011680" y="4023360"/>
-            <a:ext cx="5669280" cy="5669280"/>
-          </a:xfrm>
-          <a:prstGeom prst="ellipse">
-            <a:avLst/>
-          </a:prstGeom>
-          <a:solidFill>
-            <a:srgbClr val="3E5C8A">
-              <a:alpha val="45000"/>
-            </a:srgbClr>
-          </a:solidFill>
-          <a:ln/>
-        </p:spPr>
-      </p:sp>
-      <p:sp>
-        <p:nvSpPr>
-          <p:cNvPr id="3" name="Text 1"/>
-          <p:cNvSpPr txBox="1"/>
-          <p:nvPr/>
-        </p:nvSpPr>
-        <p:spPr>
-          <a:xfrm>
-            <a:off x="731520" y="548640"/>
-            <a:ext cx="10058400" cy="731520"/>
+          <p:cNvPr id="2" name="Text 0"/>
+          <p:cNvSpPr txBox="1"/>
+          <p:nvPr/>
+        </p:nvSpPr>
+        <p:spPr>
+          <a:xfrm>
+            <a:off x="640080" y="411480"/>
+            <a:ext cx="10881360" cy="685800"/>
           </a:xfrm>
           <a:prstGeom prst="rect">
             <a:avLst/>
@@ -8326,13 +9935,13 @@
             <a:r>
               <a:rPr lang="en-US" sz="3600" b="1" dirty="0">
                 <a:solidFill>
-                  <a:srgbClr val="FFFFFF"/>
+                  <a:srgbClr val="16203A"/>
                 </a:solidFill>
                 <a:latin typeface="Cambria" pitchFamily="34" charset="0"/>
                 <a:ea typeface="Cambria" pitchFamily="34" charset="-122"/>
                 <a:cs typeface="Cambria" pitchFamily="34" charset="-120"/>
               </a:rPr>
-              <a:t>How we run it</a:t>
+              <a:t>Eminence and positioning</a:t>
             </a:r>
             <a:endParaRPr lang="en-US" sz="3600" dirty="0"/>
           </a:p>
@@ -8340,14 +9949,14 @@
       </p:sp>
       <p:sp>
         <p:nvSpPr>
-          <p:cNvPr id="4" name="Text 2"/>
-          <p:cNvSpPr txBox="1"/>
-          <p:nvPr/>
-        </p:nvSpPr>
-        <p:spPr>
-          <a:xfrm>
-            <a:off x="731520" y="1298448"/>
-            <a:ext cx="10058400" cy="411480"/>
+          <p:cNvPr id="3" name="Text 1"/>
+          <p:cNvSpPr txBox="1"/>
+          <p:nvPr/>
+        </p:nvSpPr>
+        <p:spPr>
+          <a:xfrm>
+            <a:off x="640080" y="1133856"/>
+            <a:ext cx="10881360" cy="411480"/>
           </a:xfrm>
           <a:prstGeom prst="rect">
             <a:avLst/>
@@ -8365,17 +9974,39 @@
             <a:r>
               <a:rPr lang="en-US" sz="1450" dirty="0">
                 <a:solidFill>
-                  <a:srgbClr val="CADCFC"/>
-                </a:solidFill>
-                <a:latin typeface="Calibri" pitchFamily="34" charset="0"/>
-                <a:ea typeface="Calibri" pitchFamily="34" charset="-122"/>
-                <a:cs typeface="Calibri" pitchFamily="34" charset="-120"/>
-              </a:rPr>
-              <a:t>Cadence, inputs and the decisions we are asking for.</a:t>
+                  <a:srgbClr val="8792AB"/>
+                </a:solidFill>
+                <a:latin typeface="Calibri" pitchFamily="34" charset="0"/>
+                <a:ea typeface="Calibri" pitchFamily="34" charset="-122"/>
+                <a:cs typeface="Calibri" pitchFamily="34" charset="-120"/>
+              </a:rPr>
+              <a:t>How the market comes to know us for this.</a:t>
             </a:r>
             <a:endParaRPr lang="en-US" sz="1450" dirty="0"/>
           </a:p>
         </p:txBody>
+      </p:sp>
+      <p:sp>
+        <p:nvSpPr>
+          <p:cNvPr id="4" name="Shape 2"/>
+          <p:cNvSpPr/>
+          <p:nvPr/>
+        </p:nvSpPr>
+        <p:spPr>
+          <a:xfrm>
+            <a:off x="640080" y="1874520"/>
+            <a:ext cx="2029968" cy="2651760"/>
+          </a:xfrm>
+          <a:prstGeom prst="roundRect">
+            <a:avLst>
+              <a:gd name="adj" fmla="val 5405"/>
+            </a:avLst>
+          </a:prstGeom>
+          <a:solidFill>
+            <a:srgbClr val="E4EBF7"/>
+          </a:solidFill>
+          <a:ln/>
+        </p:spPr>
       </p:sp>
       <p:sp>
         <p:nvSpPr>
@@ -8385,8 +10016,8 @@
         </p:nvSpPr>
         <p:spPr>
           <a:xfrm>
-            <a:off x="731520" y="1965960"/>
-            <a:ext cx="384048" cy="384048"/>
+            <a:off x="868680" y="2103120"/>
+            <a:ext cx="365760" cy="365760"/>
           </a:xfrm>
           <a:prstGeom prst="ellipse">
             <a:avLst/>
@@ -8405,8 +10036,8 @@
         </p:nvSpPr>
         <p:spPr>
           <a:xfrm>
-            <a:off x="731520" y="1965960"/>
-            <a:ext cx="384048" cy="384048"/>
+            <a:off x="868680" y="2103120"/>
+            <a:ext cx="365760" cy="365760"/>
           </a:xfrm>
           <a:prstGeom prst="rect">
             <a:avLst/>
@@ -8444,8 +10075,8 @@
         </p:nvSpPr>
         <p:spPr>
           <a:xfrm>
-            <a:off x="1280160" y="1947672"/>
-            <a:ext cx="2926080" cy="365760"/>
+            <a:off x="868680" y="2578608"/>
+            <a:ext cx="1691640" cy="365760"/>
           </a:xfrm>
           <a:prstGeom prst="rect">
             <a:avLst/>
@@ -8461,17 +10092,17 @@
               <a:buNone/>
             </a:pPr>
             <a:r>
-              <a:rPr lang="en-US" sz="1900" b="1" dirty="0">
-                <a:solidFill>
-                  <a:srgbClr val="FFFFFF"/>
-                </a:solidFill>
-                <a:latin typeface="Calibri" pitchFamily="34" charset="0"/>
-                <a:ea typeface="Calibri" pitchFamily="34" charset="-122"/>
-                <a:cs typeface="Calibri" pitchFamily="34" charset="-120"/>
-              </a:rPr>
-              <a:t>Cadence</a:t>
-            </a:r>
-            <a:endParaRPr lang="en-US" sz="1900" dirty="0"/>
+              <a:rPr lang="en-US" sz="1500" b="1" dirty="0">
+                <a:solidFill>
+                  <a:srgbClr val="16203A"/>
+                </a:solidFill>
+                <a:latin typeface="Calibri" pitchFamily="34" charset="0"/>
+                <a:ea typeface="Calibri" pitchFamily="34" charset="-122"/>
+                <a:cs typeface="Calibri" pitchFamily="34" charset="-120"/>
+              </a:rPr>
+              <a:t>Published views</a:t>
+            </a:r>
+            <a:endParaRPr lang="en-US" sz="1500" dirty="0"/>
           </a:p>
         </p:txBody>
       </p:sp>
@@ -8483,8 +10114,8 @@
         </p:nvSpPr>
         <p:spPr>
           <a:xfrm>
-            <a:off x="731520" y="2606040"/>
-            <a:ext cx="3291840" cy="2560320"/>
+            <a:off x="868680" y="3063240"/>
+            <a:ext cx="1645920" cy="1280160"/>
           </a:xfrm>
           <a:prstGeom prst="rect">
             <a:avLst/>
@@ -8498,99 +10129,305 @@
           <a:p>
             <a:pPr marL="342900" indent="-342900">
               <a:spcAft>
-                <a:spcPts val="1000"/>
+                <a:spcPts val="600"/>
               </a:spcAft>
               <a:buSzPct val="100000"/>
               <a:buChar char="•"/>
             </a:pPr>
             <a:r>
-              <a:rPr lang="en-US" sz="1300" dirty="0">
-                <a:solidFill>
-                  <a:srgbClr val="CADCFC"/>
-                </a:solidFill>
-                <a:latin typeface="Calibri" pitchFamily="34" charset="0"/>
-                <a:ea typeface="Calibri" pitchFamily="34" charset="-122"/>
-                <a:cs typeface="Calibri" pitchFamily="34" charset="-120"/>
-              </a:rPr>
-              <a:t>Kick-off to confirm scope and principles</a:t>
-            </a:r>
-            <a:endParaRPr lang="en-US" sz="1300" dirty="0"/>
+              <a:rPr lang="en-US" sz="1150" dirty="0">
+                <a:solidFill>
+                  <a:srgbClr val="44506B"/>
+                </a:solidFill>
+                <a:latin typeface="Calibri" pitchFamily="34" charset="0"/>
+                <a:ea typeface="Calibri" pitchFamily="34" charset="-122"/>
+                <a:cs typeface="Calibri" pitchFamily="34" charset="-120"/>
+              </a:rPr>
+              <a:t>Points of view</a:t>
+            </a:r>
+            <a:endParaRPr lang="en-US" sz="1150" dirty="0"/>
           </a:p>
           <a:p>
             <a:pPr marL="342900" indent="-342900">
               <a:spcAft>
-                <a:spcPts val="1000"/>
+                <a:spcPts val="600"/>
               </a:spcAft>
               <a:buSzPct val="100000"/>
               <a:buChar char="•"/>
             </a:pPr>
             <a:r>
-              <a:rPr lang="en-US" sz="1300" dirty="0">
-                <a:solidFill>
-                  <a:srgbClr val="CADCFC"/>
-                </a:solidFill>
-                <a:latin typeface="Calibri" pitchFamily="34" charset="0"/>
-                <a:ea typeface="Calibri" pitchFamily="34" charset="-122"/>
-                <a:cs typeface="Calibri" pitchFamily="34" charset="-120"/>
-              </a:rPr>
-              <a:t>Weekly working session per workstream</a:t>
-            </a:r>
-            <a:endParaRPr lang="en-US" sz="1300" dirty="0"/>
+              <a:rPr lang="en-US" sz="1150" dirty="0">
+                <a:solidFill>
+                  <a:srgbClr val="44506B"/>
+                </a:solidFill>
+                <a:latin typeface="Calibri" pitchFamily="34" charset="0"/>
+                <a:ea typeface="Calibri" pitchFamily="34" charset="-122"/>
+                <a:cs typeface="Calibri" pitchFamily="34" charset="-120"/>
+              </a:rPr>
+              <a:t>Articles</a:t>
+            </a:r>
+            <a:endParaRPr lang="en-US" sz="1150" dirty="0"/>
           </a:p>
           <a:p>
             <a:pPr marL="342900" indent="-342900">
               <a:spcAft>
-                <a:spcPts val="1000"/>
+                <a:spcPts val="600"/>
               </a:spcAft>
               <a:buSzPct val="100000"/>
               <a:buChar char="•"/>
             </a:pPr>
             <a:r>
-              <a:rPr lang="en-US" sz="1300" dirty="0">
-                <a:solidFill>
-                  <a:srgbClr val="CADCFC"/>
-                </a:solidFill>
-                <a:latin typeface="Calibri" pitchFamily="34" charset="0"/>
-                <a:ea typeface="Calibri" pitchFamily="34" charset="-122"/>
-                <a:cs typeface="Calibri" pitchFamily="34" charset="-120"/>
-              </a:rPr>
-              <a:t>Checkpoint at the end of each week</a:t>
-            </a:r>
-            <a:endParaRPr lang="en-US" sz="1300" dirty="0"/>
-          </a:p>
+              <a:rPr lang="en-US" sz="1150" dirty="0">
+                <a:solidFill>
+                  <a:srgbClr val="44506B"/>
+                </a:solidFill>
+                <a:latin typeface="Calibri" pitchFamily="34" charset="0"/>
+                <a:ea typeface="Calibri" pitchFamily="34" charset="-122"/>
+                <a:cs typeface="Calibri" pitchFamily="34" charset="-120"/>
+              </a:rPr>
+              <a:t>Benchmark reports</a:t>
+            </a:r>
+            <a:endParaRPr lang="en-US" sz="1150" dirty="0"/>
+          </a:p>
+        </p:txBody>
+      </p:sp>
+      <p:sp>
+        <p:nvSpPr>
+          <p:cNvPr id="9" name="Shape 7"/>
+          <p:cNvSpPr/>
+          <p:nvPr/>
+        </p:nvSpPr>
+        <p:spPr>
+          <a:xfrm>
+            <a:off x="2852928" y="1874520"/>
+            <a:ext cx="2029968" cy="2651760"/>
+          </a:xfrm>
+          <a:prstGeom prst="roundRect">
+            <a:avLst>
+              <a:gd name="adj" fmla="val 5405"/>
+            </a:avLst>
+          </a:prstGeom>
+          <a:solidFill>
+            <a:srgbClr val="EDF2FA"/>
+          </a:solidFill>
+          <a:ln/>
+        </p:spPr>
+      </p:sp>
+      <p:sp>
+        <p:nvSpPr>
+          <p:cNvPr id="10" name="Shape 8"/>
+          <p:cNvSpPr/>
+          <p:nvPr/>
+        </p:nvSpPr>
+        <p:spPr>
+          <a:xfrm>
+            <a:off x="3081528" y="2103120"/>
+            <a:ext cx="365760" cy="365760"/>
+          </a:xfrm>
+          <a:prstGeom prst="ellipse">
+            <a:avLst/>
+          </a:prstGeom>
+          <a:solidFill>
+            <a:srgbClr val="3E5C8A"/>
+          </a:solidFill>
+          <a:ln/>
+        </p:spPr>
+      </p:sp>
+      <p:sp>
+        <p:nvSpPr>
+          <p:cNvPr id="11" name="Text 9"/>
+          <p:cNvSpPr txBox="1"/>
+          <p:nvPr/>
+        </p:nvSpPr>
+        <p:spPr>
+          <a:xfrm>
+            <a:off x="3081528" y="2103120"/>
+            <a:ext cx="365760" cy="365760"/>
+          </a:xfrm>
+          <a:prstGeom prst="rect">
+            <a:avLst/>
+          </a:prstGeom>
+          <a:noFill/>
+          <a:ln/>
+        </p:spPr>
+        <p:txBody>
+          <a:bodyPr wrap="square" lIns="0" tIns="0" rIns="0" bIns="0" rtlCol="0" anchor="ctr"/>
+          <a:lstStyle/>
+          <a:p>
+            <a:pPr algn="ctr" indent="0" marL="0">
+              <a:buNone/>
+            </a:pPr>
+            <a:r>
+              <a:rPr lang="en-US" sz="1200" b="1" dirty="0">
+                <a:solidFill>
+                  <a:srgbClr val="FFFFFF"/>
+                </a:solidFill>
+                <a:latin typeface="Calibri" pitchFamily="34" charset="0"/>
+                <a:ea typeface="Calibri" pitchFamily="34" charset="-122"/>
+                <a:cs typeface="Calibri" pitchFamily="34" charset="-120"/>
+              </a:rPr>
+              <a:t>2</a:t>
+            </a:r>
+            <a:endParaRPr lang="en-US" sz="1200" dirty="0"/>
+          </a:p>
+        </p:txBody>
+      </p:sp>
+      <p:sp>
+        <p:nvSpPr>
+          <p:cNvPr id="12" name="Text 10"/>
+          <p:cNvSpPr txBox="1"/>
+          <p:nvPr/>
+        </p:nvSpPr>
+        <p:spPr>
+          <a:xfrm>
+            <a:off x="3081528" y="2578608"/>
+            <a:ext cx="1691640" cy="365760"/>
+          </a:xfrm>
+          <a:prstGeom prst="rect">
+            <a:avLst/>
+          </a:prstGeom>
+          <a:noFill/>
+          <a:ln/>
+        </p:spPr>
+        <p:txBody>
+          <a:bodyPr wrap="square" lIns="0" tIns="0" rIns="0" bIns="0" rtlCol="0" anchor="ctr"/>
+          <a:lstStyle/>
+          <a:p>
+            <a:pPr indent="0" marL="0">
+              <a:buNone/>
+            </a:pPr>
+            <a:r>
+              <a:rPr lang="en-US" sz="1500" b="1" dirty="0">
+                <a:solidFill>
+                  <a:srgbClr val="16203A"/>
+                </a:solidFill>
+                <a:latin typeface="Calibri" pitchFamily="34" charset="0"/>
+                <a:ea typeface="Calibri" pitchFamily="34" charset="-122"/>
+                <a:cs typeface="Calibri" pitchFamily="34" charset="-120"/>
+              </a:rPr>
+              <a:t>Stages</a:t>
+            </a:r>
+            <a:endParaRPr lang="en-US" sz="1500" dirty="0"/>
+          </a:p>
+        </p:txBody>
+      </p:sp>
+      <p:sp>
+        <p:nvSpPr>
+          <p:cNvPr id="13" name="Text 11"/>
+          <p:cNvSpPr txBox="1"/>
+          <p:nvPr/>
+        </p:nvSpPr>
+        <p:spPr>
+          <a:xfrm>
+            <a:off x="3081528" y="3063240"/>
+            <a:ext cx="1645920" cy="1280160"/>
+          </a:xfrm>
+          <a:prstGeom prst="rect">
+            <a:avLst/>
+          </a:prstGeom>
+          <a:noFill/>
+          <a:ln/>
+        </p:spPr>
+        <p:txBody>
+          <a:bodyPr wrap="square" lIns="0" tIns="0" rIns="0" bIns="0" rtlCol="0" anchor="ctr"/>
+          <a:lstStyle/>
           <a:p>
             <a:pPr marL="342900" indent="-342900">
               <a:spcAft>
-                <a:spcPts val="1000"/>
+                <a:spcPts val="600"/>
               </a:spcAft>
               <a:buSzPct val="100000"/>
               <a:buChar char="•"/>
             </a:pPr>
             <a:r>
-              <a:rPr lang="en-US" sz="1300" dirty="0">
-                <a:solidFill>
-                  <a:srgbClr val="CADCFC"/>
-                </a:solidFill>
-                <a:latin typeface="Calibri" pitchFamily="34" charset="0"/>
-                <a:ea typeface="Calibri" pitchFamily="34" charset="-122"/>
-                <a:cs typeface="Calibri" pitchFamily="34" charset="-120"/>
-              </a:rPr>
-              <a:t>Sign-off session in week three</a:t>
-            </a:r>
-            <a:endParaRPr lang="en-US" sz="1300" dirty="0"/>
-          </a:p>
-        </p:txBody>
-      </p:sp>
-      <p:sp>
-        <p:nvSpPr>
-          <p:cNvPr id="9" name="Shape 7"/>
+              <a:rPr lang="en-US" sz="1150" dirty="0">
+                <a:solidFill>
+                  <a:srgbClr val="44506B"/>
+                </a:solidFill>
+                <a:latin typeface="Calibri" pitchFamily="34" charset="0"/>
+                <a:ea typeface="Calibri" pitchFamily="34" charset="-122"/>
+                <a:cs typeface="Calibri" pitchFamily="34" charset="-120"/>
+              </a:rPr>
+              <a:t>Industry conferences</a:t>
+            </a:r>
+            <a:endParaRPr lang="en-US" sz="1150" dirty="0"/>
+          </a:p>
+          <a:p>
+            <a:pPr marL="342900" indent="-342900">
+              <a:spcAft>
+                <a:spcPts val="600"/>
+              </a:spcAft>
+              <a:buSzPct val="100000"/>
+              <a:buChar char="•"/>
+            </a:pPr>
+            <a:r>
+              <a:rPr lang="en-US" sz="1150" dirty="0">
+                <a:solidFill>
+                  <a:srgbClr val="44506B"/>
+                </a:solidFill>
+                <a:latin typeface="Calibri" pitchFamily="34" charset="0"/>
+                <a:ea typeface="Calibri" pitchFamily="34" charset="-122"/>
+                <a:cs typeface="Calibri" pitchFamily="34" charset="-120"/>
+              </a:rPr>
+              <a:t>Flagship FSI events</a:t>
+            </a:r>
+            <a:endParaRPr lang="en-US" sz="1150" dirty="0"/>
+          </a:p>
+          <a:p>
+            <a:pPr marL="342900" indent="-342900">
+              <a:spcAft>
+                <a:spcPts val="600"/>
+              </a:spcAft>
+              <a:buSzPct val="100000"/>
+              <a:buChar char="•"/>
+            </a:pPr>
+            <a:r>
+              <a:rPr lang="en-US" sz="1150" dirty="0">
+                <a:solidFill>
+                  <a:srgbClr val="44506B"/>
+                </a:solidFill>
+                <a:latin typeface="Calibri" pitchFamily="34" charset="0"/>
+                <a:ea typeface="Calibri" pitchFamily="34" charset="-122"/>
+                <a:cs typeface="Calibri" pitchFamily="34" charset="-120"/>
+              </a:rPr>
+              <a:t>Panels and keynotes</a:t>
+            </a:r>
+            <a:endParaRPr lang="en-US" sz="1150" dirty="0"/>
+          </a:p>
+        </p:txBody>
+      </p:sp>
+      <p:sp>
+        <p:nvSpPr>
+          <p:cNvPr id="14" name="Shape 12"/>
           <p:cNvSpPr/>
           <p:nvPr/>
         </p:nvSpPr>
         <p:spPr>
           <a:xfrm>
-            <a:off x="4434840" y="1965960"/>
-            <a:ext cx="384048" cy="384048"/>
+            <a:off x="5065776" y="1874520"/>
+            <a:ext cx="2029968" cy="2651760"/>
+          </a:xfrm>
+          <a:prstGeom prst="roundRect">
+            <a:avLst>
+              <a:gd name="adj" fmla="val 5405"/>
+            </a:avLst>
+          </a:prstGeom>
+          <a:solidFill>
+            <a:srgbClr val="E4EBF7"/>
+          </a:solidFill>
+          <a:ln/>
+        </p:spPr>
+      </p:sp>
+      <p:sp>
+        <p:nvSpPr>
+          <p:cNvPr id="15" name="Shape 13"/>
+          <p:cNvSpPr/>
+          <p:nvPr/>
+        </p:nvSpPr>
+        <p:spPr>
+          <a:xfrm>
+            <a:off x="5294376" y="2103120"/>
+            <a:ext cx="365760" cy="365760"/>
           </a:xfrm>
           <a:prstGeom prst="ellipse">
             <a:avLst/>
@@ -8603,14 +10440,14 @@
       </p:sp>
       <p:sp>
         <p:nvSpPr>
-          <p:cNvPr id="10" name="Text 8"/>
-          <p:cNvSpPr txBox="1"/>
-          <p:nvPr/>
-        </p:nvSpPr>
-        <p:spPr>
-          <a:xfrm>
-            <a:off x="4434840" y="1965960"/>
-            <a:ext cx="384048" cy="384048"/>
+          <p:cNvPr id="16" name="Text 14"/>
+          <p:cNvSpPr txBox="1"/>
+          <p:nvPr/>
+        </p:nvSpPr>
+        <p:spPr>
+          <a:xfrm>
+            <a:off x="5294376" y="2103120"/>
+            <a:ext cx="365760" cy="365760"/>
           </a:xfrm>
           <a:prstGeom prst="rect">
             <a:avLst/>
@@ -8634,7 +10471,7 @@
                 <a:ea typeface="Calibri" pitchFamily="34" charset="-122"/>
                 <a:cs typeface="Calibri" pitchFamily="34" charset="-120"/>
               </a:rPr>
-              <a:t>2</a:t>
+              <a:t>3</a:t>
             </a:r>
             <a:endParaRPr lang="en-US" sz="1200" dirty="0"/>
           </a:p>
@@ -8642,14 +10479,14 @@
       </p:sp>
       <p:sp>
         <p:nvSpPr>
-          <p:cNvPr id="11" name="Text 9"/>
-          <p:cNvSpPr txBox="1"/>
-          <p:nvPr/>
-        </p:nvSpPr>
-        <p:spPr>
-          <a:xfrm>
-            <a:off x="4983480" y="1947672"/>
-            <a:ext cx="2926080" cy="365760"/>
+          <p:cNvPr id="17" name="Text 15"/>
+          <p:cNvSpPr txBox="1"/>
+          <p:nvPr/>
+        </p:nvSpPr>
+        <p:spPr>
+          <a:xfrm>
+            <a:off x="5294376" y="2578608"/>
+            <a:ext cx="1691640" cy="365760"/>
           </a:xfrm>
           <a:prstGeom prst="rect">
             <a:avLst/>
@@ -8665,30 +10502,30 @@
               <a:buNone/>
             </a:pPr>
             <a:r>
-              <a:rPr lang="en-US" sz="1900" b="1" dirty="0">
-                <a:solidFill>
-                  <a:srgbClr val="FFFFFF"/>
-                </a:solidFill>
-                <a:latin typeface="Calibri" pitchFamily="34" charset="0"/>
-                <a:ea typeface="Calibri" pitchFamily="34" charset="-122"/>
-                <a:cs typeface="Calibri" pitchFamily="34" charset="-120"/>
-              </a:rPr>
-              <a:t>Inputs we need</a:t>
-            </a:r>
-            <a:endParaRPr lang="en-US" sz="1900" dirty="0"/>
-          </a:p>
-        </p:txBody>
-      </p:sp>
-      <p:sp>
-        <p:nvSpPr>
-          <p:cNvPr id="12" name="Text 10"/>
-          <p:cNvSpPr txBox="1"/>
-          <p:nvPr/>
-        </p:nvSpPr>
-        <p:spPr>
-          <a:xfrm>
-            <a:off x="4434840" y="2606040"/>
-            <a:ext cx="3291840" cy="2560320"/>
+              <a:rPr lang="en-US" sz="1500" b="1" dirty="0">
+                <a:solidFill>
+                  <a:srgbClr val="16203A"/>
+                </a:solidFill>
+                <a:latin typeface="Calibri" pitchFamily="34" charset="0"/>
+                <a:ea typeface="Calibri" pitchFamily="34" charset="-122"/>
+                <a:cs typeface="Calibri" pitchFamily="34" charset="-120"/>
+              </a:rPr>
+              <a:t>Client formats</a:t>
+            </a:r>
+            <a:endParaRPr lang="en-US" sz="1500" dirty="0"/>
+          </a:p>
+        </p:txBody>
+      </p:sp>
+      <p:sp>
+        <p:nvSpPr>
+          <p:cNvPr id="18" name="Text 16"/>
+          <p:cNvSpPr txBox="1"/>
+          <p:nvPr/>
+        </p:nvSpPr>
+        <p:spPr>
+          <a:xfrm>
+            <a:off x="5294376" y="3063240"/>
+            <a:ext cx="1645920" cy="1280160"/>
           </a:xfrm>
           <a:prstGeom prst="rect">
             <a:avLst/>
@@ -8702,120 +10539,305 @@
           <a:p>
             <a:pPr marL="342900" indent="-342900">
               <a:spcAft>
-                <a:spcPts val="1000"/>
+                <a:spcPts val="600"/>
               </a:spcAft>
               <a:buSzPct val="100000"/>
               <a:buChar char="•"/>
             </a:pPr>
             <a:r>
-              <a:rPr lang="en-US" sz="1300" dirty="0">
-                <a:solidFill>
-                  <a:srgbClr val="CADCFC"/>
-                </a:solidFill>
-                <a:latin typeface="Calibri" pitchFamily="34" charset="0"/>
-                <a:ea typeface="Calibri" pitchFamily="34" charset="-122"/>
-                <a:cs typeface="Calibri" pitchFamily="34" charset="-120"/>
-              </a:rPr>
-              <a:t>Current pipeline and revenue by pillar</a:t>
-            </a:r>
-            <a:endParaRPr lang="en-US" sz="1300" dirty="0"/>
+              <a:rPr lang="en-US" sz="1150" dirty="0">
+                <a:solidFill>
+                  <a:srgbClr val="44506B"/>
+                </a:solidFill>
+                <a:latin typeface="Calibri" pitchFamily="34" charset="0"/>
+                <a:ea typeface="Calibri" pitchFamily="34" charset="-122"/>
+                <a:cs typeface="Calibri" pitchFamily="34" charset="-120"/>
+              </a:rPr>
+              <a:t>Executive workshops</a:t>
+            </a:r>
+            <a:endParaRPr lang="en-US" sz="1150" dirty="0"/>
           </a:p>
           <a:p>
             <a:pPr marL="342900" indent="-342900">
               <a:spcAft>
-                <a:spcPts val="1000"/>
+                <a:spcPts val="600"/>
               </a:spcAft>
               <a:buSzPct val="100000"/>
               <a:buChar char="•"/>
             </a:pPr>
             <a:r>
-              <a:rPr lang="en-US" sz="1300" dirty="0">
-                <a:solidFill>
-                  <a:srgbClr val="CADCFC"/>
-                </a:solidFill>
-                <a:latin typeface="Calibri" pitchFamily="34" charset="0"/>
-                <a:ea typeface="Calibri" pitchFamily="34" charset="-122"/>
-                <a:cs typeface="Calibri" pitchFamily="34" charset="-120"/>
-              </a:rPr>
-              <a:t>Existing account relationships</a:t>
-            </a:r>
-            <a:endParaRPr lang="en-US" sz="1300" dirty="0"/>
+              <a:rPr lang="en-US" sz="1150" dirty="0">
+                <a:solidFill>
+                  <a:srgbClr val="44506B"/>
+                </a:solidFill>
+                <a:latin typeface="Calibri" pitchFamily="34" charset="0"/>
+                <a:ea typeface="Calibri" pitchFamily="34" charset="-122"/>
+                <a:cs typeface="Calibri" pitchFamily="34" charset="-120"/>
+              </a:rPr>
+              <a:t>Seminars</a:t>
+            </a:r>
+            <a:endParaRPr lang="en-US" sz="1150" dirty="0"/>
           </a:p>
           <a:p>
             <a:pPr marL="342900" indent="-342900">
               <a:spcAft>
-                <a:spcPts val="1000"/>
+                <a:spcPts val="600"/>
               </a:spcAft>
               <a:buSzPct val="100000"/>
               <a:buChar char="•"/>
             </a:pPr>
             <a:r>
-              <a:rPr lang="en-US" sz="1300" dirty="0">
-                <a:solidFill>
-                  <a:srgbClr val="CADCFC"/>
-                </a:solidFill>
-                <a:latin typeface="Calibri" pitchFamily="34" charset="0"/>
-                <a:ea typeface="Calibri" pitchFamily="34" charset="-122"/>
-                <a:cs typeface="Calibri" pitchFamily="34" charset="-120"/>
-              </a:rPr>
-              <a:t>Alliance and partnership status</a:t>
-            </a:r>
-            <a:endParaRPr lang="en-US" sz="1300" dirty="0"/>
-          </a:p>
+              <a:rPr lang="en-US" sz="1150" dirty="0">
+                <a:solidFill>
+                  <a:srgbClr val="44506B"/>
+                </a:solidFill>
+                <a:latin typeface="Calibri" pitchFamily="34" charset="0"/>
+                <a:ea typeface="Calibri" pitchFamily="34" charset="-122"/>
+                <a:cs typeface="Calibri" pitchFamily="34" charset="-120"/>
+              </a:rPr>
+              <a:t>Roundtables</a:t>
+            </a:r>
+            <a:endParaRPr lang="en-US" sz="1150" dirty="0"/>
+          </a:p>
+        </p:txBody>
+      </p:sp>
+      <p:sp>
+        <p:nvSpPr>
+          <p:cNvPr id="19" name="Shape 17"/>
+          <p:cNvSpPr/>
+          <p:nvPr/>
+        </p:nvSpPr>
+        <p:spPr>
+          <a:xfrm>
+            <a:off x="7278624" y="1874520"/>
+            <a:ext cx="2029968" cy="2651760"/>
+          </a:xfrm>
+          <a:prstGeom prst="roundRect">
+            <a:avLst>
+              <a:gd name="adj" fmla="val 5405"/>
+            </a:avLst>
+          </a:prstGeom>
+          <a:solidFill>
+            <a:srgbClr val="EDF2FA"/>
+          </a:solidFill>
+          <a:ln/>
+        </p:spPr>
+      </p:sp>
+      <p:sp>
+        <p:nvSpPr>
+          <p:cNvPr id="20" name="Shape 18"/>
+          <p:cNvSpPr/>
+          <p:nvPr/>
+        </p:nvSpPr>
+        <p:spPr>
+          <a:xfrm>
+            <a:off x="7507224" y="2103120"/>
+            <a:ext cx="365760" cy="365760"/>
+          </a:xfrm>
+          <a:prstGeom prst="ellipse">
+            <a:avLst/>
+          </a:prstGeom>
+          <a:solidFill>
+            <a:srgbClr val="3E5C8A"/>
+          </a:solidFill>
+          <a:ln/>
+        </p:spPr>
+      </p:sp>
+      <p:sp>
+        <p:nvSpPr>
+          <p:cNvPr id="21" name="Text 19"/>
+          <p:cNvSpPr txBox="1"/>
+          <p:nvPr/>
+        </p:nvSpPr>
+        <p:spPr>
+          <a:xfrm>
+            <a:off x="7507224" y="2103120"/>
+            <a:ext cx="365760" cy="365760"/>
+          </a:xfrm>
+          <a:prstGeom prst="rect">
+            <a:avLst/>
+          </a:prstGeom>
+          <a:noFill/>
+          <a:ln/>
+        </p:spPr>
+        <p:txBody>
+          <a:bodyPr wrap="square" lIns="0" tIns="0" rIns="0" bIns="0" rtlCol="0" anchor="ctr"/>
+          <a:lstStyle/>
+          <a:p>
+            <a:pPr algn="ctr" indent="0" marL="0">
+              <a:buNone/>
+            </a:pPr>
+            <a:r>
+              <a:rPr lang="en-US" sz="1200" b="1" dirty="0">
+                <a:solidFill>
+                  <a:srgbClr val="FFFFFF"/>
+                </a:solidFill>
+                <a:latin typeface="Calibri" pitchFamily="34" charset="0"/>
+                <a:ea typeface="Calibri" pitchFamily="34" charset="-122"/>
+                <a:cs typeface="Calibri" pitchFamily="34" charset="-120"/>
+              </a:rPr>
+              <a:t>4</a:t>
+            </a:r>
+            <a:endParaRPr lang="en-US" sz="1200" dirty="0"/>
+          </a:p>
+        </p:txBody>
+      </p:sp>
+      <p:sp>
+        <p:nvSpPr>
+          <p:cNvPr id="22" name="Text 20"/>
+          <p:cNvSpPr txBox="1"/>
+          <p:nvPr/>
+        </p:nvSpPr>
+        <p:spPr>
+          <a:xfrm>
+            <a:off x="7507224" y="2578608"/>
+            <a:ext cx="1691640" cy="365760"/>
+          </a:xfrm>
+          <a:prstGeom prst="rect">
+            <a:avLst/>
+          </a:prstGeom>
+          <a:noFill/>
+          <a:ln/>
+        </p:spPr>
+        <p:txBody>
+          <a:bodyPr wrap="square" lIns="0" tIns="0" rIns="0" bIns="0" rtlCol="0" anchor="ctr"/>
+          <a:lstStyle/>
+          <a:p>
+            <a:pPr indent="0" marL="0">
+              <a:buNone/>
+            </a:pPr>
+            <a:r>
+              <a:rPr lang="en-US" sz="1500" b="1" dirty="0">
+                <a:solidFill>
+                  <a:srgbClr val="16203A"/>
+                </a:solidFill>
+                <a:latin typeface="Calibri" pitchFamily="34" charset="0"/>
+                <a:ea typeface="Calibri" pitchFamily="34" charset="-122"/>
+                <a:cs typeface="Calibri" pitchFamily="34" charset="-120"/>
+              </a:rPr>
+              <a:t>Digital</a:t>
+            </a:r>
+            <a:endParaRPr lang="en-US" sz="1500" dirty="0"/>
+          </a:p>
+        </p:txBody>
+      </p:sp>
+      <p:sp>
+        <p:nvSpPr>
+          <p:cNvPr id="23" name="Text 21"/>
+          <p:cNvSpPr txBox="1"/>
+          <p:nvPr/>
+        </p:nvSpPr>
+        <p:spPr>
+          <a:xfrm>
+            <a:off x="7507224" y="3063240"/>
+            <a:ext cx="1645920" cy="1280160"/>
+          </a:xfrm>
+          <a:prstGeom prst="rect">
+            <a:avLst/>
+          </a:prstGeom>
+          <a:noFill/>
+          <a:ln/>
+        </p:spPr>
+        <p:txBody>
+          <a:bodyPr wrap="square" lIns="0" tIns="0" rIns="0" bIns="0" rtlCol="0" anchor="ctr"/>
+          <a:lstStyle/>
           <a:p>
             <a:pPr marL="342900" indent="-342900">
               <a:spcAft>
-                <a:spcPts val="1000"/>
+                <a:spcPts val="600"/>
               </a:spcAft>
               <a:buSzPct val="100000"/>
               <a:buChar char="•"/>
             </a:pPr>
             <a:r>
-              <a:rPr lang="en-US" sz="1300" dirty="0">
-                <a:solidFill>
-                  <a:srgbClr val="CADCFC"/>
-                </a:solidFill>
-                <a:latin typeface="Calibri" pitchFamily="34" charset="0"/>
-                <a:ea typeface="Calibri" pitchFamily="34" charset="-122"/>
-                <a:cs typeface="Calibri" pitchFamily="34" charset="-120"/>
-              </a:rPr>
-              <a:t>Delivery capacity and skills view</a:t>
-            </a:r>
-            <a:endParaRPr lang="en-US" sz="1300" dirty="0"/>
+              <a:rPr lang="en-US" sz="1150" dirty="0">
+                <a:solidFill>
+                  <a:srgbClr val="44506B"/>
+                </a:solidFill>
+                <a:latin typeface="Calibri" pitchFamily="34" charset="0"/>
+                <a:ea typeface="Calibri" pitchFamily="34" charset="-122"/>
+                <a:cs typeface="Calibri" pitchFamily="34" charset="-120"/>
+              </a:rPr>
+              <a:t>Podcasts</a:t>
+            </a:r>
+            <a:endParaRPr lang="en-US" sz="1150" dirty="0"/>
           </a:p>
           <a:p>
             <a:pPr marL="342900" indent="-342900">
               <a:spcAft>
-                <a:spcPts val="1000"/>
+                <a:spcPts val="600"/>
               </a:spcAft>
               <a:buSzPct val="100000"/>
               <a:buChar char="•"/>
             </a:pPr>
             <a:r>
-              <a:rPr lang="en-US" sz="1300" dirty="0">
-                <a:solidFill>
-                  <a:srgbClr val="CADCFC"/>
-                </a:solidFill>
-                <a:latin typeface="Calibri" pitchFamily="34" charset="0"/>
-                <a:ea typeface="Calibri" pitchFamily="34" charset="-122"/>
-                <a:cs typeface="Calibri" pitchFamily="34" charset="-120"/>
-              </a:rPr>
-              <a:t>Historical deal values</a:t>
-            </a:r>
-            <a:endParaRPr lang="en-US" sz="1300" dirty="0"/>
-          </a:p>
-        </p:txBody>
-      </p:sp>
-      <p:sp>
-        <p:nvSpPr>
-          <p:cNvPr id="13" name="Shape 11"/>
+              <a:rPr lang="en-US" sz="1150" dirty="0">
+                <a:solidFill>
+                  <a:srgbClr val="44506B"/>
+                </a:solidFill>
+                <a:latin typeface="Calibri" pitchFamily="34" charset="0"/>
+                <a:ea typeface="Calibri" pitchFamily="34" charset="-122"/>
+                <a:cs typeface="Calibri" pitchFamily="34" charset="-120"/>
+              </a:rPr>
+              <a:t>Webinars</a:t>
+            </a:r>
+            <a:endParaRPr lang="en-US" sz="1150" dirty="0"/>
+          </a:p>
+          <a:p>
+            <a:pPr marL="342900" indent="-342900">
+              <a:spcAft>
+                <a:spcPts val="600"/>
+              </a:spcAft>
+              <a:buSzPct val="100000"/>
+              <a:buChar char="•"/>
+            </a:pPr>
+            <a:r>
+              <a:rPr lang="en-US" sz="1150" dirty="0">
+                <a:solidFill>
+                  <a:srgbClr val="44506B"/>
+                </a:solidFill>
+                <a:latin typeface="Calibri" pitchFamily="34" charset="0"/>
+                <a:ea typeface="Calibri" pitchFamily="34" charset="-122"/>
+                <a:cs typeface="Calibri" pitchFamily="34" charset="-120"/>
+              </a:rPr>
+              <a:t>Social presence</a:t>
+            </a:r>
+            <a:endParaRPr lang="en-US" sz="1150" dirty="0"/>
+          </a:p>
+        </p:txBody>
+      </p:sp>
+      <p:sp>
+        <p:nvSpPr>
+          <p:cNvPr id="24" name="Shape 22"/>
           <p:cNvSpPr/>
           <p:nvPr/>
         </p:nvSpPr>
         <p:spPr>
           <a:xfrm>
-            <a:off x="8138160" y="1965960"/>
-            <a:ext cx="384048" cy="384048"/>
+            <a:off x="9491472" y="1874520"/>
+            <a:ext cx="2029968" cy="2651760"/>
+          </a:xfrm>
+          <a:prstGeom prst="roundRect">
+            <a:avLst>
+              <a:gd name="adj" fmla="val 5405"/>
+            </a:avLst>
+          </a:prstGeom>
+          <a:solidFill>
+            <a:srgbClr val="E4EBF7"/>
+          </a:solidFill>
+          <a:ln/>
+        </p:spPr>
+      </p:sp>
+      <p:sp>
+        <p:nvSpPr>
+          <p:cNvPr id="25" name="Shape 23"/>
+          <p:cNvSpPr/>
+          <p:nvPr/>
+        </p:nvSpPr>
+        <p:spPr>
+          <a:xfrm>
+            <a:off x="9720072" y="2103120"/>
+            <a:ext cx="365760" cy="365760"/>
           </a:xfrm>
           <a:prstGeom prst="ellipse">
             <a:avLst/>
@@ -8828,14 +10850,14 @@
       </p:sp>
       <p:sp>
         <p:nvSpPr>
-          <p:cNvPr id="14" name="Text 12"/>
-          <p:cNvSpPr txBox="1"/>
-          <p:nvPr/>
-        </p:nvSpPr>
-        <p:spPr>
-          <a:xfrm>
-            <a:off x="8138160" y="1965960"/>
-            <a:ext cx="384048" cy="384048"/>
+          <p:cNvPr id="26" name="Text 24"/>
+          <p:cNvSpPr txBox="1"/>
+          <p:nvPr/>
+        </p:nvSpPr>
+        <p:spPr>
+          <a:xfrm>
+            <a:off x="9720072" y="2103120"/>
+            <a:ext cx="365760" cy="365760"/>
           </a:xfrm>
           <a:prstGeom prst="rect">
             <a:avLst/>
@@ -8859,7 +10881,7 @@
                 <a:ea typeface="Calibri" pitchFamily="34" charset="-122"/>
                 <a:cs typeface="Calibri" pitchFamily="34" charset="-120"/>
               </a:rPr>
-              <a:t>3</a:t>
+              <a:t>5</a:t>
             </a:r>
             <a:endParaRPr lang="en-US" sz="1200" dirty="0"/>
           </a:p>
@@ -8867,14 +10889,14 @@
       </p:sp>
       <p:sp>
         <p:nvSpPr>
-          <p:cNvPr id="15" name="Text 13"/>
-          <p:cNvSpPr txBox="1"/>
-          <p:nvPr/>
-        </p:nvSpPr>
-        <p:spPr>
-          <a:xfrm>
-            <a:off x="8686800" y="1947672"/>
-            <a:ext cx="2926080" cy="365760"/>
+          <p:cNvPr id="27" name="Text 25"/>
+          <p:cNvSpPr txBox="1"/>
+          <p:nvPr/>
+        </p:nvSpPr>
+        <p:spPr>
+          <a:xfrm>
+            <a:off x="9720072" y="2578608"/>
+            <a:ext cx="1691640" cy="365760"/>
           </a:xfrm>
           <a:prstGeom prst="rect">
             <a:avLst/>
@@ -8890,30 +10912,30 @@
               <a:buNone/>
             </a:pPr>
             <a:r>
-              <a:rPr lang="en-US" sz="1900" b="1" dirty="0">
-                <a:solidFill>
-                  <a:srgbClr val="FFFFFF"/>
-                </a:solidFill>
-                <a:latin typeface="Calibri" pitchFamily="34" charset="0"/>
-                <a:ea typeface="Calibri" pitchFamily="34" charset="-122"/>
-                <a:cs typeface="Calibri" pitchFamily="34" charset="-120"/>
-              </a:rPr>
-              <a:t>Decisions requested</a:t>
-            </a:r>
-            <a:endParaRPr lang="en-US" sz="1900" dirty="0"/>
-          </a:p>
-        </p:txBody>
-      </p:sp>
-      <p:sp>
-        <p:nvSpPr>
-          <p:cNvPr id="16" name="Text 14"/>
-          <p:cNvSpPr txBox="1"/>
-          <p:nvPr/>
-        </p:nvSpPr>
-        <p:spPr>
-          <a:xfrm>
-            <a:off x="8138160" y="2606040"/>
-            <a:ext cx="3291840" cy="2560320"/>
+              <a:rPr lang="en-US" sz="1500" b="1" dirty="0">
+                <a:solidFill>
+                  <a:srgbClr val="16203A"/>
+                </a:solidFill>
+                <a:latin typeface="Calibri" pitchFamily="34" charset="0"/>
+                <a:ea typeface="Calibri" pitchFamily="34" charset="-122"/>
+                <a:cs typeface="Calibri" pitchFamily="34" charset="-120"/>
+              </a:rPr>
+              <a:t>Partner-led</a:t>
+            </a:r>
+            <a:endParaRPr lang="en-US" sz="1500" dirty="0"/>
+          </a:p>
+        </p:txBody>
+      </p:sp>
+      <p:sp>
+        <p:nvSpPr>
+          <p:cNvPr id="28" name="Text 26"/>
+          <p:cNvSpPr txBox="1"/>
+          <p:nvPr/>
+        </p:nvSpPr>
+        <p:spPr>
+          <a:xfrm>
+            <a:off x="9720072" y="3063240"/>
+            <a:ext cx="1645920" cy="1280160"/>
           </a:xfrm>
           <a:prstGeom prst="rect">
             <a:avLst/>
@@ -8927,55 +10949,116 @@
           <a:p>
             <a:pPr marL="342900" indent="-342900">
               <a:spcAft>
-                <a:spcPts val="1000"/>
+                <a:spcPts val="600"/>
               </a:spcAft>
               <a:buSzPct val="100000"/>
               <a:buChar char="•"/>
             </a:pPr>
             <a:r>
-              <a:rPr lang="en-US" sz="1300" dirty="0">
-                <a:solidFill>
-                  <a:srgbClr val="CADCFC"/>
-                </a:solidFill>
-                <a:latin typeface="Calibri" pitchFamily="34" charset="0"/>
-                <a:ea typeface="Calibri" pitchFamily="34" charset="-122"/>
-                <a:cs typeface="Calibri" pitchFamily="34" charset="-120"/>
-              </a:rPr>
-              <a:t>Priority markets and segments</a:t>
-            </a:r>
-            <a:endParaRPr lang="en-US" sz="1300" dirty="0"/>
+              <a:rPr lang="en-US" sz="1150" dirty="0">
+                <a:solidFill>
+                  <a:srgbClr val="44506B"/>
+                </a:solidFill>
+                <a:latin typeface="Calibri" pitchFamily="34" charset="0"/>
+                <a:ea typeface="Calibri" pitchFamily="34" charset="-122"/>
+                <a:cs typeface="Calibri" pitchFamily="34" charset="-120"/>
+              </a:rPr>
+              <a:t>Joint content</a:t>
+            </a:r>
+            <a:endParaRPr lang="en-US" sz="1150" dirty="0"/>
           </a:p>
           <a:p>
             <a:pPr marL="342900" indent="-342900">
               <a:spcAft>
-                <a:spcPts val="1000"/>
+                <a:spcPts val="600"/>
               </a:spcAft>
               <a:buSzPct val="100000"/>
               <a:buChar char="•"/>
             </a:pPr>
             <a:r>
-              <a:rPr lang="en-US" sz="1300" dirty="0">
-                <a:solidFill>
-                  <a:srgbClr val="CADCFC"/>
-                </a:solidFill>
-                <a:latin typeface="Calibri" pitchFamily="34" charset="0"/>
-                <a:ea typeface="Calibri" pitchFamily="34" charset="-122"/>
-                <a:cs typeface="Calibri" pitchFamily="34" charset="-120"/>
-              </a:rPr>
-              <a:t>Target account list</a:t>
-            </a:r>
-            <a:endParaRPr lang="en-US" sz="1300" dirty="0"/>
+              <a:rPr lang="en-US" sz="1150" dirty="0">
+                <a:solidFill>
+                  <a:srgbClr val="44506B"/>
+                </a:solidFill>
+                <a:latin typeface="Calibri" pitchFamily="34" charset="0"/>
+                <a:ea typeface="Calibri" pitchFamily="34" charset="-122"/>
+                <a:cs typeface="Calibri" pitchFamily="34" charset="-120"/>
+              </a:rPr>
+              <a:t>Alliance events</a:t>
+            </a:r>
+            <a:endParaRPr lang="en-US" sz="1150" dirty="0"/>
           </a:p>
           <a:p>
             <a:pPr marL="342900" indent="-342900">
               <a:spcAft>
-                <a:spcPts val="1000"/>
+                <a:spcPts val="600"/>
               </a:spcAft>
               <a:buSzPct val="100000"/>
               <a:buChar char="•"/>
             </a:pPr>
             <a:r>
-              <a:rPr lang="en-US" sz="1300" dirty="0">
+              <a:rPr lang="en-US" sz="1150" dirty="0">
+                <a:solidFill>
+                  <a:srgbClr val="44506B"/>
+                </a:solidFill>
+                <a:latin typeface="Calibri" pitchFamily="34" charset="0"/>
+                <a:ea typeface="Calibri" pitchFamily="34" charset="-122"/>
+                <a:cs typeface="Calibri" pitchFamily="34" charset="-120"/>
+              </a:rPr>
+              <a:t>Co-branded assets</a:t>
+            </a:r>
+            <a:endParaRPr lang="en-US" sz="1150" dirty="0"/>
+          </a:p>
+        </p:txBody>
+      </p:sp>
+      <p:sp>
+        <p:nvSpPr>
+          <p:cNvPr id="29" name="Shape 27"/>
+          <p:cNvSpPr/>
+          <p:nvPr/>
+        </p:nvSpPr>
+        <p:spPr>
+          <a:xfrm>
+            <a:off x="640080" y="4800600"/>
+            <a:ext cx="10881360" cy="960120"/>
+          </a:xfrm>
+          <a:prstGeom prst="roundRect">
+            <a:avLst>
+              <a:gd name="adj" fmla="val 9524"/>
+            </a:avLst>
+          </a:prstGeom>
+          <a:solidFill>
+            <a:srgbClr val="1E2761"/>
+          </a:solidFill>
+          <a:ln/>
+        </p:spPr>
+      </p:sp>
+      <p:sp>
+        <p:nvSpPr>
+          <p:cNvPr id="30" name="Text 28"/>
+          <p:cNvSpPr txBox="1"/>
+          <p:nvPr/>
+        </p:nvSpPr>
+        <p:spPr>
+          <a:xfrm>
+            <a:off x="914400" y="4800600"/>
+            <a:ext cx="10332720" cy="960120"/>
+          </a:xfrm>
+          <a:prstGeom prst="rect">
+            <a:avLst/>
+          </a:prstGeom>
+          <a:noFill/>
+          <a:ln/>
+        </p:spPr>
+        <p:txBody>
+          <a:bodyPr wrap="square" lIns="0" tIns="0" rIns="0" bIns="0" rtlCol="0" anchor="ctr"/>
+          <a:lstStyle/>
+          <a:p>
+            <a:pPr indent="0" marL="0">
+              <a:buNone/>
+            </a:pPr>
+            <a:r>
+              <a:rPr lang="en-US" sz="1350" dirty="0">
                 <a:solidFill>
                   <a:srgbClr val="CADCFC"/>
                 </a:solidFill>
@@ -8983,64 +11066,406 @@
                 <a:ea typeface="Calibri" pitchFamily="34" charset="-122"/>
                 <a:cs typeface="Calibri" pitchFamily="34" charset="-120"/>
               </a:rPr>
-              <a:t>Revenue and margin targets</a:t>
-            </a:r>
-            <a:endParaRPr lang="en-US" sz="1300" dirty="0"/>
-          </a:p>
+              <a:t>For each channel the plan must answer: which ones we commit to, at what frequency, who fronts them, which accounts they target, and how we measure the return.</a:t>
+            </a:r>
+            <a:endParaRPr lang="en-US" sz="1350" dirty="0"/>
+          </a:p>
+        </p:txBody>
+      </p:sp>
+      <p:sp>
+        <p:nvSpPr>
+          <p:cNvPr id="31" name="Shape 29"/>
+          <p:cNvSpPr/>
+          <p:nvPr/>
+        </p:nvSpPr>
+        <p:spPr>
+          <a:xfrm>
+            <a:off x="4251960" y="5989320"/>
+            <a:ext cx="3657600" cy="301752"/>
+          </a:xfrm>
+          <a:prstGeom prst="roundRect">
+            <a:avLst>
+              <a:gd name="adj" fmla="val 48485"/>
+            </a:avLst>
+          </a:prstGeom>
+          <a:solidFill>
+            <a:srgbClr val="FFFFFF"/>
+          </a:solidFill>
+          <a:ln w="12700">
+            <a:solidFill>
+              <a:srgbClr val="B8862B"/>
+            </a:solidFill>
+            <a:prstDash val="solid"/>
+          </a:ln>
+        </p:spPr>
+      </p:sp>
+      <p:sp>
+        <p:nvSpPr>
+          <p:cNvPr id="32" name="Text 30"/>
+          <p:cNvSpPr txBox="1"/>
+          <p:nvPr/>
+        </p:nvSpPr>
+        <p:spPr>
+          <a:xfrm>
+            <a:off x="4251960" y="5989320"/>
+            <a:ext cx="3657600" cy="301752"/>
+          </a:xfrm>
+          <a:prstGeom prst="rect">
+            <a:avLst/>
+          </a:prstGeom>
+          <a:noFill/>
+          <a:ln/>
+        </p:spPr>
+        <p:txBody>
+          <a:bodyPr wrap="square" lIns="0" tIns="0" rIns="0" bIns="0" rtlCol="0" anchor="ctr"/>
+          <a:lstStyle/>
+          <a:p>
+            <a:pPr algn="ctr" indent="0" marL="0">
+              <a:buNone/>
+            </a:pPr>
+            <a:r>
+              <a:rPr lang="en-US" sz="1050" i="1" dirty="0">
+                <a:solidFill>
+                  <a:srgbClr val="B8862B"/>
+                </a:solidFill>
+                <a:latin typeface="Calibri" pitchFamily="34" charset="0"/>
+                <a:ea typeface="Calibri" pitchFamily="34" charset="-122"/>
+                <a:cs typeface="Calibri" pitchFamily="34" charset="-120"/>
+              </a:rPr>
+              <a:t>channel mix to be defined in the cycle</a:t>
+            </a:r>
+            <a:endParaRPr lang="en-US" sz="1050" dirty="0"/>
+          </a:p>
+        </p:txBody>
+      </p:sp>
+    </p:spTree>
+  </p:cSld>
+  <p:clrMapOvr>
+    <a:masterClrMapping/>
+  </p:clrMapOvr>
+</p:sld>
+</file>
+
+<file path=ppt/slides/slide9.xml><?xml version="1.0" encoding="utf-8"?>
+<p:sld xmlns:a="http://schemas.openxmlformats.org/drawingml/2006/main" xmlns:r="http://schemas.openxmlformats.org/officeDocument/2006/relationships" xmlns:p="http://schemas.openxmlformats.org/presentationml/2006/main">
+  <p:cSld name="Slide 9">
+    <p:bg>
+      <p:bgPr>
+        <a:solidFill>
+          <a:srgbClr val="FFFFFF"/>
+        </a:solidFill>
+      </p:bgPr>
+    </p:bg>
+    <p:spTree>
+      <p:nvGrpSpPr>
+        <p:cNvPr id="1" name=""/>
+        <p:cNvGrpSpPr/>
+        <p:nvPr/>
+      </p:nvGrpSpPr>
+      <p:grpSpPr>
+        <a:xfrm>
+          <a:off x="0" y="0"/>
+          <a:ext cx="0" cy="0"/>
+          <a:chOff x="0" y="0"/>
+          <a:chExt cx="0" cy="0"/>
+        </a:xfrm>
+      </p:grpSpPr>
+      <p:sp>
+        <p:nvSpPr>
+          <p:cNvPr id="2" name="Text 0"/>
+          <p:cNvSpPr txBox="1"/>
+          <p:nvPr/>
+        </p:nvSpPr>
+        <p:spPr>
+          <a:xfrm>
+            <a:off x="640080" y="411480"/>
+            <a:ext cx="10881360" cy="685800"/>
+          </a:xfrm>
+          <a:prstGeom prst="rect">
+            <a:avLst/>
+          </a:prstGeom>
+          <a:noFill/>
+          <a:ln/>
+        </p:spPr>
+        <p:txBody>
+          <a:bodyPr wrap="square" lIns="0" tIns="0" rIns="0" bIns="0" rtlCol="0" anchor="ctr"/>
+          <a:lstStyle/>
+          <a:p>
+            <a:pPr indent="0" marL="0">
+              <a:buNone/>
+            </a:pPr>
+            <a:r>
+              <a:rPr lang="en-US" sz="3600" b="1" dirty="0">
+                <a:solidFill>
+                  <a:srgbClr val="16203A"/>
+                </a:solidFill>
+                <a:latin typeface="Cambria" pitchFamily="34" charset="0"/>
+                <a:ea typeface="Cambria" pitchFamily="34" charset="-122"/>
+                <a:cs typeface="Cambria" pitchFamily="34" charset="-120"/>
+              </a:rPr>
+              <a:t>The three-week journey</a:t>
+            </a:r>
+            <a:endParaRPr lang="en-US" sz="3600" dirty="0"/>
+          </a:p>
+        </p:txBody>
+      </p:sp>
+      <p:sp>
+        <p:nvSpPr>
+          <p:cNvPr id="3" name="Text 1"/>
+          <p:cNvSpPr txBox="1"/>
+          <p:nvPr/>
+        </p:nvSpPr>
+        <p:spPr>
+          <a:xfrm>
+            <a:off x="640080" y="1133856"/>
+            <a:ext cx="10881360" cy="411480"/>
+          </a:xfrm>
+          <a:prstGeom prst="rect">
+            <a:avLst/>
+          </a:prstGeom>
+          <a:noFill/>
+          <a:ln/>
+        </p:spPr>
+        <p:txBody>
+          <a:bodyPr wrap="square" lIns="0" tIns="0" rIns="0" bIns="0" rtlCol="0" anchor="ctr"/>
+          <a:lstStyle/>
+          <a:p>
+            <a:pPr indent="0" marL="0">
+              <a:buNone/>
+            </a:pPr>
+            <a:r>
+              <a:rPr lang="en-US" sz="1450" dirty="0">
+                <a:solidFill>
+                  <a:srgbClr val="8792AB"/>
+                </a:solidFill>
+                <a:latin typeface="Calibri" pitchFamily="34" charset="0"/>
+                <a:ea typeface="Calibri" pitchFamily="34" charset="-122"/>
+                <a:cs typeface="Calibri" pitchFamily="34" charset="-120"/>
+              </a:rPr>
+              <a:t>Three weeks, three gates, one decision.</a:t>
+            </a:r>
+            <a:endParaRPr lang="en-US" sz="1450" dirty="0"/>
+          </a:p>
+        </p:txBody>
+      </p:sp>
+      <p:sp>
+        <p:nvSpPr>
+          <p:cNvPr id="4" name="Shape 2"/>
+          <p:cNvSpPr/>
+          <p:nvPr/>
+        </p:nvSpPr>
+        <p:spPr>
+          <a:xfrm>
+            <a:off x="640080" y="1828800"/>
+            <a:ext cx="3429000" cy="3840480"/>
+          </a:xfrm>
+          <a:prstGeom prst="roundRect">
+            <a:avLst>
+              <a:gd name="adj" fmla="val 3200"/>
+            </a:avLst>
+          </a:prstGeom>
+          <a:solidFill>
+            <a:srgbClr val="EDF2FA"/>
+          </a:solidFill>
+          <a:ln/>
+        </p:spPr>
+      </p:sp>
+      <p:sp>
+        <p:nvSpPr>
+          <p:cNvPr id="5" name="Shape 3"/>
+          <p:cNvSpPr/>
+          <p:nvPr/>
+        </p:nvSpPr>
+        <p:spPr>
+          <a:xfrm>
+            <a:off x="640080" y="1828800"/>
+            <a:ext cx="3429000" cy="685800"/>
+          </a:xfrm>
+          <a:prstGeom prst="rect">
+            <a:avLst/>
+          </a:prstGeom>
+          <a:solidFill>
+            <a:srgbClr val="1E2761"/>
+          </a:solidFill>
+          <a:ln/>
+        </p:spPr>
+      </p:sp>
+      <p:sp>
+        <p:nvSpPr>
+          <p:cNvPr id="6" name="Text 4"/>
+          <p:cNvSpPr txBox="1"/>
+          <p:nvPr/>
+        </p:nvSpPr>
+        <p:spPr>
+          <a:xfrm>
+            <a:off x="914400" y="1828800"/>
+            <a:ext cx="2926080" cy="685800"/>
+          </a:xfrm>
+          <a:prstGeom prst="rect">
+            <a:avLst/>
+          </a:prstGeom>
+          <a:noFill/>
+          <a:ln/>
+        </p:spPr>
+        <p:txBody>
+          <a:bodyPr wrap="square" lIns="0" tIns="0" rIns="0" bIns="0" rtlCol="0" anchor="ctr"/>
+          <a:lstStyle/>
+          <a:p>
+            <a:pPr indent="0" marL="0">
+              <a:buNone/>
+            </a:pPr>
+            <a:r>
+              <a:rPr lang="en-US" sz="1800" b="1" dirty="0">
+                <a:solidFill>
+                  <a:srgbClr val="FFFFFF"/>
+                </a:solidFill>
+                <a:latin typeface="Calibri" pitchFamily="34" charset="0"/>
+                <a:ea typeface="Calibri" pitchFamily="34" charset="-122"/>
+                <a:cs typeface="Calibri" pitchFamily="34" charset="-120"/>
+              </a:rPr>
+              <a:t>Week 1  ·  Frame</a:t>
+            </a:r>
+            <a:endParaRPr lang="en-US" sz="1800" dirty="0"/>
+          </a:p>
+        </p:txBody>
+      </p:sp>
+      <p:sp>
+        <p:nvSpPr>
+          <p:cNvPr id="7" name="Text 5"/>
+          <p:cNvSpPr txBox="1"/>
+          <p:nvPr/>
+        </p:nvSpPr>
+        <p:spPr>
+          <a:xfrm>
+            <a:off x="914400" y="2743200"/>
+            <a:ext cx="2880360" cy="1920240"/>
+          </a:xfrm>
+          <a:prstGeom prst="rect">
+            <a:avLst/>
+          </a:prstGeom>
+          <a:noFill/>
+          <a:ln/>
+        </p:spPr>
+        <p:txBody>
+          <a:bodyPr wrap="square" lIns="0" tIns="0" rIns="0" bIns="0" rtlCol="0" anchor="ctr"/>
+          <a:lstStyle/>
           <a:p>
             <a:pPr marL="342900" indent="-342900">
               <a:spcAft>
-                <a:spcPts val="1000"/>
+                <a:spcPts val="900"/>
               </a:spcAft>
               <a:buSzPct val="100000"/>
               <a:buChar char="•"/>
             </a:pPr>
             <a:r>
-              <a:rPr lang="en-US" sz="1300" dirty="0">
-                <a:solidFill>
-                  <a:srgbClr val="CADCFC"/>
-                </a:solidFill>
-                <a:latin typeface="Calibri" pitchFamily="34" charset="0"/>
-                <a:ea typeface="Calibri" pitchFamily="34" charset="-122"/>
-                <a:cs typeface="Calibri" pitchFamily="34" charset="-120"/>
-              </a:rPr>
-              <a:t>Account ownership</a:t>
-            </a:r>
-            <a:endParaRPr lang="en-US" sz="1300" dirty="0"/>
+              <a:rPr lang="en-US" sz="1250" dirty="0">
+                <a:solidFill>
+                  <a:srgbClr val="44506B"/>
+                </a:solidFill>
+                <a:latin typeface="Calibri" pitchFamily="34" charset="0"/>
+                <a:ea typeface="Calibri" pitchFamily="34" charset="-122"/>
+                <a:cs typeface="Calibri" pitchFamily="34" charset="-120"/>
+              </a:rPr>
+              <a:t>Baseline current position and credentials</a:t>
+            </a:r>
+            <a:endParaRPr lang="en-US" sz="1250" dirty="0"/>
           </a:p>
           <a:p>
             <a:pPr marL="342900" indent="-342900">
               <a:spcAft>
-                <a:spcPts val="1000"/>
+                <a:spcPts val="900"/>
               </a:spcAft>
               <a:buSzPct val="100000"/>
               <a:buChar char="•"/>
             </a:pPr>
             <a:r>
-              <a:rPr lang="en-US" sz="1300" dirty="0">
-                <a:solidFill>
-                  <a:srgbClr val="CADCFC"/>
-                </a:solidFill>
-                <a:latin typeface="Calibri" pitchFamily="34" charset="0"/>
-                <a:ea typeface="Calibri" pitchFamily="34" charset="-122"/>
-                <a:cs typeface="Calibri" pitchFamily="34" charset="-120"/>
-              </a:rPr>
-              <a:t>Investment and hiring asks</a:t>
-            </a:r>
-            <a:endParaRPr lang="en-US" sz="1300" dirty="0"/>
-          </a:p>
-        </p:txBody>
-      </p:sp>
-      <p:sp>
-        <p:nvSpPr>
-          <p:cNvPr id="17" name="Text 15"/>
-          <p:cNvSpPr txBox="1"/>
-          <p:nvPr/>
-        </p:nvSpPr>
-        <p:spPr>
-          <a:xfrm>
-            <a:off x="731520" y="5852160"/>
-            <a:ext cx="6400800" cy="365760"/>
+              <a:rPr lang="en-US" sz="1250" dirty="0">
+                <a:solidFill>
+                  <a:srgbClr val="44506B"/>
+                </a:solidFill>
+                <a:latin typeface="Calibri" pitchFamily="34" charset="0"/>
+                <a:ea typeface="Calibri" pitchFamily="34" charset="-122"/>
+                <a:cs typeface="Calibri" pitchFamily="34" charset="-120"/>
+              </a:rPr>
+              <a:t>Prioritise markets and segments</a:t>
+            </a:r>
+            <a:endParaRPr lang="en-US" sz="1250" dirty="0"/>
+          </a:p>
+          <a:p>
+            <a:pPr marL="342900" indent="-342900">
+              <a:spcAft>
+                <a:spcPts val="900"/>
+              </a:spcAft>
+              <a:buSzPct val="100000"/>
+              <a:buChar char="•"/>
+            </a:pPr>
+            <a:r>
+              <a:rPr lang="en-US" sz="1250" dirty="0">
+                <a:solidFill>
+                  <a:srgbClr val="44506B"/>
+                </a:solidFill>
+                <a:latin typeface="Calibri" pitchFamily="34" charset="0"/>
+                <a:ea typeface="Calibri" pitchFamily="34" charset="-122"/>
+                <a:cs typeface="Calibri" pitchFamily="34" charset="-120"/>
+              </a:rPr>
+              <a:t>Build the account longlist</a:t>
+            </a:r>
+            <a:endParaRPr lang="en-US" sz="1250" dirty="0"/>
+          </a:p>
+          <a:p>
+            <a:pPr marL="342900" indent="-342900">
+              <a:spcAft>
+                <a:spcPts val="900"/>
+              </a:spcAft>
+              <a:buSzPct val="100000"/>
+              <a:buChar char="•"/>
+            </a:pPr>
+            <a:r>
+              <a:rPr lang="en-US" sz="1250" dirty="0">
+                <a:solidFill>
+                  <a:srgbClr val="44506B"/>
+                </a:solidFill>
+                <a:latin typeface="Calibri" pitchFamily="34" charset="0"/>
+                <a:ea typeface="Calibri" pitchFamily="34" charset="-122"/>
+                <a:cs typeface="Calibri" pitchFamily="34" charset="-120"/>
+              </a:rPr>
+              <a:t>Draft the proposition catalogue</a:t>
+            </a:r>
+            <a:endParaRPr lang="en-US" sz="1250" dirty="0"/>
+          </a:p>
+          <a:p>
+            <a:pPr marL="342900" indent="-342900">
+              <a:spcAft>
+                <a:spcPts val="900"/>
+              </a:spcAft>
+              <a:buSzPct val="100000"/>
+              <a:buChar char="•"/>
+            </a:pPr>
+            <a:r>
+              <a:rPr lang="en-US" sz="1250" dirty="0">
+                <a:solidFill>
+                  <a:srgbClr val="44506B"/>
+                </a:solidFill>
+                <a:latin typeface="Calibri" pitchFamily="34" charset="0"/>
+                <a:ea typeface="Calibri" pitchFamily="34" charset="-122"/>
+                <a:cs typeface="Calibri" pitchFamily="34" charset="-120"/>
+              </a:rPr>
+              <a:t>Baseline the team we have today</a:t>
+            </a:r>
+            <a:endParaRPr lang="en-US" sz="1250" dirty="0"/>
+          </a:p>
+        </p:txBody>
+      </p:sp>
+      <p:sp>
+        <p:nvSpPr>
+          <p:cNvPr id="8" name="Text 6"/>
+          <p:cNvSpPr txBox="1"/>
+          <p:nvPr/>
+        </p:nvSpPr>
+        <p:spPr>
+          <a:xfrm>
+            <a:off x="914400" y="4892040"/>
+            <a:ext cx="2880360" cy="594360"/>
           </a:xfrm>
           <a:prstGeom prst="rect">
             <a:avLst/>
@@ -9056,15 +11481,605 @@
               <a:buNone/>
             </a:pPr>
             <a:r>
+              <a:rPr lang="en-US" sz="1200" b="1" dirty="0">
+                <a:solidFill>
+                  <a:srgbClr val="B8862B"/>
+                </a:solidFill>
+                <a:latin typeface="Calibri" pitchFamily="34" charset="0"/>
+                <a:ea typeface="Calibri" pitchFamily="34" charset="-122"/>
+                <a:cs typeface="Calibri" pitchFamily="34" charset="-120"/>
+              </a:rPr>
+              <a:t>Gate: agreed market and segment priorities</a:t>
+            </a:r>
+            <a:endParaRPr lang="en-US" sz="1200" dirty="0"/>
+          </a:p>
+        </p:txBody>
+      </p:sp>
+      <p:sp>
+        <p:nvSpPr>
+          <p:cNvPr id="9" name="Text 7"/>
+          <p:cNvSpPr txBox="1"/>
+          <p:nvPr/>
+        </p:nvSpPr>
+        <p:spPr>
+          <a:xfrm>
+            <a:off x="4096512" y="3474720"/>
+            <a:ext cx="256032" cy="457200"/>
+          </a:xfrm>
+          <a:prstGeom prst="rect">
+            <a:avLst/>
+          </a:prstGeom>
+          <a:noFill/>
+          <a:ln/>
+        </p:spPr>
+        <p:txBody>
+          <a:bodyPr wrap="square" lIns="0" tIns="0" rIns="0" bIns="0" rtlCol="0" anchor="ctr"/>
+          <a:lstStyle/>
+          <a:p>
+            <a:pPr algn="ctr" indent="0" marL="0">
+              <a:buNone/>
+            </a:pPr>
+            <a:r>
+              <a:rPr lang="en-US" sz="2000" dirty="0">
+                <a:solidFill>
+                  <a:srgbClr val="8792AB"/>
+                </a:solidFill>
+                <a:latin typeface="Calibri" pitchFamily="34" charset="0"/>
+                <a:ea typeface="Calibri" pitchFamily="34" charset="-122"/>
+                <a:cs typeface="Calibri" pitchFamily="34" charset="-120"/>
+              </a:rPr>
+              <a:t>→</a:t>
+            </a:r>
+            <a:endParaRPr lang="en-US" sz="2000" dirty="0"/>
+          </a:p>
+        </p:txBody>
+      </p:sp>
+      <p:sp>
+        <p:nvSpPr>
+          <p:cNvPr id="10" name="Shape 8"/>
+          <p:cNvSpPr/>
+          <p:nvPr/>
+        </p:nvSpPr>
+        <p:spPr>
+          <a:xfrm>
+            <a:off x="4361688" y="1828800"/>
+            <a:ext cx="3429000" cy="3840480"/>
+          </a:xfrm>
+          <a:prstGeom prst="roundRect">
+            <a:avLst>
+              <a:gd name="adj" fmla="val 3200"/>
+            </a:avLst>
+          </a:prstGeom>
+          <a:solidFill>
+            <a:srgbClr val="EDF2FA"/>
+          </a:solidFill>
+          <a:ln/>
+        </p:spPr>
+      </p:sp>
+      <p:sp>
+        <p:nvSpPr>
+          <p:cNvPr id="11" name="Shape 9"/>
+          <p:cNvSpPr/>
+          <p:nvPr/>
+        </p:nvSpPr>
+        <p:spPr>
+          <a:xfrm>
+            <a:off x="4361688" y="1828800"/>
+            <a:ext cx="3429000" cy="685800"/>
+          </a:xfrm>
+          <a:prstGeom prst="rect">
+            <a:avLst/>
+          </a:prstGeom>
+          <a:solidFill>
+            <a:srgbClr val="3E5C8A"/>
+          </a:solidFill>
+          <a:ln/>
+        </p:spPr>
+      </p:sp>
+      <p:sp>
+        <p:nvSpPr>
+          <p:cNvPr id="12" name="Text 10"/>
+          <p:cNvSpPr txBox="1"/>
+          <p:nvPr/>
+        </p:nvSpPr>
+        <p:spPr>
+          <a:xfrm>
+            <a:off x="4636008" y="1828800"/>
+            <a:ext cx="2926080" cy="685800"/>
+          </a:xfrm>
+          <a:prstGeom prst="rect">
+            <a:avLst/>
+          </a:prstGeom>
+          <a:noFill/>
+          <a:ln/>
+        </p:spPr>
+        <p:txBody>
+          <a:bodyPr wrap="square" lIns="0" tIns="0" rIns="0" bIns="0" rtlCol="0" anchor="ctr"/>
+          <a:lstStyle/>
+          <a:p>
+            <a:pPr indent="0" marL="0">
+              <a:buNone/>
+            </a:pPr>
+            <a:r>
+              <a:rPr lang="en-US" sz="1800" b="1" dirty="0">
+                <a:solidFill>
+                  <a:srgbClr val="FFFFFF"/>
+                </a:solidFill>
+                <a:latin typeface="Calibri" pitchFamily="34" charset="0"/>
+                <a:ea typeface="Calibri" pitchFamily="34" charset="-122"/>
+                <a:cs typeface="Calibri" pitchFamily="34" charset="-120"/>
+              </a:rPr>
+              <a:t>Week 2  ·  Define</a:t>
+            </a:r>
+            <a:endParaRPr lang="en-US" sz="1800" dirty="0"/>
+          </a:p>
+        </p:txBody>
+      </p:sp>
+      <p:sp>
+        <p:nvSpPr>
+          <p:cNvPr id="13" name="Text 11"/>
+          <p:cNvSpPr txBox="1"/>
+          <p:nvPr/>
+        </p:nvSpPr>
+        <p:spPr>
+          <a:xfrm>
+            <a:off x="4636008" y="2743200"/>
+            <a:ext cx="2880360" cy="1920240"/>
+          </a:xfrm>
+          <a:prstGeom prst="rect">
+            <a:avLst/>
+          </a:prstGeom>
+          <a:noFill/>
+          <a:ln/>
+        </p:spPr>
+        <p:txBody>
+          <a:bodyPr wrap="square" lIns="0" tIns="0" rIns="0" bIns="0" rtlCol="0" anchor="ctr"/>
+          <a:lstStyle/>
+          <a:p>
+            <a:pPr marL="342900" indent="-342900">
+              <a:spcAft>
+                <a:spcPts val="900"/>
+              </a:spcAft>
+              <a:buSzPct val="100000"/>
+              <a:buChar char="•"/>
+            </a:pPr>
+            <a:r>
+              <a:rPr lang="en-US" sz="1250" dirty="0">
+                <a:solidFill>
+                  <a:srgbClr val="44506B"/>
+                </a:solidFill>
+                <a:latin typeface="Calibri" pitchFamily="34" charset="0"/>
+                <a:ea typeface="Calibri" pitchFamily="34" charset="-122"/>
+                <a:cs typeface="Calibri" pitchFamily="34" charset="-120"/>
+              </a:rPr>
+              <a:t>Lock propositions and permitted variants</a:t>
+            </a:r>
+            <a:endParaRPr lang="en-US" sz="1250" dirty="0"/>
+          </a:p>
+          <a:p>
+            <a:pPr marL="342900" indent="-342900">
+              <a:spcAft>
+                <a:spcPts val="900"/>
+              </a:spcAft>
+              <a:buSzPct val="100000"/>
+              <a:buChar char="•"/>
+            </a:pPr>
+            <a:r>
+              <a:rPr lang="en-US" sz="1250" dirty="0">
+                <a:solidFill>
+                  <a:srgbClr val="44506B"/>
+                </a:solidFill>
+                <a:latin typeface="Calibri" pitchFamily="34" charset="0"/>
+                <a:ea typeface="Calibri" pitchFamily="34" charset="-122"/>
+                <a:cs typeface="Calibri" pitchFamily="34" charset="-120"/>
+              </a:rPr>
+              <a:t>Benchmark deal sizes and pricing</a:t>
+            </a:r>
+            <a:endParaRPr lang="en-US" sz="1250" dirty="0"/>
+          </a:p>
+          <a:p>
+            <a:pPr marL="342900" indent="-342900">
+              <a:spcAft>
+                <a:spcPts val="900"/>
+              </a:spcAft>
+              <a:buSzPct val="100000"/>
+              <a:buChar char="•"/>
+            </a:pPr>
+            <a:r>
+              <a:rPr lang="en-US" sz="1250" dirty="0">
+                <a:solidFill>
+                  <a:srgbClr val="44506B"/>
+                </a:solidFill>
+                <a:latin typeface="Calibri" pitchFamily="34" charset="0"/>
+                <a:ea typeface="Calibri" pitchFamily="34" charset="-122"/>
+                <a:cs typeface="Calibri" pitchFamily="34" charset="-120"/>
+              </a:rPr>
+              <a:t>Shortlist target accounts</a:t>
+            </a:r>
+            <a:endParaRPr lang="en-US" sz="1250" dirty="0"/>
+          </a:p>
+          <a:p>
+            <a:pPr marL="342900" indent="-342900">
+              <a:spcAft>
+                <a:spcPts val="900"/>
+              </a:spcAft>
+              <a:buSzPct val="100000"/>
+              <a:buChar char="•"/>
+            </a:pPr>
+            <a:r>
+              <a:rPr lang="en-US" sz="1250" dirty="0">
+                <a:solidFill>
+                  <a:srgbClr val="44506B"/>
+                </a:solidFill>
+                <a:latin typeface="Calibri" pitchFamily="34" charset="0"/>
+                <a:ea typeface="Calibri" pitchFamily="34" charset="-122"/>
+                <a:cs typeface="Calibri" pitchFamily="34" charset="-120"/>
+              </a:rPr>
+              <a:t>Size the capacity each target implies</a:t>
+            </a:r>
+            <a:endParaRPr lang="en-US" sz="1250" dirty="0"/>
+          </a:p>
+        </p:txBody>
+      </p:sp>
+      <p:sp>
+        <p:nvSpPr>
+          <p:cNvPr id="14" name="Text 12"/>
+          <p:cNvSpPr txBox="1"/>
+          <p:nvPr/>
+        </p:nvSpPr>
+        <p:spPr>
+          <a:xfrm>
+            <a:off x="4636008" y="4892040"/>
+            <a:ext cx="2880360" cy="594360"/>
+          </a:xfrm>
+          <a:prstGeom prst="rect">
+            <a:avLst/>
+          </a:prstGeom>
+          <a:noFill/>
+          <a:ln/>
+        </p:spPr>
+        <p:txBody>
+          <a:bodyPr wrap="square" lIns="0" tIns="0" rIns="0" bIns="0" rtlCol="0" anchor="ctr"/>
+          <a:lstStyle/>
+          <a:p>
+            <a:pPr indent="0" marL="0">
+              <a:buNone/>
+            </a:pPr>
+            <a:r>
+              <a:rPr lang="en-US" sz="1200" b="1" dirty="0">
+                <a:solidFill>
+                  <a:srgbClr val="B8862B"/>
+                </a:solidFill>
+                <a:latin typeface="Calibri" pitchFamily="34" charset="0"/>
+                <a:ea typeface="Calibri" pitchFamily="34" charset="-122"/>
+                <a:cs typeface="Calibri" pitchFamily="34" charset="-120"/>
+              </a:rPr>
+              <a:t>Gate: agreed catalogue and shortlist</a:t>
+            </a:r>
+            <a:endParaRPr lang="en-US" sz="1200" dirty="0"/>
+          </a:p>
+        </p:txBody>
+      </p:sp>
+      <p:sp>
+        <p:nvSpPr>
+          <p:cNvPr id="15" name="Text 13"/>
+          <p:cNvSpPr txBox="1"/>
+          <p:nvPr/>
+        </p:nvSpPr>
+        <p:spPr>
+          <a:xfrm>
+            <a:off x="7818120" y="3474720"/>
+            <a:ext cx="256032" cy="457200"/>
+          </a:xfrm>
+          <a:prstGeom prst="rect">
+            <a:avLst/>
+          </a:prstGeom>
+          <a:noFill/>
+          <a:ln/>
+        </p:spPr>
+        <p:txBody>
+          <a:bodyPr wrap="square" lIns="0" tIns="0" rIns="0" bIns="0" rtlCol="0" anchor="ctr"/>
+          <a:lstStyle/>
+          <a:p>
+            <a:pPr algn="ctr" indent="0" marL="0">
+              <a:buNone/>
+            </a:pPr>
+            <a:r>
+              <a:rPr lang="en-US" sz="2000" dirty="0">
+                <a:solidFill>
+                  <a:srgbClr val="8792AB"/>
+                </a:solidFill>
+                <a:latin typeface="Calibri" pitchFamily="34" charset="0"/>
+                <a:ea typeface="Calibri" pitchFamily="34" charset="-122"/>
+                <a:cs typeface="Calibri" pitchFamily="34" charset="-120"/>
+              </a:rPr>
+              <a:t>→</a:t>
+            </a:r>
+            <a:endParaRPr lang="en-US" sz="2000" dirty="0"/>
+          </a:p>
+        </p:txBody>
+      </p:sp>
+      <p:sp>
+        <p:nvSpPr>
+          <p:cNvPr id="16" name="Shape 14"/>
+          <p:cNvSpPr/>
+          <p:nvPr/>
+        </p:nvSpPr>
+        <p:spPr>
+          <a:xfrm>
+            <a:off x="8083296" y="1828800"/>
+            <a:ext cx="3429000" cy="3840480"/>
+          </a:xfrm>
+          <a:prstGeom prst="roundRect">
+            <a:avLst>
+              <a:gd name="adj" fmla="val 3200"/>
+            </a:avLst>
+          </a:prstGeom>
+          <a:solidFill>
+            <a:srgbClr val="EDF2FA"/>
+          </a:solidFill>
+          <a:ln/>
+        </p:spPr>
+      </p:sp>
+      <p:sp>
+        <p:nvSpPr>
+          <p:cNvPr id="17" name="Shape 15"/>
+          <p:cNvSpPr/>
+          <p:nvPr/>
+        </p:nvSpPr>
+        <p:spPr>
+          <a:xfrm>
+            <a:off x="8083296" y="1828800"/>
+            <a:ext cx="3429000" cy="685800"/>
+          </a:xfrm>
+          <a:prstGeom prst="rect">
+            <a:avLst/>
+          </a:prstGeom>
+          <a:solidFill>
+            <a:srgbClr val="1E2761"/>
+          </a:solidFill>
+          <a:ln/>
+        </p:spPr>
+      </p:sp>
+      <p:sp>
+        <p:nvSpPr>
+          <p:cNvPr id="18" name="Text 16"/>
+          <p:cNvSpPr txBox="1"/>
+          <p:nvPr/>
+        </p:nvSpPr>
+        <p:spPr>
+          <a:xfrm>
+            <a:off x="8357616" y="1828800"/>
+            <a:ext cx="2926080" cy="685800"/>
+          </a:xfrm>
+          <a:prstGeom prst="rect">
+            <a:avLst/>
+          </a:prstGeom>
+          <a:noFill/>
+          <a:ln/>
+        </p:spPr>
+        <p:txBody>
+          <a:bodyPr wrap="square" lIns="0" tIns="0" rIns="0" bIns="0" rtlCol="0" anchor="ctr"/>
+          <a:lstStyle/>
+          <a:p>
+            <a:pPr indent="0" marL="0">
+              <a:buNone/>
+            </a:pPr>
+            <a:r>
+              <a:rPr lang="en-US" sz="1800" b="1" dirty="0">
+                <a:solidFill>
+                  <a:srgbClr val="FFFFFF"/>
+                </a:solidFill>
+                <a:latin typeface="Calibri" pitchFamily="34" charset="0"/>
+                <a:ea typeface="Calibri" pitchFamily="34" charset="-122"/>
+                <a:cs typeface="Calibri" pitchFamily="34" charset="-120"/>
+              </a:rPr>
+              <a:t>Week 3  ·  Commit</a:t>
+            </a:r>
+            <a:endParaRPr lang="en-US" sz="1800" dirty="0"/>
+          </a:p>
+        </p:txBody>
+      </p:sp>
+      <p:sp>
+        <p:nvSpPr>
+          <p:cNvPr id="19" name="Text 17"/>
+          <p:cNvSpPr txBox="1"/>
+          <p:nvPr/>
+        </p:nvSpPr>
+        <p:spPr>
+          <a:xfrm>
+            <a:off x="8357616" y="2743200"/>
+            <a:ext cx="2880360" cy="1920240"/>
+          </a:xfrm>
+          <a:prstGeom prst="rect">
+            <a:avLst/>
+          </a:prstGeom>
+          <a:noFill/>
+          <a:ln/>
+        </p:spPr>
+        <p:txBody>
+          <a:bodyPr wrap="square" lIns="0" tIns="0" rIns="0" bIns="0" rtlCol="0" anchor="ctr"/>
+          <a:lstStyle/>
+          <a:p>
+            <a:pPr marL="342900" indent="-342900">
+              <a:spcAft>
+                <a:spcPts val="900"/>
+              </a:spcAft>
+              <a:buSzPct val="100000"/>
+              <a:buChar char="•"/>
+            </a:pPr>
+            <a:r>
+              <a:rPr lang="en-US" sz="1250" dirty="0">
+                <a:solidFill>
+                  <a:srgbClr val="44506B"/>
+                </a:solidFill>
+                <a:latin typeface="Calibri" pitchFamily="34" charset="0"/>
+                <a:ea typeface="Calibri" pitchFamily="34" charset="-122"/>
+                <a:cs typeface="Calibri" pitchFamily="34" charset="-120"/>
+              </a:rPr>
+              <a:t>Set revenue targets by market and offering</a:t>
+            </a:r>
+            <a:endParaRPr lang="en-US" sz="1250" dirty="0"/>
+          </a:p>
+          <a:p>
+            <a:pPr marL="342900" indent="-342900">
+              <a:spcAft>
+                <a:spcPts val="900"/>
+              </a:spcAft>
+              <a:buSzPct val="100000"/>
+              <a:buChar char="•"/>
+            </a:pPr>
+            <a:r>
+              <a:rPr lang="en-US" sz="1250" dirty="0">
+                <a:solidFill>
+                  <a:srgbClr val="44506B"/>
+                </a:solidFill>
+                <a:latin typeface="Calibri" pitchFamily="34" charset="0"/>
+                <a:ea typeface="Calibri" pitchFamily="34" charset="-122"/>
+                <a:cs typeface="Calibri" pitchFamily="34" charset="-120"/>
+              </a:rPr>
+              <a:t>Assign an owner to every account</a:t>
+            </a:r>
+            <a:endParaRPr lang="en-US" sz="1250" dirty="0"/>
+          </a:p>
+          <a:p>
+            <a:pPr marL="342900" indent="-342900">
+              <a:spcAft>
+                <a:spcPts val="900"/>
+              </a:spcAft>
+              <a:buSzPct val="100000"/>
+              <a:buChar char="•"/>
+            </a:pPr>
+            <a:r>
+              <a:rPr lang="en-US" sz="1250" dirty="0">
+                <a:solidFill>
+                  <a:srgbClr val="44506B"/>
+                </a:solidFill>
+                <a:latin typeface="Calibri" pitchFamily="34" charset="0"/>
+                <a:ea typeface="Calibri" pitchFamily="34" charset="-122"/>
+                <a:cs typeface="Calibri" pitchFamily="34" charset="-120"/>
+              </a:rPr>
+              <a:t>Agree the team model and recruitment plan</a:t>
+            </a:r>
+            <a:endParaRPr lang="en-US" sz="1250" dirty="0"/>
+          </a:p>
+          <a:p>
+            <a:pPr marL="342900" indent="-342900">
+              <a:spcAft>
+                <a:spcPts val="900"/>
+              </a:spcAft>
+              <a:buSzPct val="100000"/>
+              <a:buChar char="•"/>
+            </a:pPr>
+            <a:r>
+              <a:rPr lang="en-US" sz="1250" dirty="0">
+                <a:solidFill>
+                  <a:srgbClr val="44506B"/>
+                </a:solidFill>
+                <a:latin typeface="Calibri" pitchFamily="34" charset="0"/>
+                <a:ea typeface="Calibri" pitchFamily="34" charset="-122"/>
+                <a:cs typeface="Calibri" pitchFamily="34" charset="-120"/>
+              </a:rPr>
+              <a:t>Set the eminence calendar</a:t>
+            </a:r>
+            <a:endParaRPr lang="en-US" sz="1250" dirty="0"/>
+          </a:p>
+          <a:p>
+            <a:pPr marL="342900" indent="-342900">
+              <a:spcAft>
+                <a:spcPts val="900"/>
+              </a:spcAft>
+              <a:buSzPct val="100000"/>
+              <a:buChar char="•"/>
+            </a:pPr>
+            <a:r>
+              <a:rPr lang="en-US" sz="1250" dirty="0">
+                <a:solidFill>
+                  <a:srgbClr val="44506B"/>
+                </a:solidFill>
+                <a:latin typeface="Calibri" pitchFamily="34" charset="0"/>
+                <a:ea typeface="Calibri" pitchFamily="34" charset="-122"/>
+                <a:cs typeface="Calibri" pitchFamily="34" charset="-120"/>
+              </a:rPr>
+              <a:t>Build the activation plan and sign off</a:t>
+            </a:r>
+            <a:endParaRPr lang="en-US" sz="1250" dirty="0"/>
+          </a:p>
+        </p:txBody>
+      </p:sp>
+      <p:sp>
+        <p:nvSpPr>
+          <p:cNvPr id="20" name="Text 18"/>
+          <p:cNvSpPr txBox="1"/>
+          <p:nvPr/>
+        </p:nvSpPr>
+        <p:spPr>
+          <a:xfrm>
+            <a:off x="8357616" y="4892040"/>
+            <a:ext cx="2880360" cy="594360"/>
+          </a:xfrm>
+          <a:prstGeom prst="rect">
+            <a:avLst/>
+          </a:prstGeom>
+          <a:noFill/>
+          <a:ln/>
+        </p:spPr>
+        <p:txBody>
+          <a:bodyPr wrap="square" lIns="0" tIns="0" rIns="0" bIns="0" rtlCol="0" anchor="ctr"/>
+          <a:lstStyle/>
+          <a:p>
+            <a:pPr indent="0" marL="0">
+              <a:buNone/>
+            </a:pPr>
+            <a:r>
+              <a:rPr lang="en-US" sz="1200" b="1" dirty="0">
+                <a:solidFill>
+                  <a:srgbClr val="B8862B"/>
+                </a:solidFill>
+                <a:latin typeface="Calibri" pitchFamily="34" charset="0"/>
+                <a:ea typeface="Calibri" pitchFamily="34" charset="-122"/>
+                <a:cs typeface="Calibri" pitchFamily="34" charset="-120"/>
+              </a:rPr>
+              <a:t>Gate: strategy signed off</a:t>
+            </a:r>
+            <a:endParaRPr lang="en-US" sz="1200" dirty="0"/>
+          </a:p>
+        </p:txBody>
+      </p:sp>
+      <p:sp>
+        <p:nvSpPr>
+          <p:cNvPr id="21" name="Text 19"/>
+          <p:cNvSpPr txBox="1"/>
+          <p:nvPr/>
+        </p:nvSpPr>
+        <p:spPr>
+          <a:xfrm>
+            <a:off x="640080" y="5852160"/>
+            <a:ext cx="5486400" cy="320040"/>
+          </a:xfrm>
+          <a:prstGeom prst="rect">
+            <a:avLst/>
+          </a:prstGeom>
+          <a:noFill/>
+          <a:ln/>
+        </p:spPr>
+        <p:txBody>
+          <a:bodyPr wrap="square" lIns="0" tIns="0" rIns="0" bIns="0" rtlCol="0" anchor="ctr"/>
+          <a:lstStyle/>
+          <a:p>
+            <a:pPr indent="0" marL="0">
+              <a:buNone/>
+            </a:pPr>
+            <a:r>
               <a:rPr lang="en-US" sz="1200" i="1" dirty="0">
                 <a:solidFill>
-                  <a:srgbClr val="9AA7C4"/>
-                </a:solidFill>
-                <a:latin typeface="Calibri" pitchFamily="34" charset="0"/>
-                <a:ea typeface="Calibri" pitchFamily="34" charset="-122"/>
-                <a:cs typeface="Calibri" pitchFamily="34" charset="-120"/>
-              </a:rPr>
-              <a:t>Owners, dates and participants are set at kick-off.</a:t>
+                  <a:srgbClr val="8792AB"/>
+                </a:solidFill>
+                <a:latin typeface="Calibri" pitchFamily="34" charset="0"/>
+                <a:ea typeface="Calibri" pitchFamily="34" charset="-122"/>
+                <a:cs typeface="Calibri" pitchFamily="34" charset="-120"/>
+              </a:rPr>
+              <a:t>Start date to be defined at kick-off.</a:t>
             </a:r>
             <a:endParaRPr lang="en-US" sz="1200" dirty="0"/>
           </a:p>

--- a/FSI strategy/EAIND-FSI-Strategy-Development-Plan.pptx
+++ b/FSI strategy/EAIND-FSI-Strategy-Development-Plan.pptx
@@ -15,9 +15,10 @@
     <p:sldId id="263" r:id="rId9"/>
     <p:sldId id="264" r:id="rId10"/>
     <p:sldId id="265" r:id="rId11"/>
+    <p:sldId id="266" r:id="rId12"/>
   </p:sldIdLst>
   <p:notesMasterIdLst>
-    <p:notesMasterId r:id="rId12"/>
+    <p:notesMasterId r:id="rId13"/>
   </p:notesMasterIdLst>
   <p:sldSz cx="12192000" cy="6858000"/>
   <p:notesSz cx="6858000" cy="12192000"/>
@@ -605,10 +606,9 @@
           <a:p>
             <a:r>
               <a:rPr lang="en-US" dirty="0"/>
-              <a:t>Close on two asks: confirm the principles, and nominate the workstream owners.
-Inputs are the long pole — pipeline, revenue by pillar and market, existing relationships, alliance status, delivery capacity and historical deal values all sit with different people. Chase them in the first 48 hours or week 1 slips.
-Decisions requested at sign-off: priority markets and segments, the target account list, revenue and margin targets, account ownership, and the investment and hiring asks coming out of the talent and eminence workstreams.
-Open items to resolve at kick-off: audience for this pack, the definition of partner for account ownership, and the start date.</a:t>
+              <a:t>Three weeks is the timebox given: the strategy should be finalised in no more than about three weeks. The constraint is deliberate — it forces decisions rather than analysis.
+Each week ends at a gate, and a gate is a decision taken, not a document circulated. If a gate cannot be closed, we escalate at the checkpoint rather than let the week slip.
+Start date to be set at kick-off.</a:t>
             </a:r>
             <a:endParaRPr lang="en-US" dirty="0"/>
           </a:p>
@@ -632,6 +632,97 @@
             <a:fld id="{F7021451-1387-4CA6-816F-3879F97B5CBC}" type="slidenum">
               <a:rPr lang="en-US"/>
               <a:t>10</a:t>
+            </a:fld>
+            <a:endParaRPr lang="en-US"/>
+          </a:p>
+        </p:txBody>
+      </p:sp>
+    </p:spTree>
+    <p:extLst>
+      <p:ext uri="{BB962C8B-B14F-4D97-AF65-F5344CB8AC3E}">
+        <p14:creationId xmlns:p14="http://schemas.microsoft.com/office/powerpoint/2010/main" val="1024086991"/>
+      </p:ext>
+    </p:extLst>
+  </p:cSld>
+  <p:clrMapOvr>
+    <a:masterClrMapping/>
+  </p:clrMapOvr>
+</p:notes>
+</file>
+
+<file path=ppt/notesSlides/notesSlide11.xml><?xml version="1.0" encoding="utf-8"?>
+<p:notes xmlns:a="http://schemas.openxmlformats.org/drawingml/2006/main" xmlns:r="http://schemas.openxmlformats.org/officeDocument/2006/relationships" xmlns:p="http://schemas.openxmlformats.org/presentationml/2006/main">
+  <p:cSld>
+    <p:spTree>
+      <p:nvGrpSpPr>
+        <p:cNvPr id="1" name=""/>
+        <p:cNvGrpSpPr/>
+        <p:nvPr/>
+      </p:nvGrpSpPr>
+      <p:grpSpPr>
+        <a:xfrm>
+          <a:off x="0" y="0"/>
+          <a:ext cx="0" cy="0"/>
+          <a:chOff x="0" y="0"/>
+          <a:chExt cx="0" cy="0"/>
+        </a:xfrm>
+      </p:grpSpPr>
+      <p:sp>
+        <p:nvSpPr>
+          <p:cNvPr id="2" name="Slide Image Placeholder 1"/>
+          <p:cNvSpPr>
+            <a:spLocks noGrp="1" noRot="1" noChangeAspect="1"/>
+          </p:cNvSpPr>
+          <p:nvPr>
+            <p:ph type="sldImg"/>
+          </p:nvPr>
+        </p:nvSpPr>
+        <p:spPr/>
+      </p:sp>
+      <p:sp>
+        <p:nvSpPr>
+          <p:cNvPr id="3" name="Notes Placeholder 2"/>
+          <p:cNvSpPr>
+            <a:spLocks noGrp="1"/>
+          </p:cNvSpPr>
+          <p:nvPr>
+            <p:ph type="body" idx="1"/>
+          </p:nvPr>
+        </p:nvSpPr>
+        <p:spPr/>
+        <p:txBody>
+          <a:bodyPr/>
+          <a:lstStyle/>
+          <a:p>
+            <a:r>
+              <a:rPr lang="en-US" dirty="0"/>
+              <a:t>Close on two asks: confirm the principles, and nominate the workstream owners.
+Inputs are the long pole — pipeline, revenue by pillar and market, existing relationships, alliance status, delivery capacity and historical deal values all sit with different people. Chase them in the first 48 hours or week 1 slips.
+Decisions requested at sign-off: priority markets and segments, the target account list, revenue and margin targets, account ownership, and the investment and hiring asks coming out of the talent and eminence workstreams.
+Open items to resolve at kick-off: audience for this pack, the definition of partner for account ownership, and the start date.</a:t>
+            </a:r>
+            <a:endParaRPr lang="en-US" dirty="0"/>
+          </a:p>
+        </p:txBody>
+      </p:sp>
+      <p:sp>
+        <p:nvSpPr>
+          <p:cNvPr id="4" name="Slide Number Placeholder 3"/>
+          <p:cNvSpPr>
+            <a:spLocks noGrp="1"/>
+          </p:cNvSpPr>
+          <p:nvPr>
+            <p:ph type="sldNum" sz="quarter" idx="10"/>
+          </p:nvPr>
+        </p:nvSpPr>
+        <p:spPr/>
+        <p:txBody>
+          <a:bodyPr/>
+          <a:lstStyle/>
+          <a:p>
+            <a:fld id="{F7021451-1387-4CA6-816F-3879F97B5CBC}" type="slidenum">
+              <a:rPr lang="en-US"/>
+              <a:t>11</a:t>
             </a:fld>
             <a:endParaRPr lang="en-US"/>
           </a:p>
@@ -1069,7 +1160,8 @@
 - WS4 Coverage and ownership: two distinct mappings — our partners to accounts (who owns the relationship) and alliance partners to accounts (who we go to market with, and what they drive).
 - WS5 Delivery model and readiness: largely inherited; confirm and note gaps.
 - WS6 Team and talent: see the talent slide.
-- WS7 Eminence and positioning: see the eminence slide.</a:t>
+- WS7 Eminence and positioning: see the eminence slide.
+- WS8 Alliances: see the alliances slide. Primary alliances today are Oracle, Google and Amazon; specialised alliances are Temenos and Intellect.</a:t>
             </a:r>
             <a:endParaRPr lang="en-US" dirty="0"/>
           </a:p>
@@ -1341,9 +1433,11 @@
           <a:p>
             <a:r>
               <a:rPr lang="en-US" dirty="0"/>
-              <a:t>Three weeks is the timebox given: the strategy should be finalised in no more than about three weeks. The constraint is deliberate — it forces decisions rather than analysis.
-Each week ends at a gate, and a gate is a decision taken, not a document circulated. If a gate cannot be closed, we escalate at the checkpoint rather than let the week slip.
-Start date to be set at kick-off.</a:t>
+              <a:t>Alliances were called out as important in implementation and technology work.
+Current alliances named: Oracle, Google and Amazon as the primary ones; Temenos and Intellect as specialised, banking-platform alliances. They are on the slide as current state, not as a conclusion — what we do with each is the open question.
+The work is to decide, per alliance: what we leverage it for, which of our integrated propositions it sits behind, what kind of relationship it is (co-sell, resell, delivery, referral), which markets and accounts it opens, and what it demands from us in certifications, trained staff and pipeline commitments.
+Two links to the rest of the strategy: the alliance map must reconcile with the account coverage map (an alliance that opens an account should show up against that account), and with the talent plan (certifications and accredited staff are a recruitment and training cost).
+If other alliances belong here — hyperscaler or platform vendors we do not yet work with, or regional players — the cycle is where we add them.</a:t>
             </a:r>
             <a:endParaRPr lang="en-US" dirty="0"/>
           </a:p>
@@ -1953,6 +2047,974 @@
     <p:bg>
       <p:bgPr>
         <a:solidFill>
+          <a:srgbClr val="FFFFFF"/>
+        </a:solidFill>
+      </p:bgPr>
+    </p:bg>
+    <p:spTree>
+      <p:nvGrpSpPr>
+        <p:cNvPr id="1" name=""/>
+        <p:cNvGrpSpPr/>
+        <p:nvPr/>
+      </p:nvGrpSpPr>
+      <p:grpSpPr>
+        <a:xfrm>
+          <a:off x="0" y="0"/>
+          <a:ext cx="0" cy="0"/>
+          <a:chOff x="0" y="0"/>
+          <a:chExt cx="0" cy="0"/>
+        </a:xfrm>
+      </p:grpSpPr>
+      <p:sp>
+        <p:nvSpPr>
+          <p:cNvPr id="2" name="Text 0"/>
+          <p:cNvSpPr txBox="1"/>
+          <p:nvPr/>
+        </p:nvSpPr>
+        <p:spPr>
+          <a:xfrm>
+            <a:off x="640080" y="411480"/>
+            <a:ext cx="10881360" cy="685800"/>
+          </a:xfrm>
+          <a:prstGeom prst="rect">
+            <a:avLst/>
+          </a:prstGeom>
+          <a:noFill/>
+          <a:ln/>
+        </p:spPr>
+        <p:txBody>
+          <a:bodyPr wrap="square" lIns="0" tIns="0" rIns="0" bIns="0" rtlCol="0" anchor="ctr"/>
+          <a:lstStyle/>
+          <a:p>
+            <a:pPr indent="0" marL="0">
+              <a:buNone/>
+            </a:pPr>
+            <a:r>
+              <a:rPr lang="en-US" sz="3600" b="1" dirty="0">
+                <a:solidFill>
+                  <a:srgbClr val="16203A"/>
+                </a:solidFill>
+                <a:latin typeface="Cambria" pitchFamily="34" charset="0"/>
+                <a:ea typeface="Cambria" pitchFamily="34" charset="-122"/>
+                <a:cs typeface="Cambria" pitchFamily="34" charset="-120"/>
+              </a:rPr>
+              <a:t>The three-week journey</a:t>
+            </a:r>
+            <a:endParaRPr lang="en-US" sz="3600" dirty="0"/>
+          </a:p>
+        </p:txBody>
+      </p:sp>
+      <p:sp>
+        <p:nvSpPr>
+          <p:cNvPr id="3" name="Text 1"/>
+          <p:cNvSpPr txBox="1"/>
+          <p:nvPr/>
+        </p:nvSpPr>
+        <p:spPr>
+          <a:xfrm>
+            <a:off x="640080" y="1133856"/>
+            <a:ext cx="10881360" cy="411480"/>
+          </a:xfrm>
+          <a:prstGeom prst="rect">
+            <a:avLst/>
+          </a:prstGeom>
+          <a:noFill/>
+          <a:ln/>
+        </p:spPr>
+        <p:txBody>
+          <a:bodyPr wrap="square" lIns="0" tIns="0" rIns="0" bIns="0" rtlCol="0" anchor="ctr"/>
+          <a:lstStyle/>
+          <a:p>
+            <a:pPr indent="0" marL="0">
+              <a:buNone/>
+            </a:pPr>
+            <a:r>
+              <a:rPr lang="en-US" sz="1450" dirty="0">
+                <a:solidFill>
+                  <a:srgbClr val="8792AB"/>
+                </a:solidFill>
+                <a:latin typeface="Calibri" pitchFamily="34" charset="0"/>
+                <a:ea typeface="Calibri" pitchFamily="34" charset="-122"/>
+                <a:cs typeface="Calibri" pitchFamily="34" charset="-120"/>
+              </a:rPr>
+              <a:t>Three weeks, three gates, one decision.</a:t>
+            </a:r>
+            <a:endParaRPr lang="en-US" sz="1450" dirty="0"/>
+          </a:p>
+        </p:txBody>
+      </p:sp>
+      <p:sp>
+        <p:nvSpPr>
+          <p:cNvPr id="4" name="Shape 2"/>
+          <p:cNvSpPr/>
+          <p:nvPr/>
+        </p:nvSpPr>
+        <p:spPr>
+          <a:xfrm>
+            <a:off x="640080" y="1828800"/>
+            <a:ext cx="3429000" cy="3840480"/>
+          </a:xfrm>
+          <a:prstGeom prst="roundRect">
+            <a:avLst>
+              <a:gd name="adj" fmla="val 3200"/>
+            </a:avLst>
+          </a:prstGeom>
+          <a:solidFill>
+            <a:srgbClr val="EDF2FA"/>
+          </a:solidFill>
+          <a:ln/>
+        </p:spPr>
+      </p:sp>
+      <p:sp>
+        <p:nvSpPr>
+          <p:cNvPr id="5" name="Shape 3"/>
+          <p:cNvSpPr/>
+          <p:nvPr/>
+        </p:nvSpPr>
+        <p:spPr>
+          <a:xfrm>
+            <a:off x="640080" y="1828800"/>
+            <a:ext cx="3429000" cy="685800"/>
+          </a:xfrm>
+          <a:prstGeom prst="rect">
+            <a:avLst/>
+          </a:prstGeom>
+          <a:solidFill>
+            <a:srgbClr val="1E2761"/>
+          </a:solidFill>
+          <a:ln/>
+        </p:spPr>
+      </p:sp>
+      <p:sp>
+        <p:nvSpPr>
+          <p:cNvPr id="6" name="Text 4"/>
+          <p:cNvSpPr txBox="1"/>
+          <p:nvPr/>
+        </p:nvSpPr>
+        <p:spPr>
+          <a:xfrm>
+            <a:off x="914400" y="1828800"/>
+            <a:ext cx="2926080" cy="685800"/>
+          </a:xfrm>
+          <a:prstGeom prst="rect">
+            <a:avLst/>
+          </a:prstGeom>
+          <a:noFill/>
+          <a:ln/>
+        </p:spPr>
+        <p:txBody>
+          <a:bodyPr wrap="square" lIns="0" tIns="0" rIns="0" bIns="0" rtlCol="0" anchor="ctr"/>
+          <a:lstStyle/>
+          <a:p>
+            <a:pPr indent="0" marL="0">
+              <a:buNone/>
+            </a:pPr>
+            <a:r>
+              <a:rPr lang="en-US" sz="1800" b="1" dirty="0">
+                <a:solidFill>
+                  <a:srgbClr val="FFFFFF"/>
+                </a:solidFill>
+                <a:latin typeface="Calibri" pitchFamily="34" charset="0"/>
+                <a:ea typeface="Calibri" pitchFamily="34" charset="-122"/>
+                <a:cs typeface="Calibri" pitchFamily="34" charset="-120"/>
+              </a:rPr>
+              <a:t>Week 1  ·  Frame</a:t>
+            </a:r>
+            <a:endParaRPr lang="en-US" sz="1800" dirty="0"/>
+          </a:p>
+        </p:txBody>
+      </p:sp>
+      <p:sp>
+        <p:nvSpPr>
+          <p:cNvPr id="7" name="Text 5"/>
+          <p:cNvSpPr txBox="1"/>
+          <p:nvPr/>
+        </p:nvSpPr>
+        <p:spPr>
+          <a:xfrm>
+            <a:off x="914400" y="2743200"/>
+            <a:ext cx="2880360" cy="1920240"/>
+          </a:xfrm>
+          <a:prstGeom prst="rect">
+            <a:avLst/>
+          </a:prstGeom>
+          <a:noFill/>
+          <a:ln/>
+        </p:spPr>
+        <p:txBody>
+          <a:bodyPr wrap="square" lIns="0" tIns="0" rIns="0" bIns="0" rtlCol="0" anchor="ctr"/>
+          <a:lstStyle/>
+          <a:p>
+            <a:pPr marL="342900" indent="-342900">
+              <a:spcAft>
+                <a:spcPts val="900"/>
+              </a:spcAft>
+              <a:buSzPct val="100000"/>
+              <a:buChar char="•"/>
+            </a:pPr>
+            <a:r>
+              <a:rPr lang="en-US" sz="1250" dirty="0">
+                <a:solidFill>
+                  <a:srgbClr val="44506B"/>
+                </a:solidFill>
+                <a:latin typeface="Calibri" pitchFamily="34" charset="0"/>
+                <a:ea typeface="Calibri" pitchFamily="34" charset="-122"/>
+                <a:cs typeface="Calibri" pitchFamily="34" charset="-120"/>
+              </a:rPr>
+              <a:t>Baseline current position and credentials</a:t>
+            </a:r>
+            <a:endParaRPr lang="en-US" sz="1250" dirty="0"/>
+          </a:p>
+          <a:p>
+            <a:pPr marL="342900" indent="-342900">
+              <a:spcAft>
+                <a:spcPts val="900"/>
+              </a:spcAft>
+              <a:buSzPct val="100000"/>
+              <a:buChar char="•"/>
+            </a:pPr>
+            <a:r>
+              <a:rPr lang="en-US" sz="1250" dirty="0">
+                <a:solidFill>
+                  <a:srgbClr val="44506B"/>
+                </a:solidFill>
+                <a:latin typeface="Calibri" pitchFamily="34" charset="0"/>
+                <a:ea typeface="Calibri" pitchFamily="34" charset="-122"/>
+                <a:cs typeface="Calibri" pitchFamily="34" charset="-120"/>
+              </a:rPr>
+              <a:t>Prioritise markets and segments</a:t>
+            </a:r>
+            <a:endParaRPr lang="en-US" sz="1250" dirty="0"/>
+          </a:p>
+          <a:p>
+            <a:pPr marL="342900" indent="-342900">
+              <a:spcAft>
+                <a:spcPts val="900"/>
+              </a:spcAft>
+              <a:buSzPct val="100000"/>
+              <a:buChar char="•"/>
+            </a:pPr>
+            <a:r>
+              <a:rPr lang="en-US" sz="1250" dirty="0">
+                <a:solidFill>
+                  <a:srgbClr val="44506B"/>
+                </a:solidFill>
+                <a:latin typeface="Calibri" pitchFamily="34" charset="0"/>
+                <a:ea typeface="Calibri" pitchFamily="34" charset="-122"/>
+                <a:cs typeface="Calibri" pitchFamily="34" charset="-120"/>
+              </a:rPr>
+              <a:t>Build the account longlist</a:t>
+            </a:r>
+            <a:endParaRPr lang="en-US" sz="1250" dirty="0"/>
+          </a:p>
+          <a:p>
+            <a:pPr marL="342900" indent="-342900">
+              <a:spcAft>
+                <a:spcPts val="900"/>
+              </a:spcAft>
+              <a:buSzPct val="100000"/>
+              <a:buChar char="•"/>
+            </a:pPr>
+            <a:r>
+              <a:rPr lang="en-US" sz="1250" dirty="0">
+                <a:solidFill>
+                  <a:srgbClr val="44506B"/>
+                </a:solidFill>
+                <a:latin typeface="Calibri" pitchFamily="34" charset="0"/>
+                <a:ea typeface="Calibri" pitchFamily="34" charset="-122"/>
+                <a:cs typeface="Calibri" pitchFamily="34" charset="-120"/>
+              </a:rPr>
+              <a:t>Draft the proposition catalogue</a:t>
+            </a:r>
+            <a:endParaRPr lang="en-US" sz="1250" dirty="0"/>
+          </a:p>
+          <a:p>
+            <a:pPr marL="342900" indent="-342900">
+              <a:spcAft>
+                <a:spcPts val="900"/>
+              </a:spcAft>
+              <a:buSzPct val="100000"/>
+              <a:buChar char="•"/>
+            </a:pPr>
+            <a:r>
+              <a:rPr lang="en-US" sz="1250" dirty="0">
+                <a:solidFill>
+                  <a:srgbClr val="44506B"/>
+                </a:solidFill>
+                <a:latin typeface="Calibri" pitchFamily="34" charset="0"/>
+                <a:ea typeface="Calibri" pitchFamily="34" charset="-122"/>
+                <a:cs typeface="Calibri" pitchFamily="34" charset="-120"/>
+              </a:rPr>
+              <a:t>Baseline the team we have today</a:t>
+            </a:r>
+            <a:endParaRPr lang="en-US" sz="1250" dirty="0"/>
+          </a:p>
+        </p:txBody>
+      </p:sp>
+      <p:sp>
+        <p:nvSpPr>
+          <p:cNvPr id="8" name="Text 6"/>
+          <p:cNvSpPr txBox="1"/>
+          <p:nvPr/>
+        </p:nvSpPr>
+        <p:spPr>
+          <a:xfrm>
+            <a:off x="914400" y="4892040"/>
+            <a:ext cx="2880360" cy="594360"/>
+          </a:xfrm>
+          <a:prstGeom prst="rect">
+            <a:avLst/>
+          </a:prstGeom>
+          <a:noFill/>
+          <a:ln/>
+        </p:spPr>
+        <p:txBody>
+          <a:bodyPr wrap="square" lIns="0" tIns="0" rIns="0" bIns="0" rtlCol="0" anchor="ctr"/>
+          <a:lstStyle/>
+          <a:p>
+            <a:pPr indent="0" marL="0">
+              <a:buNone/>
+            </a:pPr>
+            <a:r>
+              <a:rPr lang="en-US" sz="1200" b="1" dirty="0">
+                <a:solidFill>
+                  <a:srgbClr val="B8862B"/>
+                </a:solidFill>
+                <a:latin typeface="Calibri" pitchFamily="34" charset="0"/>
+                <a:ea typeface="Calibri" pitchFamily="34" charset="-122"/>
+                <a:cs typeface="Calibri" pitchFamily="34" charset="-120"/>
+              </a:rPr>
+              <a:t>Gate: agreed market and segment priorities</a:t>
+            </a:r>
+            <a:endParaRPr lang="en-US" sz="1200" dirty="0"/>
+          </a:p>
+        </p:txBody>
+      </p:sp>
+      <p:sp>
+        <p:nvSpPr>
+          <p:cNvPr id="9" name="Text 7"/>
+          <p:cNvSpPr txBox="1"/>
+          <p:nvPr/>
+        </p:nvSpPr>
+        <p:spPr>
+          <a:xfrm>
+            <a:off x="4096512" y="3474720"/>
+            <a:ext cx="256032" cy="457200"/>
+          </a:xfrm>
+          <a:prstGeom prst="rect">
+            <a:avLst/>
+          </a:prstGeom>
+          <a:noFill/>
+          <a:ln/>
+        </p:spPr>
+        <p:txBody>
+          <a:bodyPr wrap="square" lIns="0" tIns="0" rIns="0" bIns="0" rtlCol="0" anchor="ctr"/>
+          <a:lstStyle/>
+          <a:p>
+            <a:pPr algn="ctr" indent="0" marL="0">
+              <a:buNone/>
+            </a:pPr>
+            <a:r>
+              <a:rPr lang="en-US" sz="2000" dirty="0">
+                <a:solidFill>
+                  <a:srgbClr val="8792AB"/>
+                </a:solidFill>
+                <a:latin typeface="Calibri" pitchFamily="34" charset="0"/>
+                <a:ea typeface="Calibri" pitchFamily="34" charset="-122"/>
+                <a:cs typeface="Calibri" pitchFamily="34" charset="-120"/>
+              </a:rPr>
+              <a:t>→</a:t>
+            </a:r>
+            <a:endParaRPr lang="en-US" sz="2000" dirty="0"/>
+          </a:p>
+        </p:txBody>
+      </p:sp>
+      <p:sp>
+        <p:nvSpPr>
+          <p:cNvPr id="10" name="Shape 8"/>
+          <p:cNvSpPr/>
+          <p:nvPr/>
+        </p:nvSpPr>
+        <p:spPr>
+          <a:xfrm>
+            <a:off x="4361688" y="1828800"/>
+            <a:ext cx="3429000" cy="3840480"/>
+          </a:xfrm>
+          <a:prstGeom prst="roundRect">
+            <a:avLst>
+              <a:gd name="adj" fmla="val 3200"/>
+            </a:avLst>
+          </a:prstGeom>
+          <a:solidFill>
+            <a:srgbClr val="EDF2FA"/>
+          </a:solidFill>
+          <a:ln/>
+        </p:spPr>
+      </p:sp>
+      <p:sp>
+        <p:nvSpPr>
+          <p:cNvPr id="11" name="Shape 9"/>
+          <p:cNvSpPr/>
+          <p:nvPr/>
+        </p:nvSpPr>
+        <p:spPr>
+          <a:xfrm>
+            <a:off x="4361688" y="1828800"/>
+            <a:ext cx="3429000" cy="685800"/>
+          </a:xfrm>
+          <a:prstGeom prst="rect">
+            <a:avLst/>
+          </a:prstGeom>
+          <a:solidFill>
+            <a:srgbClr val="3E5C8A"/>
+          </a:solidFill>
+          <a:ln/>
+        </p:spPr>
+      </p:sp>
+      <p:sp>
+        <p:nvSpPr>
+          <p:cNvPr id="12" name="Text 10"/>
+          <p:cNvSpPr txBox="1"/>
+          <p:nvPr/>
+        </p:nvSpPr>
+        <p:spPr>
+          <a:xfrm>
+            <a:off x="4636008" y="1828800"/>
+            <a:ext cx="2926080" cy="685800"/>
+          </a:xfrm>
+          <a:prstGeom prst="rect">
+            <a:avLst/>
+          </a:prstGeom>
+          <a:noFill/>
+          <a:ln/>
+        </p:spPr>
+        <p:txBody>
+          <a:bodyPr wrap="square" lIns="0" tIns="0" rIns="0" bIns="0" rtlCol="0" anchor="ctr"/>
+          <a:lstStyle/>
+          <a:p>
+            <a:pPr indent="0" marL="0">
+              <a:buNone/>
+            </a:pPr>
+            <a:r>
+              <a:rPr lang="en-US" sz="1800" b="1" dirty="0">
+                <a:solidFill>
+                  <a:srgbClr val="FFFFFF"/>
+                </a:solidFill>
+                <a:latin typeface="Calibri" pitchFamily="34" charset="0"/>
+                <a:ea typeface="Calibri" pitchFamily="34" charset="-122"/>
+                <a:cs typeface="Calibri" pitchFamily="34" charset="-120"/>
+              </a:rPr>
+              <a:t>Week 2  ·  Define</a:t>
+            </a:r>
+            <a:endParaRPr lang="en-US" sz="1800" dirty="0"/>
+          </a:p>
+        </p:txBody>
+      </p:sp>
+      <p:sp>
+        <p:nvSpPr>
+          <p:cNvPr id="13" name="Text 11"/>
+          <p:cNvSpPr txBox="1"/>
+          <p:nvPr/>
+        </p:nvSpPr>
+        <p:spPr>
+          <a:xfrm>
+            <a:off x="4636008" y="2743200"/>
+            <a:ext cx="2880360" cy="1920240"/>
+          </a:xfrm>
+          <a:prstGeom prst="rect">
+            <a:avLst/>
+          </a:prstGeom>
+          <a:noFill/>
+          <a:ln/>
+        </p:spPr>
+        <p:txBody>
+          <a:bodyPr wrap="square" lIns="0" tIns="0" rIns="0" bIns="0" rtlCol="0" anchor="ctr"/>
+          <a:lstStyle/>
+          <a:p>
+            <a:pPr marL="342900" indent="-342900">
+              <a:spcAft>
+                <a:spcPts val="900"/>
+              </a:spcAft>
+              <a:buSzPct val="100000"/>
+              <a:buChar char="•"/>
+            </a:pPr>
+            <a:r>
+              <a:rPr lang="en-US" sz="1250" dirty="0">
+                <a:solidFill>
+                  <a:srgbClr val="44506B"/>
+                </a:solidFill>
+                <a:latin typeface="Calibri" pitchFamily="34" charset="0"/>
+                <a:ea typeface="Calibri" pitchFamily="34" charset="-122"/>
+                <a:cs typeface="Calibri" pitchFamily="34" charset="-120"/>
+              </a:rPr>
+              <a:t>Lock propositions and permitted variants</a:t>
+            </a:r>
+            <a:endParaRPr lang="en-US" sz="1250" dirty="0"/>
+          </a:p>
+          <a:p>
+            <a:pPr marL="342900" indent="-342900">
+              <a:spcAft>
+                <a:spcPts val="900"/>
+              </a:spcAft>
+              <a:buSzPct val="100000"/>
+              <a:buChar char="•"/>
+            </a:pPr>
+            <a:r>
+              <a:rPr lang="en-US" sz="1250" dirty="0">
+                <a:solidFill>
+                  <a:srgbClr val="44506B"/>
+                </a:solidFill>
+                <a:latin typeface="Calibri" pitchFamily="34" charset="0"/>
+                <a:ea typeface="Calibri" pitchFamily="34" charset="-122"/>
+                <a:cs typeface="Calibri" pitchFamily="34" charset="-120"/>
+              </a:rPr>
+              <a:t>Benchmark deal sizes and pricing</a:t>
+            </a:r>
+            <a:endParaRPr lang="en-US" sz="1250" dirty="0"/>
+          </a:p>
+          <a:p>
+            <a:pPr marL="342900" indent="-342900">
+              <a:spcAft>
+                <a:spcPts val="900"/>
+              </a:spcAft>
+              <a:buSzPct val="100000"/>
+              <a:buChar char="•"/>
+            </a:pPr>
+            <a:r>
+              <a:rPr lang="en-US" sz="1250" dirty="0">
+                <a:solidFill>
+                  <a:srgbClr val="44506B"/>
+                </a:solidFill>
+                <a:latin typeface="Calibri" pitchFamily="34" charset="0"/>
+                <a:ea typeface="Calibri" pitchFamily="34" charset="-122"/>
+                <a:cs typeface="Calibri" pitchFamily="34" charset="-120"/>
+              </a:rPr>
+              <a:t>Shortlist target accounts</a:t>
+            </a:r>
+            <a:endParaRPr lang="en-US" sz="1250" dirty="0"/>
+          </a:p>
+          <a:p>
+            <a:pPr marL="342900" indent="-342900">
+              <a:spcAft>
+                <a:spcPts val="900"/>
+              </a:spcAft>
+              <a:buSzPct val="100000"/>
+              <a:buChar char="•"/>
+            </a:pPr>
+            <a:r>
+              <a:rPr lang="en-US" sz="1250" dirty="0">
+                <a:solidFill>
+                  <a:srgbClr val="44506B"/>
+                </a:solidFill>
+                <a:latin typeface="Calibri" pitchFamily="34" charset="0"/>
+                <a:ea typeface="Calibri" pitchFamily="34" charset="-122"/>
+                <a:cs typeface="Calibri" pitchFamily="34" charset="-120"/>
+              </a:rPr>
+              <a:t>Map alliances to offerings</a:t>
+            </a:r>
+            <a:endParaRPr lang="en-US" sz="1250" dirty="0"/>
+          </a:p>
+          <a:p>
+            <a:pPr marL="342900" indent="-342900">
+              <a:spcAft>
+                <a:spcPts val="900"/>
+              </a:spcAft>
+              <a:buSzPct val="100000"/>
+              <a:buChar char="•"/>
+            </a:pPr>
+            <a:r>
+              <a:rPr lang="en-US" sz="1250" dirty="0">
+                <a:solidFill>
+                  <a:srgbClr val="44506B"/>
+                </a:solidFill>
+                <a:latin typeface="Calibri" pitchFamily="34" charset="0"/>
+                <a:ea typeface="Calibri" pitchFamily="34" charset="-122"/>
+                <a:cs typeface="Calibri" pitchFamily="34" charset="-120"/>
+              </a:rPr>
+              <a:t>Size the capacity each target implies</a:t>
+            </a:r>
+            <a:endParaRPr lang="en-US" sz="1250" dirty="0"/>
+          </a:p>
+        </p:txBody>
+      </p:sp>
+      <p:sp>
+        <p:nvSpPr>
+          <p:cNvPr id="14" name="Text 12"/>
+          <p:cNvSpPr txBox="1"/>
+          <p:nvPr/>
+        </p:nvSpPr>
+        <p:spPr>
+          <a:xfrm>
+            <a:off x="4636008" y="4892040"/>
+            <a:ext cx="2880360" cy="594360"/>
+          </a:xfrm>
+          <a:prstGeom prst="rect">
+            <a:avLst/>
+          </a:prstGeom>
+          <a:noFill/>
+          <a:ln/>
+        </p:spPr>
+        <p:txBody>
+          <a:bodyPr wrap="square" lIns="0" tIns="0" rIns="0" bIns="0" rtlCol="0" anchor="ctr"/>
+          <a:lstStyle/>
+          <a:p>
+            <a:pPr indent="0" marL="0">
+              <a:buNone/>
+            </a:pPr>
+            <a:r>
+              <a:rPr lang="en-US" sz="1200" b="1" dirty="0">
+                <a:solidFill>
+                  <a:srgbClr val="B8862B"/>
+                </a:solidFill>
+                <a:latin typeface="Calibri" pitchFamily="34" charset="0"/>
+                <a:ea typeface="Calibri" pitchFamily="34" charset="-122"/>
+                <a:cs typeface="Calibri" pitchFamily="34" charset="-120"/>
+              </a:rPr>
+              <a:t>Gate: agreed catalogue and shortlist</a:t>
+            </a:r>
+            <a:endParaRPr lang="en-US" sz="1200" dirty="0"/>
+          </a:p>
+        </p:txBody>
+      </p:sp>
+      <p:sp>
+        <p:nvSpPr>
+          <p:cNvPr id="15" name="Text 13"/>
+          <p:cNvSpPr txBox="1"/>
+          <p:nvPr/>
+        </p:nvSpPr>
+        <p:spPr>
+          <a:xfrm>
+            <a:off x="7818120" y="3474720"/>
+            <a:ext cx="256032" cy="457200"/>
+          </a:xfrm>
+          <a:prstGeom prst="rect">
+            <a:avLst/>
+          </a:prstGeom>
+          <a:noFill/>
+          <a:ln/>
+        </p:spPr>
+        <p:txBody>
+          <a:bodyPr wrap="square" lIns="0" tIns="0" rIns="0" bIns="0" rtlCol="0" anchor="ctr"/>
+          <a:lstStyle/>
+          <a:p>
+            <a:pPr algn="ctr" indent="0" marL="0">
+              <a:buNone/>
+            </a:pPr>
+            <a:r>
+              <a:rPr lang="en-US" sz="2000" dirty="0">
+                <a:solidFill>
+                  <a:srgbClr val="8792AB"/>
+                </a:solidFill>
+                <a:latin typeface="Calibri" pitchFamily="34" charset="0"/>
+                <a:ea typeface="Calibri" pitchFamily="34" charset="-122"/>
+                <a:cs typeface="Calibri" pitchFamily="34" charset="-120"/>
+              </a:rPr>
+              <a:t>→</a:t>
+            </a:r>
+            <a:endParaRPr lang="en-US" sz="2000" dirty="0"/>
+          </a:p>
+        </p:txBody>
+      </p:sp>
+      <p:sp>
+        <p:nvSpPr>
+          <p:cNvPr id="16" name="Shape 14"/>
+          <p:cNvSpPr/>
+          <p:nvPr/>
+        </p:nvSpPr>
+        <p:spPr>
+          <a:xfrm>
+            <a:off x="8083296" y="1828800"/>
+            <a:ext cx="3429000" cy="3840480"/>
+          </a:xfrm>
+          <a:prstGeom prst="roundRect">
+            <a:avLst>
+              <a:gd name="adj" fmla="val 3200"/>
+            </a:avLst>
+          </a:prstGeom>
+          <a:solidFill>
+            <a:srgbClr val="EDF2FA"/>
+          </a:solidFill>
+          <a:ln/>
+        </p:spPr>
+      </p:sp>
+      <p:sp>
+        <p:nvSpPr>
+          <p:cNvPr id="17" name="Shape 15"/>
+          <p:cNvSpPr/>
+          <p:nvPr/>
+        </p:nvSpPr>
+        <p:spPr>
+          <a:xfrm>
+            <a:off x="8083296" y="1828800"/>
+            <a:ext cx="3429000" cy="685800"/>
+          </a:xfrm>
+          <a:prstGeom prst="rect">
+            <a:avLst/>
+          </a:prstGeom>
+          <a:solidFill>
+            <a:srgbClr val="1E2761"/>
+          </a:solidFill>
+          <a:ln/>
+        </p:spPr>
+      </p:sp>
+      <p:sp>
+        <p:nvSpPr>
+          <p:cNvPr id="18" name="Text 16"/>
+          <p:cNvSpPr txBox="1"/>
+          <p:nvPr/>
+        </p:nvSpPr>
+        <p:spPr>
+          <a:xfrm>
+            <a:off x="8357616" y="1828800"/>
+            <a:ext cx="2926080" cy="685800"/>
+          </a:xfrm>
+          <a:prstGeom prst="rect">
+            <a:avLst/>
+          </a:prstGeom>
+          <a:noFill/>
+          <a:ln/>
+        </p:spPr>
+        <p:txBody>
+          <a:bodyPr wrap="square" lIns="0" tIns="0" rIns="0" bIns="0" rtlCol="0" anchor="ctr"/>
+          <a:lstStyle/>
+          <a:p>
+            <a:pPr indent="0" marL="0">
+              <a:buNone/>
+            </a:pPr>
+            <a:r>
+              <a:rPr lang="en-US" sz="1800" b="1" dirty="0">
+                <a:solidFill>
+                  <a:srgbClr val="FFFFFF"/>
+                </a:solidFill>
+                <a:latin typeface="Calibri" pitchFamily="34" charset="0"/>
+                <a:ea typeface="Calibri" pitchFamily="34" charset="-122"/>
+                <a:cs typeface="Calibri" pitchFamily="34" charset="-120"/>
+              </a:rPr>
+              <a:t>Week 3  ·  Commit</a:t>
+            </a:r>
+            <a:endParaRPr lang="en-US" sz="1800" dirty="0"/>
+          </a:p>
+        </p:txBody>
+      </p:sp>
+      <p:sp>
+        <p:nvSpPr>
+          <p:cNvPr id="19" name="Text 17"/>
+          <p:cNvSpPr txBox="1"/>
+          <p:nvPr/>
+        </p:nvSpPr>
+        <p:spPr>
+          <a:xfrm>
+            <a:off x="8357616" y="2743200"/>
+            <a:ext cx="2880360" cy="1920240"/>
+          </a:xfrm>
+          <a:prstGeom prst="rect">
+            <a:avLst/>
+          </a:prstGeom>
+          <a:noFill/>
+          <a:ln/>
+        </p:spPr>
+        <p:txBody>
+          <a:bodyPr wrap="square" lIns="0" tIns="0" rIns="0" bIns="0" rtlCol="0" anchor="ctr"/>
+          <a:lstStyle/>
+          <a:p>
+            <a:pPr marL="342900" indent="-342900">
+              <a:spcAft>
+                <a:spcPts val="900"/>
+              </a:spcAft>
+              <a:buSzPct val="100000"/>
+              <a:buChar char="•"/>
+            </a:pPr>
+            <a:r>
+              <a:rPr lang="en-US" sz="1250" dirty="0">
+                <a:solidFill>
+                  <a:srgbClr val="44506B"/>
+                </a:solidFill>
+                <a:latin typeface="Calibri" pitchFamily="34" charset="0"/>
+                <a:ea typeface="Calibri" pitchFamily="34" charset="-122"/>
+                <a:cs typeface="Calibri" pitchFamily="34" charset="-120"/>
+              </a:rPr>
+              <a:t>Set revenue targets by market and offering</a:t>
+            </a:r>
+            <a:endParaRPr lang="en-US" sz="1250" dirty="0"/>
+          </a:p>
+          <a:p>
+            <a:pPr marL="342900" indent="-342900">
+              <a:spcAft>
+                <a:spcPts val="900"/>
+              </a:spcAft>
+              <a:buSzPct val="100000"/>
+              <a:buChar char="•"/>
+            </a:pPr>
+            <a:r>
+              <a:rPr lang="en-US" sz="1250" dirty="0">
+                <a:solidFill>
+                  <a:srgbClr val="44506B"/>
+                </a:solidFill>
+                <a:latin typeface="Calibri" pitchFamily="34" charset="0"/>
+                <a:ea typeface="Calibri" pitchFamily="34" charset="-122"/>
+                <a:cs typeface="Calibri" pitchFamily="34" charset="-120"/>
+              </a:rPr>
+              <a:t>Assign an owner to every account</a:t>
+            </a:r>
+            <a:endParaRPr lang="en-US" sz="1250" dirty="0"/>
+          </a:p>
+          <a:p>
+            <a:pPr marL="342900" indent="-342900">
+              <a:spcAft>
+                <a:spcPts val="900"/>
+              </a:spcAft>
+              <a:buSzPct val="100000"/>
+              <a:buChar char="•"/>
+            </a:pPr>
+            <a:r>
+              <a:rPr lang="en-US" sz="1250" dirty="0">
+                <a:solidFill>
+                  <a:srgbClr val="44506B"/>
+                </a:solidFill>
+                <a:latin typeface="Calibri" pitchFamily="34" charset="0"/>
+                <a:ea typeface="Calibri" pitchFamily="34" charset="-122"/>
+                <a:cs typeface="Calibri" pitchFamily="34" charset="-120"/>
+              </a:rPr>
+              <a:t>Agree the team model and recruitment plan</a:t>
+            </a:r>
+            <a:endParaRPr lang="en-US" sz="1250" dirty="0"/>
+          </a:p>
+          <a:p>
+            <a:pPr marL="342900" indent="-342900">
+              <a:spcAft>
+                <a:spcPts val="900"/>
+              </a:spcAft>
+              <a:buSzPct val="100000"/>
+              <a:buChar char="•"/>
+            </a:pPr>
+            <a:r>
+              <a:rPr lang="en-US" sz="1250" dirty="0">
+                <a:solidFill>
+                  <a:srgbClr val="44506B"/>
+                </a:solidFill>
+                <a:latin typeface="Calibri" pitchFamily="34" charset="0"/>
+                <a:ea typeface="Calibri" pitchFamily="34" charset="-122"/>
+                <a:cs typeface="Calibri" pitchFamily="34" charset="-120"/>
+              </a:rPr>
+              <a:t>Set the eminence calendar</a:t>
+            </a:r>
+            <a:endParaRPr lang="en-US" sz="1250" dirty="0"/>
+          </a:p>
+          <a:p>
+            <a:pPr marL="342900" indent="-342900">
+              <a:spcAft>
+                <a:spcPts val="900"/>
+              </a:spcAft>
+              <a:buSzPct val="100000"/>
+              <a:buChar char="•"/>
+            </a:pPr>
+            <a:r>
+              <a:rPr lang="en-US" sz="1250" dirty="0">
+                <a:solidFill>
+                  <a:srgbClr val="44506B"/>
+                </a:solidFill>
+                <a:latin typeface="Calibri" pitchFamily="34" charset="0"/>
+                <a:ea typeface="Calibri" pitchFamily="34" charset="-122"/>
+                <a:cs typeface="Calibri" pitchFamily="34" charset="-120"/>
+              </a:rPr>
+              <a:t>Build the activation plan and sign off</a:t>
+            </a:r>
+            <a:endParaRPr lang="en-US" sz="1250" dirty="0"/>
+          </a:p>
+        </p:txBody>
+      </p:sp>
+      <p:sp>
+        <p:nvSpPr>
+          <p:cNvPr id="20" name="Text 18"/>
+          <p:cNvSpPr txBox="1"/>
+          <p:nvPr/>
+        </p:nvSpPr>
+        <p:spPr>
+          <a:xfrm>
+            <a:off x="8357616" y="4892040"/>
+            <a:ext cx="2880360" cy="594360"/>
+          </a:xfrm>
+          <a:prstGeom prst="rect">
+            <a:avLst/>
+          </a:prstGeom>
+          <a:noFill/>
+          <a:ln/>
+        </p:spPr>
+        <p:txBody>
+          <a:bodyPr wrap="square" lIns="0" tIns="0" rIns="0" bIns="0" rtlCol="0" anchor="ctr"/>
+          <a:lstStyle/>
+          <a:p>
+            <a:pPr indent="0" marL="0">
+              <a:buNone/>
+            </a:pPr>
+            <a:r>
+              <a:rPr lang="en-US" sz="1200" b="1" dirty="0">
+                <a:solidFill>
+                  <a:srgbClr val="B8862B"/>
+                </a:solidFill>
+                <a:latin typeface="Calibri" pitchFamily="34" charset="0"/>
+                <a:ea typeface="Calibri" pitchFamily="34" charset="-122"/>
+                <a:cs typeface="Calibri" pitchFamily="34" charset="-120"/>
+              </a:rPr>
+              <a:t>Gate: strategy signed off</a:t>
+            </a:r>
+            <a:endParaRPr lang="en-US" sz="1200" dirty="0"/>
+          </a:p>
+        </p:txBody>
+      </p:sp>
+      <p:sp>
+        <p:nvSpPr>
+          <p:cNvPr id="21" name="Text 19"/>
+          <p:cNvSpPr txBox="1"/>
+          <p:nvPr/>
+        </p:nvSpPr>
+        <p:spPr>
+          <a:xfrm>
+            <a:off x="640080" y="5852160"/>
+            <a:ext cx="5486400" cy="320040"/>
+          </a:xfrm>
+          <a:prstGeom prst="rect">
+            <a:avLst/>
+          </a:prstGeom>
+          <a:noFill/>
+          <a:ln/>
+        </p:spPr>
+        <p:txBody>
+          <a:bodyPr wrap="square" lIns="0" tIns="0" rIns="0" bIns="0" rtlCol="0" anchor="ctr"/>
+          <a:lstStyle/>
+          <a:p>
+            <a:pPr indent="0" marL="0">
+              <a:buNone/>
+            </a:pPr>
+            <a:r>
+              <a:rPr lang="en-US" sz="1200" i="1" dirty="0">
+                <a:solidFill>
+                  <a:srgbClr val="8792AB"/>
+                </a:solidFill>
+                <a:latin typeface="Calibri" pitchFamily="34" charset="0"/>
+                <a:ea typeface="Calibri" pitchFamily="34" charset="-122"/>
+                <a:cs typeface="Calibri" pitchFamily="34" charset="-120"/>
+              </a:rPr>
+              <a:t>Start date to be defined at kick-off.</a:t>
+            </a:r>
+            <a:endParaRPr lang="en-US" sz="1200" dirty="0"/>
+          </a:p>
+        </p:txBody>
+      </p:sp>
+    </p:spTree>
+  </p:cSld>
+  <p:clrMapOvr>
+    <a:masterClrMapping/>
+  </p:clrMapOvr>
+</p:sld>
+</file>
+
+<file path=ppt/slides/slide11.xml><?xml version="1.0" encoding="utf-8"?>
+<p:sld xmlns:a="http://schemas.openxmlformats.org/drawingml/2006/main" xmlns:r="http://schemas.openxmlformats.org/officeDocument/2006/relationships" xmlns:p="http://schemas.openxmlformats.org/presentationml/2006/main">
+  <p:cSld name="Slide 11">
+    <p:bg>
+      <p:bgPr>
+        <a:solidFill>
           <a:srgbClr val="1E2761"/>
         </a:solidFill>
       </p:bgPr>
@@ -2699,6 +3761,27 @@
                 <a:cs typeface="Calibri" pitchFamily="34" charset="-120"/>
               </a:rPr>
               <a:t>Account ownership</a:t>
+            </a:r>
+            <a:endParaRPr lang="en-US" sz="1300" dirty="0"/>
+          </a:p>
+          <a:p>
+            <a:pPr marL="342900" indent="-342900">
+              <a:spcAft>
+                <a:spcPts val="1000"/>
+              </a:spcAft>
+              <a:buSzPct val="100000"/>
+              <a:buChar char="•"/>
+            </a:pPr>
+            <a:r>
+              <a:rPr lang="en-US" sz="1300" dirty="0">
+                <a:solidFill>
+                  <a:srgbClr val="CADCFC"/>
+                </a:solidFill>
+                <a:latin typeface="Calibri" pitchFamily="34" charset="0"/>
+                <a:ea typeface="Calibri" pitchFamily="34" charset="-122"/>
+                <a:cs typeface="Calibri" pitchFamily="34" charset="-120"/>
+              </a:rPr>
+              <a:t>Alliance priorities</a:t>
             </a:r>
             <a:endParaRPr lang="en-US" sz="1300" dirty="0"/>
           </a:p>
@@ -3538,7 +4621,7 @@
                 <a:ea typeface="Cambria" pitchFamily="34" charset="-122"/>
                 <a:cs typeface="Cambria" pitchFamily="34" charset="-120"/>
               </a:rPr>
-              <a:t>Seven questions to answer</a:t>
+              <a:t>Eight questions to answer</a:t>
             </a:r>
             <a:endParaRPr lang="en-US" sz="3600" dirty="0"/>
           </a:p>
@@ -4937,6 +6020,211 @@
       <p:sp>
         <p:nvSpPr>
           <p:cNvPr id="39" name="Shape 37"/>
+          <p:cNvSpPr/>
+          <p:nvPr/>
+        </p:nvSpPr>
+        <p:spPr>
+          <a:xfrm>
+            <a:off x="8869680" y="3794760"/>
+            <a:ext cx="2606040" cy="1783080"/>
+          </a:xfrm>
+          <a:prstGeom prst="roundRect">
+            <a:avLst>
+              <a:gd name="adj" fmla="val 6154"/>
+            </a:avLst>
+          </a:prstGeom>
+          <a:solidFill>
+            <a:srgbClr val="EDF2FA"/>
+          </a:solidFill>
+          <a:ln/>
+        </p:spPr>
+      </p:sp>
+      <p:sp>
+        <p:nvSpPr>
+          <p:cNvPr id="40" name="Shape 38"/>
+          <p:cNvSpPr/>
+          <p:nvPr/>
+        </p:nvSpPr>
+        <p:spPr>
+          <a:xfrm>
+            <a:off x="9098280" y="4050792"/>
+            <a:ext cx="365760" cy="365760"/>
+          </a:xfrm>
+          <a:prstGeom prst="ellipse">
+            <a:avLst/>
+          </a:prstGeom>
+          <a:solidFill>
+            <a:srgbClr val="1E2761"/>
+          </a:solidFill>
+          <a:ln/>
+        </p:spPr>
+      </p:sp>
+      <p:sp>
+        <p:nvSpPr>
+          <p:cNvPr id="41" name="Text 39"/>
+          <p:cNvSpPr txBox="1"/>
+          <p:nvPr/>
+        </p:nvSpPr>
+        <p:spPr>
+          <a:xfrm>
+            <a:off x="9098280" y="4050792"/>
+            <a:ext cx="365760" cy="365760"/>
+          </a:xfrm>
+          <a:prstGeom prst="rect">
+            <a:avLst/>
+          </a:prstGeom>
+          <a:noFill/>
+          <a:ln/>
+        </p:spPr>
+        <p:txBody>
+          <a:bodyPr wrap="square" lIns="0" tIns="0" rIns="0" bIns="0" rtlCol="0" anchor="ctr"/>
+          <a:lstStyle/>
+          <a:p>
+            <a:pPr algn="ctr" indent="0" marL="0">
+              <a:buNone/>
+            </a:pPr>
+            <a:r>
+              <a:rPr lang="en-US" sz="1200" b="1" dirty="0">
+                <a:solidFill>
+                  <a:srgbClr val="FFFFFF"/>
+                </a:solidFill>
+                <a:latin typeface="Calibri" pitchFamily="34" charset="0"/>
+                <a:ea typeface="Calibri" pitchFamily="34" charset="-122"/>
+                <a:cs typeface="Calibri" pitchFamily="34" charset="-120"/>
+              </a:rPr>
+              <a:t>8</a:t>
+            </a:r>
+            <a:endParaRPr lang="en-US" sz="1200" dirty="0"/>
+          </a:p>
+        </p:txBody>
+      </p:sp>
+      <p:sp>
+        <p:nvSpPr>
+          <p:cNvPr id="42" name="Text 40"/>
+          <p:cNvSpPr txBox="1"/>
+          <p:nvPr/>
+        </p:nvSpPr>
+        <p:spPr>
+          <a:xfrm>
+            <a:off x="9582912" y="4032504"/>
+            <a:ext cx="1783080" cy="365760"/>
+          </a:xfrm>
+          <a:prstGeom prst="rect">
+            <a:avLst/>
+          </a:prstGeom>
+          <a:noFill/>
+          <a:ln/>
+        </p:spPr>
+        <p:txBody>
+          <a:bodyPr wrap="square" lIns="0" tIns="0" rIns="0" bIns="0" rtlCol="0" anchor="ctr"/>
+          <a:lstStyle/>
+          <a:p>
+            <a:pPr indent="0" marL="0">
+              <a:buNone/>
+            </a:pPr>
+            <a:r>
+              <a:rPr lang="en-US" sz="1450" b="1" dirty="0">
+                <a:solidFill>
+                  <a:srgbClr val="16203A"/>
+                </a:solidFill>
+                <a:latin typeface="Calibri" pitchFamily="34" charset="0"/>
+                <a:ea typeface="Calibri" pitchFamily="34" charset="-122"/>
+                <a:cs typeface="Calibri" pitchFamily="34" charset="-120"/>
+              </a:rPr>
+              <a:t>Who we go with</a:t>
+            </a:r>
+            <a:endParaRPr lang="en-US" sz="1450" dirty="0"/>
+          </a:p>
+        </p:txBody>
+      </p:sp>
+      <p:sp>
+        <p:nvSpPr>
+          <p:cNvPr id="43" name="Text 41"/>
+          <p:cNvSpPr txBox="1"/>
+          <p:nvPr/>
+        </p:nvSpPr>
+        <p:spPr>
+          <a:xfrm>
+            <a:off x="9125712" y="4507992"/>
+            <a:ext cx="2194560" cy="960120"/>
+          </a:xfrm>
+          <a:prstGeom prst="rect">
+            <a:avLst/>
+          </a:prstGeom>
+          <a:noFill/>
+          <a:ln/>
+        </p:spPr>
+        <p:txBody>
+          <a:bodyPr wrap="square" lIns="0" tIns="0" rIns="0" bIns="0" rtlCol="0" anchor="ctr"/>
+          <a:lstStyle/>
+          <a:p>
+            <a:pPr marL="342900" indent="-342900">
+              <a:spcAft>
+                <a:spcPts val="400"/>
+              </a:spcAft>
+              <a:buSzPct val="100000"/>
+              <a:buChar char="•"/>
+            </a:pPr>
+            <a:r>
+              <a:rPr lang="en-US" sz="1050" dirty="0">
+                <a:solidFill>
+                  <a:srgbClr val="44506B"/>
+                </a:solidFill>
+                <a:latin typeface="Calibri" pitchFamily="34" charset="0"/>
+                <a:ea typeface="Calibri" pitchFamily="34" charset="-122"/>
+                <a:cs typeface="Calibri" pitchFamily="34" charset="-120"/>
+              </a:rPr>
+              <a:t>Which alliances matter for which offering?</a:t>
+            </a:r>
+            <a:endParaRPr lang="en-US" sz="1050" dirty="0"/>
+          </a:p>
+          <a:p>
+            <a:pPr marL="342900" indent="-342900">
+              <a:spcAft>
+                <a:spcPts val="400"/>
+              </a:spcAft>
+              <a:buSzPct val="100000"/>
+              <a:buChar char="•"/>
+            </a:pPr>
+            <a:r>
+              <a:rPr lang="en-US" sz="1050" dirty="0">
+                <a:solidFill>
+                  <a:srgbClr val="44506B"/>
+                </a:solidFill>
+                <a:latin typeface="Calibri" pitchFamily="34" charset="0"/>
+                <a:ea typeface="Calibri" pitchFamily="34" charset="-122"/>
+                <a:cs typeface="Calibri" pitchFamily="34" charset="-120"/>
+              </a:rPr>
+              <a:t>What do we leverage each one for?</a:t>
+            </a:r>
+            <a:endParaRPr lang="en-US" sz="1050" dirty="0"/>
+          </a:p>
+          <a:p>
+            <a:pPr marL="342900" indent="-342900">
+              <a:spcAft>
+                <a:spcPts val="400"/>
+              </a:spcAft>
+              <a:buSzPct val="100000"/>
+              <a:buChar char="•"/>
+            </a:pPr>
+            <a:r>
+              <a:rPr lang="en-US" sz="1050" dirty="0">
+                <a:solidFill>
+                  <a:srgbClr val="44506B"/>
+                </a:solidFill>
+                <a:latin typeface="Calibri" pitchFamily="34" charset="0"/>
+                <a:ea typeface="Calibri" pitchFamily="34" charset="-122"/>
+                <a:cs typeface="Calibri" pitchFamily="34" charset="-120"/>
+              </a:rPr>
+              <a:t>What do they expect back?</a:t>
+            </a:r>
+            <a:endParaRPr lang="en-US" sz="1050" dirty="0"/>
+          </a:p>
+        </p:txBody>
+      </p:sp>
+      <p:sp>
+        <p:nvSpPr>
+          <p:cNvPr id="44" name="Shape 42"/>
           <p:cNvSpPr/>
           <p:nvPr/>
         </p:nvSpPr>
@@ -4963,7 +6251,7 @@
       </p:sp>
       <p:sp>
         <p:nvSpPr>
-          <p:cNvPr id="40" name="Text 38"/>
+          <p:cNvPr id="45" name="Text 43"/>
           <p:cNvSpPr txBox="1"/>
           <p:nvPr/>
         </p:nvSpPr>
@@ -7263,7 +8551,7 @@
                 <a:ea typeface="Cambria" pitchFamily="34" charset="-122"/>
                 <a:cs typeface="Cambria" pitchFamily="34" charset="-120"/>
               </a:rPr>
-              <a:t>Seven workstreams, seven artefacts</a:t>
+              <a:t>Eight workstreams, eight artefacts</a:t>
             </a:r>
             <a:endParaRPr lang="en-US" sz="3600" dirty="0"/>
           </a:p>
@@ -7335,7 +8623,7 @@
                 <a:gridCol w="2377440"/>
                 <a:gridCol w="5486400"/>
               </a:tblGrid>
-              <a:tr h="438912">
+              <a:tr h="420624">
                 <a:tc>
                   <a:txBody>
                     <a:bodyPr/>
@@ -7345,7 +8633,7 @@
                         <a:buNone/>
                       </a:pPr>
                       <a:r>
-                        <a:rPr lang="en-US" sz="1200" b="1" dirty="0">
+                        <a:rPr lang="en-US" sz="1150" b="1" dirty="0">
                           <a:solidFill>
                             <a:srgbClr val="44506B"/>
                           </a:solidFill>
@@ -7355,14 +8643,14 @@
                         </a:rPr>
                         <a:t>Workstream</a:t>
                       </a:r>
-                      <a:endParaRPr lang="en-US" sz="1200" dirty="0">
+                      <a:endParaRPr lang="en-US" sz="1150" dirty="0">
                         <a:latin typeface="Calibri" charset="0"/>
                         <a:ea typeface="Calibri" charset="0"/>
                         <a:cs typeface="Calibri" charset="0"/>
                       </a:endParaRPr>
                     </a:p>
                   </a:txBody>
-                  <a:tcPr marL="88900" marR="88900" marT="88900" marB="88900" anchor="ctr">
+                  <a:tcPr marL="76200" marR="76200" marT="76200" marB="76200" anchor="ctr">
                     <a:lnL w="12700" cap="flat" cmpd="sng" algn="ctr">
                       <a:solidFill>
                         <a:srgbClr val="D8E0EE"/>
@@ -7413,7 +8701,7 @@
                         <a:buNone/>
                       </a:pPr>
                       <a:r>
-                        <a:rPr lang="en-US" sz="1200" b="1" dirty="0">
+                        <a:rPr lang="en-US" sz="1150" b="1" dirty="0">
                           <a:solidFill>
                             <a:srgbClr val="44506B"/>
                           </a:solidFill>
@@ -7423,14 +8711,14 @@
                         </a:rPr>
                         <a:t>Question it closes</a:t>
                       </a:r>
-                      <a:endParaRPr lang="en-US" sz="1200" dirty="0">
+                      <a:endParaRPr lang="en-US" sz="1150" dirty="0">
                         <a:latin typeface="Calibri" charset="0"/>
                         <a:ea typeface="Calibri" charset="0"/>
                         <a:cs typeface="Calibri" charset="0"/>
                       </a:endParaRPr>
                     </a:p>
                   </a:txBody>
-                  <a:tcPr marL="88900" marR="88900" marT="88900" marB="88900" anchor="ctr">
+                  <a:tcPr marL="76200" marR="76200" marT="76200" marB="76200" anchor="ctr">
                     <a:lnL w="12700" cap="flat" cmpd="sng" algn="ctr">
                       <a:solidFill>
                         <a:srgbClr val="D8E0EE"/>
@@ -7481,7 +8769,7 @@
                         <a:buNone/>
                       </a:pPr>
                       <a:r>
-                        <a:rPr lang="en-US" sz="1200" b="1" dirty="0">
+                        <a:rPr lang="en-US" sz="1150" b="1" dirty="0">
                           <a:solidFill>
                             <a:srgbClr val="44506B"/>
                           </a:solidFill>
@@ -7491,14 +8779,14 @@
                         </a:rPr>
                         <a:t>Artefact produced</a:t>
                       </a:r>
-                      <a:endParaRPr lang="en-US" sz="1200" dirty="0">
+                      <a:endParaRPr lang="en-US" sz="1150" dirty="0">
                         <a:latin typeface="Calibri" charset="0"/>
                         <a:ea typeface="Calibri" charset="0"/>
                         <a:cs typeface="Calibri" charset="0"/>
                       </a:endParaRPr>
                     </a:p>
                   </a:txBody>
-                  <a:tcPr marL="88900" marR="88900" marT="88900" marB="88900" anchor="ctr">
+                  <a:tcPr marL="76200" marR="76200" marT="76200" marB="76200" anchor="ctr">
                     <a:lnL w="12700" cap="flat" cmpd="sng" algn="ctr">
                       <a:solidFill>
                         <a:srgbClr val="D8E0EE"/>
@@ -7541,7 +8829,7 @@
                   </a:tcPr>
                 </a:tc>
               </a:tr>
-              <a:tr h="512064">
+              <a:tr h="457200">
                 <a:tc>
                   <a:txBody>
                     <a:bodyPr/>
@@ -7551,7 +8839,7 @@
                         <a:buNone/>
                       </a:pPr>
                       <a:r>
-                        <a:rPr lang="en-US" sz="1200" dirty="0">
+                        <a:rPr lang="en-US" sz="1150" dirty="0">
                           <a:solidFill>
                             <a:srgbClr val="44506B"/>
                           </a:solidFill>
@@ -7561,14 +8849,14 @@
                         </a:rPr>
                         <a:t>1 · Proposition &amp; catalogue</a:t>
                       </a:r>
-                      <a:endParaRPr lang="en-US" sz="1200" dirty="0">
+                      <a:endParaRPr lang="en-US" sz="1150" dirty="0">
                         <a:latin typeface="Calibri" charset="0"/>
                         <a:ea typeface="Calibri" charset="0"/>
                         <a:cs typeface="Calibri" charset="0"/>
                       </a:endParaRPr>
                     </a:p>
                   </a:txBody>
-                  <a:tcPr marL="88900" marR="88900" marT="88900" marB="88900" anchor="ctr">
+                  <a:tcPr marL="76200" marR="76200" marT="76200" marB="76200" anchor="ctr">
                     <a:lnL w="12700" cap="flat" cmpd="sng" algn="ctr">
                       <a:solidFill>
                         <a:srgbClr val="D8E0EE"/>
@@ -7619,7 +8907,7 @@
                         <a:buNone/>
                       </a:pPr>
                       <a:r>
-                        <a:rPr lang="en-US" sz="1200" dirty="0">
+                        <a:rPr lang="en-US" sz="1150" dirty="0">
                           <a:solidFill>
                             <a:srgbClr val="44506B"/>
                           </a:solidFill>
@@ -7629,14 +8917,14 @@
                         </a:rPr>
                         <a:t>What we offer</a:t>
                       </a:r>
-                      <a:endParaRPr lang="en-US" sz="1200" dirty="0">
+                      <a:endParaRPr lang="en-US" sz="1150" dirty="0">
                         <a:latin typeface="Calibri" charset="0"/>
                         <a:ea typeface="Calibri" charset="0"/>
                         <a:cs typeface="Calibri" charset="0"/>
                       </a:endParaRPr>
                     </a:p>
                   </a:txBody>
-                  <a:tcPr marL="88900" marR="88900" marT="88900" marB="88900" anchor="ctr">
+                  <a:tcPr marL="76200" marR="76200" marT="76200" marB="76200" anchor="ctr">
                     <a:lnL w="12700" cap="flat" cmpd="sng" algn="ctr">
                       <a:solidFill>
                         <a:srgbClr val="D8E0EE"/>
@@ -7687,7 +8975,7 @@
                         <a:buNone/>
                       </a:pPr>
                       <a:r>
-                        <a:rPr lang="en-US" sz="1200" dirty="0">
+                        <a:rPr lang="en-US" sz="1150" dirty="0">
                           <a:solidFill>
                             <a:srgbClr val="44506B"/>
                           </a:solidFill>
@@ -7697,14 +8985,14 @@
                         </a:rPr>
                         <a:t>Integrated proposition catalogue with permitted variants</a:t>
                       </a:r>
-                      <a:endParaRPr lang="en-US" sz="1200" dirty="0">
+                      <a:endParaRPr lang="en-US" sz="1150" dirty="0">
                         <a:latin typeface="Calibri" charset="0"/>
                         <a:ea typeface="Calibri" charset="0"/>
                         <a:cs typeface="Calibri" charset="0"/>
                       </a:endParaRPr>
                     </a:p>
                   </a:txBody>
-                  <a:tcPr marL="88900" marR="88900" marT="88900" marB="88900" anchor="ctr">
+                  <a:tcPr marL="76200" marR="76200" marT="76200" marB="76200" anchor="ctr">
                     <a:lnL w="12700" cap="flat" cmpd="sng" algn="ctr">
                       <a:solidFill>
                         <a:srgbClr val="D8E0EE"/>
@@ -7747,7 +9035,7 @@
                   </a:tcPr>
                 </a:tc>
               </a:tr>
-              <a:tr h="512064">
+              <a:tr h="457200">
                 <a:tc>
                   <a:txBody>
                     <a:bodyPr/>
@@ -7757,7 +9045,7 @@
                         <a:buNone/>
                       </a:pPr>
                       <a:r>
-                        <a:rPr lang="en-US" sz="1200" dirty="0">
+                        <a:rPr lang="en-US" sz="1150" dirty="0">
                           <a:solidFill>
                             <a:srgbClr val="44506B"/>
                           </a:solidFill>
@@ -7767,14 +9055,14 @@
                         </a:rPr>
                         <a:t>2 · Market &amp; account targeting</a:t>
                       </a:r>
-                      <a:endParaRPr lang="en-US" sz="1200" dirty="0">
+                      <a:endParaRPr lang="en-US" sz="1150" dirty="0">
                         <a:latin typeface="Calibri" charset="0"/>
                         <a:ea typeface="Calibri" charset="0"/>
                         <a:cs typeface="Calibri" charset="0"/>
                       </a:endParaRPr>
                     </a:p>
                   </a:txBody>
-                  <a:tcPr marL="88900" marR="88900" marT="88900" marB="88900" anchor="ctr">
+                  <a:tcPr marL="76200" marR="76200" marT="76200" marB="76200" anchor="ctr">
                     <a:lnL w="12700" cap="flat" cmpd="sng" algn="ctr">
                       <a:solidFill>
                         <a:srgbClr val="D8E0EE"/>
@@ -7825,7 +9113,7 @@
                         <a:buNone/>
                       </a:pPr>
                       <a:r>
-                        <a:rPr lang="en-US" sz="1200" dirty="0">
+                        <a:rPr lang="en-US" sz="1150" dirty="0">
                           <a:solidFill>
                             <a:srgbClr val="44506B"/>
                           </a:solidFill>
@@ -7835,14 +9123,14 @@
                         </a:rPr>
                         <a:t>Where to play</a:t>
                       </a:r>
-                      <a:endParaRPr lang="en-US" sz="1200" dirty="0">
+                      <a:endParaRPr lang="en-US" sz="1150" dirty="0">
                         <a:latin typeface="Calibri" charset="0"/>
                         <a:ea typeface="Calibri" charset="0"/>
                         <a:cs typeface="Calibri" charset="0"/>
                       </a:endParaRPr>
                     </a:p>
                   </a:txBody>
-                  <a:tcPr marL="88900" marR="88900" marT="88900" marB="88900" anchor="ctr">
+                  <a:tcPr marL="76200" marR="76200" marT="76200" marB="76200" anchor="ctr">
                     <a:lnL w="12700" cap="flat" cmpd="sng" algn="ctr">
                       <a:solidFill>
                         <a:srgbClr val="D8E0EE"/>
@@ -7893,7 +9181,7 @@
                         <a:buNone/>
                       </a:pPr>
                       <a:r>
-                        <a:rPr lang="en-US" sz="1200" dirty="0">
+                        <a:rPr lang="en-US" sz="1150" dirty="0">
                           <a:solidFill>
                             <a:srgbClr val="44506B"/>
                           </a:solidFill>
@@ -7903,14 +9191,14 @@
                         </a:rPr>
                         <a:t>Prioritised markets, segments and named account list</a:t>
                       </a:r>
-                      <a:endParaRPr lang="en-US" sz="1200" dirty="0">
+                      <a:endParaRPr lang="en-US" sz="1150" dirty="0">
                         <a:latin typeface="Calibri" charset="0"/>
                         <a:ea typeface="Calibri" charset="0"/>
                         <a:cs typeface="Calibri" charset="0"/>
                       </a:endParaRPr>
                     </a:p>
                   </a:txBody>
-                  <a:tcPr marL="88900" marR="88900" marT="88900" marB="88900" anchor="ctr">
+                  <a:tcPr marL="76200" marR="76200" marT="76200" marB="76200" anchor="ctr">
                     <a:lnL w="12700" cap="flat" cmpd="sng" algn="ctr">
                       <a:solidFill>
                         <a:srgbClr val="D8E0EE"/>
@@ -7953,7 +9241,7 @@
                   </a:tcPr>
                 </a:tc>
               </a:tr>
-              <a:tr h="512064">
+              <a:tr h="457200">
                 <a:tc>
                   <a:txBody>
                     <a:bodyPr/>
@@ -7963,7 +9251,7 @@
                         <a:buNone/>
                       </a:pPr>
                       <a:r>
-                        <a:rPr lang="en-US" sz="1200" dirty="0">
+                        <a:rPr lang="en-US" sz="1150" dirty="0">
                           <a:solidFill>
                             <a:srgbClr val="44506B"/>
                           </a:solidFill>
@@ -7973,14 +9261,14 @@
                         </a:rPr>
                         <a:t>3 · Commercial sizing &amp; pricing</a:t>
                       </a:r>
-                      <a:endParaRPr lang="en-US" sz="1200" dirty="0">
+                      <a:endParaRPr lang="en-US" sz="1150" dirty="0">
                         <a:latin typeface="Calibri" charset="0"/>
                         <a:ea typeface="Calibri" charset="0"/>
                         <a:cs typeface="Calibri" charset="0"/>
                       </a:endParaRPr>
                     </a:p>
                   </a:txBody>
-                  <a:tcPr marL="88900" marR="88900" marT="88900" marB="88900" anchor="ctr">
+                  <a:tcPr marL="76200" marR="76200" marT="76200" marB="76200" anchor="ctr">
                     <a:lnL w="12700" cap="flat" cmpd="sng" algn="ctr">
                       <a:solidFill>
                         <a:srgbClr val="D8E0EE"/>
@@ -8031,7 +9319,7 @@
                         <a:buNone/>
                       </a:pPr>
                       <a:r>
-                        <a:rPr lang="en-US" sz="1200" dirty="0">
+                        <a:rPr lang="en-US" sz="1150" dirty="0">
                           <a:solidFill>
                             <a:srgbClr val="44506B"/>
                           </a:solidFill>
@@ -8041,14 +9329,14 @@
                         </a:rPr>
                         <a:t>How much</a:t>
                       </a:r>
-                      <a:endParaRPr lang="en-US" sz="1200" dirty="0">
+                      <a:endParaRPr lang="en-US" sz="1150" dirty="0">
                         <a:latin typeface="Calibri" charset="0"/>
                         <a:ea typeface="Calibri" charset="0"/>
                         <a:cs typeface="Calibri" charset="0"/>
                       </a:endParaRPr>
                     </a:p>
                   </a:txBody>
-                  <a:tcPr marL="88900" marR="88900" marT="88900" marB="88900" anchor="ctr">
+                  <a:tcPr marL="76200" marR="76200" marT="76200" marB="76200" anchor="ctr">
                     <a:lnL w="12700" cap="flat" cmpd="sng" algn="ctr">
                       <a:solidFill>
                         <a:srgbClr val="D8E0EE"/>
@@ -8099,7 +9387,7 @@
                         <a:buNone/>
                       </a:pPr>
                       <a:r>
-                        <a:rPr lang="en-US" sz="1200" dirty="0">
+                        <a:rPr lang="en-US" sz="1150" dirty="0">
                           <a:solidFill>
                             <a:srgbClr val="44506B"/>
                           </a:solidFill>
@@ -8109,14 +9397,14 @@
                         </a:rPr>
                         <a:t>Deal-size bands, price benchmarks, revenue targets</a:t>
                       </a:r>
-                      <a:endParaRPr lang="en-US" sz="1200" dirty="0">
+                      <a:endParaRPr lang="en-US" sz="1150" dirty="0">
                         <a:latin typeface="Calibri" charset="0"/>
                         <a:ea typeface="Calibri" charset="0"/>
                         <a:cs typeface="Calibri" charset="0"/>
                       </a:endParaRPr>
                     </a:p>
                   </a:txBody>
-                  <a:tcPr marL="88900" marR="88900" marT="88900" marB="88900" anchor="ctr">
+                  <a:tcPr marL="76200" marR="76200" marT="76200" marB="76200" anchor="ctr">
                     <a:lnL w="12700" cap="flat" cmpd="sng" algn="ctr">
                       <a:solidFill>
                         <a:srgbClr val="D8E0EE"/>
@@ -8159,7 +9447,7 @@
                   </a:tcPr>
                 </a:tc>
               </a:tr>
-              <a:tr h="512064">
+              <a:tr h="457200">
                 <a:tc>
                   <a:txBody>
                     <a:bodyPr/>
@@ -8169,7 +9457,7 @@
                         <a:buNone/>
                       </a:pPr>
                       <a:r>
-                        <a:rPr lang="en-US" sz="1200" dirty="0">
+                        <a:rPr lang="en-US" sz="1150" dirty="0">
                           <a:solidFill>
                             <a:srgbClr val="44506B"/>
                           </a:solidFill>
@@ -8179,14 +9467,14 @@
                         </a:rPr>
                         <a:t>4 · Coverage &amp; ownership</a:t>
                       </a:r>
-                      <a:endParaRPr lang="en-US" sz="1200" dirty="0">
+                      <a:endParaRPr lang="en-US" sz="1150" dirty="0">
                         <a:latin typeface="Calibri" charset="0"/>
                         <a:ea typeface="Calibri" charset="0"/>
                         <a:cs typeface="Calibri" charset="0"/>
                       </a:endParaRPr>
                     </a:p>
                   </a:txBody>
-                  <a:tcPr marL="88900" marR="88900" marT="88900" marB="88900" anchor="ctr">
+                  <a:tcPr marL="76200" marR="76200" marT="76200" marB="76200" anchor="ctr">
                     <a:lnL w="12700" cap="flat" cmpd="sng" algn="ctr">
                       <a:solidFill>
                         <a:srgbClr val="D8E0EE"/>
@@ -8237,7 +9525,7 @@
                         <a:buNone/>
                       </a:pPr>
                       <a:r>
-                        <a:rPr lang="en-US" sz="1200" dirty="0">
+                        <a:rPr lang="en-US" sz="1150" dirty="0">
                           <a:solidFill>
                             <a:srgbClr val="44506B"/>
                           </a:solidFill>
@@ -8247,14 +9535,14 @@
                         </a:rPr>
                         <a:t>Who covers what</a:t>
                       </a:r>
-                      <a:endParaRPr lang="en-US" sz="1200" dirty="0">
+                      <a:endParaRPr lang="en-US" sz="1150" dirty="0">
                         <a:latin typeface="Calibri" charset="0"/>
                         <a:ea typeface="Calibri" charset="0"/>
                         <a:cs typeface="Calibri" charset="0"/>
                       </a:endParaRPr>
                     </a:p>
                   </a:txBody>
-                  <a:tcPr marL="88900" marR="88900" marT="88900" marB="88900" anchor="ctr">
+                  <a:tcPr marL="76200" marR="76200" marT="76200" marB="76200" anchor="ctr">
                     <a:lnL w="12700" cap="flat" cmpd="sng" algn="ctr">
                       <a:solidFill>
                         <a:srgbClr val="D8E0EE"/>
@@ -8305,7 +9593,7 @@
                         <a:buNone/>
                       </a:pPr>
                       <a:r>
-                        <a:rPr lang="en-US" sz="1200" dirty="0">
+                        <a:rPr lang="en-US" sz="1150" dirty="0">
                           <a:solidFill>
                             <a:srgbClr val="44506B"/>
                           </a:solidFill>
@@ -8315,14 +9603,14 @@
                         </a:rPr>
                         <a:t>Account-to-partner map and coverage model</a:t>
                       </a:r>
-                      <a:endParaRPr lang="en-US" sz="1200" dirty="0">
+                      <a:endParaRPr lang="en-US" sz="1150" dirty="0">
                         <a:latin typeface="Calibri" charset="0"/>
                         <a:ea typeface="Calibri" charset="0"/>
                         <a:cs typeface="Calibri" charset="0"/>
                       </a:endParaRPr>
                     </a:p>
                   </a:txBody>
-                  <a:tcPr marL="88900" marR="88900" marT="88900" marB="88900" anchor="ctr">
+                  <a:tcPr marL="76200" marR="76200" marT="76200" marB="76200" anchor="ctr">
                     <a:lnL w="12700" cap="flat" cmpd="sng" algn="ctr">
                       <a:solidFill>
                         <a:srgbClr val="D8E0EE"/>
@@ -8365,7 +9653,7 @@
                   </a:tcPr>
                 </a:tc>
               </a:tr>
-              <a:tr h="512064">
+              <a:tr h="457200">
                 <a:tc>
                   <a:txBody>
                     <a:bodyPr/>
@@ -8375,7 +9663,7 @@
                         <a:buNone/>
                       </a:pPr>
                       <a:r>
-                        <a:rPr lang="en-US" sz="1200" dirty="0">
+                        <a:rPr lang="en-US" sz="1150" dirty="0">
                           <a:solidFill>
                             <a:srgbClr val="44506B"/>
                           </a:solidFill>
@@ -8385,14 +9673,14 @@
                         </a:rPr>
                         <a:t>5 · Delivery model &amp; readiness</a:t>
                       </a:r>
-                      <a:endParaRPr lang="en-US" sz="1200" dirty="0">
+                      <a:endParaRPr lang="en-US" sz="1150" dirty="0">
                         <a:latin typeface="Calibri" charset="0"/>
                         <a:ea typeface="Calibri" charset="0"/>
                         <a:cs typeface="Calibri" charset="0"/>
                       </a:endParaRPr>
                     </a:p>
                   </a:txBody>
-                  <a:tcPr marL="88900" marR="88900" marT="88900" marB="88900" anchor="ctr">
+                  <a:tcPr marL="76200" marR="76200" marT="76200" marB="76200" anchor="ctr">
                     <a:lnL w="12700" cap="flat" cmpd="sng" algn="ctr">
                       <a:solidFill>
                         <a:srgbClr val="D8E0EE"/>
@@ -8443,7 +9731,7 @@
                         <a:buNone/>
                       </a:pPr>
                       <a:r>
-                        <a:rPr lang="en-US" sz="1200" dirty="0">
+                        <a:rPr lang="en-US" sz="1150" dirty="0">
                           <a:solidFill>
                             <a:srgbClr val="44506B"/>
                           </a:solidFill>
@@ -8453,14 +9741,14 @@
                         </a:rPr>
                         <a:t>How we win</a:t>
                       </a:r>
-                      <a:endParaRPr lang="en-US" sz="1200" dirty="0">
+                      <a:endParaRPr lang="en-US" sz="1150" dirty="0">
                         <a:latin typeface="Calibri" charset="0"/>
                         <a:ea typeface="Calibri" charset="0"/>
                         <a:cs typeface="Calibri" charset="0"/>
                       </a:endParaRPr>
                     </a:p>
                   </a:txBody>
-                  <a:tcPr marL="88900" marR="88900" marT="88900" marB="88900" anchor="ctr">
+                  <a:tcPr marL="76200" marR="76200" marT="76200" marB="76200" anchor="ctr">
                     <a:lnL w="12700" cap="flat" cmpd="sng" algn="ctr">
                       <a:solidFill>
                         <a:srgbClr val="D8E0EE"/>
@@ -8511,7 +9799,7 @@
                         <a:buNone/>
                       </a:pPr>
                       <a:r>
-                        <a:rPr lang="en-US" sz="1200" dirty="0">
+                        <a:rPr lang="en-US" sz="1150" dirty="0">
                           <a:solidFill>
                             <a:srgbClr val="44506B"/>
                           </a:solidFill>
@@ -8521,14 +9809,14 @@
                         </a:rPr>
                         <a:t>Delivery approach and delivery standards</a:t>
                       </a:r>
-                      <a:endParaRPr lang="en-US" sz="1200" dirty="0">
+                      <a:endParaRPr lang="en-US" sz="1150" dirty="0">
                         <a:latin typeface="Calibri" charset="0"/>
                         <a:ea typeface="Calibri" charset="0"/>
                         <a:cs typeface="Calibri" charset="0"/>
                       </a:endParaRPr>
                     </a:p>
                   </a:txBody>
-                  <a:tcPr marL="88900" marR="88900" marT="88900" marB="88900" anchor="ctr">
+                  <a:tcPr marL="76200" marR="76200" marT="76200" marB="76200" anchor="ctr">
                     <a:lnL w="12700" cap="flat" cmpd="sng" algn="ctr">
                       <a:solidFill>
                         <a:srgbClr val="D8E0EE"/>
@@ -8571,7 +9859,7 @@
                   </a:tcPr>
                 </a:tc>
               </a:tr>
-              <a:tr h="512064">
+              <a:tr h="457200">
                 <a:tc>
                   <a:txBody>
                     <a:bodyPr/>
@@ -8581,7 +9869,7 @@
                         <a:buNone/>
                       </a:pPr>
                       <a:r>
-                        <a:rPr lang="en-US" sz="1200" dirty="0">
+                        <a:rPr lang="en-US" sz="1150" dirty="0">
                           <a:solidFill>
                             <a:srgbClr val="44506B"/>
                           </a:solidFill>
@@ -8591,14 +9879,14 @@
                         </a:rPr>
                         <a:t>6 · Team &amp; talent</a:t>
                       </a:r>
-                      <a:endParaRPr lang="en-US" sz="1200" dirty="0">
+                      <a:endParaRPr lang="en-US" sz="1150" dirty="0">
                         <a:latin typeface="Calibri" charset="0"/>
                         <a:ea typeface="Calibri" charset="0"/>
                         <a:cs typeface="Calibri" charset="0"/>
                       </a:endParaRPr>
                     </a:p>
                   </a:txBody>
-                  <a:tcPr marL="88900" marR="88900" marT="88900" marB="88900" anchor="ctr">
+                  <a:tcPr marL="76200" marR="76200" marT="76200" marB="76200" anchor="ctr">
                     <a:lnL w="12700" cap="flat" cmpd="sng" algn="ctr">
                       <a:solidFill>
                         <a:srgbClr val="D8E0EE"/>
@@ -8649,7 +9937,7 @@
                         <a:buNone/>
                       </a:pPr>
                       <a:r>
-                        <a:rPr lang="en-US" sz="1200" dirty="0">
+                        <a:rPr lang="en-US" sz="1150" dirty="0">
                           <a:solidFill>
                             <a:srgbClr val="44506B"/>
                           </a:solidFill>
@@ -8659,14 +9947,14 @@
                         </a:rPr>
                         <a:t>Who delivers it</a:t>
                       </a:r>
-                      <a:endParaRPr lang="en-US" sz="1200" dirty="0">
+                      <a:endParaRPr lang="en-US" sz="1150" dirty="0">
                         <a:latin typeface="Calibri" charset="0"/>
                         <a:ea typeface="Calibri" charset="0"/>
                         <a:cs typeface="Calibri" charset="0"/>
                       </a:endParaRPr>
                     </a:p>
                   </a:txBody>
-                  <a:tcPr marL="88900" marR="88900" marT="88900" marB="88900" anchor="ctr">
+                  <a:tcPr marL="76200" marR="76200" marT="76200" marB="76200" anchor="ctr">
                     <a:lnL w="12700" cap="flat" cmpd="sng" algn="ctr">
                       <a:solidFill>
                         <a:srgbClr val="D8E0EE"/>
@@ -8717,7 +10005,7 @@
                         <a:buNone/>
                       </a:pPr>
                       <a:r>
-                        <a:rPr lang="en-US" sz="1200" dirty="0">
+                        <a:rPr lang="en-US" sz="1150" dirty="0">
                           <a:solidFill>
                             <a:srgbClr val="44506B"/>
                           </a:solidFill>
@@ -8727,14 +10015,14 @@
                         </a:rPr>
                         <a:t>Dedicated FSI team, shared capacity view, recruitment plan</a:t>
                       </a:r>
-                      <a:endParaRPr lang="en-US" sz="1200" dirty="0">
+                      <a:endParaRPr lang="en-US" sz="1150" dirty="0">
                         <a:latin typeface="Calibri" charset="0"/>
                         <a:ea typeface="Calibri" charset="0"/>
                         <a:cs typeface="Calibri" charset="0"/>
                       </a:endParaRPr>
                     </a:p>
                   </a:txBody>
-                  <a:tcPr marL="88900" marR="88900" marT="88900" marB="88900" anchor="ctr">
+                  <a:tcPr marL="76200" marR="76200" marT="76200" marB="76200" anchor="ctr">
                     <a:lnL w="12700" cap="flat" cmpd="sng" algn="ctr">
                       <a:solidFill>
                         <a:srgbClr val="D8E0EE"/>
@@ -8777,7 +10065,7 @@
                   </a:tcPr>
                 </a:tc>
               </a:tr>
-              <a:tr h="512064">
+              <a:tr h="457200">
                 <a:tc>
                   <a:txBody>
                     <a:bodyPr/>
@@ -8787,7 +10075,7 @@
                         <a:buNone/>
                       </a:pPr>
                       <a:r>
-                        <a:rPr lang="en-US" sz="1200" dirty="0">
+                        <a:rPr lang="en-US" sz="1150" dirty="0">
                           <a:solidFill>
                             <a:srgbClr val="44506B"/>
                           </a:solidFill>
@@ -8797,14 +10085,14 @@
                         </a:rPr>
                         <a:t>7 · Eminence &amp; positioning</a:t>
                       </a:r>
-                      <a:endParaRPr lang="en-US" sz="1200" dirty="0">
+                      <a:endParaRPr lang="en-US" sz="1150" dirty="0">
                         <a:latin typeface="Calibri" charset="0"/>
                         <a:ea typeface="Calibri" charset="0"/>
                         <a:cs typeface="Calibri" charset="0"/>
                       </a:endParaRPr>
                     </a:p>
                   </a:txBody>
-                  <a:tcPr marL="88900" marR="88900" marT="88900" marB="88900" anchor="ctr">
+                  <a:tcPr marL="76200" marR="76200" marT="76200" marB="76200" anchor="ctr">
                     <a:lnL w="12700" cap="flat" cmpd="sng" algn="ctr">
                       <a:solidFill>
                         <a:srgbClr val="D8E0EE"/>
@@ -8855,7 +10143,7 @@
                         <a:buNone/>
                       </a:pPr>
                       <a:r>
-                        <a:rPr lang="en-US" sz="1200" dirty="0">
+                        <a:rPr lang="en-US" sz="1150" dirty="0">
                           <a:solidFill>
                             <a:srgbClr val="44506B"/>
                           </a:solidFill>
@@ -8865,14 +10153,14 @@
                         </a:rPr>
                         <a:t>How we are known</a:t>
                       </a:r>
-                      <a:endParaRPr lang="en-US" sz="1200" dirty="0">
+                      <a:endParaRPr lang="en-US" sz="1150" dirty="0">
                         <a:latin typeface="Calibri" charset="0"/>
                         <a:ea typeface="Calibri" charset="0"/>
                         <a:cs typeface="Calibri" charset="0"/>
                       </a:endParaRPr>
                     </a:p>
                   </a:txBody>
-                  <a:tcPr marL="88900" marR="88900" marT="88900" marB="88900" anchor="ctr">
+                  <a:tcPr marL="76200" marR="76200" marT="76200" marB="76200" anchor="ctr">
                     <a:lnL w="12700" cap="flat" cmpd="sng" algn="ctr">
                       <a:solidFill>
                         <a:srgbClr val="D8E0EE"/>
@@ -8923,7 +10211,7 @@
                         <a:buNone/>
                       </a:pPr>
                       <a:r>
-                        <a:rPr lang="en-US" sz="1200" dirty="0">
+                        <a:rPr lang="en-US" sz="1150" dirty="0">
                           <a:solidFill>
                             <a:srgbClr val="44506B"/>
                           </a:solidFill>
@@ -8933,14 +10221,220 @@
                         </a:rPr>
                         <a:t>Eminence plan: content, events and speaking calendar</a:t>
                       </a:r>
-                      <a:endParaRPr lang="en-US" sz="1200" dirty="0">
+                      <a:endParaRPr lang="en-US" sz="1150" dirty="0">
                         <a:latin typeface="Calibri" charset="0"/>
                         <a:ea typeface="Calibri" charset="0"/>
                         <a:cs typeface="Calibri" charset="0"/>
                       </a:endParaRPr>
                     </a:p>
                   </a:txBody>
-                  <a:tcPr marL="88900" marR="88900" marT="88900" marB="88900" anchor="ctr">
+                  <a:tcPr marL="76200" marR="76200" marT="76200" marB="76200" anchor="ctr">
+                    <a:lnL w="12700" cap="flat" cmpd="sng" algn="ctr">
+                      <a:solidFill>
+                        <a:srgbClr val="D8E0EE"/>
+                      </a:solidFill>
+                      <a:prstDash val="solid"/>
+                      <a:round/>
+                      <a:headEnd type="none" w="med" len="med"/>
+                      <a:tailEnd type="none" w="med" len="med"/>
+                    </a:lnL>
+                    <a:lnR w="12700" cap="flat" cmpd="sng" algn="ctr">
+                      <a:solidFill>
+                        <a:srgbClr val="D8E0EE"/>
+                      </a:solidFill>
+                      <a:prstDash val="solid"/>
+                      <a:round/>
+                      <a:headEnd type="none" w="med" len="med"/>
+                      <a:tailEnd type="none" w="med" len="med"/>
+                    </a:lnR>
+                    <a:lnT w="12700" cap="flat" cmpd="sng" algn="ctr">
+                      <a:solidFill>
+                        <a:srgbClr val="D8E0EE"/>
+                      </a:solidFill>
+                      <a:prstDash val="solid"/>
+                      <a:round/>
+                      <a:headEnd type="none" w="med" len="med"/>
+                      <a:tailEnd type="none" w="med" len="med"/>
+                    </a:lnT>
+                    <a:lnB w="12700" cap="flat" cmpd="sng" algn="ctr">
+                      <a:solidFill>
+                        <a:srgbClr val="D8E0EE"/>
+                      </a:solidFill>
+                      <a:prstDash val="solid"/>
+                      <a:round/>
+                      <a:headEnd type="none" w="med" len="med"/>
+                      <a:tailEnd type="none" w="med" len="med"/>
+                    </a:lnB>
+                    <a:solidFill>
+                      <a:srgbClr val="FFFFFF"/>
+                    </a:solidFill>
+                  </a:tcPr>
+                </a:tc>
+              </a:tr>
+              <a:tr h="457200">
+                <a:tc>
+                  <a:txBody>
+                    <a:bodyPr/>
+                    <a:lstStyle/>
+                    <a:p>
+                      <a:pPr algn="l" indent="0" marL="0">
+                        <a:buNone/>
+                      </a:pPr>
+                      <a:r>
+                        <a:rPr lang="en-US" sz="1150" dirty="0">
+                          <a:solidFill>
+                            <a:srgbClr val="44506B"/>
+                          </a:solidFill>
+                          <a:latin typeface="Calibri" pitchFamily="34" charset="0"/>
+                          <a:ea typeface="Calibri" pitchFamily="34" charset="-122"/>
+                          <a:cs typeface="Calibri" pitchFamily="34" charset="-120"/>
+                        </a:rPr>
+                        <a:t>8 · Alliances</a:t>
+                      </a:r>
+                      <a:endParaRPr lang="en-US" sz="1150" dirty="0">
+                        <a:latin typeface="Calibri" charset="0"/>
+                        <a:ea typeface="Calibri" charset="0"/>
+                        <a:cs typeface="Calibri" charset="0"/>
+                      </a:endParaRPr>
+                    </a:p>
+                  </a:txBody>
+                  <a:tcPr marL="76200" marR="76200" marT="76200" marB="76200" anchor="ctr">
+                    <a:lnL w="12700" cap="flat" cmpd="sng" algn="ctr">
+                      <a:solidFill>
+                        <a:srgbClr val="D8E0EE"/>
+                      </a:solidFill>
+                      <a:prstDash val="solid"/>
+                      <a:round/>
+                      <a:headEnd type="none" w="med" len="med"/>
+                      <a:tailEnd type="none" w="med" len="med"/>
+                    </a:lnL>
+                    <a:lnR w="12700" cap="flat" cmpd="sng" algn="ctr">
+                      <a:solidFill>
+                        <a:srgbClr val="D8E0EE"/>
+                      </a:solidFill>
+                      <a:prstDash val="solid"/>
+                      <a:round/>
+                      <a:headEnd type="none" w="med" len="med"/>
+                      <a:tailEnd type="none" w="med" len="med"/>
+                    </a:lnR>
+                    <a:lnT w="12700" cap="flat" cmpd="sng" algn="ctr">
+                      <a:solidFill>
+                        <a:srgbClr val="D8E0EE"/>
+                      </a:solidFill>
+                      <a:prstDash val="solid"/>
+                      <a:round/>
+                      <a:headEnd type="none" w="med" len="med"/>
+                      <a:tailEnd type="none" w="med" len="med"/>
+                    </a:lnT>
+                    <a:lnB w="12700" cap="flat" cmpd="sng" algn="ctr">
+                      <a:solidFill>
+                        <a:srgbClr val="D8E0EE"/>
+                      </a:solidFill>
+                      <a:prstDash val="solid"/>
+                      <a:round/>
+                      <a:headEnd type="none" w="med" len="med"/>
+                      <a:tailEnd type="none" w="med" len="med"/>
+                    </a:lnB>
+                    <a:solidFill>
+                      <a:srgbClr val="FFFFFF"/>
+                    </a:solidFill>
+                  </a:tcPr>
+                </a:tc>
+                <a:tc>
+                  <a:txBody>
+                    <a:bodyPr/>
+                    <a:lstStyle/>
+                    <a:p>
+                      <a:pPr algn="l" indent="0" marL="0">
+                        <a:buNone/>
+                      </a:pPr>
+                      <a:r>
+                        <a:rPr lang="en-US" sz="1150" dirty="0">
+                          <a:solidFill>
+                            <a:srgbClr val="44506B"/>
+                          </a:solidFill>
+                          <a:latin typeface="Calibri" pitchFamily="34" charset="0"/>
+                          <a:ea typeface="Calibri" pitchFamily="34" charset="-122"/>
+                          <a:cs typeface="Calibri" pitchFamily="34" charset="-120"/>
+                        </a:rPr>
+                        <a:t>Who we go with</a:t>
+                      </a:r>
+                      <a:endParaRPr lang="en-US" sz="1150" dirty="0">
+                        <a:latin typeface="Calibri" charset="0"/>
+                        <a:ea typeface="Calibri" charset="0"/>
+                        <a:cs typeface="Calibri" charset="0"/>
+                      </a:endParaRPr>
+                    </a:p>
+                  </a:txBody>
+                  <a:tcPr marL="76200" marR="76200" marT="76200" marB="76200" anchor="ctr">
+                    <a:lnL w="12700" cap="flat" cmpd="sng" algn="ctr">
+                      <a:solidFill>
+                        <a:srgbClr val="D8E0EE"/>
+                      </a:solidFill>
+                      <a:prstDash val="solid"/>
+                      <a:round/>
+                      <a:headEnd type="none" w="med" len="med"/>
+                      <a:tailEnd type="none" w="med" len="med"/>
+                    </a:lnL>
+                    <a:lnR w="12700" cap="flat" cmpd="sng" algn="ctr">
+                      <a:solidFill>
+                        <a:srgbClr val="D8E0EE"/>
+                      </a:solidFill>
+                      <a:prstDash val="solid"/>
+                      <a:round/>
+                      <a:headEnd type="none" w="med" len="med"/>
+                      <a:tailEnd type="none" w="med" len="med"/>
+                    </a:lnR>
+                    <a:lnT w="12700" cap="flat" cmpd="sng" algn="ctr">
+                      <a:solidFill>
+                        <a:srgbClr val="D8E0EE"/>
+                      </a:solidFill>
+                      <a:prstDash val="solid"/>
+                      <a:round/>
+                      <a:headEnd type="none" w="med" len="med"/>
+                      <a:tailEnd type="none" w="med" len="med"/>
+                    </a:lnT>
+                    <a:lnB w="12700" cap="flat" cmpd="sng" algn="ctr">
+                      <a:solidFill>
+                        <a:srgbClr val="D8E0EE"/>
+                      </a:solidFill>
+                      <a:prstDash val="solid"/>
+                      <a:round/>
+                      <a:headEnd type="none" w="med" len="med"/>
+                      <a:tailEnd type="none" w="med" len="med"/>
+                    </a:lnB>
+                    <a:solidFill>
+                      <a:srgbClr val="FFFFFF"/>
+                    </a:solidFill>
+                  </a:tcPr>
+                </a:tc>
+                <a:tc>
+                  <a:txBody>
+                    <a:bodyPr/>
+                    <a:lstStyle/>
+                    <a:p>
+                      <a:pPr algn="l" indent="0" marL="0">
+                        <a:buNone/>
+                      </a:pPr>
+                      <a:r>
+                        <a:rPr lang="en-US" sz="1150" dirty="0">
+                          <a:solidFill>
+                            <a:srgbClr val="44506B"/>
+                          </a:solidFill>
+                          <a:latin typeface="Calibri" pitchFamily="34" charset="0"/>
+                          <a:ea typeface="Calibri" pitchFamily="34" charset="-122"/>
+                          <a:cs typeface="Calibri" pitchFamily="34" charset="-120"/>
+                        </a:rPr>
+                        <a:t>Alliance map: role, offerings and accounts per partner</a:t>
+                      </a:r>
+                      <a:endParaRPr lang="en-US" sz="1150" dirty="0">
+                        <a:latin typeface="Calibri" charset="0"/>
+                        <a:ea typeface="Calibri" charset="0"/>
+                        <a:cs typeface="Calibri" charset="0"/>
+                      </a:endParaRPr>
+                    </a:p>
+                  </a:txBody>
+                  <a:tcPr marL="76200" marR="76200" marT="76200" marB="76200" anchor="ctr">
                     <a:lnL w="12700" cap="flat" cmpd="sng" algn="ctr">
                       <a:solidFill>
                         <a:srgbClr val="D8E0EE"/>
@@ -9132,7 +10626,7 @@
         </p:nvSpPr>
         <p:spPr>
           <a:xfrm>
-            <a:off x="640080" y="5897880"/>
+            <a:off x="640080" y="6035040"/>
             <a:ext cx="10881360" cy="365760"/>
           </a:xfrm>
           <a:prstGeom prst="rect">
@@ -9149,7 +10643,7 @@
               <a:buNone/>
             </a:pPr>
             <a:r>
-              <a:rPr lang="en-US" sz="1300" i="1" dirty="0">
+              <a:rPr lang="en-US" sz="1250" i="1" dirty="0">
                 <a:solidFill>
                   <a:srgbClr val="8792AB"/>
                 </a:solidFill>
@@ -9159,7 +10653,7 @@
               </a:rPr>
               <a:t>Workstreams run in parallel; dependencies are resolved at the weekly checkpoint.</a:t>
             </a:r>
-            <a:endParaRPr lang="en-US" sz="1300" dirty="0"/>
+            <a:endParaRPr lang="en-US" sz="1250" dirty="0"/>
           </a:p>
         </p:txBody>
       </p:sp>
@@ -11203,7 +12697,7 @@
                 <a:ea typeface="Cambria" pitchFamily="34" charset="-122"/>
                 <a:cs typeface="Cambria" pitchFamily="34" charset="-120"/>
               </a:rPr>
-              <a:t>The three-week journey</a:t>
+              <a:t>Alliances</a:t>
             </a:r>
             <a:endParaRPr lang="en-US" sz="3600" dirty="0"/>
           </a:p>
@@ -11242,7 +12736,7 @@
                 <a:ea typeface="Calibri" pitchFamily="34" charset="-122"/>
                 <a:cs typeface="Calibri" pitchFamily="34" charset="-120"/>
               </a:rPr>
-              <a:t>Three weeks, three gates, one decision.</a:t>
+              <a:t>Who we go to market with, and what we use each one for.</a:t>
             </a:r>
             <a:endParaRPr lang="en-US" sz="1450" dirty="0"/>
           </a:p>
@@ -11257,11 +12751,11 @@
         <p:spPr>
           <a:xfrm>
             <a:off x="640080" y="1828800"/>
-            <a:ext cx="3429000" cy="3840480"/>
+            <a:ext cx="5120640" cy="2057400"/>
           </a:xfrm>
           <a:prstGeom prst="roundRect">
             <a:avLst>
-              <a:gd name="adj" fmla="val 3200"/>
+              <a:gd name="adj" fmla="val 5333"/>
             </a:avLst>
           </a:prstGeom>
           <a:solidFill>
@@ -11272,17 +12766,58 @@
       </p:sp>
       <p:sp>
         <p:nvSpPr>
-          <p:cNvPr id="5" name="Shape 3"/>
+          <p:cNvPr id="5" name="Text 3"/>
+          <p:cNvSpPr txBox="1"/>
+          <p:nvPr/>
+        </p:nvSpPr>
+        <p:spPr>
+          <a:xfrm>
+            <a:off x="914400" y="1965960"/>
+            <a:ext cx="4572000" cy="365760"/>
+          </a:xfrm>
+          <a:prstGeom prst="rect">
+            <a:avLst/>
+          </a:prstGeom>
+          <a:noFill/>
+          <a:ln/>
+        </p:spPr>
+        <p:txBody>
+          <a:bodyPr wrap="square" lIns="0" tIns="0" rIns="0" bIns="0" rtlCol="0" anchor="ctr"/>
+          <a:lstStyle/>
+          <a:p>
+            <a:pPr indent="0" marL="0">
+              <a:buNone/>
+            </a:pPr>
+            <a:r>
+              <a:rPr lang="en-US" sz="1700" b="1" dirty="0">
+                <a:solidFill>
+                  <a:srgbClr val="1E2761"/>
+                </a:solidFill>
+                <a:latin typeface="Calibri" pitchFamily="34" charset="0"/>
+                <a:ea typeface="Calibri" pitchFamily="34" charset="-122"/>
+                <a:cs typeface="Calibri" pitchFamily="34" charset="-120"/>
+              </a:rPr>
+              <a:t>Primary alliances</a:t>
+            </a:r>
+            <a:endParaRPr lang="en-US" sz="1700" dirty="0"/>
+          </a:p>
+        </p:txBody>
+      </p:sp>
+      <p:sp>
+        <p:nvSpPr>
+          <p:cNvPr id="6" name="Shape 4"/>
           <p:cNvSpPr/>
           <p:nvPr/>
         </p:nvSpPr>
         <p:spPr>
           <a:xfrm>
-            <a:off x="640080" y="1828800"/>
-            <a:ext cx="3429000" cy="685800"/>
-          </a:xfrm>
-          <a:prstGeom prst="rect">
-            <a:avLst/>
+            <a:off x="914400" y="2468880"/>
+            <a:ext cx="1402080" cy="1051560"/>
+          </a:xfrm>
+          <a:prstGeom prst="roundRect">
+            <a:avLst>
+              <a:gd name="adj" fmla="val 8696"/>
+            </a:avLst>
           </a:prstGeom>
           <a:solidFill>
             <a:srgbClr val="1E2761"/>
@@ -11292,219 +12827,14 @@
       </p:sp>
       <p:sp>
         <p:nvSpPr>
-          <p:cNvPr id="6" name="Text 4"/>
-          <p:cNvSpPr txBox="1"/>
-          <p:nvPr/>
-        </p:nvSpPr>
-        <p:spPr>
-          <a:xfrm>
-            <a:off x="914400" y="1828800"/>
-            <a:ext cx="2926080" cy="685800"/>
-          </a:xfrm>
-          <a:prstGeom prst="rect">
-            <a:avLst/>
-          </a:prstGeom>
-          <a:noFill/>
-          <a:ln/>
-        </p:spPr>
-        <p:txBody>
-          <a:bodyPr wrap="square" lIns="0" tIns="0" rIns="0" bIns="0" rtlCol="0" anchor="ctr"/>
-          <a:lstStyle/>
-          <a:p>
-            <a:pPr indent="0" marL="0">
-              <a:buNone/>
-            </a:pPr>
-            <a:r>
-              <a:rPr lang="en-US" sz="1800" b="1" dirty="0">
-                <a:solidFill>
-                  <a:srgbClr val="FFFFFF"/>
-                </a:solidFill>
-                <a:latin typeface="Calibri" pitchFamily="34" charset="0"/>
-                <a:ea typeface="Calibri" pitchFamily="34" charset="-122"/>
-                <a:cs typeface="Calibri" pitchFamily="34" charset="-120"/>
-              </a:rPr>
-              <a:t>Week 1  ·  Frame</a:t>
-            </a:r>
-            <a:endParaRPr lang="en-US" sz="1800" dirty="0"/>
-          </a:p>
-        </p:txBody>
-      </p:sp>
-      <p:sp>
-        <p:nvSpPr>
           <p:cNvPr id="7" name="Text 5"/>
           <p:cNvSpPr txBox="1"/>
           <p:nvPr/>
         </p:nvSpPr>
         <p:spPr>
           <a:xfrm>
-            <a:off x="914400" y="2743200"/>
-            <a:ext cx="2880360" cy="1920240"/>
-          </a:xfrm>
-          <a:prstGeom prst="rect">
-            <a:avLst/>
-          </a:prstGeom>
-          <a:noFill/>
-          <a:ln/>
-        </p:spPr>
-        <p:txBody>
-          <a:bodyPr wrap="square" lIns="0" tIns="0" rIns="0" bIns="0" rtlCol="0" anchor="ctr"/>
-          <a:lstStyle/>
-          <a:p>
-            <a:pPr marL="342900" indent="-342900">
-              <a:spcAft>
-                <a:spcPts val="900"/>
-              </a:spcAft>
-              <a:buSzPct val="100000"/>
-              <a:buChar char="•"/>
-            </a:pPr>
-            <a:r>
-              <a:rPr lang="en-US" sz="1250" dirty="0">
-                <a:solidFill>
-                  <a:srgbClr val="44506B"/>
-                </a:solidFill>
-                <a:latin typeface="Calibri" pitchFamily="34" charset="0"/>
-                <a:ea typeface="Calibri" pitchFamily="34" charset="-122"/>
-                <a:cs typeface="Calibri" pitchFamily="34" charset="-120"/>
-              </a:rPr>
-              <a:t>Baseline current position and credentials</a:t>
-            </a:r>
-            <a:endParaRPr lang="en-US" sz="1250" dirty="0"/>
-          </a:p>
-          <a:p>
-            <a:pPr marL="342900" indent="-342900">
-              <a:spcAft>
-                <a:spcPts val="900"/>
-              </a:spcAft>
-              <a:buSzPct val="100000"/>
-              <a:buChar char="•"/>
-            </a:pPr>
-            <a:r>
-              <a:rPr lang="en-US" sz="1250" dirty="0">
-                <a:solidFill>
-                  <a:srgbClr val="44506B"/>
-                </a:solidFill>
-                <a:latin typeface="Calibri" pitchFamily="34" charset="0"/>
-                <a:ea typeface="Calibri" pitchFamily="34" charset="-122"/>
-                <a:cs typeface="Calibri" pitchFamily="34" charset="-120"/>
-              </a:rPr>
-              <a:t>Prioritise markets and segments</a:t>
-            </a:r>
-            <a:endParaRPr lang="en-US" sz="1250" dirty="0"/>
-          </a:p>
-          <a:p>
-            <a:pPr marL="342900" indent="-342900">
-              <a:spcAft>
-                <a:spcPts val="900"/>
-              </a:spcAft>
-              <a:buSzPct val="100000"/>
-              <a:buChar char="•"/>
-            </a:pPr>
-            <a:r>
-              <a:rPr lang="en-US" sz="1250" dirty="0">
-                <a:solidFill>
-                  <a:srgbClr val="44506B"/>
-                </a:solidFill>
-                <a:latin typeface="Calibri" pitchFamily="34" charset="0"/>
-                <a:ea typeface="Calibri" pitchFamily="34" charset="-122"/>
-                <a:cs typeface="Calibri" pitchFamily="34" charset="-120"/>
-              </a:rPr>
-              <a:t>Build the account longlist</a:t>
-            </a:r>
-            <a:endParaRPr lang="en-US" sz="1250" dirty="0"/>
-          </a:p>
-          <a:p>
-            <a:pPr marL="342900" indent="-342900">
-              <a:spcAft>
-                <a:spcPts val="900"/>
-              </a:spcAft>
-              <a:buSzPct val="100000"/>
-              <a:buChar char="•"/>
-            </a:pPr>
-            <a:r>
-              <a:rPr lang="en-US" sz="1250" dirty="0">
-                <a:solidFill>
-                  <a:srgbClr val="44506B"/>
-                </a:solidFill>
-                <a:latin typeface="Calibri" pitchFamily="34" charset="0"/>
-                <a:ea typeface="Calibri" pitchFamily="34" charset="-122"/>
-                <a:cs typeface="Calibri" pitchFamily="34" charset="-120"/>
-              </a:rPr>
-              <a:t>Draft the proposition catalogue</a:t>
-            </a:r>
-            <a:endParaRPr lang="en-US" sz="1250" dirty="0"/>
-          </a:p>
-          <a:p>
-            <a:pPr marL="342900" indent="-342900">
-              <a:spcAft>
-                <a:spcPts val="900"/>
-              </a:spcAft>
-              <a:buSzPct val="100000"/>
-              <a:buChar char="•"/>
-            </a:pPr>
-            <a:r>
-              <a:rPr lang="en-US" sz="1250" dirty="0">
-                <a:solidFill>
-                  <a:srgbClr val="44506B"/>
-                </a:solidFill>
-                <a:latin typeface="Calibri" pitchFamily="34" charset="0"/>
-                <a:ea typeface="Calibri" pitchFamily="34" charset="-122"/>
-                <a:cs typeface="Calibri" pitchFamily="34" charset="-120"/>
-              </a:rPr>
-              <a:t>Baseline the team we have today</a:t>
-            </a:r>
-            <a:endParaRPr lang="en-US" sz="1250" dirty="0"/>
-          </a:p>
-        </p:txBody>
-      </p:sp>
-      <p:sp>
-        <p:nvSpPr>
-          <p:cNvPr id="8" name="Text 6"/>
-          <p:cNvSpPr txBox="1"/>
-          <p:nvPr/>
-        </p:nvSpPr>
-        <p:spPr>
-          <a:xfrm>
-            <a:off x="914400" y="4892040"/>
-            <a:ext cx="2880360" cy="594360"/>
-          </a:xfrm>
-          <a:prstGeom prst="rect">
-            <a:avLst/>
-          </a:prstGeom>
-          <a:noFill/>
-          <a:ln/>
-        </p:spPr>
-        <p:txBody>
-          <a:bodyPr wrap="square" lIns="0" tIns="0" rIns="0" bIns="0" rtlCol="0" anchor="ctr"/>
-          <a:lstStyle/>
-          <a:p>
-            <a:pPr indent="0" marL="0">
-              <a:buNone/>
-            </a:pPr>
-            <a:r>
-              <a:rPr lang="en-US" sz="1200" b="1" dirty="0">
-                <a:solidFill>
-                  <a:srgbClr val="B8862B"/>
-                </a:solidFill>
-                <a:latin typeface="Calibri" pitchFamily="34" charset="0"/>
-                <a:ea typeface="Calibri" pitchFamily="34" charset="-122"/>
-                <a:cs typeface="Calibri" pitchFamily="34" charset="-120"/>
-              </a:rPr>
-              <a:t>Gate: agreed market and segment priorities</a:t>
-            </a:r>
-            <a:endParaRPr lang="en-US" sz="1200" dirty="0"/>
-          </a:p>
-        </p:txBody>
-      </p:sp>
-      <p:sp>
-        <p:nvSpPr>
-          <p:cNvPr id="9" name="Text 7"/>
-          <p:cNvSpPr txBox="1"/>
-          <p:nvPr/>
-        </p:nvSpPr>
-        <p:spPr>
-          <a:xfrm>
-            <a:off x="4096512" y="3474720"/>
-            <a:ext cx="256032" cy="457200"/>
+            <a:off x="914400" y="2468880"/>
+            <a:ext cx="1402080" cy="1051560"/>
           </a:xfrm>
           <a:prstGeom prst="rect">
             <a:avLst/>
@@ -11520,17 +12850,78 @@
               <a:buNone/>
             </a:pPr>
             <a:r>
-              <a:rPr lang="en-US" sz="2000" dirty="0">
-                <a:solidFill>
-                  <a:srgbClr val="8792AB"/>
-                </a:solidFill>
-                <a:latin typeface="Calibri" pitchFamily="34" charset="0"/>
-                <a:ea typeface="Calibri" pitchFamily="34" charset="-122"/>
-                <a:cs typeface="Calibri" pitchFamily="34" charset="-120"/>
-              </a:rPr>
-              <a:t>→</a:t>
-            </a:r>
-            <a:endParaRPr lang="en-US" sz="2000" dirty="0"/>
+              <a:rPr lang="en-US" sz="1700" b="1" dirty="0">
+                <a:solidFill>
+                  <a:srgbClr val="FFFFFF"/>
+                </a:solidFill>
+                <a:latin typeface="Calibri" pitchFamily="34" charset="0"/>
+                <a:ea typeface="Calibri" pitchFamily="34" charset="-122"/>
+                <a:cs typeface="Calibri" pitchFamily="34" charset="-120"/>
+              </a:rPr>
+              <a:t>Oracle</a:t>
+            </a:r>
+            <a:endParaRPr lang="en-US" sz="1700" dirty="0"/>
+          </a:p>
+        </p:txBody>
+      </p:sp>
+      <p:sp>
+        <p:nvSpPr>
+          <p:cNvPr id="8" name="Shape 6"/>
+          <p:cNvSpPr/>
+          <p:nvPr/>
+        </p:nvSpPr>
+        <p:spPr>
+          <a:xfrm>
+            <a:off x="2499360" y="2468880"/>
+            <a:ext cx="1402080" cy="1051560"/>
+          </a:xfrm>
+          <a:prstGeom prst="roundRect">
+            <a:avLst>
+              <a:gd name="adj" fmla="val 8696"/>
+            </a:avLst>
+          </a:prstGeom>
+          <a:solidFill>
+            <a:srgbClr val="1E2761"/>
+          </a:solidFill>
+          <a:ln/>
+        </p:spPr>
+      </p:sp>
+      <p:sp>
+        <p:nvSpPr>
+          <p:cNvPr id="9" name="Text 7"/>
+          <p:cNvSpPr txBox="1"/>
+          <p:nvPr/>
+        </p:nvSpPr>
+        <p:spPr>
+          <a:xfrm>
+            <a:off x="2499360" y="2468880"/>
+            <a:ext cx="1402080" cy="1051560"/>
+          </a:xfrm>
+          <a:prstGeom prst="rect">
+            <a:avLst/>
+          </a:prstGeom>
+          <a:noFill/>
+          <a:ln/>
+        </p:spPr>
+        <p:txBody>
+          <a:bodyPr wrap="square" lIns="0" tIns="0" rIns="0" bIns="0" rtlCol="0" anchor="ctr"/>
+          <a:lstStyle/>
+          <a:p>
+            <a:pPr algn="ctr" indent="0" marL="0">
+              <a:buNone/>
+            </a:pPr>
+            <a:r>
+              <a:rPr lang="en-US" sz="1700" b="1" dirty="0">
+                <a:solidFill>
+                  <a:srgbClr val="FFFFFF"/>
+                </a:solidFill>
+                <a:latin typeface="Calibri" pitchFamily="34" charset="0"/>
+                <a:ea typeface="Calibri" pitchFamily="34" charset="-122"/>
+                <a:cs typeface="Calibri" pitchFamily="34" charset="-120"/>
+              </a:rPr>
+              <a:t>Google</a:t>
+            </a:r>
+            <a:endParaRPr lang="en-US" sz="1700" dirty="0"/>
           </a:p>
         </p:txBody>
       </p:sp>
@@ -11542,12 +12933,73 @@
         </p:nvSpPr>
         <p:spPr>
           <a:xfrm>
-            <a:off x="4361688" y="1828800"/>
-            <a:ext cx="3429000" cy="3840480"/>
+            <a:off x="4084320" y="2468880"/>
+            <a:ext cx="1402080" cy="1051560"/>
           </a:xfrm>
           <a:prstGeom prst="roundRect">
             <a:avLst>
-              <a:gd name="adj" fmla="val 3200"/>
+              <a:gd name="adj" fmla="val 8696"/>
+            </a:avLst>
+          </a:prstGeom>
+          <a:solidFill>
+            <a:srgbClr val="1E2761"/>
+          </a:solidFill>
+          <a:ln/>
+        </p:spPr>
+      </p:sp>
+      <p:sp>
+        <p:nvSpPr>
+          <p:cNvPr id="11" name="Text 9"/>
+          <p:cNvSpPr txBox="1"/>
+          <p:nvPr/>
+        </p:nvSpPr>
+        <p:spPr>
+          <a:xfrm>
+            <a:off x="4084320" y="2468880"/>
+            <a:ext cx="1402080" cy="1051560"/>
+          </a:xfrm>
+          <a:prstGeom prst="rect">
+            <a:avLst/>
+          </a:prstGeom>
+          <a:noFill/>
+          <a:ln/>
+        </p:spPr>
+        <p:txBody>
+          <a:bodyPr wrap="square" lIns="0" tIns="0" rIns="0" bIns="0" rtlCol="0" anchor="ctr"/>
+          <a:lstStyle/>
+          <a:p>
+            <a:pPr algn="ctr" indent="0" marL="0">
+              <a:buNone/>
+            </a:pPr>
+            <a:r>
+              <a:rPr lang="en-US" sz="1700" b="1" dirty="0">
+                <a:solidFill>
+                  <a:srgbClr val="FFFFFF"/>
+                </a:solidFill>
+                <a:latin typeface="Calibri" pitchFamily="34" charset="0"/>
+                <a:ea typeface="Calibri" pitchFamily="34" charset="-122"/>
+                <a:cs typeface="Calibri" pitchFamily="34" charset="-120"/>
+              </a:rPr>
+              <a:t>Amazon</a:t>
+            </a:r>
+            <a:endParaRPr lang="en-US" sz="1700" dirty="0"/>
+          </a:p>
+        </p:txBody>
+      </p:sp>
+      <p:sp>
+        <p:nvSpPr>
+          <p:cNvPr id="12" name="Shape 10"/>
+          <p:cNvSpPr/>
+          <p:nvPr/>
+        </p:nvSpPr>
+        <p:spPr>
+          <a:xfrm>
+            <a:off x="6309360" y="1828800"/>
+            <a:ext cx="5212080" cy="2057400"/>
+          </a:xfrm>
+          <a:prstGeom prst="roundRect">
+            <a:avLst>
+              <a:gd name="adj" fmla="val 5333"/>
             </a:avLst>
           </a:prstGeom>
           <a:solidFill>
@@ -11558,17 +13010,58 @@
       </p:sp>
       <p:sp>
         <p:nvSpPr>
-          <p:cNvPr id="11" name="Shape 9"/>
+          <p:cNvPr id="13" name="Text 11"/>
+          <p:cNvSpPr txBox="1"/>
+          <p:nvPr/>
+        </p:nvSpPr>
+        <p:spPr>
+          <a:xfrm>
+            <a:off x="6583680" y="1965960"/>
+            <a:ext cx="4663440" cy="365760"/>
+          </a:xfrm>
+          <a:prstGeom prst="rect">
+            <a:avLst/>
+          </a:prstGeom>
+          <a:noFill/>
+          <a:ln/>
+        </p:spPr>
+        <p:txBody>
+          <a:bodyPr wrap="square" lIns="0" tIns="0" rIns="0" bIns="0" rtlCol="0" anchor="ctr"/>
+          <a:lstStyle/>
+          <a:p>
+            <a:pPr indent="0" marL="0">
+              <a:buNone/>
+            </a:pPr>
+            <a:r>
+              <a:rPr lang="en-US" sz="1700" b="1" dirty="0">
+                <a:solidFill>
+                  <a:srgbClr val="3E5C8A"/>
+                </a:solidFill>
+                <a:latin typeface="Calibri" pitchFamily="34" charset="0"/>
+                <a:ea typeface="Calibri" pitchFamily="34" charset="-122"/>
+                <a:cs typeface="Calibri" pitchFamily="34" charset="-120"/>
+              </a:rPr>
+              <a:t>Specialised alliances</a:t>
+            </a:r>
+            <a:endParaRPr lang="en-US" sz="1700" dirty="0"/>
+          </a:p>
+        </p:txBody>
+      </p:sp>
+      <p:sp>
+        <p:nvSpPr>
+          <p:cNvPr id="14" name="Shape 12"/>
           <p:cNvSpPr/>
           <p:nvPr/>
         </p:nvSpPr>
         <p:spPr>
           <a:xfrm>
-            <a:off x="4361688" y="1828800"/>
-            <a:ext cx="3429000" cy="685800"/>
-          </a:xfrm>
-          <a:prstGeom prst="rect">
-            <a:avLst/>
+            <a:off x="6583680" y="2468880"/>
+            <a:ext cx="2240280" cy="1051560"/>
+          </a:xfrm>
+          <a:prstGeom prst="roundRect">
+            <a:avLst>
+              <a:gd name="adj" fmla="val 8696"/>
+            </a:avLst>
           </a:prstGeom>
           <a:solidFill>
             <a:srgbClr val="3E5C8A"/>
@@ -11578,14 +13071,180 @@
       </p:sp>
       <p:sp>
         <p:nvSpPr>
-          <p:cNvPr id="12" name="Text 10"/>
-          <p:cNvSpPr txBox="1"/>
-          <p:nvPr/>
-        </p:nvSpPr>
-        <p:spPr>
-          <a:xfrm>
-            <a:off x="4636008" y="1828800"/>
-            <a:ext cx="2926080" cy="685800"/>
+          <p:cNvPr id="15" name="Text 13"/>
+          <p:cNvSpPr txBox="1"/>
+          <p:nvPr/>
+        </p:nvSpPr>
+        <p:spPr>
+          <a:xfrm>
+            <a:off x="6583680" y="2468880"/>
+            <a:ext cx="2240280" cy="1051560"/>
+          </a:xfrm>
+          <a:prstGeom prst="rect">
+            <a:avLst/>
+          </a:prstGeom>
+          <a:noFill/>
+          <a:ln/>
+        </p:spPr>
+        <p:txBody>
+          <a:bodyPr wrap="square" lIns="0" tIns="0" rIns="0" bIns="0" rtlCol="0" anchor="ctr"/>
+          <a:lstStyle/>
+          <a:p>
+            <a:pPr algn="ctr" indent="0" marL="0">
+              <a:buNone/>
+            </a:pPr>
+            <a:r>
+              <a:rPr lang="en-US" sz="1700" b="1" dirty="0">
+                <a:solidFill>
+                  <a:srgbClr val="FFFFFF"/>
+                </a:solidFill>
+                <a:latin typeface="Calibri" pitchFamily="34" charset="0"/>
+                <a:ea typeface="Calibri" pitchFamily="34" charset="-122"/>
+                <a:cs typeface="Calibri" pitchFamily="34" charset="-120"/>
+              </a:rPr>
+              <a:t>Temenos</a:t>
+            </a:r>
+            <a:endParaRPr lang="en-US" sz="1700" dirty="0"/>
+          </a:p>
+        </p:txBody>
+      </p:sp>
+      <p:sp>
+        <p:nvSpPr>
+          <p:cNvPr id="16" name="Shape 14"/>
+          <p:cNvSpPr/>
+          <p:nvPr/>
+        </p:nvSpPr>
+        <p:spPr>
+          <a:xfrm>
+            <a:off x="9006840" y="2468880"/>
+            <a:ext cx="2240280" cy="1051560"/>
+          </a:xfrm>
+          <a:prstGeom prst="roundRect">
+            <a:avLst>
+              <a:gd name="adj" fmla="val 8696"/>
+            </a:avLst>
+          </a:prstGeom>
+          <a:solidFill>
+            <a:srgbClr val="3E5C8A"/>
+          </a:solidFill>
+          <a:ln/>
+        </p:spPr>
+      </p:sp>
+      <p:sp>
+        <p:nvSpPr>
+          <p:cNvPr id="17" name="Text 15"/>
+          <p:cNvSpPr txBox="1"/>
+          <p:nvPr/>
+        </p:nvSpPr>
+        <p:spPr>
+          <a:xfrm>
+            <a:off x="9006840" y="2468880"/>
+            <a:ext cx="2240280" cy="1051560"/>
+          </a:xfrm>
+          <a:prstGeom prst="rect">
+            <a:avLst/>
+          </a:prstGeom>
+          <a:noFill/>
+          <a:ln/>
+        </p:spPr>
+        <p:txBody>
+          <a:bodyPr wrap="square" lIns="0" tIns="0" rIns="0" bIns="0" rtlCol="0" anchor="ctr"/>
+          <a:lstStyle/>
+          <a:p>
+            <a:pPr algn="ctr" indent="0" marL="0">
+              <a:buNone/>
+            </a:pPr>
+            <a:r>
+              <a:rPr lang="en-US" sz="1700" b="1" dirty="0">
+                <a:solidFill>
+                  <a:srgbClr val="FFFFFF"/>
+                </a:solidFill>
+                <a:latin typeface="Calibri" pitchFamily="34" charset="0"/>
+                <a:ea typeface="Calibri" pitchFamily="34" charset="-122"/>
+                <a:cs typeface="Calibri" pitchFamily="34" charset="-120"/>
+              </a:rPr>
+              <a:t>Intellect</a:t>
+            </a:r>
+            <a:endParaRPr lang="en-US" sz="1700" dirty="0"/>
+          </a:p>
+        </p:txBody>
+      </p:sp>
+      <p:sp>
+        <p:nvSpPr>
+          <p:cNvPr id="18" name="Shape 16"/>
+          <p:cNvSpPr/>
+          <p:nvPr/>
+        </p:nvSpPr>
+        <p:spPr>
+          <a:xfrm>
+            <a:off x="4023360" y="4023360"/>
+            <a:ext cx="4114800" cy="301752"/>
+          </a:xfrm>
+          <a:prstGeom prst="roundRect">
+            <a:avLst>
+              <a:gd name="adj" fmla="val 48485"/>
+            </a:avLst>
+          </a:prstGeom>
+          <a:solidFill>
+            <a:srgbClr val="FFFFFF"/>
+          </a:solidFill>
+          <a:ln w="12700">
+            <a:solidFill>
+              <a:srgbClr val="B8862B"/>
+            </a:solidFill>
+            <a:prstDash val="solid"/>
+          </a:ln>
+        </p:spPr>
+      </p:sp>
+      <p:sp>
+        <p:nvSpPr>
+          <p:cNvPr id="19" name="Text 17"/>
+          <p:cNvSpPr txBox="1"/>
+          <p:nvPr/>
+        </p:nvSpPr>
+        <p:spPr>
+          <a:xfrm>
+            <a:off x="4023360" y="4023360"/>
+            <a:ext cx="4114800" cy="301752"/>
+          </a:xfrm>
+          <a:prstGeom prst="rect">
+            <a:avLst/>
+          </a:prstGeom>
+          <a:noFill/>
+          <a:ln/>
+        </p:spPr>
+        <p:txBody>
+          <a:bodyPr wrap="square" lIns="0" tIns="0" rIns="0" bIns="0" rtlCol="0" anchor="ctr"/>
+          <a:lstStyle/>
+          <a:p>
+            <a:pPr algn="ctr" indent="0" marL="0">
+              <a:buNone/>
+            </a:pPr>
+            <a:r>
+              <a:rPr lang="en-US" sz="1050" i="1" dirty="0">
+                <a:solidFill>
+                  <a:srgbClr val="B8862B"/>
+                </a:solidFill>
+                <a:latin typeface="Calibri" pitchFamily="34" charset="0"/>
+                <a:ea typeface="Calibri" pitchFamily="34" charset="-122"/>
+                <a:cs typeface="Calibri" pitchFamily="34" charset="-120"/>
+              </a:rPr>
+              <a:t>further alliances to be defined in the cycle</a:t>
+            </a:r>
+            <a:endParaRPr lang="en-US" sz="1050" dirty="0"/>
+          </a:p>
+        </p:txBody>
+      </p:sp>
+      <p:sp>
+        <p:nvSpPr>
+          <p:cNvPr id="20" name="Text 18"/>
+          <p:cNvSpPr txBox="1"/>
+          <p:nvPr/>
+        </p:nvSpPr>
+        <p:spPr>
+          <a:xfrm>
+            <a:off x="640080" y="4617720"/>
+            <a:ext cx="10881360" cy="320040"/>
           </a:xfrm>
           <a:prstGeom prst="rect">
             <a:avLst/>
@@ -11601,238 +13260,32 @@
               <a:buNone/>
             </a:pPr>
             <a:r>
-              <a:rPr lang="en-US" sz="1800" b="1" dirty="0">
-                <a:solidFill>
-                  <a:srgbClr val="FFFFFF"/>
-                </a:solidFill>
-                <a:latin typeface="Calibri" pitchFamily="34" charset="0"/>
-                <a:ea typeface="Calibri" pitchFamily="34" charset="-122"/>
-                <a:cs typeface="Calibri" pitchFamily="34" charset="-120"/>
-              </a:rPr>
-              <a:t>Week 2  ·  Define</a:t>
-            </a:r>
-            <a:endParaRPr lang="en-US" sz="1800" dirty="0"/>
-          </a:p>
-        </p:txBody>
-      </p:sp>
-      <p:sp>
-        <p:nvSpPr>
-          <p:cNvPr id="13" name="Text 11"/>
-          <p:cNvSpPr txBox="1"/>
-          <p:nvPr/>
-        </p:nvSpPr>
-        <p:spPr>
-          <a:xfrm>
-            <a:off x="4636008" y="2743200"/>
-            <a:ext cx="2880360" cy="1920240"/>
-          </a:xfrm>
-          <a:prstGeom prst="rect">
-            <a:avLst/>
-          </a:prstGeom>
-          <a:noFill/>
-          <a:ln/>
-        </p:spPr>
-        <p:txBody>
-          <a:bodyPr wrap="square" lIns="0" tIns="0" rIns="0" bIns="0" rtlCol="0" anchor="ctr"/>
-          <a:lstStyle/>
-          <a:p>
-            <a:pPr marL="342900" indent="-342900">
-              <a:spcAft>
-                <a:spcPts val="900"/>
-              </a:spcAft>
-              <a:buSzPct val="100000"/>
-              <a:buChar char="•"/>
-            </a:pPr>
-            <a:r>
-              <a:rPr lang="en-US" sz="1250" dirty="0">
-                <a:solidFill>
-                  <a:srgbClr val="44506B"/>
-                </a:solidFill>
-                <a:latin typeface="Calibri" pitchFamily="34" charset="0"/>
-                <a:ea typeface="Calibri" pitchFamily="34" charset="-122"/>
-                <a:cs typeface="Calibri" pitchFamily="34" charset="-120"/>
-              </a:rPr>
-              <a:t>Lock propositions and permitted variants</a:t>
-            </a:r>
-            <a:endParaRPr lang="en-US" sz="1250" dirty="0"/>
-          </a:p>
-          <a:p>
-            <a:pPr marL="342900" indent="-342900">
-              <a:spcAft>
-                <a:spcPts val="900"/>
-              </a:spcAft>
-              <a:buSzPct val="100000"/>
-              <a:buChar char="•"/>
-            </a:pPr>
-            <a:r>
-              <a:rPr lang="en-US" sz="1250" dirty="0">
-                <a:solidFill>
-                  <a:srgbClr val="44506B"/>
-                </a:solidFill>
-                <a:latin typeface="Calibri" pitchFamily="34" charset="0"/>
-                <a:ea typeface="Calibri" pitchFamily="34" charset="-122"/>
-                <a:cs typeface="Calibri" pitchFamily="34" charset="-120"/>
-              </a:rPr>
-              <a:t>Benchmark deal sizes and pricing</a:t>
-            </a:r>
-            <a:endParaRPr lang="en-US" sz="1250" dirty="0"/>
-          </a:p>
-          <a:p>
-            <a:pPr marL="342900" indent="-342900">
-              <a:spcAft>
-                <a:spcPts val="900"/>
-              </a:spcAft>
-              <a:buSzPct val="100000"/>
-              <a:buChar char="•"/>
-            </a:pPr>
-            <a:r>
-              <a:rPr lang="en-US" sz="1250" dirty="0">
-                <a:solidFill>
-                  <a:srgbClr val="44506B"/>
-                </a:solidFill>
-                <a:latin typeface="Calibri" pitchFamily="34" charset="0"/>
-                <a:ea typeface="Calibri" pitchFamily="34" charset="-122"/>
-                <a:cs typeface="Calibri" pitchFamily="34" charset="-120"/>
-              </a:rPr>
-              <a:t>Shortlist target accounts</a:t>
-            </a:r>
-            <a:endParaRPr lang="en-US" sz="1250" dirty="0"/>
-          </a:p>
-          <a:p>
-            <a:pPr marL="342900" indent="-342900">
-              <a:spcAft>
-                <a:spcPts val="900"/>
-              </a:spcAft>
-              <a:buSzPct val="100000"/>
-              <a:buChar char="•"/>
-            </a:pPr>
-            <a:r>
-              <a:rPr lang="en-US" sz="1250" dirty="0">
-                <a:solidFill>
-                  <a:srgbClr val="44506B"/>
-                </a:solidFill>
-                <a:latin typeface="Calibri" pitchFamily="34" charset="0"/>
-                <a:ea typeface="Calibri" pitchFamily="34" charset="-122"/>
-                <a:cs typeface="Calibri" pitchFamily="34" charset="-120"/>
-              </a:rPr>
-              <a:t>Size the capacity each target implies</a:t>
-            </a:r>
-            <a:endParaRPr lang="en-US" sz="1250" dirty="0"/>
-          </a:p>
-        </p:txBody>
-      </p:sp>
-      <p:sp>
-        <p:nvSpPr>
-          <p:cNvPr id="14" name="Text 12"/>
-          <p:cNvSpPr txBox="1"/>
-          <p:nvPr/>
-        </p:nvSpPr>
-        <p:spPr>
-          <a:xfrm>
-            <a:off x="4636008" y="4892040"/>
-            <a:ext cx="2880360" cy="594360"/>
-          </a:xfrm>
-          <a:prstGeom prst="rect">
-            <a:avLst/>
-          </a:prstGeom>
-          <a:noFill/>
-          <a:ln/>
-        </p:spPr>
-        <p:txBody>
-          <a:bodyPr wrap="square" lIns="0" tIns="0" rIns="0" bIns="0" rtlCol="0" anchor="ctr"/>
-          <a:lstStyle/>
-          <a:p>
-            <a:pPr indent="0" marL="0">
-              <a:buNone/>
-            </a:pPr>
-            <a:r>
-              <a:rPr lang="en-US" sz="1200" b="1" dirty="0">
-                <a:solidFill>
-                  <a:srgbClr val="B8862B"/>
-                </a:solidFill>
-                <a:latin typeface="Calibri" pitchFamily="34" charset="0"/>
-                <a:ea typeface="Calibri" pitchFamily="34" charset="-122"/>
-                <a:cs typeface="Calibri" pitchFamily="34" charset="-120"/>
-              </a:rPr>
-              <a:t>Gate: agreed catalogue and shortlist</a:t>
-            </a:r>
-            <a:endParaRPr lang="en-US" sz="1200" dirty="0"/>
-          </a:p>
-        </p:txBody>
-      </p:sp>
-      <p:sp>
-        <p:nvSpPr>
-          <p:cNvPr id="15" name="Text 13"/>
-          <p:cNvSpPr txBox="1"/>
-          <p:nvPr/>
-        </p:nvSpPr>
-        <p:spPr>
-          <a:xfrm>
-            <a:off x="7818120" y="3474720"/>
-            <a:ext cx="256032" cy="457200"/>
-          </a:xfrm>
-          <a:prstGeom prst="rect">
-            <a:avLst/>
-          </a:prstGeom>
-          <a:noFill/>
-          <a:ln/>
-        </p:spPr>
-        <p:txBody>
-          <a:bodyPr wrap="square" lIns="0" tIns="0" rIns="0" bIns="0" rtlCol="0" anchor="ctr"/>
-          <a:lstStyle/>
-          <a:p>
-            <a:pPr algn="ctr" indent="0" marL="0">
-              <a:buNone/>
-            </a:pPr>
-            <a:r>
-              <a:rPr lang="en-US" sz="2000" dirty="0">
-                <a:solidFill>
-                  <a:srgbClr val="8792AB"/>
-                </a:solidFill>
-                <a:latin typeface="Calibri" pitchFamily="34" charset="0"/>
-                <a:ea typeface="Calibri" pitchFamily="34" charset="-122"/>
-                <a:cs typeface="Calibri" pitchFamily="34" charset="-120"/>
-              </a:rPr>
-              <a:t>→</a:t>
-            </a:r>
-            <a:endParaRPr lang="en-US" sz="2000" dirty="0"/>
-          </a:p>
-        </p:txBody>
-      </p:sp>
-      <p:sp>
-        <p:nvSpPr>
-          <p:cNvPr id="16" name="Shape 14"/>
+              <a:rPr lang="en-US" sz="1400" b="1" dirty="0">
+                <a:solidFill>
+                  <a:srgbClr val="16203A"/>
+                </a:solidFill>
+                <a:latin typeface="Calibri" pitchFamily="34" charset="0"/>
+                <a:ea typeface="Calibri" pitchFamily="34" charset="-122"/>
+                <a:cs typeface="Calibri" pitchFamily="34" charset="-120"/>
+              </a:rPr>
+              <a:t>For every alliance the plan must answer:</a:t>
+            </a:r>
+            <a:endParaRPr lang="en-US" sz="1400" dirty="0"/>
+          </a:p>
+        </p:txBody>
+      </p:sp>
+      <p:sp>
+        <p:nvSpPr>
+          <p:cNvPr id="21" name="Shape 19"/>
           <p:cNvSpPr/>
           <p:nvPr/>
         </p:nvSpPr>
         <p:spPr>
           <a:xfrm>
-            <a:off x="8083296" y="1828800"/>
-            <a:ext cx="3429000" cy="3840480"/>
-          </a:xfrm>
-          <a:prstGeom prst="roundRect">
-            <a:avLst>
-              <a:gd name="adj" fmla="val 3200"/>
-            </a:avLst>
-          </a:prstGeom>
-          <a:solidFill>
-            <a:srgbClr val="EDF2FA"/>
-          </a:solidFill>
-          <a:ln/>
-        </p:spPr>
-      </p:sp>
-      <p:sp>
-        <p:nvSpPr>
-          <p:cNvPr id="17" name="Shape 15"/>
-          <p:cNvSpPr/>
-          <p:nvPr/>
-        </p:nvSpPr>
-        <p:spPr>
-          <a:xfrm>
-            <a:off x="8083296" y="1828800"/>
-            <a:ext cx="3429000" cy="685800"/>
-          </a:xfrm>
-          <a:prstGeom prst="rect">
+            <a:off x="640080" y="5029200"/>
+            <a:ext cx="310896" cy="310896"/>
+          </a:xfrm>
+          <a:prstGeom prst="ellipse">
             <a:avLst/>
           </a:prstGeom>
           <a:solidFill>
@@ -11843,14 +13296,53 @@
       </p:sp>
       <p:sp>
         <p:nvSpPr>
-          <p:cNvPr id="18" name="Text 16"/>
-          <p:cNvSpPr txBox="1"/>
-          <p:nvPr/>
-        </p:nvSpPr>
-        <p:spPr>
-          <a:xfrm>
-            <a:off x="8357616" y="1828800"/>
-            <a:ext cx="2926080" cy="685800"/>
+          <p:cNvPr id="22" name="Text 20"/>
+          <p:cNvSpPr txBox="1"/>
+          <p:nvPr/>
+        </p:nvSpPr>
+        <p:spPr>
+          <a:xfrm>
+            <a:off x="640080" y="5029200"/>
+            <a:ext cx="310896" cy="310896"/>
+          </a:xfrm>
+          <a:prstGeom prst="rect">
+            <a:avLst/>
+          </a:prstGeom>
+          <a:noFill/>
+          <a:ln/>
+        </p:spPr>
+        <p:txBody>
+          <a:bodyPr wrap="square" lIns="0" tIns="0" rIns="0" bIns="0" rtlCol="0" anchor="ctr"/>
+          <a:lstStyle/>
+          <a:p>
+            <a:pPr algn="ctr" indent="0" marL="0">
+              <a:buNone/>
+            </a:pPr>
+            <a:r>
+              <a:rPr lang="en-US" sz="1200" b="1" dirty="0">
+                <a:solidFill>
+                  <a:srgbClr val="FFFFFF"/>
+                </a:solidFill>
+                <a:latin typeface="Calibri" pitchFamily="34" charset="0"/>
+                <a:ea typeface="Calibri" pitchFamily="34" charset="-122"/>
+                <a:cs typeface="Calibri" pitchFamily="34" charset="-120"/>
+              </a:rPr>
+              <a:t>1</a:t>
+            </a:r>
+            <a:endParaRPr lang="en-US" sz="1200" dirty="0"/>
+          </a:p>
+        </p:txBody>
+      </p:sp>
+      <p:sp>
+        <p:nvSpPr>
+          <p:cNvPr id="23" name="Text 21"/>
+          <p:cNvSpPr txBox="1"/>
+          <p:nvPr/>
+        </p:nvSpPr>
+        <p:spPr>
+          <a:xfrm>
+            <a:off x="1097280" y="4992624"/>
+            <a:ext cx="2377440" cy="320040"/>
           </a:xfrm>
           <a:prstGeom prst="rect">
             <a:avLst/>
@@ -11866,157 +13358,30 @@
               <a:buNone/>
             </a:pPr>
             <a:r>
-              <a:rPr lang="en-US" sz="1800" b="1" dirty="0">
-                <a:solidFill>
-                  <a:srgbClr val="FFFFFF"/>
-                </a:solidFill>
-                <a:latin typeface="Calibri" pitchFamily="34" charset="0"/>
-                <a:ea typeface="Calibri" pitchFamily="34" charset="-122"/>
-                <a:cs typeface="Calibri" pitchFamily="34" charset="-120"/>
-              </a:rPr>
-              <a:t>Week 3  ·  Commit</a:t>
-            </a:r>
-            <a:endParaRPr lang="en-US" sz="1800" dirty="0"/>
-          </a:p>
-        </p:txBody>
-      </p:sp>
-      <p:sp>
-        <p:nvSpPr>
-          <p:cNvPr id="19" name="Text 17"/>
-          <p:cNvSpPr txBox="1"/>
-          <p:nvPr/>
-        </p:nvSpPr>
-        <p:spPr>
-          <a:xfrm>
-            <a:off x="8357616" y="2743200"/>
-            <a:ext cx="2880360" cy="1920240"/>
-          </a:xfrm>
-          <a:prstGeom prst="rect">
-            <a:avLst/>
-          </a:prstGeom>
-          <a:noFill/>
-          <a:ln/>
-        </p:spPr>
-        <p:txBody>
-          <a:bodyPr wrap="square" lIns="0" tIns="0" rIns="0" bIns="0" rtlCol="0" anchor="ctr"/>
-          <a:lstStyle/>
-          <a:p>
-            <a:pPr marL="342900" indent="-342900">
-              <a:spcAft>
-                <a:spcPts val="900"/>
-              </a:spcAft>
-              <a:buSzPct val="100000"/>
-              <a:buChar char="•"/>
-            </a:pPr>
-            <a:r>
-              <a:rPr lang="en-US" sz="1250" dirty="0">
-                <a:solidFill>
-                  <a:srgbClr val="44506B"/>
-                </a:solidFill>
-                <a:latin typeface="Calibri" pitchFamily="34" charset="0"/>
-                <a:ea typeface="Calibri" pitchFamily="34" charset="-122"/>
-                <a:cs typeface="Calibri" pitchFamily="34" charset="-120"/>
-              </a:rPr>
-              <a:t>Set revenue targets by market and offering</a:t>
-            </a:r>
-            <a:endParaRPr lang="en-US" sz="1250" dirty="0"/>
-          </a:p>
-          <a:p>
-            <a:pPr marL="342900" indent="-342900">
-              <a:spcAft>
-                <a:spcPts val="900"/>
-              </a:spcAft>
-              <a:buSzPct val="100000"/>
-              <a:buChar char="•"/>
-            </a:pPr>
-            <a:r>
-              <a:rPr lang="en-US" sz="1250" dirty="0">
-                <a:solidFill>
-                  <a:srgbClr val="44506B"/>
-                </a:solidFill>
-                <a:latin typeface="Calibri" pitchFamily="34" charset="0"/>
-                <a:ea typeface="Calibri" pitchFamily="34" charset="-122"/>
-                <a:cs typeface="Calibri" pitchFamily="34" charset="-120"/>
-              </a:rPr>
-              <a:t>Assign an owner to every account</a:t>
-            </a:r>
-            <a:endParaRPr lang="en-US" sz="1250" dirty="0"/>
-          </a:p>
-          <a:p>
-            <a:pPr marL="342900" indent="-342900">
-              <a:spcAft>
-                <a:spcPts val="900"/>
-              </a:spcAft>
-              <a:buSzPct val="100000"/>
-              <a:buChar char="•"/>
-            </a:pPr>
-            <a:r>
-              <a:rPr lang="en-US" sz="1250" dirty="0">
-                <a:solidFill>
-                  <a:srgbClr val="44506B"/>
-                </a:solidFill>
-                <a:latin typeface="Calibri" pitchFamily="34" charset="0"/>
-                <a:ea typeface="Calibri" pitchFamily="34" charset="-122"/>
-                <a:cs typeface="Calibri" pitchFamily="34" charset="-120"/>
-              </a:rPr>
-              <a:t>Agree the team model and recruitment plan</a:t>
-            </a:r>
-            <a:endParaRPr lang="en-US" sz="1250" dirty="0"/>
-          </a:p>
-          <a:p>
-            <a:pPr marL="342900" indent="-342900">
-              <a:spcAft>
-                <a:spcPts val="900"/>
-              </a:spcAft>
-              <a:buSzPct val="100000"/>
-              <a:buChar char="•"/>
-            </a:pPr>
-            <a:r>
-              <a:rPr lang="en-US" sz="1250" dirty="0">
-                <a:solidFill>
-                  <a:srgbClr val="44506B"/>
-                </a:solidFill>
-                <a:latin typeface="Calibri" pitchFamily="34" charset="0"/>
-                <a:ea typeface="Calibri" pitchFamily="34" charset="-122"/>
-                <a:cs typeface="Calibri" pitchFamily="34" charset="-120"/>
-              </a:rPr>
-              <a:t>Set the eminence calendar</a:t>
-            </a:r>
-            <a:endParaRPr lang="en-US" sz="1250" dirty="0"/>
-          </a:p>
-          <a:p>
-            <a:pPr marL="342900" indent="-342900">
-              <a:spcAft>
-                <a:spcPts val="900"/>
-              </a:spcAft>
-              <a:buSzPct val="100000"/>
-              <a:buChar char="•"/>
-            </a:pPr>
-            <a:r>
-              <a:rPr lang="en-US" sz="1250" dirty="0">
-                <a:solidFill>
-                  <a:srgbClr val="44506B"/>
-                </a:solidFill>
-                <a:latin typeface="Calibri" pitchFamily="34" charset="0"/>
-                <a:ea typeface="Calibri" pitchFamily="34" charset="-122"/>
-                <a:cs typeface="Calibri" pitchFamily="34" charset="-120"/>
-              </a:rPr>
-              <a:t>Build the activation plan and sign off</a:t>
-            </a:r>
-            <a:endParaRPr lang="en-US" sz="1250" dirty="0"/>
-          </a:p>
-        </p:txBody>
-      </p:sp>
-      <p:sp>
-        <p:nvSpPr>
-          <p:cNvPr id="20" name="Text 18"/>
-          <p:cNvSpPr txBox="1"/>
-          <p:nvPr/>
-        </p:nvSpPr>
-        <p:spPr>
-          <a:xfrm>
-            <a:off x="8357616" y="4892040"/>
-            <a:ext cx="2880360" cy="594360"/>
+              <a:rPr lang="en-US" sz="1300" b="1" dirty="0">
+                <a:solidFill>
+                  <a:srgbClr val="16203A"/>
+                </a:solidFill>
+                <a:latin typeface="Calibri" pitchFamily="34" charset="0"/>
+                <a:ea typeface="Calibri" pitchFamily="34" charset="-122"/>
+                <a:cs typeface="Calibri" pitchFamily="34" charset="-120"/>
+              </a:rPr>
+              <a:t>What we leverage it for</a:t>
+            </a:r>
+            <a:endParaRPr lang="en-US" sz="1300" dirty="0"/>
+          </a:p>
+        </p:txBody>
+      </p:sp>
+      <p:sp>
+        <p:nvSpPr>
+          <p:cNvPr id="24" name="Text 22"/>
+          <p:cNvSpPr txBox="1"/>
+          <p:nvPr/>
+        </p:nvSpPr>
+        <p:spPr>
+          <a:xfrm>
+            <a:off x="3474720" y="4992624"/>
+            <a:ext cx="2514600" cy="411480"/>
           </a:xfrm>
           <a:prstGeom prst="rect">
             <a:avLst/>
@@ -12032,15 +13397,74 @@
               <a:buNone/>
             </a:pPr>
             <a:r>
+              <a:rPr lang="en-US" sz="1200" dirty="0">
+                <a:solidFill>
+                  <a:srgbClr val="44506B"/>
+                </a:solidFill>
+                <a:latin typeface="Calibri" pitchFamily="34" charset="0"/>
+                <a:ea typeface="Calibri" pitchFamily="34" charset="-122"/>
+                <a:cs typeface="Calibri" pitchFamily="34" charset="-120"/>
+              </a:rPr>
+              <a:t>Which propositions and which pillars it sits behind</a:t>
+            </a:r>
+            <a:endParaRPr lang="en-US" sz="1200" dirty="0"/>
+          </a:p>
+        </p:txBody>
+      </p:sp>
+      <p:sp>
+        <p:nvSpPr>
+          <p:cNvPr id="25" name="Shape 23"/>
+          <p:cNvSpPr/>
+          <p:nvPr/>
+        </p:nvSpPr>
+        <p:spPr>
+          <a:xfrm>
+            <a:off x="6263640" y="5029200"/>
+            <a:ext cx="310896" cy="310896"/>
+          </a:xfrm>
+          <a:prstGeom prst="ellipse">
+            <a:avLst/>
+          </a:prstGeom>
+          <a:solidFill>
+            <a:srgbClr val="1E2761"/>
+          </a:solidFill>
+          <a:ln/>
+        </p:spPr>
+      </p:sp>
+      <p:sp>
+        <p:nvSpPr>
+          <p:cNvPr id="26" name="Text 24"/>
+          <p:cNvSpPr txBox="1"/>
+          <p:nvPr/>
+        </p:nvSpPr>
+        <p:spPr>
+          <a:xfrm>
+            <a:off x="6263640" y="5029200"/>
+            <a:ext cx="310896" cy="310896"/>
+          </a:xfrm>
+          <a:prstGeom prst="rect">
+            <a:avLst/>
+          </a:prstGeom>
+          <a:noFill/>
+          <a:ln/>
+        </p:spPr>
+        <p:txBody>
+          <a:bodyPr wrap="square" lIns="0" tIns="0" rIns="0" bIns="0" rtlCol="0" anchor="ctr"/>
+          <a:lstStyle/>
+          <a:p>
+            <a:pPr algn="ctr" indent="0" marL="0">
+              <a:buNone/>
+            </a:pPr>
+            <a:r>
               <a:rPr lang="en-US" sz="1200" b="1" dirty="0">
                 <a:solidFill>
-                  <a:srgbClr val="B8862B"/>
-                </a:solidFill>
-                <a:latin typeface="Calibri" pitchFamily="34" charset="0"/>
-                <a:ea typeface="Calibri" pitchFamily="34" charset="-122"/>
-                <a:cs typeface="Calibri" pitchFamily="34" charset="-120"/>
-              </a:rPr>
-              <a:t>Gate: strategy signed off</a:t>
+                  <a:srgbClr val="FFFFFF"/>
+                </a:solidFill>
+                <a:latin typeface="Calibri" pitchFamily="34" charset="0"/>
+                <a:ea typeface="Calibri" pitchFamily="34" charset="-122"/>
+                <a:cs typeface="Calibri" pitchFamily="34" charset="-120"/>
+              </a:rPr>
+              <a:t>2</a:t>
             </a:r>
             <a:endParaRPr lang="en-US" sz="1200" dirty="0"/>
           </a:p>
@@ -12048,14 +13472,14 @@
       </p:sp>
       <p:sp>
         <p:nvSpPr>
-          <p:cNvPr id="21" name="Text 19"/>
-          <p:cNvSpPr txBox="1"/>
-          <p:nvPr/>
-        </p:nvSpPr>
-        <p:spPr>
-          <a:xfrm>
-            <a:off x="640080" y="5852160"/>
-            <a:ext cx="5486400" cy="320040"/>
+          <p:cNvPr id="27" name="Text 25"/>
+          <p:cNvSpPr txBox="1"/>
+          <p:nvPr/>
+        </p:nvSpPr>
+        <p:spPr>
+          <a:xfrm>
+            <a:off x="6720840" y="4992624"/>
+            <a:ext cx="2377440" cy="320040"/>
           </a:xfrm>
           <a:prstGeom prst="rect">
             <a:avLst/>
@@ -12071,15 +13495,328 @@
               <a:buNone/>
             </a:pPr>
             <a:r>
-              <a:rPr lang="en-US" sz="1200" i="1" dirty="0">
-                <a:solidFill>
-                  <a:srgbClr val="8792AB"/>
-                </a:solidFill>
-                <a:latin typeface="Calibri" pitchFamily="34" charset="0"/>
-                <a:ea typeface="Calibri" pitchFamily="34" charset="-122"/>
-                <a:cs typeface="Calibri" pitchFamily="34" charset="-120"/>
-              </a:rPr>
-              <a:t>Start date to be defined at kick-off.</a:t>
+              <a:rPr lang="en-US" sz="1300" b="1" dirty="0">
+                <a:solidFill>
+                  <a:srgbClr val="16203A"/>
+                </a:solidFill>
+                <a:latin typeface="Calibri" pitchFamily="34" charset="0"/>
+                <a:ea typeface="Calibri" pitchFamily="34" charset="-122"/>
+                <a:cs typeface="Calibri" pitchFamily="34" charset="-120"/>
+              </a:rPr>
+              <a:t>What the relationship is</a:t>
+            </a:r>
+            <a:endParaRPr lang="en-US" sz="1300" dirty="0"/>
+          </a:p>
+        </p:txBody>
+      </p:sp>
+      <p:sp>
+        <p:nvSpPr>
+          <p:cNvPr id="28" name="Text 26"/>
+          <p:cNvSpPr txBox="1"/>
+          <p:nvPr/>
+        </p:nvSpPr>
+        <p:spPr>
+          <a:xfrm>
+            <a:off x="9098280" y="4992624"/>
+            <a:ext cx="2514600" cy="411480"/>
+          </a:xfrm>
+          <a:prstGeom prst="rect">
+            <a:avLst/>
+          </a:prstGeom>
+          <a:noFill/>
+          <a:ln/>
+        </p:spPr>
+        <p:txBody>
+          <a:bodyPr wrap="square" lIns="0" tIns="0" rIns="0" bIns="0" rtlCol="0" anchor="ctr"/>
+          <a:lstStyle/>
+          <a:p>
+            <a:pPr indent="0" marL="0">
+              <a:buNone/>
+            </a:pPr>
+            <a:r>
+              <a:rPr lang="en-US" sz="1200" dirty="0">
+                <a:solidFill>
+                  <a:srgbClr val="44506B"/>
+                </a:solidFill>
+                <a:latin typeface="Calibri" pitchFamily="34" charset="0"/>
+                <a:ea typeface="Calibri" pitchFamily="34" charset="-122"/>
+                <a:cs typeface="Calibri" pitchFamily="34" charset="-120"/>
+              </a:rPr>
+              <a:t>Co-sell, resell, delivery partner or referral</a:t>
+            </a:r>
+            <a:endParaRPr lang="en-US" sz="1200" dirty="0"/>
+          </a:p>
+        </p:txBody>
+      </p:sp>
+      <p:sp>
+        <p:nvSpPr>
+          <p:cNvPr id="29" name="Shape 27"/>
+          <p:cNvSpPr/>
+          <p:nvPr/>
+        </p:nvSpPr>
+        <p:spPr>
+          <a:xfrm>
+            <a:off x="640080" y="5715000"/>
+            <a:ext cx="310896" cy="310896"/>
+          </a:xfrm>
+          <a:prstGeom prst="ellipse">
+            <a:avLst/>
+          </a:prstGeom>
+          <a:solidFill>
+            <a:srgbClr val="3E5C8A"/>
+          </a:solidFill>
+          <a:ln/>
+        </p:spPr>
+      </p:sp>
+      <p:sp>
+        <p:nvSpPr>
+          <p:cNvPr id="30" name="Text 28"/>
+          <p:cNvSpPr txBox="1"/>
+          <p:nvPr/>
+        </p:nvSpPr>
+        <p:spPr>
+          <a:xfrm>
+            <a:off x="640080" y="5715000"/>
+            <a:ext cx="310896" cy="310896"/>
+          </a:xfrm>
+          <a:prstGeom prst="rect">
+            <a:avLst/>
+          </a:prstGeom>
+          <a:noFill/>
+          <a:ln/>
+        </p:spPr>
+        <p:txBody>
+          <a:bodyPr wrap="square" lIns="0" tIns="0" rIns="0" bIns="0" rtlCol="0" anchor="ctr"/>
+          <a:lstStyle/>
+          <a:p>
+            <a:pPr algn="ctr" indent="0" marL="0">
+              <a:buNone/>
+            </a:pPr>
+            <a:r>
+              <a:rPr lang="en-US" sz="1200" b="1" dirty="0">
+                <a:solidFill>
+                  <a:srgbClr val="FFFFFF"/>
+                </a:solidFill>
+                <a:latin typeface="Calibri" pitchFamily="34" charset="0"/>
+                <a:ea typeface="Calibri" pitchFamily="34" charset="-122"/>
+                <a:cs typeface="Calibri" pitchFamily="34" charset="-120"/>
+              </a:rPr>
+              <a:t>3</a:t>
+            </a:r>
+            <a:endParaRPr lang="en-US" sz="1200" dirty="0"/>
+          </a:p>
+        </p:txBody>
+      </p:sp>
+      <p:sp>
+        <p:nvSpPr>
+          <p:cNvPr id="31" name="Text 29"/>
+          <p:cNvSpPr txBox="1"/>
+          <p:nvPr/>
+        </p:nvSpPr>
+        <p:spPr>
+          <a:xfrm>
+            <a:off x="1097280" y="5678424"/>
+            <a:ext cx="2377440" cy="320040"/>
+          </a:xfrm>
+          <a:prstGeom prst="rect">
+            <a:avLst/>
+          </a:prstGeom>
+          <a:noFill/>
+          <a:ln/>
+        </p:spPr>
+        <p:txBody>
+          <a:bodyPr wrap="square" lIns="0" tIns="0" rIns="0" bIns="0" rtlCol="0" anchor="ctr"/>
+          <a:lstStyle/>
+          <a:p>
+            <a:pPr indent="0" marL="0">
+              <a:buNone/>
+            </a:pPr>
+            <a:r>
+              <a:rPr lang="en-US" sz="1300" b="1" dirty="0">
+                <a:solidFill>
+                  <a:srgbClr val="16203A"/>
+                </a:solidFill>
+                <a:latin typeface="Calibri" pitchFamily="34" charset="0"/>
+                <a:ea typeface="Calibri" pitchFamily="34" charset="-122"/>
+                <a:cs typeface="Calibri" pitchFamily="34" charset="-120"/>
+              </a:rPr>
+              <a:t>Where it opens doors</a:t>
+            </a:r>
+            <a:endParaRPr lang="en-US" sz="1300" dirty="0"/>
+          </a:p>
+        </p:txBody>
+      </p:sp>
+      <p:sp>
+        <p:nvSpPr>
+          <p:cNvPr id="32" name="Text 30"/>
+          <p:cNvSpPr txBox="1"/>
+          <p:nvPr/>
+        </p:nvSpPr>
+        <p:spPr>
+          <a:xfrm>
+            <a:off x="3474720" y="5678424"/>
+            <a:ext cx="2514600" cy="411480"/>
+          </a:xfrm>
+          <a:prstGeom prst="rect">
+            <a:avLst/>
+          </a:prstGeom>
+          <a:noFill/>
+          <a:ln/>
+        </p:spPr>
+        <p:txBody>
+          <a:bodyPr wrap="square" lIns="0" tIns="0" rIns="0" bIns="0" rtlCol="0" anchor="ctr"/>
+          <a:lstStyle/>
+          <a:p>
+            <a:pPr indent="0" marL="0">
+              <a:buNone/>
+            </a:pPr>
+            <a:r>
+              <a:rPr lang="en-US" sz="1200" dirty="0">
+                <a:solidFill>
+                  <a:srgbClr val="44506B"/>
+                </a:solidFill>
+                <a:latin typeface="Calibri" pitchFamily="34" charset="0"/>
+                <a:ea typeface="Calibri" pitchFamily="34" charset="-122"/>
+                <a:cs typeface="Calibri" pitchFamily="34" charset="-120"/>
+              </a:rPr>
+              <a:t>Which markets and which accounts it gives us access to</a:t>
+            </a:r>
+            <a:endParaRPr lang="en-US" sz="1200" dirty="0"/>
+          </a:p>
+        </p:txBody>
+      </p:sp>
+      <p:sp>
+        <p:nvSpPr>
+          <p:cNvPr id="33" name="Shape 31"/>
+          <p:cNvSpPr/>
+          <p:nvPr/>
+        </p:nvSpPr>
+        <p:spPr>
+          <a:xfrm>
+            <a:off x="6263640" y="5715000"/>
+            <a:ext cx="310896" cy="310896"/>
+          </a:xfrm>
+          <a:prstGeom prst="ellipse">
+            <a:avLst/>
+          </a:prstGeom>
+          <a:solidFill>
+            <a:srgbClr val="3E5C8A"/>
+          </a:solidFill>
+          <a:ln/>
+        </p:spPr>
+      </p:sp>
+      <p:sp>
+        <p:nvSpPr>
+          <p:cNvPr id="34" name="Text 32"/>
+          <p:cNvSpPr txBox="1"/>
+          <p:nvPr/>
+        </p:nvSpPr>
+        <p:spPr>
+          <a:xfrm>
+            <a:off x="6263640" y="5715000"/>
+            <a:ext cx="310896" cy="310896"/>
+          </a:xfrm>
+          <a:prstGeom prst="rect">
+            <a:avLst/>
+          </a:prstGeom>
+          <a:noFill/>
+          <a:ln/>
+        </p:spPr>
+        <p:txBody>
+          <a:bodyPr wrap="square" lIns="0" tIns="0" rIns="0" bIns="0" rtlCol="0" anchor="ctr"/>
+          <a:lstStyle/>
+          <a:p>
+            <a:pPr algn="ctr" indent="0" marL="0">
+              <a:buNone/>
+            </a:pPr>
+            <a:r>
+              <a:rPr lang="en-US" sz="1200" b="1" dirty="0">
+                <a:solidFill>
+                  <a:srgbClr val="FFFFFF"/>
+                </a:solidFill>
+                <a:latin typeface="Calibri" pitchFamily="34" charset="0"/>
+                <a:ea typeface="Calibri" pitchFamily="34" charset="-122"/>
+                <a:cs typeface="Calibri" pitchFamily="34" charset="-120"/>
+              </a:rPr>
+              <a:t>4</a:t>
+            </a:r>
+            <a:endParaRPr lang="en-US" sz="1200" dirty="0"/>
+          </a:p>
+        </p:txBody>
+      </p:sp>
+      <p:sp>
+        <p:nvSpPr>
+          <p:cNvPr id="35" name="Text 33"/>
+          <p:cNvSpPr txBox="1"/>
+          <p:nvPr/>
+        </p:nvSpPr>
+        <p:spPr>
+          <a:xfrm>
+            <a:off x="6720840" y="5678424"/>
+            <a:ext cx="2377440" cy="320040"/>
+          </a:xfrm>
+          <a:prstGeom prst="rect">
+            <a:avLst/>
+          </a:prstGeom>
+          <a:noFill/>
+          <a:ln/>
+        </p:spPr>
+        <p:txBody>
+          <a:bodyPr wrap="square" lIns="0" tIns="0" rIns="0" bIns="0" rtlCol="0" anchor="ctr"/>
+          <a:lstStyle/>
+          <a:p>
+            <a:pPr indent="0" marL="0">
+              <a:buNone/>
+            </a:pPr>
+            <a:r>
+              <a:rPr lang="en-US" sz="1300" b="1" dirty="0">
+                <a:solidFill>
+                  <a:srgbClr val="16203A"/>
+                </a:solidFill>
+                <a:latin typeface="Calibri" pitchFamily="34" charset="0"/>
+                <a:ea typeface="Calibri" pitchFamily="34" charset="-122"/>
+                <a:cs typeface="Calibri" pitchFamily="34" charset="-120"/>
+              </a:rPr>
+              <a:t>What it costs us</a:t>
+            </a:r>
+            <a:endParaRPr lang="en-US" sz="1300" dirty="0"/>
+          </a:p>
+        </p:txBody>
+      </p:sp>
+      <p:sp>
+        <p:nvSpPr>
+          <p:cNvPr id="36" name="Text 34"/>
+          <p:cNvSpPr txBox="1"/>
+          <p:nvPr/>
+        </p:nvSpPr>
+        <p:spPr>
+          <a:xfrm>
+            <a:off x="9098280" y="5678424"/>
+            <a:ext cx="2514600" cy="411480"/>
+          </a:xfrm>
+          <a:prstGeom prst="rect">
+            <a:avLst/>
+          </a:prstGeom>
+          <a:noFill/>
+          <a:ln/>
+        </p:spPr>
+        <p:txBody>
+          <a:bodyPr wrap="square" lIns="0" tIns="0" rIns="0" bIns="0" rtlCol="0" anchor="ctr"/>
+          <a:lstStyle/>
+          <a:p>
+            <a:pPr indent="0" marL="0">
+              <a:buNone/>
+            </a:pPr>
+            <a:r>
+              <a:rPr lang="en-US" sz="1200" dirty="0">
+                <a:solidFill>
+                  <a:srgbClr val="44506B"/>
+                </a:solidFill>
+                <a:latin typeface="Calibri" pitchFamily="34" charset="0"/>
+                <a:ea typeface="Calibri" pitchFamily="34" charset="-122"/>
+                <a:cs typeface="Calibri" pitchFamily="34" charset="-120"/>
+              </a:rPr>
+              <a:t>Certifications, credentials and commitments they expect back</a:t>
             </a:r>
             <a:endParaRPr lang="en-US" sz="1200" dirty="0"/>
           </a:p>
